--- a/authentic-self-presentation/Finding_Your_Authentic_Self.pptx
+++ b/authentic-self-presentation/Finding_Your_Authentic_Self.pptx
@@ -12,6 +12,7 @@
     <p:sldId id="260" r:id="rId12"/>
     <p:sldId id="261" r:id="rId13"/>
     <p:sldId id="262" r:id="rId14"/>
+    <p:sldId id="263" r:id="rId15"/>
   </p:sldIdLst>
   <p:sldSz cx="12191695" cy="6858000" type="screen4x3"/>
   <p:notesSz cx="6858000" cy="9144000"/>
@@ -138,69 +139,12 @@
           </c:tx>
           <c:spPr>
             <a:solidFill>
-              <a:srgbClr val="A3B5B1"/>
+              <a:srgbClr val="A7B7B1"/>
             </a:solidFill>
             <a:ln>
               <a:noFill/>
             </a:ln>
           </c:spPr>
-          <c:dLbls>
-            <c:dLbl>
-              <c:idx val="0"/>
-              <c:tx>
-                <c:rich>
-                  <a:bodyPr/>
-                  <a:lstStyle/>
-                  <a:p/>
-                </c:rich>
-              </c:tx>
-              <c:showLegendKey val="0"/>
-              <c:showVal val="1"/>
-              <c:showCatName val="0"/>
-              <c:showSerName val="0"/>
-              <c:showPercent val="0"/>
-              <c:showBubbleSize val="0"/>
-            </c:dLbl>
-            <c:dLbl>
-              <c:idx val="1"/>
-              <c:tx>
-                <c:rich>
-                  <a:bodyPr/>
-                  <a:lstStyle/>
-                  <a:p/>
-                </c:rich>
-              </c:tx>
-              <c:showLegendKey val="0"/>
-              <c:showVal val="1"/>
-              <c:showCatName val="0"/>
-              <c:showSerName val="0"/>
-              <c:showPercent val="0"/>
-              <c:showBubbleSize val="0"/>
-            </c:dLbl>
-            <c:dLbl>
-              <c:idx val="2"/>
-              <c:tx>
-                <c:rich>
-                  <a:bodyPr/>
-                  <a:lstStyle/>
-                  <a:p/>
-                </c:rich>
-              </c:tx>
-              <c:showLegendKey val="0"/>
-              <c:showVal val="1"/>
-              <c:showCatName val="0"/>
-              <c:showSerName val="0"/>
-              <c:showPercent val="0"/>
-              <c:showBubbleSize val="0"/>
-            </c:dLbl>
-            <c:showLegendKey val="0"/>
-            <c:showVal val="0"/>
-            <c:showCatName val="0"/>
-            <c:showSerName val="0"/>
-            <c:showPercent val="0"/>
-            <c:showBubbleSize val="0"/>
-            <c:showLeaderLines val="1"/>
-          </c:dLbls>
           <c:cat>
             <c:strRef>
               <c:f>Sheet1!$A$2:$A$4</c:f>
@@ -253,7 +197,7 @@
           </c:tx>
           <c:spPr>
             <a:solidFill>
-              <a:srgbClr val="E6E9E8"/>
+              <a:srgbClr val="DFE5E0"/>
             </a:solidFill>
             <a:ln>
               <a:noFill/>
@@ -311,19 +255,20 @@
           </c:tx>
           <c:spPr>
             <a:solidFill>
-              <a:srgbClr val="3C726A"/>
+              <a:srgbClr val="39796F"/>
             </a:solidFill>
             <a:ln>
               <a:noFill/>
             </a:ln>
           </c:spPr>
           <c:dLbls>
+            <c:numFmt formatCode="0.0&quot;%&quot;" sourceLinked="0"/>
             <c:txPr>
               <a:bodyPr/>
               <a:lstStyle/>
               <a:p>
                 <a:pPr>
-                  <a:defRPr>
+                  <a:defRPr sz="1500">
                     <a:solidFill>
                       <a:srgbClr val="FFFFFF"/>
                     </a:solidFill>
@@ -331,6 +276,7 @@
                 </a:pPr>
               </a:p>
             </c:txPr>
+            <c:dLblPos val="ctr"/>
             <c:showLegendKey val="0"/>
             <c:showVal val="0"/>
             <c:showCatName val="0"/>
@@ -375,26 +321,6 @@
             </c:numRef>
           </c:val>
         </c:ser>
-        <c:dLbls>
-          <c:numFmt formatCode="0.0&quot;%&quot;" sourceLinked="0"/>
-          <c:txPr>
-            <a:bodyPr/>
-            <a:lstStyle/>
-            <a:p>
-              <a:pPr>
-                <a:defRPr sz="1600"/>
-              </a:pPr>
-            </a:p>
-          </c:txPr>
-          <c:dLblPos val="ctr"/>
-          <c:showLegendKey val="0"/>
-          <c:showVal val="1"/>
-          <c:showCatName val="0"/>
-          <c:showSerName val="0"/>
-          <c:showPercent val="0"/>
-          <c:showBubbleSize val="0"/>
-          <c:showLeaderLines val="1"/>
-        </c:dLbls>
         <c:gapWidth val="65"/>
         <c:overlap val="100"/>
         <c:axId val="-2068027336"/>
@@ -415,7 +341,7 @@
           <a:lstStyle/>
           <a:p>
             <a:pPr>
-              <a:defRPr sz="1900"/>
+              <a:defRPr sz="1600"/>
             </a:pPr>
           </a:p>
         </c:txPr>
@@ -444,7 +370,7 @@
           <a:lstStyle/>
           <a:p>
             <a:pPr>
-              <a:defRPr sz="1300"/>
+              <a:defRPr sz="1100"/>
             </a:pPr>
           </a:p>
         </c:txPr>
@@ -461,7 +387,7 @@
         <a:lstStyle/>
         <a:p>
           <a:pPr>
-            <a:defRPr sz="1500"/>
+            <a:defRPr sz="1200"/>
           </a:pPr>
         </a:p>
       </c:txPr>
@@ -885,7 +811,7 @@
           <a:p/>
           <a:p>
             <a:r>
-              <a:t>Hi everyone. What’s your MBTI? [Pause for 2–3 seconds] And do those four letters really tell us who you are? The two readings made me think about being true to ourselves. But today, I want to ask a different question: do we need to try so hard to find our authentic self?</a:t>
+              <a:t>Hi everyone. What’s your MBTI? [Pause] And do those four letters really tell us who you are? The two readings made me think about being true to ourselves. But today, I want to ask a different question: do we need to try so hard to find our authentic self?</a:t>
             </a:r>
           </a:p>
         </p:txBody>
@@ -955,13 +881,13 @@
           <a:lstStyle/>
           <a:p>
             <a:r>
-              <a:t>转折：以前觉得寻找自己很重要 → 现在觉得不必一直纠结。</a:t>
+              <a:t>目录：为什么少纠结 → 标签不完整 → 人会变化 → 怎么做。简单带过，不展开。</a:t>
             </a:r>
           </a:p>
           <a:p/>
           <a:p>
             <a:r>
-              <a:t>I used to think finding my true self was very important. Recently, I changed my view. Maybe we don’t need to keep checking whether everything we do is “the real me.” We can live a little more freely, and think carefully when something important comes along.</a:t>
+              <a:t>Here is my outline: why worry less? We are more than a label, and we change. Then, what can we do?</a:t>
             </a:r>
           </a:p>
         </p:txBody>
@@ -1031,13 +957,13 @@
           <a:lstStyle/>
           <a:p>
             <a:r>
-              <a:t>理由一：内向也能表达，外向也想独处 → 标签只描述一部分。</a:t>
+              <a:t>转折：以前觉得寻找自己很重要 → 现在觉得不必一直纠结。</a:t>
             </a:r>
           </a:p>
           <a:p/>
           <a:p>
             <a:r>
-              <a:t>First, we are more complicated than a label. An introvert can enjoy speaking up about something they love. An extrovert can want a quiet evening alone. Neither has to be pretending. Labels can help us describe ourselves, but they don’t have to decide what we can do.</a:t>
+              <a:t>I used to think finding my true self was very important. Recently, I changed my view. Maybe we don’t need to keep checking whether everything we do is “the real me.” We can live a little more freely, and think carefully when something important comes along.</a:t>
             </a:r>
           </a:p>
         </p:txBody>
@@ -1107,13 +1033,13 @@
           <a:lstStyle/>
           <a:p>
             <a:r>
-              <a:t>理由二：看图 → 只讲 calmness，约 42% 更平静 → 人格有稳定也有变化。</a:t>
+              <a:t>理由一：内向也能表达，外向也想独处 → 标签只描述一部分。</a:t>
             </a:r>
           </a:p>
           <a:p/>
           <a:p>
             <a:r>
-              <a:t>Second, we change. Researchers compared the personalities of 1,795 people in adolescence and fifty years later. This chart shows three of the measured traits. For example, about forty-two percent became calmer. Some stayed similar, while others changed. So today’s description of ourselves may not be the final one.</a:t>
+              <a:t>First, we are more complicated than a label. An introvert can enjoy speaking up. An extrovert can want a quiet evening alone. Neither has to be pretending. Labels can help us describe ourselves. But labels don’t have to decide what we can do.</a:t>
             </a:r>
           </a:p>
         </p:txBody>
@@ -1183,13 +1109,13 @@
           <a:lstStyle/>
           <a:p>
             <a:r>
-              <a:t>做法：留意想法 → 认真考虑 → 问别人。紧张与想表达可以同时存在。</a:t>
+              <a:t>理由二：看图 → 只讲 calmness，约 42% 更平静 → 人格有稳定也有变化。</a:t>
             </a:r>
           </a:p>
           <a:p/>
           <a:p>
             <a:r>
-              <a:t>So, what can we do? When something really matters, our wishes or doubts may become clearer. Notice them, then take time to think. For example, I may feel nervous about a presentation, but still want to share my ideas. Both feelings can be real. We can also ask other people for different views. Finding ourselves doesn’t mean refusing help.</a:t>
+              <a:t>Second, we change. Researchers compared the personalities of 1,795 people in adolescence and fifty years later. This chart shows three of the measured traits. About forty-two percent became calmer. Some stayed similar, while others changed. Today’s description may not be the final one.</a:t>
             </a:r>
           </a:p>
         </p:txBody>
@@ -1259,13 +1185,13 @@
           <a:lstStyle/>
           <a:p>
             <a:r>
-              <a:t>结尾：回扣 MBTI → 好好生活 → 重要时刻思考 → 听别人意见 → 最后一句。</a:t>
+              <a:t>做法：留意想法 → 认真考虑 → 问别人。紧张与想表达可以同时存在。</a:t>
             </a:r>
           </a:p>
           <a:p/>
           <a:p>
             <a:r>
-              <a:t>So, what’s your MBTI? Whatever your answer is, it doesn’t have to be the whole story. You don’t need to figure yourself out once and for all. Live your life, and when something really matters, take time to consider what you want. Listen to others, too—not to let them define you, but to help you see more clearly. You don’t need a final definition of yourself to make choices that matter to you. Thank you.</a:t>
+              <a:t>So, what can we do? When something really matters, our wishes or doubts may become clearer. Notice them, then take time to think. For example, I may feel nervous about a presentation, but still want to share my ideas. Both feelings can be real. We can also ask other people for different views. Finding ourselves doesn’t mean refusing help.</a:t>
             </a:r>
           </a:p>
         </p:txBody>
@@ -1335,7 +1261,83 @@
           <a:lstStyle/>
           <a:p>
             <a:r>
-              <a:t>参考文献备用页，不需要在四分钟演讲中讲解。图表为根据研究数据重绘，并非原文图像。</a:t>
+              <a:t>结尾：回扣 MBTI → 好好生活 → 重要时刻思考 → 听别人意见 → 最后一句。</a:t>
+            </a:r>
+          </a:p>
+          <a:p/>
+          <a:p>
+            <a:r>
+              <a:t>So, what’s your MBTI? Whatever your answer is, it doesn’t have to be the whole story. You don’t need to figure yourself out once and for all. Live your life, and when something really matters, take time to consider what you want. Listen to others, too—not to let them define you, but to help you see more clearly. You don’t need a final definition of yourself to make choices that matter to you. Thank you.</a:t>
+            </a:r>
+          </a:p>
+        </p:txBody>
+      </p:sp>
+      <p:sp>
+        <p:nvSpPr>
+          <p:cNvPr id="4" name="Slide Number Placeholder 3"/>
+          <p:cNvSpPr>
+            <a:spLocks noGrp="1"/>
+          </p:cNvSpPr>
+          <p:nvPr>
+            <p:ph type="sldNum" idx="5" sz="quarter"/>
+          </p:nvPr>
+        </p:nvSpPr>
+        <p:spPr/>
+      </p:sp>
+    </p:spTree>
+  </p:cSld>
+  <p:clrMapOvr>
+    <a:masterClrMapping/>
+  </p:clrMapOvr>
+</p:notes>
+</file>
+
+<file path=ppt/notesSlides/notesSlide8.xml><?xml version="1.0" encoding="utf-8"?>
+<p:notes xmlns:a="http://schemas.openxmlformats.org/drawingml/2006/main" xmlns:p="http://schemas.openxmlformats.org/presentationml/2006/main" xmlns:r="http://schemas.openxmlformats.org/officeDocument/2006/relationships">
+  <p:cSld>
+    <p:spTree>
+      <p:nvGrpSpPr>
+        <p:cNvPr id="1" name=""/>
+        <p:cNvGrpSpPr/>
+        <p:nvPr/>
+      </p:nvGrpSpPr>
+      <p:grpSpPr>
+        <a:xfrm>
+          <a:off x="0" y="0"/>
+          <a:ext cx="0" cy="0"/>
+          <a:chOff x="0" y="0"/>
+          <a:chExt cx="0" cy="0"/>
+        </a:xfrm>
+      </p:grpSpPr>
+      <p:sp>
+        <p:nvSpPr>
+          <p:cNvPr id="2" name="Slide Image Placeholder 1"/>
+          <p:cNvSpPr>
+            <a:spLocks noGrp="1"/>
+          </p:cNvSpPr>
+          <p:nvPr>
+            <p:ph type="sldImg" idx="2"/>
+          </p:nvPr>
+        </p:nvSpPr>
+        <p:spPr/>
+      </p:sp>
+      <p:sp>
+        <p:nvSpPr>
+          <p:cNvPr id="3" name="Notes Placeholder 2"/>
+          <p:cNvSpPr>
+            <a:spLocks noGrp="1"/>
+          </p:cNvSpPr>
+          <p:nvPr>
+            <p:ph type="body" idx="3" sz="quarter"/>
+          </p:nvPr>
+        </p:nvSpPr>
+        <p:spPr/>
+        <p:txBody>
+          <a:bodyPr/>
+          <a:lstStyle/>
+          <a:p>
+            <a:r>
+              <a:t>参考文献页不用讲。图表根据 Table 7 重绘。研究支持人格既有稳定性也会变化，不是 MBTI 研究。</a:t>
             </a:r>
           </a:p>
         </p:txBody>
@@ -4337,7 +4339,7 @@
     <p:bg>
       <p:bgPr>
         <a:solidFill>
-          <a:srgbClr val="FFFFFF"/>
+          <a:srgbClr val="F7F8F4"/>
         </a:solidFill>
         <a:effectLst/>
       </p:bgPr>
@@ -4351,14 +4353,57 @@
       <p:grpSpPr/>
       <p:sp>
         <p:nvSpPr>
-          <p:cNvPr id="2" name="TextBox 1"/>
+          <p:cNvPr id="2" name="Rectangle 1"/>
+          <p:cNvSpPr/>
+          <p:nvPr/>
+        </p:nvSpPr>
+        <p:spPr>
+          <a:xfrm>
+            <a:off x="0" y="0"/>
+            <a:ext cx="146304" cy="6858000"/>
+          </a:xfrm>
+          <a:prstGeom prst="rect">
+            <a:avLst/>
+          </a:prstGeom>
+          <a:solidFill>
+            <a:srgbClr val="39796F"/>
+          </a:solidFill>
+          <a:ln>
+            <a:noFill/>
+          </a:ln>
+        </p:spPr>
+        <p:style>
+          <a:lnRef idx="1">
+            <a:schemeClr val="accent1"/>
+          </a:lnRef>
+          <a:fillRef idx="3">
+            <a:schemeClr val="accent1"/>
+          </a:fillRef>
+          <a:effectRef idx="2">
+            <a:schemeClr val="accent1"/>
+          </a:effectRef>
+          <a:fontRef idx="minor">
+            <a:schemeClr val="lt1"/>
+          </a:fontRef>
+        </p:style>
+        <p:txBody>
+          <a:bodyPr rtlCol="0" anchor="ctr"/>
+          <a:lstStyle/>
+          <a:p>
+            <a:pPr algn="ctr"/>
+          </a:p>
+        </p:txBody>
+      </p:sp>
+      <p:sp>
+        <p:nvSpPr>
+          <p:cNvPr id="3" name="TextBox 2"/>
           <p:cNvSpPr txBox="1"/>
           <p:nvPr/>
         </p:nvSpPr>
         <p:spPr>
           <a:xfrm>
-            <a:off x="640080" y="320040"/>
-            <a:ext cx="10058400" cy="320040"/>
+            <a:off x="594360" y="292608"/>
+            <a:ext cx="10058400" cy="274320"/>
           </a:xfrm>
           <a:prstGeom prst="rect">
             <a:avLst/>
@@ -4366,18 +4411,15 @@
           <a:noFill/>
         </p:spPr>
         <p:txBody>
-          <a:bodyPr wrap="square">
+          <a:bodyPr wrap="square" lIns="18288" rIns="18288" tIns="18288">
             <a:spAutoFit/>
           </a:bodyPr>
           <a:lstStyle/>
           <a:p>
             <a:pPr>
-              <a:spcAft>
-                <a:spcPts val="900"/>
-              </a:spcAft>
               <a:defRPr sz="1100" b="0">
                 <a:solidFill>
-                  <a:srgbClr val="627078"/>
+                  <a:srgbClr val="637575"/>
                 </a:solidFill>
                 <a:latin typeface="Aptos"/>
               </a:defRPr>
@@ -4390,14 +4432,14 @@
       </p:sp>
       <p:sp>
         <p:nvSpPr>
-          <p:cNvPr id="3" name="TextBox 2"/>
+          <p:cNvPr id="4" name="TextBox 3"/>
           <p:cNvSpPr txBox="1"/>
           <p:nvPr/>
         </p:nvSpPr>
         <p:spPr>
           <a:xfrm>
-            <a:off x="640080" y="914400"/>
-            <a:ext cx="10881360" cy="1417320"/>
+            <a:off x="594360" y="6437376"/>
+            <a:ext cx="9144000" cy="228600"/>
           </a:xfrm>
           <a:prstGeom prst="rect">
             <a:avLst/>
@@ -4405,54 +4447,372 @@
           <a:noFill/>
         </p:spPr>
         <p:txBody>
-          <a:bodyPr wrap="square">
+          <a:bodyPr wrap="square" lIns="18288" rIns="18288" tIns="18288">
             <a:spAutoFit/>
           </a:bodyPr>
           <a:lstStyle/>
           <a:p>
             <a:pPr>
-              <a:spcAft>
-                <a:spcPts val="900"/>
-              </a:spcAft>
-              <a:defRPr sz="4000" b="1">
+              <a:defRPr sz="1000" b="0">
                 <a:solidFill>
-                  <a:srgbClr val="24343B"/>
+                  <a:srgbClr val="637575"/>
                 </a:solidFill>
                 <a:latin typeface="Aptos"/>
               </a:defRPr>
             </a:pPr>
             <a:r>
-              <a:t>Finding Your Authentic Self</a:t>
-            </a:r>
-          </a:p>
+              <a:t>A QUESTION</a:t>
+            </a:r>
+          </a:p>
+        </p:txBody>
+      </p:sp>
+      <p:sp>
+        <p:nvSpPr>
+          <p:cNvPr id="5" name="TextBox 4"/>
+          <p:cNvSpPr txBox="1"/>
+          <p:nvPr/>
+        </p:nvSpPr>
+        <p:spPr>
+          <a:xfrm>
+            <a:off x="10972800" y="6400800"/>
+            <a:ext cx="594360" cy="274320"/>
+          </a:xfrm>
+          <a:prstGeom prst="rect">
+            <a:avLst/>
+          </a:prstGeom>
+          <a:noFill/>
+        </p:spPr>
+        <p:txBody>
+          <a:bodyPr wrap="square" lIns="18288" rIns="18288" tIns="18288">
+            <a:spAutoFit/>
+          </a:bodyPr>
+          <a:lstStyle/>
           <a:p>
             <a:pPr>
-              <a:spcAft>
-                <a:spcPts val="900"/>
-              </a:spcAft>
-              <a:defRPr sz="4000" b="1">
+              <a:defRPr sz="1200" b="1">
                 <a:solidFill>
-                  <a:srgbClr val="24343B"/>
+                  <a:srgbClr val="39796F"/>
                 </a:solidFill>
                 <a:latin typeface="Aptos"/>
               </a:defRPr>
             </a:pPr>
             <a:r>
-              <a:t>or Not?</a:t>
-            </a:r>
-          </a:p>
-        </p:txBody>
-      </p:sp>
-      <p:sp>
-        <p:nvSpPr>
-          <p:cNvPr id="4" name="TextBox 3"/>
+              <a:t>01</a:t>
+            </a:r>
+          </a:p>
+        </p:txBody>
+      </p:sp>
+      <p:sp>
+        <p:nvSpPr>
+          <p:cNvPr id="6" name="Rectangle 5"/>
+          <p:cNvSpPr/>
+          <p:nvPr/>
+        </p:nvSpPr>
+        <p:spPr>
+          <a:xfrm>
+            <a:off x="621792" y="6172200"/>
+            <a:ext cx="210312" cy="32004"/>
+          </a:xfrm>
+          <a:prstGeom prst="rect">
+            <a:avLst/>
+          </a:prstGeom>
+          <a:solidFill>
+            <a:srgbClr val="39796F"/>
+          </a:solidFill>
+          <a:ln>
+            <a:noFill/>
+          </a:ln>
+        </p:spPr>
+        <p:style>
+          <a:lnRef idx="1">
+            <a:schemeClr val="accent1"/>
+          </a:lnRef>
+          <a:fillRef idx="3">
+            <a:schemeClr val="accent1"/>
+          </a:fillRef>
+          <a:effectRef idx="2">
+            <a:schemeClr val="accent1"/>
+          </a:effectRef>
+          <a:fontRef idx="minor">
+            <a:schemeClr val="lt1"/>
+          </a:fontRef>
+        </p:style>
+        <p:txBody>
+          <a:bodyPr rtlCol="0" anchor="ctr"/>
+          <a:lstStyle/>
+          <a:p>
+            <a:pPr algn="ctr"/>
+          </a:p>
+        </p:txBody>
+      </p:sp>
+      <p:sp>
+        <p:nvSpPr>
+          <p:cNvPr id="7" name="Rectangle 6"/>
+          <p:cNvSpPr/>
+          <p:nvPr/>
+        </p:nvSpPr>
+        <p:spPr>
+          <a:xfrm>
+            <a:off x="914400" y="6172200"/>
+            <a:ext cx="210312" cy="32004"/>
+          </a:xfrm>
+          <a:prstGeom prst="rect">
+            <a:avLst/>
+          </a:prstGeom>
+          <a:solidFill>
+            <a:srgbClr val="D5DEDA"/>
+          </a:solidFill>
+          <a:ln>
+            <a:noFill/>
+          </a:ln>
+        </p:spPr>
+        <p:style>
+          <a:lnRef idx="1">
+            <a:schemeClr val="accent1"/>
+          </a:lnRef>
+          <a:fillRef idx="3">
+            <a:schemeClr val="accent1"/>
+          </a:fillRef>
+          <a:effectRef idx="2">
+            <a:schemeClr val="accent1"/>
+          </a:effectRef>
+          <a:fontRef idx="minor">
+            <a:schemeClr val="lt1"/>
+          </a:fontRef>
+        </p:style>
+        <p:txBody>
+          <a:bodyPr rtlCol="0" anchor="ctr"/>
+          <a:lstStyle/>
+          <a:p>
+            <a:pPr algn="ctr"/>
+          </a:p>
+        </p:txBody>
+      </p:sp>
+      <p:sp>
+        <p:nvSpPr>
+          <p:cNvPr id="8" name="Rectangle 7"/>
+          <p:cNvSpPr/>
+          <p:nvPr/>
+        </p:nvSpPr>
+        <p:spPr>
+          <a:xfrm>
+            <a:off x="1207008" y="6172200"/>
+            <a:ext cx="210312" cy="32004"/>
+          </a:xfrm>
+          <a:prstGeom prst="rect">
+            <a:avLst/>
+          </a:prstGeom>
+          <a:solidFill>
+            <a:srgbClr val="D5DEDA"/>
+          </a:solidFill>
+          <a:ln>
+            <a:noFill/>
+          </a:ln>
+        </p:spPr>
+        <p:style>
+          <a:lnRef idx="1">
+            <a:schemeClr val="accent1"/>
+          </a:lnRef>
+          <a:fillRef idx="3">
+            <a:schemeClr val="accent1"/>
+          </a:fillRef>
+          <a:effectRef idx="2">
+            <a:schemeClr val="accent1"/>
+          </a:effectRef>
+          <a:fontRef idx="minor">
+            <a:schemeClr val="lt1"/>
+          </a:fontRef>
+        </p:style>
+        <p:txBody>
+          <a:bodyPr rtlCol="0" anchor="ctr"/>
+          <a:lstStyle/>
+          <a:p>
+            <a:pPr algn="ctr"/>
+          </a:p>
+        </p:txBody>
+      </p:sp>
+      <p:sp>
+        <p:nvSpPr>
+          <p:cNvPr id="9" name="Rectangle 8"/>
+          <p:cNvSpPr/>
+          <p:nvPr/>
+        </p:nvSpPr>
+        <p:spPr>
+          <a:xfrm>
+            <a:off x="1499616" y="6172200"/>
+            <a:ext cx="210312" cy="32004"/>
+          </a:xfrm>
+          <a:prstGeom prst="rect">
+            <a:avLst/>
+          </a:prstGeom>
+          <a:solidFill>
+            <a:srgbClr val="D5DEDA"/>
+          </a:solidFill>
+          <a:ln>
+            <a:noFill/>
+          </a:ln>
+        </p:spPr>
+        <p:style>
+          <a:lnRef idx="1">
+            <a:schemeClr val="accent1"/>
+          </a:lnRef>
+          <a:fillRef idx="3">
+            <a:schemeClr val="accent1"/>
+          </a:fillRef>
+          <a:effectRef idx="2">
+            <a:schemeClr val="accent1"/>
+          </a:effectRef>
+          <a:fontRef idx="minor">
+            <a:schemeClr val="lt1"/>
+          </a:fontRef>
+        </p:style>
+        <p:txBody>
+          <a:bodyPr rtlCol="0" anchor="ctr"/>
+          <a:lstStyle/>
+          <a:p>
+            <a:pPr algn="ctr"/>
+          </a:p>
+        </p:txBody>
+      </p:sp>
+      <p:sp>
+        <p:nvSpPr>
+          <p:cNvPr id="10" name="Rectangle 9"/>
+          <p:cNvSpPr/>
+          <p:nvPr/>
+        </p:nvSpPr>
+        <p:spPr>
+          <a:xfrm>
+            <a:off x="1792224" y="6172200"/>
+            <a:ext cx="210312" cy="32004"/>
+          </a:xfrm>
+          <a:prstGeom prst="rect">
+            <a:avLst/>
+          </a:prstGeom>
+          <a:solidFill>
+            <a:srgbClr val="D5DEDA"/>
+          </a:solidFill>
+          <a:ln>
+            <a:noFill/>
+          </a:ln>
+        </p:spPr>
+        <p:style>
+          <a:lnRef idx="1">
+            <a:schemeClr val="accent1"/>
+          </a:lnRef>
+          <a:fillRef idx="3">
+            <a:schemeClr val="accent1"/>
+          </a:fillRef>
+          <a:effectRef idx="2">
+            <a:schemeClr val="accent1"/>
+          </a:effectRef>
+          <a:fontRef idx="minor">
+            <a:schemeClr val="lt1"/>
+          </a:fontRef>
+        </p:style>
+        <p:txBody>
+          <a:bodyPr rtlCol="0" anchor="ctr"/>
+          <a:lstStyle/>
+          <a:p>
+            <a:pPr algn="ctr"/>
+          </a:p>
+        </p:txBody>
+      </p:sp>
+      <p:sp>
+        <p:nvSpPr>
+          <p:cNvPr id="11" name="Rectangle 10"/>
+          <p:cNvSpPr/>
+          <p:nvPr/>
+        </p:nvSpPr>
+        <p:spPr>
+          <a:xfrm>
+            <a:off x="2084832" y="6172200"/>
+            <a:ext cx="210312" cy="32004"/>
+          </a:xfrm>
+          <a:prstGeom prst="rect">
+            <a:avLst/>
+          </a:prstGeom>
+          <a:solidFill>
+            <a:srgbClr val="D5DEDA"/>
+          </a:solidFill>
+          <a:ln>
+            <a:noFill/>
+          </a:ln>
+        </p:spPr>
+        <p:style>
+          <a:lnRef idx="1">
+            <a:schemeClr val="accent1"/>
+          </a:lnRef>
+          <a:fillRef idx="3">
+            <a:schemeClr val="accent1"/>
+          </a:fillRef>
+          <a:effectRef idx="2">
+            <a:schemeClr val="accent1"/>
+          </a:effectRef>
+          <a:fontRef idx="minor">
+            <a:schemeClr val="lt1"/>
+          </a:fontRef>
+        </p:style>
+        <p:txBody>
+          <a:bodyPr rtlCol="0" anchor="ctr"/>
+          <a:lstStyle/>
+          <a:p>
+            <a:pPr algn="ctr"/>
+          </a:p>
+        </p:txBody>
+      </p:sp>
+      <p:sp>
+        <p:nvSpPr>
+          <p:cNvPr id="12" name="Rectangle 11"/>
+          <p:cNvSpPr/>
+          <p:nvPr/>
+        </p:nvSpPr>
+        <p:spPr>
+          <a:xfrm>
+            <a:off x="2377440" y="6172200"/>
+            <a:ext cx="210312" cy="32004"/>
+          </a:xfrm>
+          <a:prstGeom prst="rect">
+            <a:avLst/>
+          </a:prstGeom>
+          <a:solidFill>
+            <a:srgbClr val="D5DEDA"/>
+          </a:solidFill>
+          <a:ln>
+            <a:noFill/>
+          </a:ln>
+        </p:spPr>
+        <p:style>
+          <a:lnRef idx="1">
+            <a:schemeClr val="accent1"/>
+          </a:lnRef>
+          <a:fillRef idx="3">
+            <a:schemeClr val="accent1"/>
+          </a:fillRef>
+          <a:effectRef idx="2">
+            <a:schemeClr val="accent1"/>
+          </a:effectRef>
+          <a:fontRef idx="minor">
+            <a:schemeClr val="lt1"/>
+          </a:fontRef>
+        </p:style>
+        <p:txBody>
+          <a:bodyPr rtlCol="0" anchor="ctr"/>
+          <a:lstStyle/>
+          <a:p>
+            <a:pPr algn="ctr"/>
+          </a:p>
+        </p:txBody>
+      </p:sp>
+      <p:sp>
+        <p:nvSpPr>
+          <p:cNvPr id="13" name="TextBox 12"/>
           <p:cNvSpPr txBox="1"/>
           <p:nvPr/>
         </p:nvSpPr>
         <p:spPr>
           <a:xfrm>
-            <a:off x="685800" y="3017520"/>
-            <a:ext cx="10789920" cy="1645920"/>
+            <a:off x="685800" y="1005840"/>
+            <a:ext cx="7315200" cy="1554480"/>
           </a:xfrm>
           <a:prstGeom prst="rect">
             <a:avLst/>
@@ -4460,54 +4820,93 @@
           <a:noFill/>
         </p:spPr>
         <p:txBody>
-          <a:bodyPr wrap="square">
+          <a:bodyPr wrap="square" lIns="18288" rIns="18288" tIns="18288">
             <a:spAutoFit/>
           </a:bodyPr>
           <a:lstStyle/>
           <a:p>
             <a:pPr>
-              <a:spcAft>
-                <a:spcPts val="900"/>
-              </a:spcAft>
-              <a:defRPr sz="3000" b="0">
+              <a:defRPr sz="4300" b="1">
                 <a:solidFill>
-                  <a:srgbClr val="24343B"/>
+                  <a:srgbClr val="223B40"/>
                 </a:solidFill>
                 <a:latin typeface="Aptos"/>
               </a:defRPr>
             </a:pPr>
             <a:r>
-              <a:t>What’s your MBTI?</a:t>
+              <a:t>Finding Your Authentic Self</a:t>
             </a:r>
           </a:p>
           <a:p>
             <a:pPr>
-              <a:spcAft>
-                <a:spcPts val="900"/>
-              </a:spcAft>
-              <a:defRPr sz="3000" b="0">
+              <a:defRPr sz="4300" b="1">
                 <a:solidFill>
-                  <a:srgbClr val="24343B"/>
+                  <a:srgbClr val="223B40"/>
                 </a:solidFill>
                 <a:latin typeface="Aptos"/>
               </a:defRPr>
             </a:pPr>
             <a:r>
-              <a:t>Is that the whole story?</a:t>
-            </a:r>
-          </a:p>
-        </p:txBody>
-      </p:sp>
-      <p:sp>
-        <p:nvSpPr>
-          <p:cNvPr id="5" name="TextBox 4"/>
+              <a:t>or Not?</a:t>
+            </a:r>
+          </a:p>
+        </p:txBody>
+      </p:sp>
+      <p:sp>
+        <p:nvSpPr>
+          <p:cNvPr id="14" name="Rounded Rectangle 13"/>
+          <p:cNvSpPr/>
+          <p:nvPr/>
+        </p:nvSpPr>
+        <p:spPr>
+          <a:xfrm>
+            <a:off x="9144000" y="1143000"/>
+            <a:ext cx="2148840" cy="2148840"/>
+          </a:xfrm>
+          <a:prstGeom prst="roundRect">
+            <a:avLst>
+              <a:gd name="adj" fmla="val 10000"/>
+            </a:avLst>
+          </a:prstGeom>
+          <a:solidFill>
+            <a:srgbClr val="E6EFEB"/>
+          </a:solidFill>
+          <a:ln>
+            <a:noFill/>
+          </a:ln>
+        </p:spPr>
+        <p:style>
+          <a:lnRef idx="1">
+            <a:schemeClr val="accent1"/>
+          </a:lnRef>
+          <a:fillRef idx="3">
+            <a:schemeClr val="accent1"/>
+          </a:fillRef>
+          <a:effectRef idx="2">
+            <a:schemeClr val="accent1"/>
+          </a:effectRef>
+          <a:fontRef idx="minor">
+            <a:schemeClr val="lt1"/>
+          </a:fontRef>
+        </p:style>
+        <p:txBody>
+          <a:bodyPr rtlCol="0" anchor="ctr"/>
+          <a:lstStyle/>
+          <a:p>
+            <a:pPr algn="ctr"/>
+          </a:p>
+        </p:txBody>
+      </p:sp>
+      <p:sp>
+        <p:nvSpPr>
+          <p:cNvPr id="15" name="TextBox 14"/>
           <p:cNvSpPr txBox="1"/>
           <p:nvPr/>
         </p:nvSpPr>
         <p:spPr>
           <a:xfrm>
-            <a:off x="11064240" y="6419088"/>
-            <a:ext cx="548640" cy="228600"/>
+            <a:off x="9555480" y="1417320"/>
+            <a:ext cx="1463040" cy="822960"/>
           </a:xfrm>
           <a:prstGeom prst="rect">
             <a:avLst/>
@@ -4515,24 +4914,165 @@
           <a:noFill/>
         </p:spPr>
         <p:txBody>
-          <a:bodyPr wrap="square">
+          <a:bodyPr wrap="square" lIns="18288" rIns="18288" tIns="18288">
             <a:spAutoFit/>
           </a:bodyPr>
           <a:lstStyle/>
           <a:p>
             <a:pPr>
-              <a:spcAft>
-                <a:spcPts val="900"/>
-              </a:spcAft>
-              <a:defRPr sz="1100" b="0">
+              <a:defRPr sz="2600" b="1">
                 <a:solidFill>
-                  <a:srgbClr val="627078"/>
+                  <a:srgbClr val="39796F"/>
                 </a:solidFill>
                 <a:latin typeface="Aptos"/>
               </a:defRPr>
             </a:pPr>
             <a:r>
-              <a:t>01</a:t>
+              <a:t>MBTI</a:t>
+            </a:r>
+          </a:p>
+        </p:txBody>
+      </p:sp>
+      <p:sp>
+        <p:nvSpPr>
+          <p:cNvPr id="16" name="TextBox 15"/>
+          <p:cNvSpPr txBox="1"/>
+          <p:nvPr/>
+        </p:nvSpPr>
+        <p:spPr>
+          <a:xfrm>
+            <a:off x="9784080" y="2029968"/>
+            <a:ext cx="1188720" cy="914400"/>
+          </a:xfrm>
+          <a:prstGeom prst="rect">
+            <a:avLst/>
+          </a:prstGeom>
+          <a:noFill/>
+        </p:spPr>
+        <p:txBody>
+          <a:bodyPr wrap="square" lIns="18288" rIns="18288" tIns="18288">
+            <a:spAutoFit/>
+          </a:bodyPr>
+          <a:lstStyle/>
+          <a:p>
+            <a:pPr>
+              <a:defRPr sz="5800" b="1">
+                <a:solidFill>
+                  <a:srgbClr val="39796F"/>
+                </a:solidFill>
+                <a:latin typeface="Aptos"/>
+              </a:defRPr>
+            </a:pPr>
+            <a:r>
+              <a:t>?</a:t>
+            </a:r>
+          </a:p>
+        </p:txBody>
+      </p:sp>
+      <p:sp>
+        <p:nvSpPr>
+          <p:cNvPr id="17" name="TextBox 16"/>
+          <p:cNvSpPr txBox="1"/>
+          <p:nvPr/>
+        </p:nvSpPr>
+        <p:spPr>
+          <a:xfrm>
+            <a:off x="731520" y="3200400"/>
+            <a:ext cx="10515600" cy="594360"/>
+          </a:xfrm>
+          <a:prstGeom prst="rect">
+            <a:avLst/>
+          </a:prstGeom>
+          <a:noFill/>
+        </p:spPr>
+        <p:txBody>
+          <a:bodyPr wrap="square" lIns="18288" rIns="18288" tIns="18288">
+            <a:spAutoFit/>
+          </a:bodyPr>
+          <a:lstStyle/>
+          <a:p>
+            <a:pPr>
+              <a:defRPr sz="2700" b="1">
+                <a:solidFill>
+                  <a:srgbClr val="39796F"/>
+                </a:solidFill>
+                <a:latin typeface="Aptos"/>
+              </a:defRPr>
+            </a:pPr>
+            <a:r>
+              <a:t>What’s your MBTI?</a:t>
+            </a:r>
+          </a:p>
+        </p:txBody>
+      </p:sp>
+      <p:sp>
+        <p:nvSpPr>
+          <p:cNvPr id="18" name="TextBox 17"/>
+          <p:cNvSpPr txBox="1"/>
+          <p:nvPr/>
+        </p:nvSpPr>
+        <p:spPr>
+          <a:xfrm>
+            <a:off x="731520" y="3913632"/>
+            <a:ext cx="10515600" cy="594360"/>
+          </a:xfrm>
+          <a:prstGeom prst="rect">
+            <a:avLst/>
+          </a:prstGeom>
+          <a:noFill/>
+        </p:spPr>
+        <p:txBody>
+          <a:bodyPr wrap="square" lIns="18288" rIns="18288" tIns="18288">
+            <a:spAutoFit/>
+          </a:bodyPr>
+          <a:lstStyle/>
+          <a:p>
+            <a:pPr>
+              <a:defRPr sz="2300" b="0">
+                <a:solidFill>
+                  <a:srgbClr val="223B40"/>
+                </a:solidFill>
+                <a:latin typeface="Aptos"/>
+              </a:defRPr>
+            </a:pPr>
+            <a:r>
+              <a:t>Do those four letters really tell us who you are?</a:t>
+            </a:r>
+          </a:p>
+        </p:txBody>
+      </p:sp>
+      <p:sp>
+        <p:nvSpPr>
+          <p:cNvPr id="19" name="TextBox 18"/>
+          <p:cNvSpPr txBox="1"/>
+          <p:nvPr/>
+        </p:nvSpPr>
+        <p:spPr>
+          <a:xfrm>
+            <a:off x="731520" y="4626864"/>
+            <a:ext cx="10515600" cy="594360"/>
+          </a:xfrm>
+          <a:prstGeom prst="rect">
+            <a:avLst/>
+          </a:prstGeom>
+          <a:noFill/>
+        </p:spPr>
+        <p:txBody>
+          <a:bodyPr wrap="square" lIns="18288" rIns="18288" tIns="18288">
+            <a:spAutoFit/>
+          </a:bodyPr>
+          <a:lstStyle/>
+          <a:p>
+            <a:pPr>
+              <a:defRPr sz="2300" b="0">
+                <a:solidFill>
+                  <a:srgbClr val="223B40"/>
+                </a:solidFill>
+                <a:latin typeface="Aptos"/>
+              </a:defRPr>
+            </a:pPr>
+            <a:r>
+              <a:t>Do we need to try so hard to find our authentic self?</a:t>
             </a:r>
           </a:p>
         </p:txBody>
@@ -4551,7 +5091,7 @@
     <p:bg>
       <p:bgPr>
         <a:solidFill>
-          <a:srgbClr val="FFFFFF"/>
+          <a:srgbClr val="F7F8F4"/>
         </a:solidFill>
         <a:effectLst/>
       </p:bgPr>
@@ -4565,14 +5105,57 @@
       <p:grpSpPr/>
       <p:sp>
         <p:nvSpPr>
-          <p:cNvPr id="2" name="TextBox 1"/>
+          <p:cNvPr id="2" name="Rectangle 1"/>
+          <p:cNvSpPr/>
+          <p:nvPr/>
+        </p:nvSpPr>
+        <p:spPr>
+          <a:xfrm>
+            <a:off x="0" y="0"/>
+            <a:ext cx="146304" cy="6858000"/>
+          </a:xfrm>
+          <a:prstGeom prst="rect">
+            <a:avLst/>
+          </a:prstGeom>
+          <a:solidFill>
+            <a:srgbClr val="39796F"/>
+          </a:solidFill>
+          <a:ln>
+            <a:noFill/>
+          </a:ln>
+        </p:spPr>
+        <p:style>
+          <a:lnRef idx="1">
+            <a:schemeClr val="accent1"/>
+          </a:lnRef>
+          <a:fillRef idx="3">
+            <a:schemeClr val="accent1"/>
+          </a:fillRef>
+          <a:effectRef idx="2">
+            <a:schemeClr val="accent1"/>
+          </a:effectRef>
+          <a:fontRef idx="minor">
+            <a:schemeClr val="lt1"/>
+          </a:fontRef>
+        </p:style>
+        <p:txBody>
+          <a:bodyPr rtlCol="0" anchor="ctr"/>
+          <a:lstStyle/>
+          <a:p>
+            <a:pPr algn="ctr"/>
+          </a:p>
+        </p:txBody>
+      </p:sp>
+      <p:sp>
+        <p:nvSpPr>
+          <p:cNvPr id="3" name="TextBox 2"/>
           <p:cNvSpPr txBox="1"/>
           <p:nvPr/>
         </p:nvSpPr>
         <p:spPr>
           <a:xfrm>
-            <a:off x="640080" y="320040"/>
-            <a:ext cx="10058400" cy="320040"/>
+            <a:off x="594360" y="292608"/>
+            <a:ext cx="10058400" cy="274320"/>
           </a:xfrm>
           <a:prstGeom prst="rect">
             <a:avLst/>
@@ -4580,18 +5163,15 @@
           <a:noFill/>
         </p:spPr>
         <p:txBody>
-          <a:bodyPr wrap="square">
+          <a:bodyPr wrap="square" lIns="18288" rIns="18288" tIns="18288">
             <a:spAutoFit/>
           </a:bodyPr>
           <a:lstStyle/>
           <a:p>
             <a:pPr>
-              <a:spcAft>
-                <a:spcPts val="900"/>
-              </a:spcAft>
               <a:defRPr sz="1100" b="0">
                 <a:solidFill>
-                  <a:srgbClr val="627078"/>
+                  <a:srgbClr val="637575"/>
                 </a:solidFill>
                 <a:latin typeface="Aptos"/>
               </a:defRPr>
@@ -4604,14 +5184,14 @@
       </p:sp>
       <p:sp>
         <p:nvSpPr>
-          <p:cNvPr id="3" name="TextBox 2"/>
+          <p:cNvPr id="4" name="TextBox 3"/>
           <p:cNvSpPr txBox="1"/>
           <p:nvPr/>
         </p:nvSpPr>
         <p:spPr>
           <a:xfrm>
-            <a:off x="640080" y="914400"/>
-            <a:ext cx="10881360" cy="822960"/>
+            <a:off x="594360" y="6437376"/>
+            <a:ext cx="9144000" cy="228600"/>
           </a:xfrm>
           <a:prstGeom prst="rect">
             <a:avLst/>
@@ -4619,38 +5199,35 @@
           <a:noFill/>
         </p:spPr>
         <p:txBody>
-          <a:bodyPr wrap="square">
+          <a:bodyPr wrap="square" lIns="18288" rIns="18288" tIns="18288">
             <a:spAutoFit/>
           </a:bodyPr>
           <a:lstStyle/>
           <a:p>
             <a:pPr>
-              <a:spcAft>
-                <a:spcPts val="900"/>
-              </a:spcAft>
-              <a:defRPr sz="3400" b="1">
+              <a:defRPr sz="1000" b="0">
                 <a:solidFill>
-                  <a:srgbClr val="24343B"/>
+                  <a:srgbClr val="637575"/>
                 </a:solidFill>
                 <a:latin typeface="Aptos"/>
               </a:defRPr>
             </a:pPr>
             <a:r>
-              <a:t>Do we need to search so hard?</a:t>
-            </a:r>
-          </a:p>
-        </p:txBody>
-      </p:sp>
-      <p:sp>
-        <p:nvSpPr>
-          <p:cNvPr id="4" name="TextBox 3"/>
+              <a:t>OUTLINE</a:t>
+            </a:r>
+          </a:p>
+        </p:txBody>
+      </p:sp>
+      <p:sp>
+        <p:nvSpPr>
+          <p:cNvPr id="5" name="TextBox 4"/>
           <p:cNvSpPr txBox="1"/>
           <p:nvPr/>
         </p:nvSpPr>
         <p:spPr>
           <a:xfrm>
-            <a:off x="731520" y="2423160"/>
-            <a:ext cx="548640" cy="457200"/>
+            <a:off x="10972800" y="6400800"/>
+            <a:ext cx="594360" cy="274320"/>
           </a:xfrm>
           <a:prstGeom prst="rect">
             <a:avLst/>
@@ -4658,38 +5235,336 @@
           <a:noFill/>
         </p:spPr>
         <p:txBody>
-          <a:bodyPr wrap="square">
+          <a:bodyPr wrap="square" lIns="18288" rIns="18288" tIns="18288">
             <a:spAutoFit/>
           </a:bodyPr>
           <a:lstStyle/>
           <a:p>
             <a:pPr>
-              <a:spcAft>
-                <a:spcPts val="900"/>
-              </a:spcAft>
-              <a:defRPr sz="1500" b="1">
+              <a:defRPr sz="1200" b="1">
                 <a:solidFill>
-                  <a:srgbClr val="3C726A"/>
+                  <a:srgbClr val="39796F"/>
                 </a:solidFill>
                 <a:latin typeface="Aptos"/>
               </a:defRPr>
             </a:pPr>
             <a:r>
-              <a:t>01</a:t>
-            </a:r>
-          </a:p>
-        </p:txBody>
-      </p:sp>
-      <p:sp>
-        <p:nvSpPr>
-          <p:cNvPr id="5" name="TextBox 4"/>
+              <a:t>02</a:t>
+            </a:r>
+          </a:p>
+        </p:txBody>
+      </p:sp>
+      <p:sp>
+        <p:nvSpPr>
+          <p:cNvPr id="6" name="Rectangle 5"/>
+          <p:cNvSpPr/>
+          <p:nvPr/>
+        </p:nvSpPr>
+        <p:spPr>
+          <a:xfrm>
+            <a:off x="621792" y="6172200"/>
+            <a:ext cx="210312" cy="32004"/>
+          </a:xfrm>
+          <a:prstGeom prst="rect">
+            <a:avLst/>
+          </a:prstGeom>
+          <a:solidFill>
+            <a:srgbClr val="D5DEDA"/>
+          </a:solidFill>
+          <a:ln>
+            <a:noFill/>
+          </a:ln>
+        </p:spPr>
+        <p:style>
+          <a:lnRef idx="1">
+            <a:schemeClr val="accent1"/>
+          </a:lnRef>
+          <a:fillRef idx="3">
+            <a:schemeClr val="accent1"/>
+          </a:fillRef>
+          <a:effectRef idx="2">
+            <a:schemeClr val="accent1"/>
+          </a:effectRef>
+          <a:fontRef idx="minor">
+            <a:schemeClr val="lt1"/>
+          </a:fontRef>
+        </p:style>
+        <p:txBody>
+          <a:bodyPr rtlCol="0" anchor="ctr"/>
+          <a:lstStyle/>
+          <a:p>
+            <a:pPr algn="ctr"/>
+          </a:p>
+        </p:txBody>
+      </p:sp>
+      <p:sp>
+        <p:nvSpPr>
+          <p:cNvPr id="7" name="Rectangle 6"/>
+          <p:cNvSpPr/>
+          <p:nvPr/>
+        </p:nvSpPr>
+        <p:spPr>
+          <a:xfrm>
+            <a:off x="914400" y="6172200"/>
+            <a:ext cx="210312" cy="32004"/>
+          </a:xfrm>
+          <a:prstGeom prst="rect">
+            <a:avLst/>
+          </a:prstGeom>
+          <a:solidFill>
+            <a:srgbClr val="39796F"/>
+          </a:solidFill>
+          <a:ln>
+            <a:noFill/>
+          </a:ln>
+        </p:spPr>
+        <p:style>
+          <a:lnRef idx="1">
+            <a:schemeClr val="accent1"/>
+          </a:lnRef>
+          <a:fillRef idx="3">
+            <a:schemeClr val="accent1"/>
+          </a:fillRef>
+          <a:effectRef idx="2">
+            <a:schemeClr val="accent1"/>
+          </a:effectRef>
+          <a:fontRef idx="minor">
+            <a:schemeClr val="lt1"/>
+          </a:fontRef>
+        </p:style>
+        <p:txBody>
+          <a:bodyPr rtlCol="0" anchor="ctr"/>
+          <a:lstStyle/>
+          <a:p>
+            <a:pPr algn="ctr"/>
+          </a:p>
+        </p:txBody>
+      </p:sp>
+      <p:sp>
+        <p:nvSpPr>
+          <p:cNvPr id="8" name="Rectangle 7"/>
+          <p:cNvSpPr/>
+          <p:nvPr/>
+        </p:nvSpPr>
+        <p:spPr>
+          <a:xfrm>
+            <a:off x="1207008" y="6172200"/>
+            <a:ext cx="210312" cy="32004"/>
+          </a:xfrm>
+          <a:prstGeom prst="rect">
+            <a:avLst/>
+          </a:prstGeom>
+          <a:solidFill>
+            <a:srgbClr val="D5DEDA"/>
+          </a:solidFill>
+          <a:ln>
+            <a:noFill/>
+          </a:ln>
+        </p:spPr>
+        <p:style>
+          <a:lnRef idx="1">
+            <a:schemeClr val="accent1"/>
+          </a:lnRef>
+          <a:fillRef idx="3">
+            <a:schemeClr val="accent1"/>
+          </a:fillRef>
+          <a:effectRef idx="2">
+            <a:schemeClr val="accent1"/>
+          </a:effectRef>
+          <a:fontRef idx="minor">
+            <a:schemeClr val="lt1"/>
+          </a:fontRef>
+        </p:style>
+        <p:txBody>
+          <a:bodyPr rtlCol="0" anchor="ctr"/>
+          <a:lstStyle/>
+          <a:p>
+            <a:pPr algn="ctr"/>
+          </a:p>
+        </p:txBody>
+      </p:sp>
+      <p:sp>
+        <p:nvSpPr>
+          <p:cNvPr id="9" name="Rectangle 8"/>
+          <p:cNvSpPr/>
+          <p:nvPr/>
+        </p:nvSpPr>
+        <p:spPr>
+          <a:xfrm>
+            <a:off x="1499616" y="6172200"/>
+            <a:ext cx="210312" cy="32004"/>
+          </a:xfrm>
+          <a:prstGeom prst="rect">
+            <a:avLst/>
+          </a:prstGeom>
+          <a:solidFill>
+            <a:srgbClr val="D5DEDA"/>
+          </a:solidFill>
+          <a:ln>
+            <a:noFill/>
+          </a:ln>
+        </p:spPr>
+        <p:style>
+          <a:lnRef idx="1">
+            <a:schemeClr val="accent1"/>
+          </a:lnRef>
+          <a:fillRef idx="3">
+            <a:schemeClr val="accent1"/>
+          </a:fillRef>
+          <a:effectRef idx="2">
+            <a:schemeClr val="accent1"/>
+          </a:effectRef>
+          <a:fontRef idx="minor">
+            <a:schemeClr val="lt1"/>
+          </a:fontRef>
+        </p:style>
+        <p:txBody>
+          <a:bodyPr rtlCol="0" anchor="ctr"/>
+          <a:lstStyle/>
+          <a:p>
+            <a:pPr algn="ctr"/>
+          </a:p>
+        </p:txBody>
+      </p:sp>
+      <p:sp>
+        <p:nvSpPr>
+          <p:cNvPr id="10" name="Rectangle 9"/>
+          <p:cNvSpPr/>
+          <p:nvPr/>
+        </p:nvSpPr>
+        <p:spPr>
+          <a:xfrm>
+            <a:off x="1792224" y="6172200"/>
+            <a:ext cx="210312" cy="32004"/>
+          </a:xfrm>
+          <a:prstGeom prst="rect">
+            <a:avLst/>
+          </a:prstGeom>
+          <a:solidFill>
+            <a:srgbClr val="D5DEDA"/>
+          </a:solidFill>
+          <a:ln>
+            <a:noFill/>
+          </a:ln>
+        </p:spPr>
+        <p:style>
+          <a:lnRef idx="1">
+            <a:schemeClr val="accent1"/>
+          </a:lnRef>
+          <a:fillRef idx="3">
+            <a:schemeClr val="accent1"/>
+          </a:fillRef>
+          <a:effectRef idx="2">
+            <a:schemeClr val="accent1"/>
+          </a:effectRef>
+          <a:fontRef idx="minor">
+            <a:schemeClr val="lt1"/>
+          </a:fontRef>
+        </p:style>
+        <p:txBody>
+          <a:bodyPr rtlCol="0" anchor="ctr"/>
+          <a:lstStyle/>
+          <a:p>
+            <a:pPr algn="ctr"/>
+          </a:p>
+        </p:txBody>
+      </p:sp>
+      <p:sp>
+        <p:nvSpPr>
+          <p:cNvPr id="11" name="Rectangle 10"/>
+          <p:cNvSpPr/>
+          <p:nvPr/>
+        </p:nvSpPr>
+        <p:spPr>
+          <a:xfrm>
+            <a:off x="2084832" y="6172200"/>
+            <a:ext cx="210312" cy="32004"/>
+          </a:xfrm>
+          <a:prstGeom prst="rect">
+            <a:avLst/>
+          </a:prstGeom>
+          <a:solidFill>
+            <a:srgbClr val="D5DEDA"/>
+          </a:solidFill>
+          <a:ln>
+            <a:noFill/>
+          </a:ln>
+        </p:spPr>
+        <p:style>
+          <a:lnRef idx="1">
+            <a:schemeClr val="accent1"/>
+          </a:lnRef>
+          <a:fillRef idx="3">
+            <a:schemeClr val="accent1"/>
+          </a:fillRef>
+          <a:effectRef idx="2">
+            <a:schemeClr val="accent1"/>
+          </a:effectRef>
+          <a:fontRef idx="minor">
+            <a:schemeClr val="lt1"/>
+          </a:fontRef>
+        </p:style>
+        <p:txBody>
+          <a:bodyPr rtlCol="0" anchor="ctr"/>
+          <a:lstStyle/>
+          <a:p>
+            <a:pPr algn="ctr"/>
+          </a:p>
+        </p:txBody>
+      </p:sp>
+      <p:sp>
+        <p:nvSpPr>
+          <p:cNvPr id="12" name="Rectangle 11"/>
+          <p:cNvSpPr/>
+          <p:nvPr/>
+        </p:nvSpPr>
+        <p:spPr>
+          <a:xfrm>
+            <a:off x="2377440" y="6172200"/>
+            <a:ext cx="210312" cy="32004"/>
+          </a:xfrm>
+          <a:prstGeom prst="rect">
+            <a:avLst/>
+          </a:prstGeom>
+          <a:solidFill>
+            <a:srgbClr val="D5DEDA"/>
+          </a:solidFill>
+          <a:ln>
+            <a:noFill/>
+          </a:ln>
+        </p:spPr>
+        <p:style>
+          <a:lnRef idx="1">
+            <a:schemeClr val="accent1"/>
+          </a:lnRef>
+          <a:fillRef idx="3">
+            <a:schemeClr val="accent1"/>
+          </a:fillRef>
+          <a:effectRef idx="2">
+            <a:schemeClr val="accent1"/>
+          </a:effectRef>
+          <a:fontRef idx="minor">
+            <a:schemeClr val="lt1"/>
+          </a:fontRef>
+        </p:style>
+        <p:txBody>
+          <a:bodyPr rtlCol="0" anchor="ctr"/>
+          <a:lstStyle/>
+          <a:p>
+            <a:pPr algn="ctr"/>
+          </a:p>
+        </p:txBody>
+      </p:sp>
+      <p:sp>
+        <p:nvSpPr>
+          <p:cNvPr id="13" name="TextBox 12"/>
           <p:cNvSpPr txBox="1"/>
           <p:nvPr/>
         </p:nvSpPr>
         <p:spPr>
           <a:xfrm>
-            <a:off x="1371600" y="2331720"/>
-            <a:ext cx="9692640" cy="685800"/>
+            <a:off x="685800" y="1005840"/>
+            <a:ext cx="10789920" cy="640080"/>
           </a:xfrm>
           <a:prstGeom prst="rect">
             <a:avLst/>
@@ -4697,38 +5572,80 @@
           <a:noFill/>
         </p:spPr>
         <p:txBody>
-          <a:bodyPr wrap="square">
+          <a:bodyPr wrap="square" lIns="18288" rIns="18288" tIns="18288">
             <a:spAutoFit/>
           </a:bodyPr>
           <a:lstStyle/>
           <a:p>
             <a:pPr>
-              <a:spcAft>
-                <a:spcPts val="900"/>
-              </a:spcAft>
-              <a:defRPr sz="2700" b="0">
+              <a:defRPr sz="3600" b="1">
                 <a:solidFill>
-                  <a:srgbClr val="24343B"/>
+                  <a:srgbClr val="223B40"/>
                 </a:solidFill>
                 <a:latin typeface="Aptos"/>
               </a:defRPr>
             </a:pPr>
             <a:r>
-              <a:t>I used to ask: “Who am I, really?”</a:t>
-            </a:r>
-          </a:p>
-        </p:txBody>
-      </p:sp>
-      <p:sp>
-        <p:nvSpPr>
-          <p:cNvPr id="6" name="TextBox 5"/>
+              <a:t>Today’s outline</a:t>
+            </a:r>
+          </a:p>
+        </p:txBody>
+      </p:sp>
+      <p:sp>
+        <p:nvSpPr>
+          <p:cNvPr id="14" name="Rounded Rectangle 13"/>
+          <p:cNvSpPr/>
+          <p:nvPr/>
+        </p:nvSpPr>
+        <p:spPr>
+          <a:xfrm>
+            <a:off x="731520" y="2057400"/>
+            <a:ext cx="5166360" cy="1261872"/>
+          </a:xfrm>
+          <a:prstGeom prst="roundRect">
+            <a:avLst>
+              <a:gd name="adj" fmla="val 10000"/>
+            </a:avLst>
+          </a:prstGeom>
+          <a:solidFill>
+            <a:srgbClr val="E6EFEB"/>
+          </a:solidFill>
+          <a:ln>
+            <a:noFill/>
+          </a:ln>
+        </p:spPr>
+        <p:style>
+          <a:lnRef idx="1">
+            <a:schemeClr val="accent1"/>
+          </a:lnRef>
+          <a:fillRef idx="3">
+            <a:schemeClr val="accent1"/>
+          </a:fillRef>
+          <a:effectRef idx="2">
+            <a:schemeClr val="accent1"/>
+          </a:effectRef>
+          <a:fontRef idx="minor">
+            <a:schemeClr val="lt1"/>
+          </a:fontRef>
+        </p:style>
+        <p:txBody>
+          <a:bodyPr rtlCol="0" anchor="ctr"/>
+          <a:lstStyle/>
+          <a:p>
+            <a:pPr algn="ctr"/>
+          </a:p>
+        </p:txBody>
+      </p:sp>
+      <p:sp>
+        <p:nvSpPr>
+          <p:cNvPr id="15" name="TextBox 14"/>
           <p:cNvSpPr txBox="1"/>
           <p:nvPr/>
         </p:nvSpPr>
         <p:spPr>
           <a:xfrm>
-            <a:off x="731520" y="3246120"/>
-            <a:ext cx="548640" cy="457200"/>
+            <a:off x="932688" y="2221992"/>
+            <a:ext cx="640080" cy="411480"/>
           </a:xfrm>
           <a:prstGeom prst="rect">
             <a:avLst/>
@@ -4736,38 +5653,35 @@
           <a:noFill/>
         </p:spPr>
         <p:txBody>
-          <a:bodyPr wrap="square">
+          <a:bodyPr wrap="square" lIns="18288" rIns="18288" tIns="18288">
             <a:spAutoFit/>
           </a:bodyPr>
           <a:lstStyle/>
           <a:p>
             <a:pPr>
-              <a:spcAft>
-                <a:spcPts val="900"/>
-              </a:spcAft>
-              <a:defRPr sz="1500" b="1">
+              <a:defRPr sz="2200" b="1">
                 <a:solidFill>
-                  <a:srgbClr val="3C726A"/>
+                  <a:srgbClr val="39796F"/>
                 </a:solidFill>
                 <a:latin typeface="Aptos"/>
               </a:defRPr>
             </a:pPr>
             <a:r>
-              <a:t>02</a:t>
-            </a:r>
-          </a:p>
-        </p:txBody>
-      </p:sp>
-      <p:sp>
-        <p:nvSpPr>
-          <p:cNvPr id="7" name="TextBox 6"/>
+              <a:t>01</a:t>
+            </a:r>
+          </a:p>
+        </p:txBody>
+      </p:sp>
+      <p:sp>
+        <p:nvSpPr>
+          <p:cNvPr id="16" name="TextBox 15"/>
           <p:cNvSpPr txBox="1"/>
           <p:nvPr/>
         </p:nvSpPr>
         <p:spPr>
           <a:xfrm>
-            <a:off x="1371600" y="3154679"/>
-            <a:ext cx="9692640" cy="685800"/>
+            <a:off x="1645920" y="2258568"/>
+            <a:ext cx="3977639" cy="868680"/>
           </a:xfrm>
           <a:prstGeom prst="rect">
             <a:avLst/>
@@ -4775,38 +5689,80 @@
           <a:noFill/>
         </p:spPr>
         <p:txBody>
-          <a:bodyPr wrap="square">
+          <a:bodyPr wrap="square" lIns="18288" rIns="18288" tIns="18288">
             <a:spAutoFit/>
           </a:bodyPr>
           <a:lstStyle/>
           <a:p>
             <a:pPr>
-              <a:spcAft>
-                <a:spcPts val="900"/>
-              </a:spcAft>
-              <a:defRPr sz="2700" b="0">
+              <a:defRPr sz="2500" b="1">
                 <a:solidFill>
-                  <a:srgbClr val="24343B"/>
+                  <a:srgbClr val="223B40"/>
                 </a:solidFill>
                 <a:latin typeface="Aptos"/>
               </a:defRPr>
             </a:pPr>
             <a:r>
-              <a:t>Now I ask: “Do I need a fixed answer?”</a:t>
-            </a:r>
-          </a:p>
-        </p:txBody>
-      </p:sp>
-      <p:sp>
-        <p:nvSpPr>
-          <p:cNvPr id="8" name="TextBox 7"/>
+              <a:t>Why worry less?</a:t>
+            </a:r>
+          </a:p>
+        </p:txBody>
+      </p:sp>
+      <p:sp>
+        <p:nvSpPr>
+          <p:cNvPr id="17" name="Rounded Rectangle 16"/>
+          <p:cNvSpPr/>
+          <p:nvPr/>
+        </p:nvSpPr>
+        <p:spPr>
+          <a:xfrm>
+            <a:off x="6217920" y="2057400"/>
+            <a:ext cx="5166360" cy="1261872"/>
+          </a:xfrm>
+          <a:prstGeom prst="roundRect">
+            <a:avLst>
+              <a:gd name="adj" fmla="val 10000"/>
+            </a:avLst>
+          </a:prstGeom>
+          <a:solidFill>
+            <a:srgbClr val="E6EEF2"/>
+          </a:solidFill>
+          <a:ln>
+            <a:noFill/>
+          </a:ln>
+        </p:spPr>
+        <p:style>
+          <a:lnRef idx="1">
+            <a:schemeClr val="accent1"/>
+          </a:lnRef>
+          <a:fillRef idx="3">
+            <a:schemeClr val="accent1"/>
+          </a:fillRef>
+          <a:effectRef idx="2">
+            <a:schemeClr val="accent1"/>
+          </a:effectRef>
+          <a:fontRef idx="minor">
+            <a:schemeClr val="lt1"/>
+          </a:fontRef>
+        </p:style>
+        <p:txBody>
+          <a:bodyPr rtlCol="0" anchor="ctr"/>
+          <a:lstStyle/>
+          <a:p>
+            <a:pPr algn="ctr"/>
+          </a:p>
+        </p:txBody>
+      </p:sp>
+      <p:sp>
+        <p:nvSpPr>
+          <p:cNvPr id="18" name="TextBox 17"/>
           <p:cNvSpPr txBox="1"/>
           <p:nvPr/>
         </p:nvSpPr>
         <p:spPr>
           <a:xfrm>
-            <a:off x="731520" y="4069080"/>
-            <a:ext cx="548640" cy="457200"/>
+            <a:off x="6419088" y="2221992"/>
+            <a:ext cx="640080" cy="411480"/>
           </a:xfrm>
           <a:prstGeom prst="rect">
             <a:avLst/>
@@ -4814,38 +5770,35 @@
           <a:noFill/>
         </p:spPr>
         <p:txBody>
-          <a:bodyPr wrap="square">
+          <a:bodyPr wrap="square" lIns="18288" rIns="18288" tIns="18288">
             <a:spAutoFit/>
           </a:bodyPr>
           <a:lstStyle/>
           <a:p>
             <a:pPr>
-              <a:spcAft>
-                <a:spcPts val="900"/>
-              </a:spcAft>
-              <a:defRPr sz="1500" b="1">
+              <a:defRPr sz="2200" b="1">
                 <a:solidFill>
-                  <a:srgbClr val="3C726A"/>
+                  <a:srgbClr val="39796F"/>
                 </a:solidFill>
                 <a:latin typeface="Aptos"/>
               </a:defRPr>
             </a:pPr>
             <a:r>
-              <a:t>03</a:t>
-            </a:r>
-          </a:p>
-        </p:txBody>
-      </p:sp>
-      <p:sp>
-        <p:nvSpPr>
-          <p:cNvPr id="9" name="TextBox 8"/>
+              <a:t>02</a:t>
+            </a:r>
+          </a:p>
+        </p:txBody>
+      </p:sp>
+      <p:sp>
+        <p:nvSpPr>
+          <p:cNvPr id="19" name="TextBox 18"/>
           <p:cNvSpPr txBox="1"/>
           <p:nvPr/>
         </p:nvSpPr>
         <p:spPr>
           <a:xfrm>
-            <a:off x="1371600" y="3977639"/>
-            <a:ext cx="9692640" cy="685800"/>
+            <a:off x="7132320" y="2258568"/>
+            <a:ext cx="3977639" cy="868680"/>
           </a:xfrm>
           <a:prstGeom prst="rect">
             <a:avLst/>
@@ -4853,38 +5806,80 @@
           <a:noFill/>
         </p:spPr>
         <p:txBody>
-          <a:bodyPr wrap="square">
+          <a:bodyPr wrap="square" lIns="18288" rIns="18288" tIns="18288">
             <a:spAutoFit/>
           </a:bodyPr>
           <a:lstStyle/>
           <a:p>
             <a:pPr>
-              <a:spcAft>
-                <a:spcPts val="900"/>
-              </a:spcAft>
-              <a:defRPr sz="2700" b="0">
+              <a:defRPr sz="2500" b="1">
                 <a:solidFill>
-                  <a:srgbClr val="24343B"/>
+                  <a:srgbClr val="223B40"/>
                 </a:solidFill>
                 <a:latin typeface="Aptos"/>
               </a:defRPr>
             </a:pPr>
             <a:r>
-              <a:t>Maybe we can worry less and live more.</a:t>
-            </a:r>
-          </a:p>
-        </p:txBody>
-      </p:sp>
-      <p:sp>
-        <p:nvSpPr>
-          <p:cNvPr id="10" name="TextBox 9"/>
+              <a:t>We are more than a label.</a:t>
+            </a:r>
+          </a:p>
+        </p:txBody>
+      </p:sp>
+      <p:sp>
+        <p:nvSpPr>
+          <p:cNvPr id="20" name="Rounded Rectangle 19"/>
+          <p:cNvSpPr/>
+          <p:nvPr/>
+        </p:nvSpPr>
+        <p:spPr>
+          <a:xfrm>
+            <a:off x="731520" y="3566160"/>
+            <a:ext cx="5166360" cy="1261872"/>
+          </a:xfrm>
+          <a:prstGeom prst="roundRect">
+            <a:avLst>
+              <a:gd name="adj" fmla="val 10000"/>
+            </a:avLst>
+          </a:prstGeom>
+          <a:solidFill>
+            <a:srgbClr val="E6EEF2"/>
+          </a:solidFill>
+          <a:ln>
+            <a:noFill/>
+          </a:ln>
+        </p:spPr>
+        <p:style>
+          <a:lnRef idx="1">
+            <a:schemeClr val="accent1"/>
+          </a:lnRef>
+          <a:fillRef idx="3">
+            <a:schemeClr val="accent1"/>
+          </a:fillRef>
+          <a:effectRef idx="2">
+            <a:schemeClr val="accent1"/>
+          </a:effectRef>
+          <a:fontRef idx="minor">
+            <a:schemeClr val="lt1"/>
+          </a:fontRef>
+        </p:style>
+        <p:txBody>
+          <a:bodyPr rtlCol="0" anchor="ctr"/>
+          <a:lstStyle/>
+          <a:p>
+            <a:pPr algn="ctr"/>
+          </a:p>
+        </p:txBody>
+      </p:sp>
+      <p:sp>
+        <p:nvSpPr>
+          <p:cNvPr id="21" name="TextBox 20"/>
           <p:cNvSpPr txBox="1"/>
           <p:nvPr/>
         </p:nvSpPr>
         <p:spPr>
           <a:xfrm>
-            <a:off x="11064240" y="6419088"/>
-            <a:ext cx="548640" cy="228600"/>
+            <a:off x="932688" y="3730752"/>
+            <a:ext cx="640080" cy="411480"/>
           </a:xfrm>
           <a:prstGeom prst="rect">
             <a:avLst/>
@@ -4892,24 +5887,174 @@
           <a:noFill/>
         </p:spPr>
         <p:txBody>
-          <a:bodyPr wrap="square">
+          <a:bodyPr wrap="square" lIns="18288" rIns="18288" tIns="18288">
             <a:spAutoFit/>
           </a:bodyPr>
           <a:lstStyle/>
           <a:p>
             <a:pPr>
-              <a:spcAft>
-                <a:spcPts val="900"/>
-              </a:spcAft>
-              <a:defRPr sz="1100" b="0">
+              <a:defRPr sz="2200" b="1">
                 <a:solidFill>
-                  <a:srgbClr val="627078"/>
+                  <a:srgbClr val="39796F"/>
                 </a:solidFill>
                 <a:latin typeface="Aptos"/>
               </a:defRPr>
             </a:pPr>
             <a:r>
-              <a:t>02</a:t>
+              <a:t>03</a:t>
+            </a:r>
+          </a:p>
+        </p:txBody>
+      </p:sp>
+      <p:sp>
+        <p:nvSpPr>
+          <p:cNvPr id="22" name="TextBox 21"/>
+          <p:cNvSpPr txBox="1"/>
+          <p:nvPr/>
+        </p:nvSpPr>
+        <p:spPr>
+          <a:xfrm>
+            <a:off x="1645920" y="3767328"/>
+            <a:ext cx="3977639" cy="868680"/>
+          </a:xfrm>
+          <a:prstGeom prst="rect">
+            <a:avLst/>
+          </a:prstGeom>
+          <a:noFill/>
+        </p:spPr>
+        <p:txBody>
+          <a:bodyPr wrap="square" lIns="18288" rIns="18288" tIns="18288">
+            <a:spAutoFit/>
+          </a:bodyPr>
+          <a:lstStyle/>
+          <a:p>
+            <a:pPr>
+              <a:defRPr sz="2500" b="1">
+                <a:solidFill>
+                  <a:srgbClr val="223B40"/>
+                </a:solidFill>
+                <a:latin typeface="Aptos"/>
+              </a:defRPr>
+            </a:pPr>
+            <a:r>
+              <a:t>We change.</a:t>
+            </a:r>
+          </a:p>
+        </p:txBody>
+      </p:sp>
+      <p:sp>
+        <p:nvSpPr>
+          <p:cNvPr id="23" name="Rounded Rectangle 22"/>
+          <p:cNvSpPr/>
+          <p:nvPr/>
+        </p:nvSpPr>
+        <p:spPr>
+          <a:xfrm>
+            <a:off x="6217920" y="3566160"/>
+            <a:ext cx="5166360" cy="1261872"/>
+          </a:xfrm>
+          <a:prstGeom prst="roundRect">
+            <a:avLst>
+              <a:gd name="adj" fmla="val 10000"/>
+            </a:avLst>
+          </a:prstGeom>
+          <a:solidFill>
+            <a:srgbClr val="E6EFEB"/>
+          </a:solidFill>
+          <a:ln>
+            <a:noFill/>
+          </a:ln>
+        </p:spPr>
+        <p:style>
+          <a:lnRef idx="1">
+            <a:schemeClr val="accent1"/>
+          </a:lnRef>
+          <a:fillRef idx="3">
+            <a:schemeClr val="accent1"/>
+          </a:fillRef>
+          <a:effectRef idx="2">
+            <a:schemeClr val="accent1"/>
+          </a:effectRef>
+          <a:fontRef idx="minor">
+            <a:schemeClr val="lt1"/>
+          </a:fontRef>
+        </p:style>
+        <p:txBody>
+          <a:bodyPr rtlCol="0" anchor="ctr"/>
+          <a:lstStyle/>
+          <a:p>
+            <a:pPr algn="ctr"/>
+          </a:p>
+        </p:txBody>
+      </p:sp>
+      <p:sp>
+        <p:nvSpPr>
+          <p:cNvPr id="24" name="TextBox 23"/>
+          <p:cNvSpPr txBox="1"/>
+          <p:nvPr/>
+        </p:nvSpPr>
+        <p:spPr>
+          <a:xfrm>
+            <a:off x="6419088" y="3730752"/>
+            <a:ext cx="640080" cy="411480"/>
+          </a:xfrm>
+          <a:prstGeom prst="rect">
+            <a:avLst/>
+          </a:prstGeom>
+          <a:noFill/>
+        </p:spPr>
+        <p:txBody>
+          <a:bodyPr wrap="square" lIns="18288" rIns="18288" tIns="18288">
+            <a:spAutoFit/>
+          </a:bodyPr>
+          <a:lstStyle/>
+          <a:p>
+            <a:pPr>
+              <a:defRPr sz="2200" b="1">
+                <a:solidFill>
+                  <a:srgbClr val="39796F"/>
+                </a:solidFill>
+                <a:latin typeface="Aptos"/>
+              </a:defRPr>
+            </a:pPr>
+            <a:r>
+              <a:t>04</a:t>
+            </a:r>
+          </a:p>
+        </p:txBody>
+      </p:sp>
+      <p:sp>
+        <p:nvSpPr>
+          <p:cNvPr id="25" name="TextBox 24"/>
+          <p:cNvSpPr txBox="1"/>
+          <p:nvPr/>
+        </p:nvSpPr>
+        <p:spPr>
+          <a:xfrm>
+            <a:off x="7132320" y="3767328"/>
+            <a:ext cx="3977639" cy="868680"/>
+          </a:xfrm>
+          <a:prstGeom prst="rect">
+            <a:avLst/>
+          </a:prstGeom>
+          <a:noFill/>
+        </p:spPr>
+        <p:txBody>
+          <a:bodyPr wrap="square" lIns="18288" rIns="18288" tIns="18288">
+            <a:spAutoFit/>
+          </a:bodyPr>
+          <a:lstStyle/>
+          <a:p>
+            <a:pPr>
+              <a:defRPr sz="2500" b="1">
+                <a:solidFill>
+                  <a:srgbClr val="223B40"/>
+                </a:solidFill>
+                <a:latin typeface="Aptos"/>
+              </a:defRPr>
+            </a:pPr>
+            <a:r>
+              <a:t>What can we do?</a:t>
             </a:r>
           </a:p>
         </p:txBody>
@@ -4928,7 +6073,7 @@
     <p:bg>
       <p:bgPr>
         <a:solidFill>
-          <a:srgbClr val="FFFFFF"/>
+          <a:srgbClr val="F7F8F4"/>
         </a:solidFill>
         <a:effectLst/>
       </p:bgPr>
@@ -4942,14 +6087,57 @@
       <p:grpSpPr/>
       <p:sp>
         <p:nvSpPr>
-          <p:cNvPr id="2" name="TextBox 1"/>
+          <p:cNvPr id="2" name="Rectangle 1"/>
+          <p:cNvSpPr/>
+          <p:nvPr/>
+        </p:nvSpPr>
+        <p:spPr>
+          <a:xfrm>
+            <a:off x="0" y="0"/>
+            <a:ext cx="146304" cy="6858000"/>
+          </a:xfrm>
+          <a:prstGeom prst="rect">
+            <a:avLst/>
+          </a:prstGeom>
+          <a:solidFill>
+            <a:srgbClr val="39796F"/>
+          </a:solidFill>
+          <a:ln>
+            <a:noFill/>
+          </a:ln>
+        </p:spPr>
+        <p:style>
+          <a:lnRef idx="1">
+            <a:schemeClr val="accent1"/>
+          </a:lnRef>
+          <a:fillRef idx="3">
+            <a:schemeClr val="accent1"/>
+          </a:fillRef>
+          <a:effectRef idx="2">
+            <a:schemeClr val="accent1"/>
+          </a:effectRef>
+          <a:fontRef idx="minor">
+            <a:schemeClr val="lt1"/>
+          </a:fontRef>
+        </p:style>
+        <p:txBody>
+          <a:bodyPr rtlCol="0" anchor="ctr"/>
+          <a:lstStyle/>
+          <a:p>
+            <a:pPr algn="ctr"/>
+          </a:p>
+        </p:txBody>
+      </p:sp>
+      <p:sp>
+        <p:nvSpPr>
+          <p:cNvPr id="3" name="TextBox 2"/>
           <p:cNvSpPr txBox="1"/>
           <p:nvPr/>
         </p:nvSpPr>
         <p:spPr>
           <a:xfrm>
-            <a:off x="640080" y="320040"/>
-            <a:ext cx="10058400" cy="320040"/>
+            <a:off x="594360" y="292608"/>
+            <a:ext cx="10058400" cy="274320"/>
           </a:xfrm>
           <a:prstGeom prst="rect">
             <a:avLst/>
@@ -4957,18 +6145,15 @@
           <a:noFill/>
         </p:spPr>
         <p:txBody>
-          <a:bodyPr wrap="square">
+          <a:bodyPr wrap="square" lIns="18288" rIns="18288" tIns="18288">
             <a:spAutoFit/>
           </a:bodyPr>
           <a:lstStyle/>
           <a:p>
             <a:pPr>
-              <a:spcAft>
-                <a:spcPts val="900"/>
-              </a:spcAft>
               <a:defRPr sz="1100" b="0">
                 <a:solidFill>
-                  <a:srgbClr val="627078"/>
+                  <a:srgbClr val="637575"/>
                 </a:solidFill>
                 <a:latin typeface="Aptos"/>
               </a:defRPr>
@@ -4981,14 +6166,14 @@
       </p:sp>
       <p:sp>
         <p:nvSpPr>
-          <p:cNvPr id="3" name="TextBox 2"/>
+          <p:cNvPr id="4" name="TextBox 3"/>
           <p:cNvSpPr txBox="1"/>
           <p:nvPr/>
         </p:nvSpPr>
         <p:spPr>
           <a:xfrm>
-            <a:off x="640080" y="914400"/>
-            <a:ext cx="10881360" cy="822960"/>
+            <a:off x="594360" y="6437376"/>
+            <a:ext cx="9144000" cy="228600"/>
           </a:xfrm>
           <a:prstGeom prst="rect">
             <a:avLst/>
@@ -4996,38 +6181,35 @@
           <a:noFill/>
         </p:spPr>
         <p:txBody>
-          <a:bodyPr wrap="square">
+          <a:bodyPr wrap="square" lIns="18288" rIns="18288" tIns="18288">
             <a:spAutoFit/>
           </a:bodyPr>
           <a:lstStyle/>
           <a:p>
             <a:pPr>
-              <a:spcAft>
-                <a:spcPts val="900"/>
-              </a:spcAft>
-              <a:defRPr sz="3400" b="1">
+              <a:defRPr sz="1000" b="0">
                 <a:solidFill>
-                  <a:srgbClr val="24343B"/>
+                  <a:srgbClr val="637575"/>
                 </a:solidFill>
                 <a:latin typeface="Aptos"/>
               </a:defRPr>
             </a:pPr>
             <a:r>
-              <a:t>We are more than a label.</a:t>
-            </a:r>
-          </a:p>
-        </p:txBody>
-      </p:sp>
-      <p:sp>
-        <p:nvSpPr>
-          <p:cNvPr id="4" name="TextBox 3"/>
+              <a:t>A DIFFERENT VIEW</a:t>
+            </a:r>
+          </a:p>
+        </p:txBody>
+      </p:sp>
+      <p:sp>
+        <p:nvSpPr>
+          <p:cNvPr id="5" name="TextBox 4"/>
           <p:cNvSpPr txBox="1"/>
           <p:nvPr/>
         </p:nvSpPr>
         <p:spPr>
           <a:xfrm>
-            <a:off x="731520" y="2423160"/>
-            <a:ext cx="548640" cy="457200"/>
+            <a:off x="10972800" y="6400800"/>
+            <a:ext cx="594360" cy="274320"/>
           </a:xfrm>
           <a:prstGeom prst="rect">
             <a:avLst/>
@@ -5035,38 +6217,336 @@
           <a:noFill/>
         </p:spPr>
         <p:txBody>
-          <a:bodyPr wrap="square">
+          <a:bodyPr wrap="square" lIns="18288" rIns="18288" tIns="18288">
             <a:spAutoFit/>
           </a:bodyPr>
           <a:lstStyle/>
           <a:p>
             <a:pPr>
-              <a:spcAft>
-                <a:spcPts val="900"/>
-              </a:spcAft>
-              <a:defRPr sz="1500" b="1">
+              <a:defRPr sz="1200" b="1">
                 <a:solidFill>
-                  <a:srgbClr val="3C726A"/>
+                  <a:srgbClr val="39796F"/>
                 </a:solidFill>
                 <a:latin typeface="Aptos"/>
               </a:defRPr>
             </a:pPr>
             <a:r>
-              <a:t>01</a:t>
-            </a:r>
-          </a:p>
-        </p:txBody>
-      </p:sp>
-      <p:sp>
-        <p:nvSpPr>
-          <p:cNvPr id="5" name="TextBox 4"/>
+              <a:t>03</a:t>
+            </a:r>
+          </a:p>
+        </p:txBody>
+      </p:sp>
+      <p:sp>
+        <p:nvSpPr>
+          <p:cNvPr id="6" name="Rectangle 5"/>
+          <p:cNvSpPr/>
+          <p:nvPr/>
+        </p:nvSpPr>
+        <p:spPr>
+          <a:xfrm>
+            <a:off x="621792" y="6172200"/>
+            <a:ext cx="210312" cy="32004"/>
+          </a:xfrm>
+          <a:prstGeom prst="rect">
+            <a:avLst/>
+          </a:prstGeom>
+          <a:solidFill>
+            <a:srgbClr val="D5DEDA"/>
+          </a:solidFill>
+          <a:ln>
+            <a:noFill/>
+          </a:ln>
+        </p:spPr>
+        <p:style>
+          <a:lnRef idx="1">
+            <a:schemeClr val="accent1"/>
+          </a:lnRef>
+          <a:fillRef idx="3">
+            <a:schemeClr val="accent1"/>
+          </a:fillRef>
+          <a:effectRef idx="2">
+            <a:schemeClr val="accent1"/>
+          </a:effectRef>
+          <a:fontRef idx="minor">
+            <a:schemeClr val="lt1"/>
+          </a:fontRef>
+        </p:style>
+        <p:txBody>
+          <a:bodyPr rtlCol="0" anchor="ctr"/>
+          <a:lstStyle/>
+          <a:p>
+            <a:pPr algn="ctr"/>
+          </a:p>
+        </p:txBody>
+      </p:sp>
+      <p:sp>
+        <p:nvSpPr>
+          <p:cNvPr id="7" name="Rectangle 6"/>
+          <p:cNvSpPr/>
+          <p:nvPr/>
+        </p:nvSpPr>
+        <p:spPr>
+          <a:xfrm>
+            <a:off x="914400" y="6172200"/>
+            <a:ext cx="210312" cy="32004"/>
+          </a:xfrm>
+          <a:prstGeom prst="rect">
+            <a:avLst/>
+          </a:prstGeom>
+          <a:solidFill>
+            <a:srgbClr val="D5DEDA"/>
+          </a:solidFill>
+          <a:ln>
+            <a:noFill/>
+          </a:ln>
+        </p:spPr>
+        <p:style>
+          <a:lnRef idx="1">
+            <a:schemeClr val="accent1"/>
+          </a:lnRef>
+          <a:fillRef idx="3">
+            <a:schemeClr val="accent1"/>
+          </a:fillRef>
+          <a:effectRef idx="2">
+            <a:schemeClr val="accent1"/>
+          </a:effectRef>
+          <a:fontRef idx="minor">
+            <a:schemeClr val="lt1"/>
+          </a:fontRef>
+        </p:style>
+        <p:txBody>
+          <a:bodyPr rtlCol="0" anchor="ctr"/>
+          <a:lstStyle/>
+          <a:p>
+            <a:pPr algn="ctr"/>
+          </a:p>
+        </p:txBody>
+      </p:sp>
+      <p:sp>
+        <p:nvSpPr>
+          <p:cNvPr id="8" name="Rectangle 7"/>
+          <p:cNvSpPr/>
+          <p:nvPr/>
+        </p:nvSpPr>
+        <p:spPr>
+          <a:xfrm>
+            <a:off x="1207008" y="6172200"/>
+            <a:ext cx="210312" cy="32004"/>
+          </a:xfrm>
+          <a:prstGeom prst="rect">
+            <a:avLst/>
+          </a:prstGeom>
+          <a:solidFill>
+            <a:srgbClr val="39796F"/>
+          </a:solidFill>
+          <a:ln>
+            <a:noFill/>
+          </a:ln>
+        </p:spPr>
+        <p:style>
+          <a:lnRef idx="1">
+            <a:schemeClr val="accent1"/>
+          </a:lnRef>
+          <a:fillRef idx="3">
+            <a:schemeClr val="accent1"/>
+          </a:fillRef>
+          <a:effectRef idx="2">
+            <a:schemeClr val="accent1"/>
+          </a:effectRef>
+          <a:fontRef idx="minor">
+            <a:schemeClr val="lt1"/>
+          </a:fontRef>
+        </p:style>
+        <p:txBody>
+          <a:bodyPr rtlCol="0" anchor="ctr"/>
+          <a:lstStyle/>
+          <a:p>
+            <a:pPr algn="ctr"/>
+          </a:p>
+        </p:txBody>
+      </p:sp>
+      <p:sp>
+        <p:nvSpPr>
+          <p:cNvPr id="9" name="Rectangle 8"/>
+          <p:cNvSpPr/>
+          <p:nvPr/>
+        </p:nvSpPr>
+        <p:spPr>
+          <a:xfrm>
+            <a:off x="1499616" y="6172200"/>
+            <a:ext cx="210312" cy="32004"/>
+          </a:xfrm>
+          <a:prstGeom prst="rect">
+            <a:avLst/>
+          </a:prstGeom>
+          <a:solidFill>
+            <a:srgbClr val="D5DEDA"/>
+          </a:solidFill>
+          <a:ln>
+            <a:noFill/>
+          </a:ln>
+        </p:spPr>
+        <p:style>
+          <a:lnRef idx="1">
+            <a:schemeClr val="accent1"/>
+          </a:lnRef>
+          <a:fillRef idx="3">
+            <a:schemeClr val="accent1"/>
+          </a:fillRef>
+          <a:effectRef idx="2">
+            <a:schemeClr val="accent1"/>
+          </a:effectRef>
+          <a:fontRef idx="minor">
+            <a:schemeClr val="lt1"/>
+          </a:fontRef>
+        </p:style>
+        <p:txBody>
+          <a:bodyPr rtlCol="0" anchor="ctr"/>
+          <a:lstStyle/>
+          <a:p>
+            <a:pPr algn="ctr"/>
+          </a:p>
+        </p:txBody>
+      </p:sp>
+      <p:sp>
+        <p:nvSpPr>
+          <p:cNvPr id="10" name="Rectangle 9"/>
+          <p:cNvSpPr/>
+          <p:nvPr/>
+        </p:nvSpPr>
+        <p:spPr>
+          <a:xfrm>
+            <a:off x="1792224" y="6172200"/>
+            <a:ext cx="210312" cy="32004"/>
+          </a:xfrm>
+          <a:prstGeom prst="rect">
+            <a:avLst/>
+          </a:prstGeom>
+          <a:solidFill>
+            <a:srgbClr val="D5DEDA"/>
+          </a:solidFill>
+          <a:ln>
+            <a:noFill/>
+          </a:ln>
+        </p:spPr>
+        <p:style>
+          <a:lnRef idx="1">
+            <a:schemeClr val="accent1"/>
+          </a:lnRef>
+          <a:fillRef idx="3">
+            <a:schemeClr val="accent1"/>
+          </a:fillRef>
+          <a:effectRef idx="2">
+            <a:schemeClr val="accent1"/>
+          </a:effectRef>
+          <a:fontRef idx="minor">
+            <a:schemeClr val="lt1"/>
+          </a:fontRef>
+        </p:style>
+        <p:txBody>
+          <a:bodyPr rtlCol="0" anchor="ctr"/>
+          <a:lstStyle/>
+          <a:p>
+            <a:pPr algn="ctr"/>
+          </a:p>
+        </p:txBody>
+      </p:sp>
+      <p:sp>
+        <p:nvSpPr>
+          <p:cNvPr id="11" name="Rectangle 10"/>
+          <p:cNvSpPr/>
+          <p:nvPr/>
+        </p:nvSpPr>
+        <p:spPr>
+          <a:xfrm>
+            <a:off x="2084832" y="6172200"/>
+            <a:ext cx="210312" cy="32004"/>
+          </a:xfrm>
+          <a:prstGeom prst="rect">
+            <a:avLst/>
+          </a:prstGeom>
+          <a:solidFill>
+            <a:srgbClr val="D5DEDA"/>
+          </a:solidFill>
+          <a:ln>
+            <a:noFill/>
+          </a:ln>
+        </p:spPr>
+        <p:style>
+          <a:lnRef idx="1">
+            <a:schemeClr val="accent1"/>
+          </a:lnRef>
+          <a:fillRef idx="3">
+            <a:schemeClr val="accent1"/>
+          </a:fillRef>
+          <a:effectRef idx="2">
+            <a:schemeClr val="accent1"/>
+          </a:effectRef>
+          <a:fontRef idx="minor">
+            <a:schemeClr val="lt1"/>
+          </a:fontRef>
+        </p:style>
+        <p:txBody>
+          <a:bodyPr rtlCol="0" anchor="ctr"/>
+          <a:lstStyle/>
+          <a:p>
+            <a:pPr algn="ctr"/>
+          </a:p>
+        </p:txBody>
+      </p:sp>
+      <p:sp>
+        <p:nvSpPr>
+          <p:cNvPr id="12" name="Rectangle 11"/>
+          <p:cNvSpPr/>
+          <p:nvPr/>
+        </p:nvSpPr>
+        <p:spPr>
+          <a:xfrm>
+            <a:off x="2377440" y="6172200"/>
+            <a:ext cx="210312" cy="32004"/>
+          </a:xfrm>
+          <a:prstGeom prst="rect">
+            <a:avLst/>
+          </a:prstGeom>
+          <a:solidFill>
+            <a:srgbClr val="D5DEDA"/>
+          </a:solidFill>
+          <a:ln>
+            <a:noFill/>
+          </a:ln>
+        </p:spPr>
+        <p:style>
+          <a:lnRef idx="1">
+            <a:schemeClr val="accent1"/>
+          </a:lnRef>
+          <a:fillRef idx="3">
+            <a:schemeClr val="accent1"/>
+          </a:fillRef>
+          <a:effectRef idx="2">
+            <a:schemeClr val="accent1"/>
+          </a:effectRef>
+          <a:fontRef idx="minor">
+            <a:schemeClr val="lt1"/>
+          </a:fontRef>
+        </p:style>
+        <p:txBody>
+          <a:bodyPr rtlCol="0" anchor="ctr"/>
+          <a:lstStyle/>
+          <a:p>
+            <a:pPr algn="ctr"/>
+          </a:p>
+        </p:txBody>
+      </p:sp>
+      <p:sp>
+        <p:nvSpPr>
+          <p:cNvPr id="13" name="TextBox 12"/>
           <p:cNvSpPr txBox="1"/>
           <p:nvPr/>
         </p:nvSpPr>
         <p:spPr>
           <a:xfrm>
-            <a:off x="1371600" y="2331720"/>
-            <a:ext cx="9692640" cy="685800"/>
+            <a:off x="685800" y="941832"/>
+            <a:ext cx="10881360" cy="731520"/>
           </a:xfrm>
           <a:prstGeom prst="rect">
             <a:avLst/>
@@ -5074,38 +6554,80 @@
           <a:noFill/>
         </p:spPr>
         <p:txBody>
-          <a:bodyPr wrap="square">
+          <a:bodyPr wrap="square" lIns="18288" rIns="18288" tIns="18288">
             <a:spAutoFit/>
           </a:bodyPr>
           <a:lstStyle/>
           <a:p>
             <a:pPr>
-              <a:spcAft>
-                <a:spcPts val="900"/>
-              </a:spcAft>
-              <a:defRPr sz="2700" b="0">
+              <a:defRPr sz="3500" b="1">
                 <a:solidFill>
-                  <a:srgbClr val="24343B"/>
+                  <a:srgbClr val="223B40"/>
                 </a:solidFill>
                 <a:latin typeface="Aptos"/>
               </a:defRPr>
             </a:pPr>
             <a:r>
-              <a:t>An introvert can enjoy speaking up.</a:t>
-            </a:r>
-          </a:p>
-        </p:txBody>
-      </p:sp>
-      <p:sp>
-        <p:nvSpPr>
-          <p:cNvPr id="6" name="TextBox 5"/>
+              <a:t>Do we need to search so hard?</a:t>
+            </a:r>
+          </a:p>
+        </p:txBody>
+      </p:sp>
+      <p:sp>
+        <p:nvSpPr>
+          <p:cNvPr id="14" name="Rounded Rectangle 13"/>
+          <p:cNvSpPr/>
+          <p:nvPr/>
+        </p:nvSpPr>
+        <p:spPr>
+          <a:xfrm>
+            <a:off x="731520" y="2194560"/>
+            <a:ext cx="5166360" cy="1965960"/>
+          </a:xfrm>
+          <a:prstGeom prst="roundRect">
+            <a:avLst>
+              <a:gd name="adj" fmla="val 10000"/>
+            </a:avLst>
+          </a:prstGeom>
+          <a:solidFill>
+            <a:srgbClr val="E6EEF2"/>
+          </a:solidFill>
+          <a:ln>
+            <a:noFill/>
+          </a:ln>
+        </p:spPr>
+        <p:style>
+          <a:lnRef idx="1">
+            <a:schemeClr val="accent1"/>
+          </a:lnRef>
+          <a:fillRef idx="3">
+            <a:schemeClr val="accent1"/>
+          </a:fillRef>
+          <a:effectRef idx="2">
+            <a:schemeClr val="accent1"/>
+          </a:effectRef>
+          <a:fontRef idx="minor">
+            <a:schemeClr val="lt1"/>
+          </a:fontRef>
+        </p:style>
+        <p:txBody>
+          <a:bodyPr rtlCol="0" anchor="ctr"/>
+          <a:lstStyle/>
+          <a:p>
+            <a:pPr algn="ctr"/>
+          </a:p>
+        </p:txBody>
+      </p:sp>
+      <p:sp>
+        <p:nvSpPr>
+          <p:cNvPr id="15" name="TextBox 14"/>
           <p:cNvSpPr txBox="1"/>
           <p:nvPr/>
         </p:nvSpPr>
         <p:spPr>
           <a:xfrm>
-            <a:off x="731520" y="3246120"/>
-            <a:ext cx="548640" cy="457200"/>
+            <a:off x="1005840" y="2487168"/>
+            <a:ext cx="4572000" cy="365760"/>
           </a:xfrm>
           <a:prstGeom prst="rect">
             <a:avLst/>
@@ -5113,38 +6635,35 @@
           <a:noFill/>
         </p:spPr>
         <p:txBody>
-          <a:bodyPr wrap="square">
+          <a:bodyPr wrap="square" lIns="18288" rIns="18288" tIns="18288">
             <a:spAutoFit/>
           </a:bodyPr>
           <a:lstStyle/>
           <a:p>
             <a:pPr>
-              <a:spcAft>
-                <a:spcPts val="900"/>
-              </a:spcAft>
-              <a:defRPr sz="1500" b="1">
+              <a:defRPr sz="1300" b="1">
                 <a:solidFill>
-                  <a:srgbClr val="3C726A"/>
+                  <a:srgbClr val="39796F"/>
                 </a:solidFill>
                 <a:latin typeface="Aptos"/>
               </a:defRPr>
             </a:pPr>
             <a:r>
-              <a:t>02</a:t>
-            </a:r>
-          </a:p>
-        </p:txBody>
-      </p:sp>
-      <p:sp>
-        <p:nvSpPr>
-          <p:cNvPr id="7" name="TextBox 6"/>
+              <a:t>I USED TO THINK</a:t>
+            </a:r>
+          </a:p>
+        </p:txBody>
+      </p:sp>
+      <p:sp>
+        <p:nvSpPr>
+          <p:cNvPr id="16" name="TextBox 15"/>
           <p:cNvSpPr txBox="1"/>
           <p:nvPr/>
         </p:nvSpPr>
         <p:spPr>
           <a:xfrm>
-            <a:off x="1371600" y="3154679"/>
-            <a:ext cx="9692640" cy="685800"/>
+            <a:off x="1005840" y="3017520"/>
+            <a:ext cx="4526280" cy="1005840"/>
           </a:xfrm>
           <a:prstGeom prst="rect">
             <a:avLst/>
@@ -5152,38 +6671,80 @@
           <a:noFill/>
         </p:spPr>
         <p:txBody>
-          <a:bodyPr wrap="square">
+          <a:bodyPr wrap="square" lIns="18288" rIns="18288" tIns="18288">
             <a:spAutoFit/>
           </a:bodyPr>
           <a:lstStyle/>
           <a:p>
             <a:pPr>
-              <a:spcAft>
-                <a:spcPts val="900"/>
-              </a:spcAft>
-              <a:defRPr sz="2700" b="0">
+              <a:defRPr sz="2700" b="1">
                 <a:solidFill>
-                  <a:srgbClr val="24343B"/>
+                  <a:srgbClr val="223B40"/>
                 </a:solidFill>
                 <a:latin typeface="Aptos"/>
               </a:defRPr>
             </a:pPr>
             <a:r>
-              <a:t>An extrovert can need time alone.</a:t>
-            </a:r>
-          </a:p>
-        </p:txBody>
-      </p:sp>
-      <p:sp>
-        <p:nvSpPr>
-          <p:cNvPr id="8" name="TextBox 7"/>
+              <a:t>Finding my true self was very important.</a:t>
+            </a:r>
+          </a:p>
+        </p:txBody>
+      </p:sp>
+      <p:sp>
+        <p:nvSpPr>
+          <p:cNvPr id="17" name="Rounded Rectangle 16"/>
+          <p:cNvSpPr/>
+          <p:nvPr/>
+        </p:nvSpPr>
+        <p:spPr>
+          <a:xfrm>
+            <a:off x="6217920" y="2194560"/>
+            <a:ext cx="5166360" cy="1965960"/>
+          </a:xfrm>
+          <a:prstGeom prst="roundRect">
+            <a:avLst>
+              <a:gd name="adj" fmla="val 10000"/>
+            </a:avLst>
+          </a:prstGeom>
+          <a:solidFill>
+            <a:srgbClr val="E6EFEB"/>
+          </a:solidFill>
+          <a:ln>
+            <a:noFill/>
+          </a:ln>
+        </p:spPr>
+        <p:style>
+          <a:lnRef idx="1">
+            <a:schemeClr val="accent1"/>
+          </a:lnRef>
+          <a:fillRef idx="3">
+            <a:schemeClr val="accent1"/>
+          </a:fillRef>
+          <a:effectRef idx="2">
+            <a:schemeClr val="accent1"/>
+          </a:effectRef>
+          <a:fontRef idx="minor">
+            <a:schemeClr val="lt1"/>
+          </a:fontRef>
+        </p:style>
+        <p:txBody>
+          <a:bodyPr rtlCol="0" anchor="ctr"/>
+          <a:lstStyle/>
+          <a:p>
+            <a:pPr algn="ctr"/>
+          </a:p>
+        </p:txBody>
+      </p:sp>
+      <p:sp>
+        <p:nvSpPr>
+          <p:cNvPr id="18" name="TextBox 17"/>
           <p:cNvSpPr txBox="1"/>
           <p:nvPr/>
         </p:nvSpPr>
         <p:spPr>
           <a:xfrm>
-            <a:off x="731520" y="4069080"/>
-            <a:ext cx="548640" cy="457200"/>
+            <a:off x="6492240" y="2487168"/>
+            <a:ext cx="4572000" cy="365760"/>
           </a:xfrm>
           <a:prstGeom prst="rect">
             <a:avLst/>
@@ -5191,38 +6752,35 @@
           <a:noFill/>
         </p:spPr>
         <p:txBody>
-          <a:bodyPr wrap="square">
+          <a:bodyPr wrap="square" lIns="18288" rIns="18288" tIns="18288">
             <a:spAutoFit/>
           </a:bodyPr>
           <a:lstStyle/>
           <a:p>
             <a:pPr>
-              <a:spcAft>
-                <a:spcPts val="900"/>
-              </a:spcAft>
-              <a:defRPr sz="1500" b="1">
+              <a:defRPr sz="1300" b="1">
                 <a:solidFill>
-                  <a:srgbClr val="3C726A"/>
+                  <a:srgbClr val="39796F"/>
                 </a:solidFill>
                 <a:latin typeface="Aptos"/>
               </a:defRPr>
             </a:pPr>
             <a:r>
-              <a:t>03</a:t>
-            </a:r>
-          </a:p>
-        </p:txBody>
-      </p:sp>
-      <p:sp>
-        <p:nvSpPr>
-          <p:cNvPr id="9" name="TextBox 8"/>
+              <a:t>NOW I THINK</a:t>
+            </a:r>
+          </a:p>
+        </p:txBody>
+      </p:sp>
+      <p:sp>
+        <p:nvSpPr>
+          <p:cNvPr id="19" name="TextBox 18"/>
           <p:cNvSpPr txBox="1"/>
           <p:nvPr/>
         </p:nvSpPr>
         <p:spPr>
           <a:xfrm>
-            <a:off x="1371600" y="3977639"/>
-            <a:ext cx="9692640" cy="685800"/>
+            <a:off x="6492240" y="3017520"/>
+            <a:ext cx="4526280" cy="1005840"/>
           </a:xfrm>
           <a:prstGeom prst="rect">
             <a:avLst/>
@@ -5230,38 +6788,80 @@
           <a:noFill/>
         </p:spPr>
         <p:txBody>
-          <a:bodyPr wrap="square">
+          <a:bodyPr wrap="square" lIns="18288" rIns="18288" tIns="18288">
             <a:spAutoFit/>
           </a:bodyPr>
           <a:lstStyle/>
           <a:p>
             <a:pPr>
-              <a:spcAft>
-                <a:spcPts val="900"/>
-              </a:spcAft>
-              <a:defRPr sz="2700" b="0">
+              <a:defRPr sz="2700" b="1">
                 <a:solidFill>
-                  <a:srgbClr val="24343B"/>
+                  <a:srgbClr val="223B40"/>
                 </a:solidFill>
                 <a:latin typeface="Aptos"/>
               </a:defRPr>
             </a:pPr>
             <a:r>
-              <a:t>A label describes part of us.</a:t>
-            </a:r>
-          </a:p>
-        </p:txBody>
-      </p:sp>
-      <p:sp>
-        <p:nvSpPr>
-          <p:cNvPr id="10" name="TextBox 9"/>
+              <a:t>Recently, I changed my view.</a:t>
+            </a:r>
+          </a:p>
+        </p:txBody>
+      </p:sp>
+      <p:sp>
+        <p:nvSpPr>
+          <p:cNvPr id="20" name="Rounded Rectangle 19"/>
+          <p:cNvSpPr/>
+          <p:nvPr/>
+        </p:nvSpPr>
+        <p:spPr>
+          <a:xfrm>
+            <a:off x="731520" y="4617720"/>
+            <a:ext cx="10652760" cy="822960"/>
+          </a:xfrm>
+          <a:prstGeom prst="roundRect">
+            <a:avLst>
+              <a:gd name="adj" fmla="val 10000"/>
+            </a:avLst>
+          </a:prstGeom>
+          <a:solidFill>
+            <a:srgbClr val="39796F"/>
+          </a:solidFill>
+          <a:ln>
+            <a:noFill/>
+          </a:ln>
+        </p:spPr>
+        <p:style>
+          <a:lnRef idx="1">
+            <a:schemeClr val="accent1"/>
+          </a:lnRef>
+          <a:fillRef idx="3">
+            <a:schemeClr val="accent1"/>
+          </a:fillRef>
+          <a:effectRef idx="2">
+            <a:schemeClr val="accent1"/>
+          </a:effectRef>
+          <a:fontRef idx="minor">
+            <a:schemeClr val="lt1"/>
+          </a:fontRef>
+        </p:style>
+        <p:txBody>
+          <a:bodyPr rtlCol="0" anchor="ctr"/>
+          <a:lstStyle/>
+          <a:p>
+            <a:pPr algn="ctr"/>
+          </a:p>
+        </p:txBody>
+      </p:sp>
+      <p:sp>
+        <p:nvSpPr>
+          <p:cNvPr id="21" name="TextBox 20"/>
           <p:cNvSpPr txBox="1"/>
           <p:nvPr/>
         </p:nvSpPr>
         <p:spPr>
           <a:xfrm>
-            <a:off x="11064240" y="6419088"/>
-            <a:ext cx="548640" cy="228600"/>
+            <a:off x="1005840" y="4800600"/>
+            <a:ext cx="10058400" cy="502920"/>
           </a:xfrm>
           <a:prstGeom prst="rect">
             <a:avLst/>
@@ -5269,24 +6869,21 @@
           <a:noFill/>
         </p:spPr>
         <p:txBody>
-          <a:bodyPr wrap="square">
+          <a:bodyPr wrap="square" lIns="18288" rIns="18288" tIns="18288">
             <a:spAutoFit/>
           </a:bodyPr>
           <a:lstStyle/>
           <a:p>
             <a:pPr>
-              <a:spcAft>
-                <a:spcPts val="900"/>
-              </a:spcAft>
-              <a:defRPr sz="1100" b="0">
+              <a:defRPr sz="2700" b="1">
                 <a:solidFill>
-                  <a:srgbClr val="627078"/>
+                  <a:srgbClr val="FFFFFF"/>
                 </a:solidFill>
                 <a:latin typeface="Aptos"/>
               </a:defRPr>
             </a:pPr>
             <a:r>
-              <a:t>03</a:t>
+              <a:t>We can live a little more freely.</a:t>
             </a:r>
           </a:p>
         </p:txBody>
@@ -5305,7 +6902,7 @@
     <p:bg>
       <p:bgPr>
         <a:solidFill>
-          <a:srgbClr val="FFFFFF"/>
+          <a:srgbClr val="F7F8F4"/>
         </a:solidFill>
         <a:effectLst/>
       </p:bgPr>
@@ -5319,14 +6916,57 @@
       <p:grpSpPr/>
       <p:sp>
         <p:nvSpPr>
-          <p:cNvPr id="2" name="TextBox 1"/>
+          <p:cNvPr id="2" name="Rectangle 1"/>
+          <p:cNvSpPr/>
+          <p:nvPr/>
+        </p:nvSpPr>
+        <p:spPr>
+          <a:xfrm>
+            <a:off x="0" y="0"/>
+            <a:ext cx="146304" cy="6858000"/>
+          </a:xfrm>
+          <a:prstGeom prst="rect">
+            <a:avLst/>
+          </a:prstGeom>
+          <a:solidFill>
+            <a:srgbClr val="39796F"/>
+          </a:solidFill>
+          <a:ln>
+            <a:noFill/>
+          </a:ln>
+        </p:spPr>
+        <p:style>
+          <a:lnRef idx="1">
+            <a:schemeClr val="accent1"/>
+          </a:lnRef>
+          <a:fillRef idx="3">
+            <a:schemeClr val="accent1"/>
+          </a:fillRef>
+          <a:effectRef idx="2">
+            <a:schemeClr val="accent1"/>
+          </a:effectRef>
+          <a:fontRef idx="minor">
+            <a:schemeClr val="lt1"/>
+          </a:fontRef>
+        </p:style>
+        <p:txBody>
+          <a:bodyPr rtlCol="0" anchor="ctr"/>
+          <a:lstStyle/>
+          <a:p>
+            <a:pPr algn="ctr"/>
+          </a:p>
+        </p:txBody>
+      </p:sp>
+      <p:sp>
+        <p:nvSpPr>
+          <p:cNvPr id="3" name="TextBox 2"/>
           <p:cNvSpPr txBox="1"/>
           <p:nvPr/>
         </p:nvSpPr>
         <p:spPr>
           <a:xfrm>
-            <a:off x="640080" y="320040"/>
-            <a:ext cx="10058400" cy="320040"/>
+            <a:off x="594360" y="292608"/>
+            <a:ext cx="10058400" cy="274320"/>
           </a:xfrm>
           <a:prstGeom prst="rect">
             <a:avLst/>
@@ -5334,18 +6974,15 @@
           <a:noFill/>
         </p:spPr>
         <p:txBody>
-          <a:bodyPr wrap="square">
+          <a:bodyPr wrap="square" lIns="18288" rIns="18288" tIns="18288">
             <a:spAutoFit/>
           </a:bodyPr>
           <a:lstStyle/>
           <a:p>
             <a:pPr>
-              <a:spcAft>
-                <a:spcPts val="900"/>
-              </a:spcAft>
               <a:defRPr sz="1100" b="0">
                 <a:solidFill>
-                  <a:srgbClr val="627078"/>
+                  <a:srgbClr val="637575"/>
                 </a:solidFill>
                 <a:latin typeface="Aptos"/>
               </a:defRPr>
@@ -5358,14 +6995,14 @@
       </p:sp>
       <p:sp>
         <p:nvSpPr>
-          <p:cNvPr id="3" name="TextBox 2"/>
+          <p:cNvPr id="4" name="TextBox 3"/>
           <p:cNvSpPr txBox="1"/>
           <p:nvPr/>
         </p:nvSpPr>
         <p:spPr>
           <a:xfrm>
-            <a:off x="640080" y="914400"/>
-            <a:ext cx="10881360" cy="822960"/>
+            <a:off x="594360" y="6437376"/>
+            <a:ext cx="9144000" cy="228600"/>
           </a:xfrm>
           <a:prstGeom prst="rect">
             <a:avLst/>
@@ -5373,38 +7010,35 @@
           <a:noFill/>
         </p:spPr>
         <p:txBody>
-          <a:bodyPr wrap="square">
+          <a:bodyPr wrap="square" lIns="18288" rIns="18288" tIns="18288">
             <a:spAutoFit/>
           </a:bodyPr>
           <a:lstStyle/>
           <a:p>
             <a:pPr>
-              <a:spcAft>
-                <a:spcPts val="900"/>
-              </a:spcAft>
-              <a:defRPr sz="3400" b="1">
+              <a:defRPr sz="1000" b="0">
                 <a:solidFill>
-                  <a:srgbClr val="24343B"/>
+                  <a:srgbClr val="637575"/>
                 </a:solidFill>
                 <a:latin typeface="Aptos"/>
               </a:defRPr>
             </a:pPr>
             <a:r>
-              <a:t>We also change over time.</a:t>
-            </a:r>
-          </a:p>
-        </p:txBody>
-      </p:sp>
-      <p:sp>
-        <p:nvSpPr>
-          <p:cNvPr id="4" name="TextBox 3"/>
+              <a:t>REASON 1</a:t>
+            </a:r>
+          </a:p>
+        </p:txBody>
+      </p:sp>
+      <p:sp>
+        <p:nvSpPr>
+          <p:cNvPr id="5" name="TextBox 4"/>
           <p:cNvSpPr txBox="1"/>
           <p:nvPr/>
         </p:nvSpPr>
         <p:spPr>
           <a:xfrm>
-            <a:off x="731520" y="1737360"/>
-            <a:ext cx="10515600" cy="457200"/>
+            <a:off x="10972800" y="6400800"/>
+            <a:ext cx="594360" cy="274320"/>
           </a:xfrm>
           <a:prstGeom prst="rect">
             <a:avLst/>
@@ -5412,56 +7046,336 @@
           <a:noFill/>
         </p:spPr>
         <p:txBody>
-          <a:bodyPr wrap="square">
+          <a:bodyPr wrap="square" lIns="18288" rIns="18288" tIns="18288">
             <a:spAutoFit/>
           </a:bodyPr>
           <a:lstStyle/>
           <a:p>
             <a:pPr>
-              <a:spcAft>
-                <a:spcPts val="900"/>
-              </a:spcAft>
-              <a:defRPr sz="2100" b="0">
+              <a:defRPr sz="1200" b="1">
                 <a:solidFill>
-                  <a:srgbClr val="627078"/>
+                  <a:srgbClr val="39796F"/>
                 </a:solidFill>
                 <a:latin typeface="Aptos"/>
               </a:defRPr>
             </a:pPr>
             <a:r>
-              <a:t>1,795 participants  •  Adolescence → 50 years later</a:t>
-            </a:r>
-          </a:p>
-        </p:txBody>
-      </p:sp>
-      <p:graphicFrame>
-        <p:nvGraphicFramePr>
-          <p:cNvPr id="5" name="Chart 4"/>
-          <p:cNvGraphicFramePr>
-            <a:graphicFrameLocks noGrp="1"/>
-          </p:cNvGraphicFramePr>
-          <p:nvPr/>
-        </p:nvGraphicFramePr>
-        <p:xfrm>
-          <a:off x="731520" y="2423160"/>
-          <a:ext cx="10698480" cy="2834640"/>
-        </p:xfrm>
-        <a:graphic>
-          <a:graphicData uri="http://schemas.openxmlformats.org/drawingml/2006/chart">
-            <c:chart xmlns:c="http://schemas.openxmlformats.org/drawingml/2006/chart" r:id="rId2"/>
-          </a:graphicData>
-        </a:graphic>
-      </p:graphicFrame>
-      <p:sp>
-        <p:nvSpPr>
-          <p:cNvPr id="6" name="TextBox 5"/>
+              <a:t>04</a:t>
+            </a:r>
+          </a:p>
+        </p:txBody>
+      </p:sp>
+      <p:sp>
+        <p:nvSpPr>
+          <p:cNvPr id="6" name="Rectangle 5"/>
+          <p:cNvSpPr/>
+          <p:nvPr/>
+        </p:nvSpPr>
+        <p:spPr>
+          <a:xfrm>
+            <a:off x="621792" y="6172200"/>
+            <a:ext cx="210312" cy="32004"/>
+          </a:xfrm>
+          <a:prstGeom prst="rect">
+            <a:avLst/>
+          </a:prstGeom>
+          <a:solidFill>
+            <a:srgbClr val="D5DEDA"/>
+          </a:solidFill>
+          <a:ln>
+            <a:noFill/>
+          </a:ln>
+        </p:spPr>
+        <p:style>
+          <a:lnRef idx="1">
+            <a:schemeClr val="accent1"/>
+          </a:lnRef>
+          <a:fillRef idx="3">
+            <a:schemeClr val="accent1"/>
+          </a:fillRef>
+          <a:effectRef idx="2">
+            <a:schemeClr val="accent1"/>
+          </a:effectRef>
+          <a:fontRef idx="minor">
+            <a:schemeClr val="lt1"/>
+          </a:fontRef>
+        </p:style>
+        <p:txBody>
+          <a:bodyPr rtlCol="0" anchor="ctr"/>
+          <a:lstStyle/>
+          <a:p>
+            <a:pPr algn="ctr"/>
+          </a:p>
+        </p:txBody>
+      </p:sp>
+      <p:sp>
+        <p:nvSpPr>
+          <p:cNvPr id="7" name="Rectangle 6"/>
+          <p:cNvSpPr/>
+          <p:nvPr/>
+        </p:nvSpPr>
+        <p:spPr>
+          <a:xfrm>
+            <a:off x="914400" y="6172200"/>
+            <a:ext cx="210312" cy="32004"/>
+          </a:xfrm>
+          <a:prstGeom prst="rect">
+            <a:avLst/>
+          </a:prstGeom>
+          <a:solidFill>
+            <a:srgbClr val="D5DEDA"/>
+          </a:solidFill>
+          <a:ln>
+            <a:noFill/>
+          </a:ln>
+        </p:spPr>
+        <p:style>
+          <a:lnRef idx="1">
+            <a:schemeClr val="accent1"/>
+          </a:lnRef>
+          <a:fillRef idx="3">
+            <a:schemeClr val="accent1"/>
+          </a:fillRef>
+          <a:effectRef idx="2">
+            <a:schemeClr val="accent1"/>
+          </a:effectRef>
+          <a:fontRef idx="minor">
+            <a:schemeClr val="lt1"/>
+          </a:fontRef>
+        </p:style>
+        <p:txBody>
+          <a:bodyPr rtlCol="0" anchor="ctr"/>
+          <a:lstStyle/>
+          <a:p>
+            <a:pPr algn="ctr"/>
+          </a:p>
+        </p:txBody>
+      </p:sp>
+      <p:sp>
+        <p:nvSpPr>
+          <p:cNvPr id="8" name="Rectangle 7"/>
+          <p:cNvSpPr/>
+          <p:nvPr/>
+        </p:nvSpPr>
+        <p:spPr>
+          <a:xfrm>
+            <a:off x="1207008" y="6172200"/>
+            <a:ext cx="210312" cy="32004"/>
+          </a:xfrm>
+          <a:prstGeom prst="rect">
+            <a:avLst/>
+          </a:prstGeom>
+          <a:solidFill>
+            <a:srgbClr val="D5DEDA"/>
+          </a:solidFill>
+          <a:ln>
+            <a:noFill/>
+          </a:ln>
+        </p:spPr>
+        <p:style>
+          <a:lnRef idx="1">
+            <a:schemeClr val="accent1"/>
+          </a:lnRef>
+          <a:fillRef idx="3">
+            <a:schemeClr val="accent1"/>
+          </a:fillRef>
+          <a:effectRef idx="2">
+            <a:schemeClr val="accent1"/>
+          </a:effectRef>
+          <a:fontRef idx="minor">
+            <a:schemeClr val="lt1"/>
+          </a:fontRef>
+        </p:style>
+        <p:txBody>
+          <a:bodyPr rtlCol="0" anchor="ctr"/>
+          <a:lstStyle/>
+          <a:p>
+            <a:pPr algn="ctr"/>
+          </a:p>
+        </p:txBody>
+      </p:sp>
+      <p:sp>
+        <p:nvSpPr>
+          <p:cNvPr id="9" name="Rectangle 8"/>
+          <p:cNvSpPr/>
+          <p:nvPr/>
+        </p:nvSpPr>
+        <p:spPr>
+          <a:xfrm>
+            <a:off x="1499616" y="6172200"/>
+            <a:ext cx="210312" cy="32004"/>
+          </a:xfrm>
+          <a:prstGeom prst="rect">
+            <a:avLst/>
+          </a:prstGeom>
+          <a:solidFill>
+            <a:srgbClr val="39796F"/>
+          </a:solidFill>
+          <a:ln>
+            <a:noFill/>
+          </a:ln>
+        </p:spPr>
+        <p:style>
+          <a:lnRef idx="1">
+            <a:schemeClr val="accent1"/>
+          </a:lnRef>
+          <a:fillRef idx="3">
+            <a:schemeClr val="accent1"/>
+          </a:fillRef>
+          <a:effectRef idx="2">
+            <a:schemeClr val="accent1"/>
+          </a:effectRef>
+          <a:fontRef idx="minor">
+            <a:schemeClr val="lt1"/>
+          </a:fontRef>
+        </p:style>
+        <p:txBody>
+          <a:bodyPr rtlCol="0" anchor="ctr"/>
+          <a:lstStyle/>
+          <a:p>
+            <a:pPr algn="ctr"/>
+          </a:p>
+        </p:txBody>
+      </p:sp>
+      <p:sp>
+        <p:nvSpPr>
+          <p:cNvPr id="10" name="Rectangle 9"/>
+          <p:cNvSpPr/>
+          <p:nvPr/>
+        </p:nvSpPr>
+        <p:spPr>
+          <a:xfrm>
+            <a:off x="1792224" y="6172200"/>
+            <a:ext cx="210312" cy="32004"/>
+          </a:xfrm>
+          <a:prstGeom prst="rect">
+            <a:avLst/>
+          </a:prstGeom>
+          <a:solidFill>
+            <a:srgbClr val="D5DEDA"/>
+          </a:solidFill>
+          <a:ln>
+            <a:noFill/>
+          </a:ln>
+        </p:spPr>
+        <p:style>
+          <a:lnRef idx="1">
+            <a:schemeClr val="accent1"/>
+          </a:lnRef>
+          <a:fillRef idx="3">
+            <a:schemeClr val="accent1"/>
+          </a:fillRef>
+          <a:effectRef idx="2">
+            <a:schemeClr val="accent1"/>
+          </a:effectRef>
+          <a:fontRef idx="minor">
+            <a:schemeClr val="lt1"/>
+          </a:fontRef>
+        </p:style>
+        <p:txBody>
+          <a:bodyPr rtlCol="0" anchor="ctr"/>
+          <a:lstStyle/>
+          <a:p>
+            <a:pPr algn="ctr"/>
+          </a:p>
+        </p:txBody>
+      </p:sp>
+      <p:sp>
+        <p:nvSpPr>
+          <p:cNvPr id="11" name="Rectangle 10"/>
+          <p:cNvSpPr/>
+          <p:nvPr/>
+        </p:nvSpPr>
+        <p:spPr>
+          <a:xfrm>
+            <a:off x="2084832" y="6172200"/>
+            <a:ext cx="210312" cy="32004"/>
+          </a:xfrm>
+          <a:prstGeom prst="rect">
+            <a:avLst/>
+          </a:prstGeom>
+          <a:solidFill>
+            <a:srgbClr val="D5DEDA"/>
+          </a:solidFill>
+          <a:ln>
+            <a:noFill/>
+          </a:ln>
+        </p:spPr>
+        <p:style>
+          <a:lnRef idx="1">
+            <a:schemeClr val="accent1"/>
+          </a:lnRef>
+          <a:fillRef idx="3">
+            <a:schemeClr val="accent1"/>
+          </a:fillRef>
+          <a:effectRef idx="2">
+            <a:schemeClr val="accent1"/>
+          </a:effectRef>
+          <a:fontRef idx="minor">
+            <a:schemeClr val="lt1"/>
+          </a:fontRef>
+        </p:style>
+        <p:txBody>
+          <a:bodyPr rtlCol="0" anchor="ctr"/>
+          <a:lstStyle/>
+          <a:p>
+            <a:pPr algn="ctr"/>
+          </a:p>
+        </p:txBody>
+      </p:sp>
+      <p:sp>
+        <p:nvSpPr>
+          <p:cNvPr id="12" name="Rectangle 11"/>
+          <p:cNvSpPr/>
+          <p:nvPr/>
+        </p:nvSpPr>
+        <p:spPr>
+          <a:xfrm>
+            <a:off x="2377440" y="6172200"/>
+            <a:ext cx="210312" cy="32004"/>
+          </a:xfrm>
+          <a:prstGeom prst="rect">
+            <a:avLst/>
+          </a:prstGeom>
+          <a:solidFill>
+            <a:srgbClr val="D5DEDA"/>
+          </a:solidFill>
+          <a:ln>
+            <a:noFill/>
+          </a:ln>
+        </p:spPr>
+        <p:style>
+          <a:lnRef idx="1">
+            <a:schemeClr val="accent1"/>
+          </a:lnRef>
+          <a:fillRef idx="3">
+            <a:schemeClr val="accent1"/>
+          </a:fillRef>
+          <a:effectRef idx="2">
+            <a:schemeClr val="accent1"/>
+          </a:effectRef>
+          <a:fontRef idx="minor">
+            <a:schemeClr val="lt1"/>
+          </a:fontRef>
+        </p:style>
+        <p:txBody>
+          <a:bodyPr rtlCol="0" anchor="ctr"/>
+          <a:lstStyle/>
+          <a:p>
+            <a:pPr algn="ctr"/>
+          </a:p>
+        </p:txBody>
+      </p:sp>
+      <p:sp>
+        <p:nvSpPr>
+          <p:cNvPr id="13" name="TextBox 12"/>
           <p:cNvSpPr txBox="1"/>
           <p:nvPr/>
         </p:nvSpPr>
         <p:spPr>
           <a:xfrm>
-            <a:off x="731520" y="5440680"/>
-            <a:ext cx="10698480" cy="457200"/>
+            <a:off x="685800" y="941832"/>
+            <a:ext cx="10881360" cy="731520"/>
           </a:xfrm>
           <a:prstGeom prst="rect">
             <a:avLst/>
@@ -5469,38 +7383,80 @@
           <a:noFill/>
         </p:spPr>
         <p:txBody>
-          <a:bodyPr wrap="square">
+          <a:bodyPr wrap="square" lIns="18288" rIns="18288" tIns="18288">
             <a:spAutoFit/>
           </a:bodyPr>
           <a:lstStyle/>
           <a:p>
             <a:pPr>
-              <a:spcAft>
-                <a:spcPts val="900"/>
-              </a:spcAft>
-              <a:defRPr sz="2500" b="1">
+              <a:defRPr sz="3500" b="1">
                 <a:solidFill>
-                  <a:srgbClr val="3C726A"/>
+                  <a:srgbClr val="223B40"/>
                 </a:solidFill>
                 <a:latin typeface="Aptos"/>
               </a:defRPr>
             </a:pPr>
             <a:r>
-              <a:t>Some parts stay similar. Others change.</a:t>
-            </a:r>
-          </a:p>
-        </p:txBody>
-      </p:sp>
-      <p:sp>
-        <p:nvSpPr>
-          <p:cNvPr id="7" name="TextBox 6"/>
+              <a:t>We are more than a label.</a:t>
+            </a:r>
+          </a:p>
+        </p:txBody>
+      </p:sp>
+      <p:sp>
+        <p:nvSpPr>
+          <p:cNvPr id="14" name="Rounded Rectangle 13"/>
+          <p:cNvSpPr/>
+          <p:nvPr/>
+        </p:nvSpPr>
+        <p:spPr>
+          <a:xfrm>
+            <a:off x="731520" y="2148840"/>
+            <a:ext cx="5166360" cy="2148840"/>
+          </a:xfrm>
+          <a:prstGeom prst="roundRect">
+            <a:avLst>
+              <a:gd name="adj" fmla="val 10000"/>
+            </a:avLst>
+          </a:prstGeom>
+          <a:solidFill>
+            <a:srgbClr val="E6EFEB"/>
+          </a:solidFill>
+          <a:ln>
+            <a:noFill/>
+          </a:ln>
+        </p:spPr>
+        <p:style>
+          <a:lnRef idx="1">
+            <a:schemeClr val="accent1"/>
+          </a:lnRef>
+          <a:fillRef idx="3">
+            <a:schemeClr val="accent1"/>
+          </a:fillRef>
+          <a:effectRef idx="2">
+            <a:schemeClr val="accent1"/>
+          </a:effectRef>
+          <a:fontRef idx="minor">
+            <a:schemeClr val="lt1"/>
+          </a:fontRef>
+        </p:style>
+        <p:txBody>
+          <a:bodyPr rtlCol="0" anchor="ctr"/>
+          <a:lstStyle/>
+          <a:p>
+            <a:pPr algn="ctr"/>
+          </a:p>
+        </p:txBody>
+      </p:sp>
+      <p:sp>
+        <p:nvSpPr>
+          <p:cNvPr id="15" name="TextBox 14"/>
           <p:cNvSpPr txBox="1"/>
           <p:nvPr/>
         </p:nvSpPr>
         <p:spPr>
           <a:xfrm>
-            <a:off x="731520" y="6080760"/>
-            <a:ext cx="10789920" cy="411480"/>
+            <a:off x="1005840" y="2423160"/>
+            <a:ext cx="4572000" cy="365760"/>
           </a:xfrm>
           <a:prstGeom prst="rect">
             <a:avLst/>
@@ -5508,54 +7464,116 @@
           <a:noFill/>
         </p:spPr>
         <p:txBody>
-          <a:bodyPr wrap="square">
+          <a:bodyPr wrap="square" lIns="18288" rIns="18288" tIns="18288">
             <a:spAutoFit/>
           </a:bodyPr>
           <a:lstStyle/>
           <a:p>
             <a:pPr>
-              <a:spcAft>
-                <a:spcPts val="900"/>
-              </a:spcAft>
-              <a:defRPr sz="1100" b="0">
+              <a:defRPr sz="1400" b="1">
                 <a:solidFill>
-                  <a:srgbClr val="627078"/>
+                  <a:srgbClr val="39796F"/>
                 </a:solidFill>
                 <a:latin typeface="Aptos"/>
               </a:defRPr>
             </a:pPr>
             <a:r>
-              <a:t>Redrawn from Damian et al. (2019), Table 7, p. 688. Selected PTPI scales; reliable change uses RCI ±1.96.</a:t>
-            </a:r>
-          </a:p>
+              <a:t>INTROVERT</a:t>
+            </a:r>
+          </a:p>
+        </p:txBody>
+      </p:sp>
+      <p:sp>
+        <p:nvSpPr>
+          <p:cNvPr id="16" name="TextBox 15"/>
+          <p:cNvSpPr txBox="1"/>
+          <p:nvPr/>
+        </p:nvSpPr>
+        <p:spPr>
+          <a:xfrm>
+            <a:off x="1005840" y="2971800"/>
+            <a:ext cx="4526280" cy="1097280"/>
+          </a:xfrm>
+          <a:prstGeom prst="rect">
+            <a:avLst/>
+          </a:prstGeom>
+          <a:noFill/>
+        </p:spPr>
+        <p:txBody>
+          <a:bodyPr wrap="square" lIns="18288" rIns="18288" tIns="18288">
+            <a:spAutoFit/>
+          </a:bodyPr>
+          <a:lstStyle/>
           <a:p>
             <a:pPr>
-              <a:spcAft>
-                <a:spcPts val="900"/>
-              </a:spcAft>
-              <a:defRPr sz="1100" b="0">
+              <a:defRPr sz="2700" b="1">
                 <a:solidFill>
-                  <a:srgbClr val="627078"/>
+                  <a:srgbClr val="223B40"/>
                 </a:solidFill>
                 <a:latin typeface="Aptos"/>
               </a:defRPr>
             </a:pPr>
             <a:r>
-              <a:t>https://doi.org/10.1037/pspp0000210</a:t>
-            </a:r>
-          </a:p>
-        </p:txBody>
-      </p:sp>
-      <p:sp>
-        <p:nvSpPr>
-          <p:cNvPr id="8" name="TextBox 7"/>
+              <a:t>An introvert can enjoy speaking up.</a:t>
+            </a:r>
+          </a:p>
+        </p:txBody>
+      </p:sp>
+      <p:sp>
+        <p:nvSpPr>
+          <p:cNvPr id="17" name="Rounded Rectangle 16"/>
+          <p:cNvSpPr/>
+          <p:nvPr/>
+        </p:nvSpPr>
+        <p:spPr>
+          <a:xfrm>
+            <a:off x="6217920" y="2148840"/>
+            <a:ext cx="5166360" cy="2148840"/>
+          </a:xfrm>
+          <a:prstGeom prst="roundRect">
+            <a:avLst>
+              <a:gd name="adj" fmla="val 10000"/>
+            </a:avLst>
+          </a:prstGeom>
+          <a:solidFill>
+            <a:srgbClr val="E6EEF2"/>
+          </a:solidFill>
+          <a:ln>
+            <a:noFill/>
+          </a:ln>
+        </p:spPr>
+        <p:style>
+          <a:lnRef idx="1">
+            <a:schemeClr val="accent1"/>
+          </a:lnRef>
+          <a:fillRef idx="3">
+            <a:schemeClr val="accent1"/>
+          </a:fillRef>
+          <a:effectRef idx="2">
+            <a:schemeClr val="accent1"/>
+          </a:effectRef>
+          <a:fontRef idx="minor">
+            <a:schemeClr val="lt1"/>
+          </a:fontRef>
+        </p:style>
+        <p:txBody>
+          <a:bodyPr rtlCol="0" anchor="ctr"/>
+          <a:lstStyle/>
+          <a:p>
+            <a:pPr algn="ctr"/>
+          </a:p>
+        </p:txBody>
+      </p:sp>
+      <p:sp>
+        <p:nvSpPr>
+          <p:cNvPr id="18" name="TextBox 17"/>
           <p:cNvSpPr txBox="1"/>
           <p:nvPr/>
         </p:nvSpPr>
         <p:spPr>
           <a:xfrm>
-            <a:off x="11064240" y="6419088"/>
-            <a:ext cx="548640" cy="228600"/>
+            <a:off x="6492240" y="2423160"/>
+            <a:ext cx="4572000" cy="365760"/>
           </a:xfrm>
           <a:prstGeom prst="rect">
             <a:avLst/>
@@ -5563,24 +7581,93 @@
           <a:noFill/>
         </p:spPr>
         <p:txBody>
-          <a:bodyPr wrap="square">
+          <a:bodyPr wrap="square" lIns="18288" rIns="18288" tIns="18288">
             <a:spAutoFit/>
           </a:bodyPr>
           <a:lstStyle/>
           <a:p>
             <a:pPr>
-              <a:spcAft>
-                <a:spcPts val="900"/>
-              </a:spcAft>
-              <a:defRPr sz="1100" b="0">
+              <a:defRPr sz="1400" b="1">
                 <a:solidFill>
-                  <a:srgbClr val="627078"/>
+                  <a:srgbClr val="39796F"/>
                 </a:solidFill>
                 <a:latin typeface="Aptos"/>
               </a:defRPr>
             </a:pPr>
             <a:r>
-              <a:t>04</a:t>
+              <a:t>EXTROVERT</a:t>
+            </a:r>
+          </a:p>
+        </p:txBody>
+      </p:sp>
+      <p:sp>
+        <p:nvSpPr>
+          <p:cNvPr id="19" name="TextBox 18"/>
+          <p:cNvSpPr txBox="1"/>
+          <p:nvPr/>
+        </p:nvSpPr>
+        <p:spPr>
+          <a:xfrm>
+            <a:off x="6492240" y="2971800"/>
+            <a:ext cx="4526280" cy="1097280"/>
+          </a:xfrm>
+          <a:prstGeom prst="rect">
+            <a:avLst/>
+          </a:prstGeom>
+          <a:noFill/>
+        </p:spPr>
+        <p:txBody>
+          <a:bodyPr wrap="square" lIns="18288" rIns="18288" tIns="18288">
+            <a:spAutoFit/>
+          </a:bodyPr>
+          <a:lstStyle/>
+          <a:p>
+            <a:pPr>
+              <a:defRPr sz="2700" b="1">
+                <a:solidFill>
+                  <a:srgbClr val="223B40"/>
+                </a:solidFill>
+                <a:latin typeface="Aptos"/>
+              </a:defRPr>
+            </a:pPr>
+            <a:r>
+              <a:t>An extrovert can want a quiet evening alone.</a:t>
+            </a:r>
+          </a:p>
+        </p:txBody>
+      </p:sp>
+      <p:sp>
+        <p:nvSpPr>
+          <p:cNvPr id="20" name="TextBox 19"/>
+          <p:cNvSpPr txBox="1"/>
+          <p:nvPr/>
+        </p:nvSpPr>
+        <p:spPr>
+          <a:xfrm>
+            <a:off x="868680" y="4892040"/>
+            <a:ext cx="10424160" cy="731520"/>
+          </a:xfrm>
+          <a:prstGeom prst="rect">
+            <a:avLst/>
+          </a:prstGeom>
+          <a:noFill/>
+        </p:spPr>
+        <p:txBody>
+          <a:bodyPr wrap="square" lIns="18288" rIns="18288" tIns="18288">
+            <a:spAutoFit/>
+          </a:bodyPr>
+          <a:lstStyle/>
+          <a:p>
+            <a:pPr>
+              <a:defRPr sz="2800" b="1">
+                <a:solidFill>
+                  <a:srgbClr val="39796F"/>
+                </a:solidFill>
+                <a:latin typeface="Aptos"/>
+              </a:defRPr>
+            </a:pPr>
+            <a:r>
+              <a:t>Labels don’t have to decide what we can do.</a:t>
             </a:r>
           </a:p>
         </p:txBody>
@@ -5599,7 +7686,7 @@
     <p:bg>
       <p:bgPr>
         <a:solidFill>
-          <a:srgbClr val="FFFFFF"/>
+          <a:srgbClr val="F7F8F4"/>
         </a:solidFill>
         <a:effectLst/>
       </p:bgPr>
@@ -5613,14 +7700,57 @@
       <p:grpSpPr/>
       <p:sp>
         <p:nvSpPr>
-          <p:cNvPr id="2" name="TextBox 1"/>
+          <p:cNvPr id="2" name="Rectangle 1"/>
+          <p:cNvSpPr/>
+          <p:nvPr/>
+        </p:nvSpPr>
+        <p:spPr>
+          <a:xfrm>
+            <a:off x="0" y="0"/>
+            <a:ext cx="146304" cy="6858000"/>
+          </a:xfrm>
+          <a:prstGeom prst="rect">
+            <a:avLst/>
+          </a:prstGeom>
+          <a:solidFill>
+            <a:srgbClr val="39796F"/>
+          </a:solidFill>
+          <a:ln>
+            <a:noFill/>
+          </a:ln>
+        </p:spPr>
+        <p:style>
+          <a:lnRef idx="1">
+            <a:schemeClr val="accent1"/>
+          </a:lnRef>
+          <a:fillRef idx="3">
+            <a:schemeClr val="accent1"/>
+          </a:fillRef>
+          <a:effectRef idx="2">
+            <a:schemeClr val="accent1"/>
+          </a:effectRef>
+          <a:fontRef idx="minor">
+            <a:schemeClr val="lt1"/>
+          </a:fontRef>
+        </p:style>
+        <p:txBody>
+          <a:bodyPr rtlCol="0" anchor="ctr"/>
+          <a:lstStyle/>
+          <a:p>
+            <a:pPr algn="ctr"/>
+          </a:p>
+        </p:txBody>
+      </p:sp>
+      <p:sp>
+        <p:nvSpPr>
+          <p:cNvPr id="3" name="TextBox 2"/>
           <p:cNvSpPr txBox="1"/>
           <p:nvPr/>
         </p:nvSpPr>
         <p:spPr>
           <a:xfrm>
-            <a:off x="640080" y="320040"/>
-            <a:ext cx="10058400" cy="320040"/>
+            <a:off x="594360" y="292608"/>
+            <a:ext cx="10058400" cy="274320"/>
           </a:xfrm>
           <a:prstGeom prst="rect">
             <a:avLst/>
@@ -5628,18 +7758,15 @@
           <a:noFill/>
         </p:spPr>
         <p:txBody>
-          <a:bodyPr wrap="square">
+          <a:bodyPr wrap="square" lIns="18288" rIns="18288" tIns="18288">
             <a:spAutoFit/>
           </a:bodyPr>
           <a:lstStyle/>
           <a:p>
             <a:pPr>
-              <a:spcAft>
-                <a:spcPts val="900"/>
-              </a:spcAft>
               <a:defRPr sz="1100" b="0">
                 <a:solidFill>
-                  <a:srgbClr val="627078"/>
+                  <a:srgbClr val="637575"/>
                 </a:solidFill>
                 <a:latin typeface="Aptos"/>
               </a:defRPr>
@@ -5652,14 +7779,14 @@
       </p:sp>
       <p:sp>
         <p:nvSpPr>
-          <p:cNvPr id="3" name="TextBox 2"/>
+          <p:cNvPr id="4" name="TextBox 3"/>
           <p:cNvSpPr txBox="1"/>
           <p:nvPr/>
         </p:nvSpPr>
         <p:spPr>
           <a:xfrm>
-            <a:off x="640080" y="914400"/>
-            <a:ext cx="10881360" cy="822960"/>
+            <a:off x="594360" y="6437376"/>
+            <a:ext cx="9144000" cy="228600"/>
           </a:xfrm>
           <a:prstGeom prst="rect">
             <a:avLst/>
@@ -5667,38 +7794,35 @@
           <a:noFill/>
         </p:spPr>
         <p:txBody>
-          <a:bodyPr wrap="square">
+          <a:bodyPr wrap="square" lIns="18288" rIns="18288" tIns="18288">
             <a:spAutoFit/>
           </a:bodyPr>
           <a:lstStyle/>
           <a:p>
             <a:pPr>
-              <a:spcAft>
-                <a:spcPts val="900"/>
-              </a:spcAft>
-              <a:defRPr sz="3400" b="1">
+              <a:defRPr sz="1000" b="0">
                 <a:solidFill>
-                  <a:srgbClr val="24343B"/>
+                  <a:srgbClr val="637575"/>
                 </a:solidFill>
                 <a:latin typeface="Aptos"/>
               </a:defRPr>
             </a:pPr>
             <a:r>
-              <a:t>When it matters, listen carefully.</a:t>
-            </a:r>
-          </a:p>
-        </p:txBody>
-      </p:sp>
-      <p:sp>
-        <p:nvSpPr>
-          <p:cNvPr id="4" name="TextBox 3"/>
+              <a:t>REASON 2</a:t>
+            </a:r>
+          </a:p>
+        </p:txBody>
+      </p:sp>
+      <p:sp>
+        <p:nvSpPr>
+          <p:cNvPr id="5" name="TextBox 4"/>
           <p:cNvSpPr txBox="1"/>
           <p:nvPr/>
         </p:nvSpPr>
         <p:spPr>
           <a:xfrm>
-            <a:off x="731520" y="2423160"/>
-            <a:ext cx="548640" cy="457200"/>
+            <a:off x="10972800" y="6400800"/>
+            <a:ext cx="594360" cy="274320"/>
           </a:xfrm>
           <a:prstGeom prst="rect">
             <a:avLst/>
@@ -5706,38 +7830,336 @@
           <a:noFill/>
         </p:spPr>
         <p:txBody>
-          <a:bodyPr wrap="square">
+          <a:bodyPr wrap="square" lIns="18288" rIns="18288" tIns="18288">
             <a:spAutoFit/>
           </a:bodyPr>
           <a:lstStyle/>
           <a:p>
             <a:pPr>
-              <a:spcAft>
-                <a:spcPts val="900"/>
-              </a:spcAft>
-              <a:defRPr sz="1500" b="1">
+              <a:defRPr sz="1200" b="1">
                 <a:solidFill>
-                  <a:srgbClr val="3C726A"/>
+                  <a:srgbClr val="39796F"/>
                 </a:solidFill>
                 <a:latin typeface="Aptos"/>
               </a:defRPr>
             </a:pPr>
             <a:r>
-              <a:t>01</a:t>
-            </a:r>
-          </a:p>
-        </p:txBody>
-      </p:sp>
-      <p:sp>
-        <p:nvSpPr>
-          <p:cNvPr id="5" name="TextBox 4"/>
+              <a:t>05</a:t>
+            </a:r>
+          </a:p>
+        </p:txBody>
+      </p:sp>
+      <p:sp>
+        <p:nvSpPr>
+          <p:cNvPr id="6" name="Rectangle 5"/>
+          <p:cNvSpPr/>
+          <p:nvPr/>
+        </p:nvSpPr>
+        <p:spPr>
+          <a:xfrm>
+            <a:off x="621792" y="6172200"/>
+            <a:ext cx="210312" cy="32004"/>
+          </a:xfrm>
+          <a:prstGeom prst="rect">
+            <a:avLst/>
+          </a:prstGeom>
+          <a:solidFill>
+            <a:srgbClr val="D5DEDA"/>
+          </a:solidFill>
+          <a:ln>
+            <a:noFill/>
+          </a:ln>
+        </p:spPr>
+        <p:style>
+          <a:lnRef idx="1">
+            <a:schemeClr val="accent1"/>
+          </a:lnRef>
+          <a:fillRef idx="3">
+            <a:schemeClr val="accent1"/>
+          </a:fillRef>
+          <a:effectRef idx="2">
+            <a:schemeClr val="accent1"/>
+          </a:effectRef>
+          <a:fontRef idx="minor">
+            <a:schemeClr val="lt1"/>
+          </a:fontRef>
+        </p:style>
+        <p:txBody>
+          <a:bodyPr rtlCol="0" anchor="ctr"/>
+          <a:lstStyle/>
+          <a:p>
+            <a:pPr algn="ctr"/>
+          </a:p>
+        </p:txBody>
+      </p:sp>
+      <p:sp>
+        <p:nvSpPr>
+          <p:cNvPr id="7" name="Rectangle 6"/>
+          <p:cNvSpPr/>
+          <p:nvPr/>
+        </p:nvSpPr>
+        <p:spPr>
+          <a:xfrm>
+            <a:off x="914400" y="6172200"/>
+            <a:ext cx="210312" cy="32004"/>
+          </a:xfrm>
+          <a:prstGeom prst="rect">
+            <a:avLst/>
+          </a:prstGeom>
+          <a:solidFill>
+            <a:srgbClr val="D5DEDA"/>
+          </a:solidFill>
+          <a:ln>
+            <a:noFill/>
+          </a:ln>
+        </p:spPr>
+        <p:style>
+          <a:lnRef idx="1">
+            <a:schemeClr val="accent1"/>
+          </a:lnRef>
+          <a:fillRef idx="3">
+            <a:schemeClr val="accent1"/>
+          </a:fillRef>
+          <a:effectRef idx="2">
+            <a:schemeClr val="accent1"/>
+          </a:effectRef>
+          <a:fontRef idx="minor">
+            <a:schemeClr val="lt1"/>
+          </a:fontRef>
+        </p:style>
+        <p:txBody>
+          <a:bodyPr rtlCol="0" anchor="ctr"/>
+          <a:lstStyle/>
+          <a:p>
+            <a:pPr algn="ctr"/>
+          </a:p>
+        </p:txBody>
+      </p:sp>
+      <p:sp>
+        <p:nvSpPr>
+          <p:cNvPr id="8" name="Rectangle 7"/>
+          <p:cNvSpPr/>
+          <p:nvPr/>
+        </p:nvSpPr>
+        <p:spPr>
+          <a:xfrm>
+            <a:off x="1207008" y="6172200"/>
+            <a:ext cx="210312" cy="32004"/>
+          </a:xfrm>
+          <a:prstGeom prst="rect">
+            <a:avLst/>
+          </a:prstGeom>
+          <a:solidFill>
+            <a:srgbClr val="D5DEDA"/>
+          </a:solidFill>
+          <a:ln>
+            <a:noFill/>
+          </a:ln>
+        </p:spPr>
+        <p:style>
+          <a:lnRef idx="1">
+            <a:schemeClr val="accent1"/>
+          </a:lnRef>
+          <a:fillRef idx="3">
+            <a:schemeClr val="accent1"/>
+          </a:fillRef>
+          <a:effectRef idx="2">
+            <a:schemeClr val="accent1"/>
+          </a:effectRef>
+          <a:fontRef idx="minor">
+            <a:schemeClr val="lt1"/>
+          </a:fontRef>
+        </p:style>
+        <p:txBody>
+          <a:bodyPr rtlCol="0" anchor="ctr"/>
+          <a:lstStyle/>
+          <a:p>
+            <a:pPr algn="ctr"/>
+          </a:p>
+        </p:txBody>
+      </p:sp>
+      <p:sp>
+        <p:nvSpPr>
+          <p:cNvPr id="9" name="Rectangle 8"/>
+          <p:cNvSpPr/>
+          <p:nvPr/>
+        </p:nvSpPr>
+        <p:spPr>
+          <a:xfrm>
+            <a:off x="1499616" y="6172200"/>
+            <a:ext cx="210312" cy="32004"/>
+          </a:xfrm>
+          <a:prstGeom prst="rect">
+            <a:avLst/>
+          </a:prstGeom>
+          <a:solidFill>
+            <a:srgbClr val="D5DEDA"/>
+          </a:solidFill>
+          <a:ln>
+            <a:noFill/>
+          </a:ln>
+        </p:spPr>
+        <p:style>
+          <a:lnRef idx="1">
+            <a:schemeClr val="accent1"/>
+          </a:lnRef>
+          <a:fillRef idx="3">
+            <a:schemeClr val="accent1"/>
+          </a:fillRef>
+          <a:effectRef idx="2">
+            <a:schemeClr val="accent1"/>
+          </a:effectRef>
+          <a:fontRef idx="minor">
+            <a:schemeClr val="lt1"/>
+          </a:fontRef>
+        </p:style>
+        <p:txBody>
+          <a:bodyPr rtlCol="0" anchor="ctr"/>
+          <a:lstStyle/>
+          <a:p>
+            <a:pPr algn="ctr"/>
+          </a:p>
+        </p:txBody>
+      </p:sp>
+      <p:sp>
+        <p:nvSpPr>
+          <p:cNvPr id="10" name="Rectangle 9"/>
+          <p:cNvSpPr/>
+          <p:nvPr/>
+        </p:nvSpPr>
+        <p:spPr>
+          <a:xfrm>
+            <a:off x="1792224" y="6172200"/>
+            <a:ext cx="210312" cy="32004"/>
+          </a:xfrm>
+          <a:prstGeom prst="rect">
+            <a:avLst/>
+          </a:prstGeom>
+          <a:solidFill>
+            <a:srgbClr val="39796F"/>
+          </a:solidFill>
+          <a:ln>
+            <a:noFill/>
+          </a:ln>
+        </p:spPr>
+        <p:style>
+          <a:lnRef idx="1">
+            <a:schemeClr val="accent1"/>
+          </a:lnRef>
+          <a:fillRef idx="3">
+            <a:schemeClr val="accent1"/>
+          </a:fillRef>
+          <a:effectRef idx="2">
+            <a:schemeClr val="accent1"/>
+          </a:effectRef>
+          <a:fontRef idx="minor">
+            <a:schemeClr val="lt1"/>
+          </a:fontRef>
+        </p:style>
+        <p:txBody>
+          <a:bodyPr rtlCol="0" anchor="ctr"/>
+          <a:lstStyle/>
+          <a:p>
+            <a:pPr algn="ctr"/>
+          </a:p>
+        </p:txBody>
+      </p:sp>
+      <p:sp>
+        <p:nvSpPr>
+          <p:cNvPr id="11" name="Rectangle 10"/>
+          <p:cNvSpPr/>
+          <p:nvPr/>
+        </p:nvSpPr>
+        <p:spPr>
+          <a:xfrm>
+            <a:off x="2084832" y="6172200"/>
+            <a:ext cx="210312" cy="32004"/>
+          </a:xfrm>
+          <a:prstGeom prst="rect">
+            <a:avLst/>
+          </a:prstGeom>
+          <a:solidFill>
+            <a:srgbClr val="D5DEDA"/>
+          </a:solidFill>
+          <a:ln>
+            <a:noFill/>
+          </a:ln>
+        </p:spPr>
+        <p:style>
+          <a:lnRef idx="1">
+            <a:schemeClr val="accent1"/>
+          </a:lnRef>
+          <a:fillRef idx="3">
+            <a:schemeClr val="accent1"/>
+          </a:fillRef>
+          <a:effectRef idx="2">
+            <a:schemeClr val="accent1"/>
+          </a:effectRef>
+          <a:fontRef idx="minor">
+            <a:schemeClr val="lt1"/>
+          </a:fontRef>
+        </p:style>
+        <p:txBody>
+          <a:bodyPr rtlCol="0" anchor="ctr"/>
+          <a:lstStyle/>
+          <a:p>
+            <a:pPr algn="ctr"/>
+          </a:p>
+        </p:txBody>
+      </p:sp>
+      <p:sp>
+        <p:nvSpPr>
+          <p:cNvPr id="12" name="Rectangle 11"/>
+          <p:cNvSpPr/>
+          <p:nvPr/>
+        </p:nvSpPr>
+        <p:spPr>
+          <a:xfrm>
+            <a:off x="2377440" y="6172200"/>
+            <a:ext cx="210312" cy="32004"/>
+          </a:xfrm>
+          <a:prstGeom prst="rect">
+            <a:avLst/>
+          </a:prstGeom>
+          <a:solidFill>
+            <a:srgbClr val="D5DEDA"/>
+          </a:solidFill>
+          <a:ln>
+            <a:noFill/>
+          </a:ln>
+        </p:spPr>
+        <p:style>
+          <a:lnRef idx="1">
+            <a:schemeClr val="accent1"/>
+          </a:lnRef>
+          <a:fillRef idx="3">
+            <a:schemeClr val="accent1"/>
+          </a:fillRef>
+          <a:effectRef idx="2">
+            <a:schemeClr val="accent1"/>
+          </a:effectRef>
+          <a:fontRef idx="minor">
+            <a:schemeClr val="lt1"/>
+          </a:fontRef>
+        </p:style>
+        <p:txBody>
+          <a:bodyPr rtlCol="0" anchor="ctr"/>
+          <a:lstStyle/>
+          <a:p>
+            <a:pPr algn="ctr"/>
+          </a:p>
+        </p:txBody>
+      </p:sp>
+      <p:sp>
+        <p:nvSpPr>
+          <p:cNvPr id="13" name="TextBox 12"/>
           <p:cNvSpPr txBox="1"/>
           <p:nvPr/>
         </p:nvSpPr>
         <p:spPr>
           <a:xfrm>
-            <a:off x="1371600" y="2331720"/>
-            <a:ext cx="9692640" cy="685800"/>
+            <a:off x="685800" y="941832"/>
+            <a:ext cx="10881360" cy="731520"/>
           </a:xfrm>
           <a:prstGeom prst="rect">
             <a:avLst/>
@@ -5745,38 +8167,35 @@
           <a:noFill/>
         </p:spPr>
         <p:txBody>
-          <a:bodyPr wrap="square">
+          <a:bodyPr wrap="square" lIns="18288" rIns="18288" tIns="18288">
             <a:spAutoFit/>
           </a:bodyPr>
           <a:lstStyle/>
           <a:p>
             <a:pPr>
-              <a:spcAft>
-                <a:spcPts val="900"/>
-              </a:spcAft>
-              <a:defRPr sz="2700" b="0">
+              <a:defRPr sz="3500" b="1">
                 <a:solidFill>
-                  <a:srgbClr val="24343B"/>
+                  <a:srgbClr val="223B40"/>
                 </a:solidFill>
                 <a:latin typeface="Aptos"/>
               </a:defRPr>
             </a:pPr>
             <a:r>
-              <a:t>Notice: “What do I really want?”</a:t>
-            </a:r>
-          </a:p>
-        </p:txBody>
-      </p:sp>
-      <p:sp>
-        <p:nvSpPr>
-          <p:cNvPr id="6" name="TextBox 5"/>
+              <a:t>We also change over time.</a:t>
+            </a:r>
+          </a:p>
+        </p:txBody>
+      </p:sp>
+      <p:sp>
+        <p:nvSpPr>
+          <p:cNvPr id="14" name="TextBox 13"/>
           <p:cNvSpPr txBox="1"/>
           <p:nvPr/>
         </p:nvSpPr>
         <p:spPr>
           <a:xfrm>
-            <a:off x="731520" y="3246120"/>
-            <a:ext cx="548640" cy="457200"/>
+            <a:off x="731520" y="1755648"/>
+            <a:ext cx="10607040" cy="457200"/>
           </a:xfrm>
           <a:prstGeom prst="rect">
             <a:avLst/>
@@ -5784,38 +8203,98 @@
           <a:noFill/>
         </p:spPr>
         <p:txBody>
-          <a:bodyPr wrap="square">
+          <a:bodyPr wrap="square" lIns="18288" rIns="18288" tIns="18288">
             <a:spAutoFit/>
           </a:bodyPr>
           <a:lstStyle/>
           <a:p>
             <a:pPr>
-              <a:spcAft>
-                <a:spcPts val="900"/>
-              </a:spcAft>
-              <a:defRPr sz="1500" b="1">
+              <a:defRPr sz="2200" b="0">
                 <a:solidFill>
-                  <a:srgbClr val="3C726A"/>
+                  <a:srgbClr val="637575"/>
                 </a:solidFill>
                 <a:latin typeface="Aptos"/>
               </a:defRPr>
             </a:pPr>
             <a:r>
-              <a:t>02</a:t>
-            </a:r>
-          </a:p>
-        </p:txBody>
-      </p:sp>
-      <p:sp>
-        <p:nvSpPr>
-          <p:cNvPr id="7" name="TextBox 6"/>
+              <a:t>1,795 people · fifty years later</a:t>
+            </a:r>
+          </a:p>
+        </p:txBody>
+      </p:sp>
+      <p:graphicFrame>
+        <p:nvGraphicFramePr>
+          <p:cNvPr id="15" name="Chart 14"/>
+          <p:cNvGraphicFramePr>
+            <a:graphicFrameLocks noGrp="1"/>
+          </p:cNvGraphicFramePr>
+          <p:nvPr/>
+        </p:nvGraphicFramePr>
+        <p:xfrm>
+          <a:off x="731520" y="2331720"/>
+          <a:ext cx="7818120" cy="2971800"/>
+        </p:xfrm>
+        <a:graphic>
+          <a:graphicData uri="http://schemas.openxmlformats.org/drawingml/2006/chart">
+            <c:chart xmlns:c="http://schemas.openxmlformats.org/drawingml/2006/chart" r:id="rId2"/>
+          </a:graphicData>
+        </a:graphic>
+      </p:graphicFrame>
+      <p:sp>
+        <p:nvSpPr>
+          <p:cNvPr id="16" name="Rounded Rectangle 15"/>
+          <p:cNvSpPr/>
+          <p:nvPr/>
+        </p:nvSpPr>
+        <p:spPr>
+          <a:xfrm>
+            <a:off x="8869680" y="2423160"/>
+            <a:ext cx="2514600" cy="2697480"/>
+          </a:xfrm>
+          <a:prstGeom prst="roundRect">
+            <a:avLst>
+              <a:gd name="adj" fmla="val 10000"/>
+            </a:avLst>
+          </a:prstGeom>
+          <a:solidFill>
+            <a:srgbClr val="E6EFEB"/>
+          </a:solidFill>
+          <a:ln>
+            <a:noFill/>
+          </a:ln>
+        </p:spPr>
+        <p:style>
+          <a:lnRef idx="1">
+            <a:schemeClr val="accent1"/>
+          </a:lnRef>
+          <a:fillRef idx="3">
+            <a:schemeClr val="accent1"/>
+          </a:fillRef>
+          <a:effectRef idx="2">
+            <a:schemeClr val="accent1"/>
+          </a:effectRef>
+          <a:fontRef idx="minor">
+            <a:schemeClr val="lt1"/>
+          </a:fontRef>
+        </p:style>
+        <p:txBody>
+          <a:bodyPr rtlCol="0" anchor="ctr"/>
+          <a:lstStyle/>
+          <a:p>
+            <a:pPr algn="ctr"/>
+          </a:p>
+        </p:txBody>
+      </p:sp>
+      <p:sp>
+        <p:nvSpPr>
+          <p:cNvPr id="17" name="TextBox 16"/>
           <p:cNvSpPr txBox="1"/>
           <p:nvPr/>
         </p:nvSpPr>
         <p:spPr>
           <a:xfrm>
-            <a:off x="1371600" y="3154679"/>
-            <a:ext cx="9692640" cy="685800"/>
+            <a:off x="9144000" y="2697480"/>
+            <a:ext cx="2011680" cy="731520"/>
           </a:xfrm>
           <a:prstGeom prst="rect">
             <a:avLst/>
@@ -5823,38 +8302,35 @@
           <a:noFill/>
         </p:spPr>
         <p:txBody>
-          <a:bodyPr wrap="square">
+          <a:bodyPr wrap="square" lIns="18288" rIns="18288" tIns="18288">
             <a:spAutoFit/>
           </a:bodyPr>
           <a:lstStyle/>
           <a:p>
             <a:pPr>
-              <a:spcAft>
-                <a:spcPts val="900"/>
-              </a:spcAft>
-              <a:defRPr sz="2700" b="0">
+              <a:defRPr sz="3900" b="1">
                 <a:solidFill>
-                  <a:srgbClr val="24343B"/>
+                  <a:srgbClr val="39796F"/>
                 </a:solidFill>
                 <a:latin typeface="Aptos"/>
               </a:defRPr>
             </a:pPr>
             <a:r>
-              <a:t>Pause: “Why does this matter to me?”</a:t>
-            </a:r>
-          </a:p>
-        </p:txBody>
-      </p:sp>
-      <p:sp>
-        <p:nvSpPr>
-          <p:cNvPr id="8" name="TextBox 7"/>
+              <a:t>≈42%</a:t>
+            </a:r>
+          </a:p>
+        </p:txBody>
+      </p:sp>
+      <p:sp>
+        <p:nvSpPr>
+          <p:cNvPr id="18" name="TextBox 17"/>
           <p:cNvSpPr txBox="1"/>
           <p:nvPr/>
         </p:nvSpPr>
         <p:spPr>
           <a:xfrm>
-            <a:off x="731520" y="4069080"/>
-            <a:ext cx="548640" cy="457200"/>
+            <a:off x="9144000" y="3611880"/>
+            <a:ext cx="1965960" cy="1143000"/>
           </a:xfrm>
           <a:prstGeom prst="rect">
             <a:avLst/>
@@ -5862,77 +8338,48 @@
           <a:noFill/>
         </p:spPr>
         <p:txBody>
-          <a:bodyPr wrap="square">
+          <a:bodyPr wrap="square" lIns="18288" rIns="18288" tIns="18288">
             <a:spAutoFit/>
           </a:bodyPr>
           <a:lstStyle/>
           <a:p>
             <a:pPr>
-              <a:spcAft>
-                <a:spcPts val="900"/>
-              </a:spcAft>
-              <a:defRPr sz="1500" b="1">
+              <a:defRPr sz="2500" b="1">
                 <a:solidFill>
-                  <a:srgbClr val="3C726A"/>
+                  <a:srgbClr val="223B40"/>
                 </a:solidFill>
                 <a:latin typeface="Aptos"/>
               </a:defRPr>
             </a:pPr>
             <a:r>
-              <a:t>03</a:t>
-            </a:r>
-          </a:p>
-        </p:txBody>
-      </p:sp>
-      <p:sp>
-        <p:nvSpPr>
-          <p:cNvPr id="9" name="TextBox 8"/>
-          <p:cNvSpPr txBox="1"/>
-          <p:nvPr/>
-        </p:nvSpPr>
-        <p:spPr>
-          <a:xfrm>
-            <a:off x="1371600" y="3977639"/>
-            <a:ext cx="9692640" cy="685800"/>
-          </a:xfrm>
-          <a:prstGeom prst="rect">
-            <a:avLst/>
-          </a:prstGeom>
-          <a:noFill/>
-        </p:spPr>
-        <p:txBody>
-          <a:bodyPr wrap="square">
-            <a:spAutoFit/>
-          </a:bodyPr>
-          <a:lstStyle/>
+              <a:t>became</a:t>
+            </a:r>
+          </a:p>
           <a:p>
             <a:pPr>
-              <a:spcAft>
-                <a:spcPts val="900"/>
-              </a:spcAft>
-              <a:defRPr sz="2700" b="0">
+              <a:defRPr sz="2500" b="1">
                 <a:solidFill>
-                  <a:srgbClr val="24343B"/>
+                  <a:srgbClr val="223B40"/>
                 </a:solidFill>
                 <a:latin typeface="Aptos"/>
               </a:defRPr>
             </a:pPr>
             <a:r>
-              <a:t>Ask others: “What am I missing?”</a:t>
-            </a:r>
-          </a:p>
-        </p:txBody>
-      </p:sp>
-      <p:sp>
-        <p:nvSpPr>
-          <p:cNvPr id="10" name="TextBox 9"/>
+              <a:t>calmer</a:t>
+            </a:r>
+          </a:p>
+        </p:txBody>
+      </p:sp>
+      <p:sp>
+        <p:nvSpPr>
+          <p:cNvPr id="19" name="TextBox 18"/>
           <p:cNvSpPr txBox="1"/>
           <p:nvPr/>
         </p:nvSpPr>
         <p:spPr>
           <a:xfrm>
-            <a:off x="11064240" y="6419088"/>
-            <a:ext cx="548640" cy="228600"/>
+            <a:off x="777240" y="5422392"/>
+            <a:ext cx="10515600" cy="457200"/>
           </a:xfrm>
           <a:prstGeom prst="rect">
             <a:avLst/>
@@ -5940,24 +8387,57 @@
           <a:noFill/>
         </p:spPr>
         <p:txBody>
-          <a:bodyPr wrap="square">
+          <a:bodyPr wrap="square" lIns="18288" rIns="18288" tIns="18288">
             <a:spAutoFit/>
           </a:bodyPr>
           <a:lstStyle/>
           <a:p>
             <a:pPr>
-              <a:spcAft>
-                <a:spcPts val="900"/>
-              </a:spcAft>
-              <a:defRPr sz="1100" b="0">
+              <a:defRPr sz="2500" b="1">
                 <a:solidFill>
-                  <a:srgbClr val="627078"/>
+                  <a:srgbClr val="39796F"/>
                 </a:solidFill>
                 <a:latin typeface="Aptos"/>
               </a:defRPr>
             </a:pPr>
             <a:r>
-              <a:t>05</a:t>
+              <a:t>Today’s description may not be the final one.</a:t>
+            </a:r>
+          </a:p>
+        </p:txBody>
+      </p:sp>
+      <p:sp>
+        <p:nvSpPr>
+          <p:cNvPr id="20" name="TextBox 19"/>
+          <p:cNvSpPr txBox="1"/>
+          <p:nvPr/>
+        </p:nvSpPr>
+        <p:spPr>
+          <a:xfrm>
+            <a:off x="777240" y="5925312"/>
+            <a:ext cx="10698480" cy="210312"/>
+          </a:xfrm>
+          <a:prstGeom prst="rect">
+            <a:avLst/>
+          </a:prstGeom>
+          <a:noFill/>
+        </p:spPr>
+        <p:txBody>
+          <a:bodyPr wrap="square" lIns="18288" rIns="18288" tIns="18288">
+            <a:spAutoFit/>
+          </a:bodyPr>
+          <a:lstStyle/>
+          <a:p>
+            <a:pPr>
+              <a:defRPr sz="1000" b="0">
+                <a:solidFill>
+                  <a:srgbClr val="637575"/>
+                </a:solidFill>
+                <a:latin typeface="Aptos"/>
+              </a:defRPr>
+            </a:pPr>
+            <a:r>
+              <a:t>Redrawn from Damian et al. (2019), Table 7, p. 688. Selected PTPI scales; RCI ±1.96. doi:10.1037/pspp0000210</a:t>
             </a:r>
           </a:p>
         </p:txBody>
@@ -5976,7 +8456,7 @@
     <p:bg>
       <p:bgPr>
         <a:solidFill>
-          <a:srgbClr val="FFFFFF"/>
+          <a:srgbClr val="F7F8F4"/>
         </a:solidFill>
         <a:effectLst/>
       </p:bgPr>
@@ -5990,14 +8470,57 @@
       <p:grpSpPr/>
       <p:sp>
         <p:nvSpPr>
-          <p:cNvPr id="2" name="TextBox 1"/>
+          <p:cNvPr id="2" name="Rectangle 1"/>
+          <p:cNvSpPr/>
+          <p:nvPr/>
+        </p:nvSpPr>
+        <p:spPr>
+          <a:xfrm>
+            <a:off x="0" y="0"/>
+            <a:ext cx="146304" cy="6858000"/>
+          </a:xfrm>
+          <a:prstGeom prst="rect">
+            <a:avLst/>
+          </a:prstGeom>
+          <a:solidFill>
+            <a:srgbClr val="39796F"/>
+          </a:solidFill>
+          <a:ln>
+            <a:noFill/>
+          </a:ln>
+        </p:spPr>
+        <p:style>
+          <a:lnRef idx="1">
+            <a:schemeClr val="accent1"/>
+          </a:lnRef>
+          <a:fillRef idx="3">
+            <a:schemeClr val="accent1"/>
+          </a:fillRef>
+          <a:effectRef idx="2">
+            <a:schemeClr val="accent1"/>
+          </a:effectRef>
+          <a:fontRef idx="minor">
+            <a:schemeClr val="lt1"/>
+          </a:fontRef>
+        </p:style>
+        <p:txBody>
+          <a:bodyPr rtlCol="0" anchor="ctr"/>
+          <a:lstStyle/>
+          <a:p>
+            <a:pPr algn="ctr"/>
+          </a:p>
+        </p:txBody>
+      </p:sp>
+      <p:sp>
+        <p:nvSpPr>
+          <p:cNvPr id="3" name="TextBox 2"/>
           <p:cNvSpPr txBox="1"/>
           <p:nvPr/>
         </p:nvSpPr>
         <p:spPr>
           <a:xfrm>
-            <a:off x="640080" y="320040"/>
-            <a:ext cx="10058400" cy="320040"/>
+            <a:off x="594360" y="292608"/>
+            <a:ext cx="10058400" cy="274320"/>
           </a:xfrm>
           <a:prstGeom prst="rect">
             <a:avLst/>
@@ -6005,18 +8528,15 @@
           <a:noFill/>
         </p:spPr>
         <p:txBody>
-          <a:bodyPr wrap="square">
+          <a:bodyPr wrap="square" lIns="18288" rIns="18288" tIns="18288">
             <a:spAutoFit/>
           </a:bodyPr>
           <a:lstStyle/>
           <a:p>
             <a:pPr>
-              <a:spcAft>
-                <a:spcPts val="900"/>
-              </a:spcAft>
               <a:defRPr sz="1100" b="0">
                 <a:solidFill>
-                  <a:srgbClr val="627078"/>
+                  <a:srgbClr val="637575"/>
                 </a:solidFill>
                 <a:latin typeface="Aptos"/>
               </a:defRPr>
@@ -6029,14 +8549,14 @@
       </p:sp>
       <p:sp>
         <p:nvSpPr>
-          <p:cNvPr id="3" name="TextBox 2"/>
+          <p:cNvPr id="4" name="TextBox 3"/>
           <p:cNvSpPr txBox="1"/>
           <p:nvPr/>
         </p:nvSpPr>
         <p:spPr>
           <a:xfrm>
-            <a:off x="640080" y="914400"/>
-            <a:ext cx="10881360" cy="822960"/>
+            <a:off x="594360" y="6437376"/>
+            <a:ext cx="9144000" cy="228600"/>
           </a:xfrm>
           <a:prstGeom prst="rect">
             <a:avLst/>
@@ -6044,38 +8564,35 @@
           <a:noFill/>
         </p:spPr>
         <p:txBody>
-          <a:bodyPr wrap="square">
+          <a:bodyPr wrap="square" lIns="18288" rIns="18288" tIns="18288">
             <a:spAutoFit/>
           </a:bodyPr>
           <a:lstStyle/>
           <a:p>
             <a:pPr>
-              <a:spcAft>
-                <a:spcPts val="900"/>
-              </a:spcAft>
-              <a:defRPr sz="3400" b="1">
+              <a:defRPr sz="1000" b="0">
                 <a:solidFill>
-                  <a:srgbClr val="24343B"/>
+                  <a:srgbClr val="637575"/>
                 </a:solidFill>
                 <a:latin typeface="Aptos"/>
               </a:defRPr>
             </a:pPr>
             <a:r>
-              <a:t>You don’t need a final definition.</a:t>
-            </a:r>
-          </a:p>
-        </p:txBody>
-      </p:sp>
-      <p:sp>
-        <p:nvSpPr>
-          <p:cNvPr id="4" name="TextBox 3"/>
+              <a:t>IN PRACTICE</a:t>
+            </a:r>
+          </a:p>
+        </p:txBody>
+      </p:sp>
+      <p:sp>
+        <p:nvSpPr>
+          <p:cNvPr id="5" name="TextBox 4"/>
           <p:cNvSpPr txBox="1"/>
           <p:nvPr/>
         </p:nvSpPr>
         <p:spPr>
           <a:xfrm>
-            <a:off x="731520" y="2423160"/>
-            <a:ext cx="548640" cy="457200"/>
+            <a:off x="10972800" y="6400800"/>
+            <a:ext cx="594360" cy="274320"/>
           </a:xfrm>
           <a:prstGeom prst="rect">
             <a:avLst/>
@@ -6083,38 +8600,336 @@
           <a:noFill/>
         </p:spPr>
         <p:txBody>
-          <a:bodyPr wrap="square">
+          <a:bodyPr wrap="square" lIns="18288" rIns="18288" tIns="18288">
             <a:spAutoFit/>
           </a:bodyPr>
           <a:lstStyle/>
           <a:p>
             <a:pPr>
-              <a:spcAft>
-                <a:spcPts val="900"/>
-              </a:spcAft>
-              <a:defRPr sz="1500" b="1">
+              <a:defRPr sz="1200" b="1">
                 <a:solidFill>
-                  <a:srgbClr val="3C726A"/>
+                  <a:srgbClr val="39796F"/>
                 </a:solidFill>
                 <a:latin typeface="Aptos"/>
               </a:defRPr>
             </a:pPr>
             <a:r>
-              <a:t>01</a:t>
-            </a:r>
-          </a:p>
-        </p:txBody>
-      </p:sp>
-      <p:sp>
-        <p:nvSpPr>
-          <p:cNvPr id="5" name="TextBox 4"/>
+              <a:t>06</a:t>
+            </a:r>
+          </a:p>
+        </p:txBody>
+      </p:sp>
+      <p:sp>
+        <p:nvSpPr>
+          <p:cNvPr id="6" name="Rectangle 5"/>
+          <p:cNvSpPr/>
+          <p:nvPr/>
+        </p:nvSpPr>
+        <p:spPr>
+          <a:xfrm>
+            <a:off x="621792" y="6172200"/>
+            <a:ext cx="210312" cy="32004"/>
+          </a:xfrm>
+          <a:prstGeom prst="rect">
+            <a:avLst/>
+          </a:prstGeom>
+          <a:solidFill>
+            <a:srgbClr val="D5DEDA"/>
+          </a:solidFill>
+          <a:ln>
+            <a:noFill/>
+          </a:ln>
+        </p:spPr>
+        <p:style>
+          <a:lnRef idx="1">
+            <a:schemeClr val="accent1"/>
+          </a:lnRef>
+          <a:fillRef idx="3">
+            <a:schemeClr val="accent1"/>
+          </a:fillRef>
+          <a:effectRef idx="2">
+            <a:schemeClr val="accent1"/>
+          </a:effectRef>
+          <a:fontRef idx="minor">
+            <a:schemeClr val="lt1"/>
+          </a:fontRef>
+        </p:style>
+        <p:txBody>
+          <a:bodyPr rtlCol="0" anchor="ctr"/>
+          <a:lstStyle/>
+          <a:p>
+            <a:pPr algn="ctr"/>
+          </a:p>
+        </p:txBody>
+      </p:sp>
+      <p:sp>
+        <p:nvSpPr>
+          <p:cNvPr id="7" name="Rectangle 6"/>
+          <p:cNvSpPr/>
+          <p:nvPr/>
+        </p:nvSpPr>
+        <p:spPr>
+          <a:xfrm>
+            <a:off x="914400" y="6172200"/>
+            <a:ext cx="210312" cy="32004"/>
+          </a:xfrm>
+          <a:prstGeom prst="rect">
+            <a:avLst/>
+          </a:prstGeom>
+          <a:solidFill>
+            <a:srgbClr val="D5DEDA"/>
+          </a:solidFill>
+          <a:ln>
+            <a:noFill/>
+          </a:ln>
+        </p:spPr>
+        <p:style>
+          <a:lnRef idx="1">
+            <a:schemeClr val="accent1"/>
+          </a:lnRef>
+          <a:fillRef idx="3">
+            <a:schemeClr val="accent1"/>
+          </a:fillRef>
+          <a:effectRef idx="2">
+            <a:schemeClr val="accent1"/>
+          </a:effectRef>
+          <a:fontRef idx="minor">
+            <a:schemeClr val="lt1"/>
+          </a:fontRef>
+        </p:style>
+        <p:txBody>
+          <a:bodyPr rtlCol="0" anchor="ctr"/>
+          <a:lstStyle/>
+          <a:p>
+            <a:pPr algn="ctr"/>
+          </a:p>
+        </p:txBody>
+      </p:sp>
+      <p:sp>
+        <p:nvSpPr>
+          <p:cNvPr id="8" name="Rectangle 7"/>
+          <p:cNvSpPr/>
+          <p:nvPr/>
+        </p:nvSpPr>
+        <p:spPr>
+          <a:xfrm>
+            <a:off x="1207008" y="6172200"/>
+            <a:ext cx="210312" cy="32004"/>
+          </a:xfrm>
+          <a:prstGeom prst="rect">
+            <a:avLst/>
+          </a:prstGeom>
+          <a:solidFill>
+            <a:srgbClr val="D5DEDA"/>
+          </a:solidFill>
+          <a:ln>
+            <a:noFill/>
+          </a:ln>
+        </p:spPr>
+        <p:style>
+          <a:lnRef idx="1">
+            <a:schemeClr val="accent1"/>
+          </a:lnRef>
+          <a:fillRef idx="3">
+            <a:schemeClr val="accent1"/>
+          </a:fillRef>
+          <a:effectRef idx="2">
+            <a:schemeClr val="accent1"/>
+          </a:effectRef>
+          <a:fontRef idx="minor">
+            <a:schemeClr val="lt1"/>
+          </a:fontRef>
+        </p:style>
+        <p:txBody>
+          <a:bodyPr rtlCol="0" anchor="ctr"/>
+          <a:lstStyle/>
+          <a:p>
+            <a:pPr algn="ctr"/>
+          </a:p>
+        </p:txBody>
+      </p:sp>
+      <p:sp>
+        <p:nvSpPr>
+          <p:cNvPr id="9" name="Rectangle 8"/>
+          <p:cNvSpPr/>
+          <p:nvPr/>
+        </p:nvSpPr>
+        <p:spPr>
+          <a:xfrm>
+            <a:off x="1499616" y="6172200"/>
+            <a:ext cx="210312" cy="32004"/>
+          </a:xfrm>
+          <a:prstGeom prst="rect">
+            <a:avLst/>
+          </a:prstGeom>
+          <a:solidFill>
+            <a:srgbClr val="D5DEDA"/>
+          </a:solidFill>
+          <a:ln>
+            <a:noFill/>
+          </a:ln>
+        </p:spPr>
+        <p:style>
+          <a:lnRef idx="1">
+            <a:schemeClr val="accent1"/>
+          </a:lnRef>
+          <a:fillRef idx="3">
+            <a:schemeClr val="accent1"/>
+          </a:fillRef>
+          <a:effectRef idx="2">
+            <a:schemeClr val="accent1"/>
+          </a:effectRef>
+          <a:fontRef idx="minor">
+            <a:schemeClr val="lt1"/>
+          </a:fontRef>
+        </p:style>
+        <p:txBody>
+          <a:bodyPr rtlCol="0" anchor="ctr"/>
+          <a:lstStyle/>
+          <a:p>
+            <a:pPr algn="ctr"/>
+          </a:p>
+        </p:txBody>
+      </p:sp>
+      <p:sp>
+        <p:nvSpPr>
+          <p:cNvPr id="10" name="Rectangle 9"/>
+          <p:cNvSpPr/>
+          <p:nvPr/>
+        </p:nvSpPr>
+        <p:spPr>
+          <a:xfrm>
+            <a:off x="1792224" y="6172200"/>
+            <a:ext cx="210312" cy="32004"/>
+          </a:xfrm>
+          <a:prstGeom prst="rect">
+            <a:avLst/>
+          </a:prstGeom>
+          <a:solidFill>
+            <a:srgbClr val="D5DEDA"/>
+          </a:solidFill>
+          <a:ln>
+            <a:noFill/>
+          </a:ln>
+        </p:spPr>
+        <p:style>
+          <a:lnRef idx="1">
+            <a:schemeClr val="accent1"/>
+          </a:lnRef>
+          <a:fillRef idx="3">
+            <a:schemeClr val="accent1"/>
+          </a:fillRef>
+          <a:effectRef idx="2">
+            <a:schemeClr val="accent1"/>
+          </a:effectRef>
+          <a:fontRef idx="minor">
+            <a:schemeClr val="lt1"/>
+          </a:fontRef>
+        </p:style>
+        <p:txBody>
+          <a:bodyPr rtlCol="0" anchor="ctr"/>
+          <a:lstStyle/>
+          <a:p>
+            <a:pPr algn="ctr"/>
+          </a:p>
+        </p:txBody>
+      </p:sp>
+      <p:sp>
+        <p:nvSpPr>
+          <p:cNvPr id="11" name="Rectangle 10"/>
+          <p:cNvSpPr/>
+          <p:nvPr/>
+        </p:nvSpPr>
+        <p:spPr>
+          <a:xfrm>
+            <a:off x="2084832" y="6172200"/>
+            <a:ext cx="210312" cy="32004"/>
+          </a:xfrm>
+          <a:prstGeom prst="rect">
+            <a:avLst/>
+          </a:prstGeom>
+          <a:solidFill>
+            <a:srgbClr val="39796F"/>
+          </a:solidFill>
+          <a:ln>
+            <a:noFill/>
+          </a:ln>
+        </p:spPr>
+        <p:style>
+          <a:lnRef idx="1">
+            <a:schemeClr val="accent1"/>
+          </a:lnRef>
+          <a:fillRef idx="3">
+            <a:schemeClr val="accent1"/>
+          </a:fillRef>
+          <a:effectRef idx="2">
+            <a:schemeClr val="accent1"/>
+          </a:effectRef>
+          <a:fontRef idx="minor">
+            <a:schemeClr val="lt1"/>
+          </a:fontRef>
+        </p:style>
+        <p:txBody>
+          <a:bodyPr rtlCol="0" anchor="ctr"/>
+          <a:lstStyle/>
+          <a:p>
+            <a:pPr algn="ctr"/>
+          </a:p>
+        </p:txBody>
+      </p:sp>
+      <p:sp>
+        <p:nvSpPr>
+          <p:cNvPr id="12" name="Rectangle 11"/>
+          <p:cNvSpPr/>
+          <p:nvPr/>
+        </p:nvSpPr>
+        <p:spPr>
+          <a:xfrm>
+            <a:off x="2377440" y="6172200"/>
+            <a:ext cx="210312" cy="32004"/>
+          </a:xfrm>
+          <a:prstGeom prst="rect">
+            <a:avLst/>
+          </a:prstGeom>
+          <a:solidFill>
+            <a:srgbClr val="D5DEDA"/>
+          </a:solidFill>
+          <a:ln>
+            <a:noFill/>
+          </a:ln>
+        </p:spPr>
+        <p:style>
+          <a:lnRef idx="1">
+            <a:schemeClr val="accent1"/>
+          </a:lnRef>
+          <a:fillRef idx="3">
+            <a:schemeClr val="accent1"/>
+          </a:fillRef>
+          <a:effectRef idx="2">
+            <a:schemeClr val="accent1"/>
+          </a:effectRef>
+          <a:fontRef idx="minor">
+            <a:schemeClr val="lt1"/>
+          </a:fontRef>
+        </p:style>
+        <p:txBody>
+          <a:bodyPr rtlCol="0" anchor="ctr"/>
+          <a:lstStyle/>
+          <a:p>
+            <a:pPr algn="ctr"/>
+          </a:p>
+        </p:txBody>
+      </p:sp>
+      <p:sp>
+        <p:nvSpPr>
+          <p:cNvPr id="13" name="TextBox 12"/>
           <p:cNvSpPr txBox="1"/>
           <p:nvPr/>
         </p:nvSpPr>
         <p:spPr>
           <a:xfrm>
-            <a:off x="1371600" y="2331720"/>
-            <a:ext cx="9692640" cy="685800"/>
+            <a:off x="685800" y="941832"/>
+            <a:ext cx="10881360" cy="731520"/>
           </a:xfrm>
           <a:prstGeom prst="rect">
             <a:avLst/>
@@ -6122,38 +8937,80 @@
           <a:noFill/>
         </p:spPr>
         <p:txBody>
-          <a:bodyPr wrap="square">
+          <a:bodyPr wrap="square" lIns="18288" rIns="18288" tIns="18288">
             <a:spAutoFit/>
           </a:bodyPr>
           <a:lstStyle/>
           <a:p>
             <a:pPr>
-              <a:spcAft>
-                <a:spcPts val="900"/>
-              </a:spcAft>
-              <a:defRPr sz="2700" b="0">
+              <a:defRPr sz="3500" b="1">
                 <a:solidFill>
-                  <a:srgbClr val="24343B"/>
+                  <a:srgbClr val="223B40"/>
                 </a:solidFill>
                 <a:latin typeface="Aptos"/>
               </a:defRPr>
             </a:pPr>
             <a:r>
-              <a:t>Live your life.</a:t>
-            </a:r>
-          </a:p>
-        </p:txBody>
-      </p:sp>
-      <p:sp>
-        <p:nvSpPr>
-          <p:cNvPr id="6" name="TextBox 5"/>
+              <a:t>When it matters, listen carefully.</a:t>
+            </a:r>
+          </a:p>
+        </p:txBody>
+      </p:sp>
+      <p:sp>
+        <p:nvSpPr>
+          <p:cNvPr id="14" name="Rounded Rectangle 13"/>
+          <p:cNvSpPr/>
+          <p:nvPr/>
+        </p:nvSpPr>
+        <p:spPr>
+          <a:xfrm>
+            <a:off x="731520" y="1938528"/>
+            <a:ext cx="10652760" cy="1069848"/>
+          </a:xfrm>
+          <a:prstGeom prst="roundRect">
+            <a:avLst>
+              <a:gd name="adj" fmla="val 10000"/>
+            </a:avLst>
+          </a:prstGeom>
+          <a:solidFill>
+            <a:srgbClr val="E6EFEB"/>
+          </a:solidFill>
+          <a:ln>
+            <a:noFill/>
+          </a:ln>
+        </p:spPr>
+        <p:style>
+          <a:lnRef idx="1">
+            <a:schemeClr val="accent1"/>
+          </a:lnRef>
+          <a:fillRef idx="3">
+            <a:schemeClr val="accent1"/>
+          </a:fillRef>
+          <a:effectRef idx="2">
+            <a:schemeClr val="accent1"/>
+          </a:effectRef>
+          <a:fontRef idx="minor">
+            <a:schemeClr val="lt1"/>
+          </a:fontRef>
+        </p:style>
+        <p:txBody>
+          <a:bodyPr rtlCol="0" anchor="ctr"/>
+          <a:lstStyle/>
+          <a:p>
+            <a:pPr algn="ctr"/>
+          </a:p>
+        </p:txBody>
+      </p:sp>
+      <p:sp>
+        <p:nvSpPr>
+          <p:cNvPr id="15" name="TextBox 14"/>
           <p:cNvSpPr txBox="1"/>
           <p:nvPr/>
         </p:nvSpPr>
         <p:spPr>
           <a:xfrm>
-            <a:off x="731520" y="3246120"/>
-            <a:ext cx="548640" cy="457200"/>
+            <a:off x="960120" y="2084832"/>
+            <a:ext cx="2697480" cy="685800"/>
           </a:xfrm>
           <a:prstGeom prst="rect">
             <a:avLst/>
@@ -6161,38 +9018,35 @@
           <a:noFill/>
         </p:spPr>
         <p:txBody>
-          <a:bodyPr wrap="square">
+          <a:bodyPr wrap="square" lIns="18288" rIns="18288" tIns="18288">
             <a:spAutoFit/>
           </a:bodyPr>
           <a:lstStyle/>
           <a:p>
             <a:pPr>
-              <a:spcAft>
-                <a:spcPts val="900"/>
-              </a:spcAft>
-              <a:defRPr sz="1500" b="1">
+              <a:defRPr sz="1300" b="1">
                 <a:solidFill>
-                  <a:srgbClr val="3C726A"/>
+                  <a:srgbClr val="39796F"/>
                 </a:solidFill>
                 <a:latin typeface="Aptos"/>
               </a:defRPr>
             </a:pPr>
             <a:r>
-              <a:t>02</a:t>
-            </a:r>
-          </a:p>
-        </p:txBody>
-      </p:sp>
-      <p:sp>
-        <p:nvSpPr>
-          <p:cNvPr id="7" name="TextBox 6"/>
+              <a:t>NOTICE + THINK</a:t>
+            </a:r>
+          </a:p>
+        </p:txBody>
+      </p:sp>
+      <p:sp>
+        <p:nvSpPr>
+          <p:cNvPr id="16" name="TextBox 15"/>
           <p:cNvSpPr txBox="1"/>
           <p:nvPr/>
         </p:nvSpPr>
         <p:spPr>
           <a:xfrm>
-            <a:off x="1371600" y="3154679"/>
-            <a:ext cx="9692640" cy="685800"/>
+            <a:off x="3703320" y="2130552"/>
+            <a:ext cx="7223760" cy="731520"/>
           </a:xfrm>
           <a:prstGeom prst="rect">
             <a:avLst/>
@@ -6200,38 +9054,80 @@
           <a:noFill/>
         </p:spPr>
         <p:txBody>
-          <a:bodyPr wrap="square">
+          <a:bodyPr wrap="square" lIns="18288" rIns="18288" tIns="18288">
             <a:spAutoFit/>
           </a:bodyPr>
           <a:lstStyle/>
           <a:p>
             <a:pPr>
-              <a:spcAft>
-                <a:spcPts val="900"/>
-              </a:spcAft>
-              <a:defRPr sz="2700" b="0">
+              <a:defRPr sz="2500" b="1">
                 <a:solidFill>
-                  <a:srgbClr val="24343B"/>
+                  <a:srgbClr val="223B40"/>
                 </a:solidFill>
                 <a:latin typeface="Aptos"/>
               </a:defRPr>
             </a:pPr>
             <a:r>
-              <a:t>Think carefully when it matters.</a:t>
-            </a:r>
-          </a:p>
-        </p:txBody>
-      </p:sp>
-      <p:sp>
-        <p:nvSpPr>
-          <p:cNvPr id="8" name="TextBox 7"/>
+              <a:t>Notice them, then take time to think.</a:t>
+            </a:r>
+          </a:p>
+        </p:txBody>
+      </p:sp>
+      <p:sp>
+        <p:nvSpPr>
+          <p:cNvPr id="17" name="Rounded Rectangle 16"/>
+          <p:cNvSpPr/>
+          <p:nvPr/>
+        </p:nvSpPr>
+        <p:spPr>
+          <a:xfrm>
+            <a:off x="731520" y="3191256"/>
+            <a:ext cx="10652760" cy="1069848"/>
+          </a:xfrm>
+          <a:prstGeom prst="roundRect">
+            <a:avLst>
+              <a:gd name="adj" fmla="val 10000"/>
+            </a:avLst>
+          </a:prstGeom>
+          <a:solidFill>
+            <a:srgbClr val="E6EEF2"/>
+          </a:solidFill>
+          <a:ln>
+            <a:noFill/>
+          </a:ln>
+        </p:spPr>
+        <p:style>
+          <a:lnRef idx="1">
+            <a:schemeClr val="accent1"/>
+          </a:lnRef>
+          <a:fillRef idx="3">
+            <a:schemeClr val="accent1"/>
+          </a:fillRef>
+          <a:effectRef idx="2">
+            <a:schemeClr val="accent1"/>
+          </a:effectRef>
+          <a:fontRef idx="minor">
+            <a:schemeClr val="lt1"/>
+          </a:fontRef>
+        </p:style>
+        <p:txBody>
+          <a:bodyPr rtlCol="0" anchor="ctr"/>
+          <a:lstStyle/>
+          <a:p>
+            <a:pPr algn="ctr"/>
+          </a:p>
+        </p:txBody>
+      </p:sp>
+      <p:sp>
+        <p:nvSpPr>
+          <p:cNvPr id="18" name="TextBox 17"/>
           <p:cNvSpPr txBox="1"/>
           <p:nvPr/>
         </p:nvSpPr>
         <p:spPr>
           <a:xfrm>
-            <a:off x="731520" y="4069080"/>
-            <a:ext cx="548640" cy="457200"/>
+            <a:off x="960120" y="3337560"/>
+            <a:ext cx="2697480" cy="685800"/>
           </a:xfrm>
           <a:prstGeom prst="rect">
             <a:avLst/>
@@ -6239,38 +9135,35 @@
           <a:noFill/>
         </p:spPr>
         <p:txBody>
-          <a:bodyPr wrap="square">
+          <a:bodyPr wrap="square" lIns="18288" rIns="18288" tIns="18288">
             <a:spAutoFit/>
           </a:bodyPr>
           <a:lstStyle/>
           <a:p>
             <a:pPr>
-              <a:spcAft>
-                <a:spcPts val="900"/>
-              </a:spcAft>
-              <a:defRPr sz="1500" b="1">
+              <a:defRPr sz="1300" b="1">
                 <a:solidFill>
-                  <a:srgbClr val="3C726A"/>
+                  <a:srgbClr val="39796F"/>
                 </a:solidFill>
                 <a:latin typeface="Aptos"/>
               </a:defRPr>
             </a:pPr>
             <a:r>
-              <a:t>03</a:t>
-            </a:r>
-          </a:p>
-        </p:txBody>
-      </p:sp>
-      <p:sp>
-        <p:nvSpPr>
-          <p:cNvPr id="9" name="TextBox 8"/>
+              <a:t>ALLOW BOTH FEELINGS</a:t>
+            </a:r>
+          </a:p>
+        </p:txBody>
+      </p:sp>
+      <p:sp>
+        <p:nvSpPr>
+          <p:cNvPr id="19" name="TextBox 18"/>
           <p:cNvSpPr txBox="1"/>
           <p:nvPr/>
         </p:nvSpPr>
         <p:spPr>
           <a:xfrm>
-            <a:off x="1371600" y="3977639"/>
-            <a:ext cx="9692640" cy="685800"/>
+            <a:off x="3703320" y="3383280"/>
+            <a:ext cx="7223760" cy="731520"/>
           </a:xfrm>
           <a:prstGeom prst="rect">
             <a:avLst/>
@@ -6278,38 +9171,80 @@
           <a:noFill/>
         </p:spPr>
         <p:txBody>
-          <a:bodyPr wrap="square">
+          <a:bodyPr wrap="square" lIns="18288" rIns="18288" tIns="18288">
             <a:spAutoFit/>
           </a:bodyPr>
           <a:lstStyle/>
           <a:p>
             <a:pPr>
-              <a:spcAft>
-                <a:spcPts val="900"/>
-              </a:spcAft>
-              <a:defRPr sz="2700" b="0">
+              <a:defRPr sz="2500" b="1">
                 <a:solidFill>
-                  <a:srgbClr val="24343B"/>
+                  <a:srgbClr val="223B40"/>
                 </a:solidFill>
                 <a:latin typeface="Aptos"/>
               </a:defRPr>
             </a:pPr>
             <a:r>
-              <a:t>Let others help you see more clearly.</a:t>
-            </a:r>
-          </a:p>
-        </p:txBody>
-      </p:sp>
-      <p:sp>
-        <p:nvSpPr>
-          <p:cNvPr id="10" name="TextBox 9"/>
+              <a:t>Both feelings can be real.</a:t>
+            </a:r>
+          </a:p>
+        </p:txBody>
+      </p:sp>
+      <p:sp>
+        <p:nvSpPr>
+          <p:cNvPr id="20" name="Rounded Rectangle 19"/>
+          <p:cNvSpPr/>
+          <p:nvPr/>
+        </p:nvSpPr>
+        <p:spPr>
+          <a:xfrm>
+            <a:off x="731520" y="4443984"/>
+            <a:ext cx="10652760" cy="1069848"/>
+          </a:xfrm>
+          <a:prstGeom prst="roundRect">
+            <a:avLst>
+              <a:gd name="adj" fmla="val 10000"/>
+            </a:avLst>
+          </a:prstGeom>
+          <a:solidFill>
+            <a:srgbClr val="E6EFEB"/>
+          </a:solidFill>
+          <a:ln>
+            <a:noFill/>
+          </a:ln>
+        </p:spPr>
+        <p:style>
+          <a:lnRef idx="1">
+            <a:schemeClr val="accent1"/>
+          </a:lnRef>
+          <a:fillRef idx="3">
+            <a:schemeClr val="accent1"/>
+          </a:fillRef>
+          <a:effectRef idx="2">
+            <a:schemeClr val="accent1"/>
+          </a:effectRef>
+          <a:fontRef idx="minor">
+            <a:schemeClr val="lt1"/>
+          </a:fontRef>
+        </p:style>
+        <p:txBody>
+          <a:bodyPr rtlCol="0" anchor="ctr"/>
+          <a:lstStyle/>
+          <a:p>
+            <a:pPr algn="ctr"/>
+          </a:p>
+        </p:txBody>
+      </p:sp>
+      <p:sp>
+        <p:nvSpPr>
+          <p:cNvPr id="21" name="TextBox 20"/>
           <p:cNvSpPr txBox="1"/>
           <p:nvPr/>
         </p:nvSpPr>
         <p:spPr>
           <a:xfrm>
-            <a:off x="731520" y="5166360"/>
-            <a:ext cx="10698480" cy="822960"/>
+            <a:off x="960120" y="4590288"/>
+            <a:ext cx="2697480" cy="685800"/>
           </a:xfrm>
           <a:prstGeom prst="rect">
             <a:avLst/>
@@ -6317,79 +9252,57 @@
           <a:noFill/>
         </p:spPr>
         <p:txBody>
-          <a:bodyPr wrap="square">
+          <a:bodyPr wrap="square" lIns="18288" rIns="18288" tIns="18288">
             <a:spAutoFit/>
           </a:bodyPr>
           <a:lstStyle/>
           <a:p>
             <a:pPr>
-              <a:spcAft>
-                <a:spcPts val="900"/>
-              </a:spcAft>
-              <a:defRPr sz="2300" b="1">
+              <a:defRPr sz="1300" b="1">
                 <a:solidFill>
-                  <a:srgbClr val="3C726A"/>
+                  <a:srgbClr val="39796F"/>
                 </a:solidFill>
                 <a:latin typeface="Aptos"/>
               </a:defRPr>
             </a:pPr>
             <a:r>
-              <a:t>You don’t need a final definition of yourself</a:t>
-            </a:r>
-          </a:p>
+              <a:t>ASK FOR OTHER VIEWS</a:t>
+            </a:r>
+          </a:p>
+        </p:txBody>
+      </p:sp>
+      <p:sp>
+        <p:nvSpPr>
+          <p:cNvPr id="22" name="TextBox 21"/>
+          <p:cNvSpPr txBox="1"/>
+          <p:nvPr/>
+        </p:nvSpPr>
+        <p:spPr>
+          <a:xfrm>
+            <a:off x="3703320" y="4636008"/>
+            <a:ext cx="7223760" cy="731520"/>
+          </a:xfrm>
+          <a:prstGeom prst="rect">
+            <a:avLst/>
+          </a:prstGeom>
+          <a:noFill/>
+        </p:spPr>
+        <p:txBody>
+          <a:bodyPr wrap="square" lIns="18288" rIns="18288" tIns="18288">
+            <a:spAutoFit/>
+          </a:bodyPr>
+          <a:lstStyle/>
           <a:p>
             <a:pPr>
-              <a:spcAft>
-                <a:spcPts val="900"/>
-              </a:spcAft>
-              <a:defRPr sz="2300" b="1">
+              <a:defRPr sz="2500" b="1">
                 <a:solidFill>
-                  <a:srgbClr val="3C726A"/>
+                  <a:srgbClr val="223B40"/>
                 </a:solidFill>
                 <a:latin typeface="Aptos"/>
               </a:defRPr>
             </a:pPr>
             <a:r>
-              <a:t>to make choices that matter to you.</a:t>
-            </a:r>
-          </a:p>
-        </p:txBody>
-      </p:sp>
-      <p:sp>
-        <p:nvSpPr>
-          <p:cNvPr id="11" name="TextBox 10"/>
-          <p:cNvSpPr txBox="1"/>
-          <p:nvPr/>
-        </p:nvSpPr>
-        <p:spPr>
-          <a:xfrm>
-            <a:off x="11064240" y="6419088"/>
-            <a:ext cx="548640" cy="228600"/>
-          </a:xfrm>
-          <a:prstGeom prst="rect">
-            <a:avLst/>
-          </a:prstGeom>
-          <a:noFill/>
-        </p:spPr>
-        <p:txBody>
-          <a:bodyPr wrap="square">
-            <a:spAutoFit/>
-          </a:bodyPr>
-          <a:lstStyle/>
-          <a:p>
-            <a:pPr>
-              <a:spcAft>
-                <a:spcPts val="900"/>
-              </a:spcAft>
-              <a:defRPr sz="1100" b="0">
-                <a:solidFill>
-                  <a:srgbClr val="627078"/>
-                </a:solidFill>
-                <a:latin typeface="Aptos"/>
-              </a:defRPr>
-            </a:pPr>
-            <a:r>
-              <a:t>06</a:t>
+              <a:t>Finding ourselves doesn’t mean refusing help.</a:t>
             </a:r>
           </a:p>
         </p:txBody>
@@ -6405,6 +9318,14 @@
 <file path=ppt/slides/slide7.xml><?xml version="1.0" encoding="utf-8"?>
 <p:sld xmlns:a="http://schemas.openxmlformats.org/drawingml/2006/main" xmlns:p="http://schemas.openxmlformats.org/presentationml/2006/main" xmlns:r="http://schemas.openxmlformats.org/officeDocument/2006/relationships">
   <p:cSld>
+    <p:bg>
+      <p:bgPr>
+        <a:solidFill>
+          <a:srgbClr val="F7F8F4"/>
+        </a:solidFill>
+        <a:effectLst/>
+      </p:bgPr>
+    </p:bg>
     <p:spTree>
       <p:nvGrpSpPr>
         <p:cNvPr id="1" name=""/>
@@ -6414,14 +9335,57 @@
       <p:grpSpPr/>
       <p:sp>
         <p:nvSpPr>
-          <p:cNvPr id="2" name="TextBox 1"/>
+          <p:cNvPr id="2" name="Rectangle 1"/>
+          <p:cNvSpPr/>
+          <p:nvPr/>
+        </p:nvSpPr>
+        <p:spPr>
+          <a:xfrm>
+            <a:off x="0" y="0"/>
+            <a:ext cx="146304" cy="6858000"/>
+          </a:xfrm>
+          <a:prstGeom prst="rect">
+            <a:avLst/>
+          </a:prstGeom>
+          <a:solidFill>
+            <a:srgbClr val="39796F"/>
+          </a:solidFill>
+          <a:ln>
+            <a:noFill/>
+          </a:ln>
+        </p:spPr>
+        <p:style>
+          <a:lnRef idx="1">
+            <a:schemeClr val="accent1"/>
+          </a:lnRef>
+          <a:fillRef idx="3">
+            <a:schemeClr val="accent1"/>
+          </a:fillRef>
+          <a:effectRef idx="2">
+            <a:schemeClr val="accent1"/>
+          </a:effectRef>
+          <a:fontRef idx="minor">
+            <a:schemeClr val="lt1"/>
+          </a:fontRef>
+        </p:style>
+        <p:txBody>
+          <a:bodyPr rtlCol="0" anchor="ctr"/>
+          <a:lstStyle/>
+          <a:p>
+            <a:pPr algn="ctr"/>
+          </a:p>
+        </p:txBody>
+      </p:sp>
+      <p:sp>
+        <p:nvSpPr>
+          <p:cNvPr id="3" name="TextBox 2"/>
           <p:cNvSpPr txBox="1"/>
           <p:nvPr/>
         </p:nvSpPr>
         <p:spPr>
           <a:xfrm>
-            <a:off x="640080" y="457200"/>
-            <a:ext cx="10972800" cy="640080"/>
+            <a:off x="594360" y="292608"/>
+            <a:ext cx="10058400" cy="274320"/>
           </a:xfrm>
           <a:prstGeom prst="rect">
             <a:avLst/>
@@ -6429,38 +9393,35 @@
           <a:noFill/>
         </p:spPr>
         <p:txBody>
-          <a:bodyPr wrap="square">
+          <a:bodyPr wrap="square" lIns="18288" rIns="18288" tIns="18288">
             <a:spAutoFit/>
           </a:bodyPr>
           <a:lstStyle/>
           <a:p>
             <a:pPr>
-              <a:spcAft>
-                <a:spcPts val="900"/>
-              </a:spcAft>
-              <a:defRPr sz="3200" b="1">
+              <a:defRPr sz="1100" b="0">
                 <a:solidFill>
-                  <a:srgbClr val="24343B"/>
+                  <a:srgbClr val="637575"/>
                 </a:solidFill>
                 <a:latin typeface="Aptos"/>
               </a:defRPr>
             </a:pPr>
             <a:r>
-              <a:t>References</a:t>
-            </a:r>
-          </a:p>
-        </p:txBody>
-      </p:sp>
-      <p:sp>
-        <p:nvSpPr>
-          <p:cNvPr id="3" name="TextBox 2"/>
+              <a:t>FINDING YOUR AUTHENTIC SELF OR NOT</a:t>
+            </a:r>
+          </a:p>
+        </p:txBody>
+      </p:sp>
+      <p:sp>
+        <p:nvSpPr>
+          <p:cNvPr id="4" name="TextBox 3"/>
           <p:cNvSpPr txBox="1"/>
           <p:nvPr/>
         </p:nvSpPr>
         <p:spPr>
           <a:xfrm>
-            <a:off x="731520" y="1463040"/>
-            <a:ext cx="10698480" cy="365760"/>
+            <a:off x="594360" y="6437376"/>
+            <a:ext cx="9144000" cy="228600"/>
           </a:xfrm>
           <a:prstGeom prst="rect">
             <a:avLst/>
@@ -6468,38 +9429,35 @@
           <a:noFill/>
         </p:spPr>
         <p:txBody>
-          <a:bodyPr wrap="square">
+          <a:bodyPr wrap="square" lIns="18288" rIns="18288" tIns="18288">
             <a:spAutoFit/>
           </a:bodyPr>
           <a:lstStyle/>
           <a:p>
             <a:pPr>
-              <a:spcAft>
-                <a:spcPts val="900"/>
-              </a:spcAft>
-              <a:defRPr sz="2100" b="1">
+              <a:defRPr sz="1000" b="0">
                 <a:solidFill>
-                  <a:srgbClr val="3C726A"/>
+                  <a:srgbClr val="637575"/>
                 </a:solidFill>
                 <a:latin typeface="Aptos"/>
               </a:defRPr>
             </a:pPr>
             <a:r>
-              <a:t>Research used for the chart</a:t>
-            </a:r>
-          </a:p>
-        </p:txBody>
-      </p:sp>
-      <p:sp>
-        <p:nvSpPr>
-          <p:cNvPr id="4" name="TextBox 3"/>
+              <a:t>TAKEAWAY</a:t>
+            </a:r>
+          </a:p>
+        </p:txBody>
+      </p:sp>
+      <p:sp>
+        <p:nvSpPr>
+          <p:cNvPr id="5" name="TextBox 4"/>
           <p:cNvSpPr txBox="1"/>
           <p:nvPr/>
         </p:nvSpPr>
         <p:spPr>
           <a:xfrm>
-            <a:off x="731520" y="1920240"/>
-            <a:ext cx="10698480" cy="2011680"/>
+            <a:off x="10972800" y="6400800"/>
+            <a:ext cx="594360" cy="274320"/>
           </a:xfrm>
           <a:prstGeom prst="rect">
             <a:avLst/>
@@ -6507,102 +9465,525 @@
           <a:noFill/>
         </p:spPr>
         <p:txBody>
-          <a:bodyPr wrap="square">
+          <a:bodyPr wrap="square" lIns="18288" rIns="18288" tIns="18288">
             <a:spAutoFit/>
           </a:bodyPr>
           <a:lstStyle/>
           <a:p>
             <a:pPr>
-              <a:spcAft>
-                <a:spcPts val="900"/>
-              </a:spcAft>
-              <a:defRPr sz="1800" b="0">
+              <a:defRPr sz="1200" b="1">
                 <a:solidFill>
-                  <a:srgbClr val="24343B"/>
+                  <a:srgbClr val="39796F"/>
                 </a:solidFill>
                 <a:latin typeface="Aptos"/>
               </a:defRPr>
             </a:pPr>
             <a:r>
-              <a:t>Damian, R. I., Spengler, M., Sutu, A., &amp; Roberts, B. W. (2019).</a:t>
-            </a:r>
-          </a:p>
+              <a:t>07</a:t>
+            </a:r>
+          </a:p>
+        </p:txBody>
+      </p:sp>
+      <p:sp>
+        <p:nvSpPr>
+          <p:cNvPr id="6" name="Rectangle 5"/>
+          <p:cNvSpPr/>
+          <p:nvPr/>
+        </p:nvSpPr>
+        <p:spPr>
+          <a:xfrm>
+            <a:off x="621792" y="6172200"/>
+            <a:ext cx="210312" cy="32004"/>
+          </a:xfrm>
+          <a:prstGeom prst="rect">
+            <a:avLst/>
+          </a:prstGeom>
+          <a:solidFill>
+            <a:srgbClr val="D5DEDA"/>
+          </a:solidFill>
+          <a:ln>
+            <a:noFill/>
+          </a:ln>
+        </p:spPr>
+        <p:style>
+          <a:lnRef idx="1">
+            <a:schemeClr val="accent1"/>
+          </a:lnRef>
+          <a:fillRef idx="3">
+            <a:schemeClr val="accent1"/>
+          </a:fillRef>
+          <a:effectRef idx="2">
+            <a:schemeClr val="accent1"/>
+          </a:effectRef>
+          <a:fontRef idx="minor">
+            <a:schemeClr val="lt1"/>
+          </a:fontRef>
+        </p:style>
+        <p:txBody>
+          <a:bodyPr rtlCol="0" anchor="ctr"/>
+          <a:lstStyle/>
+          <a:p>
+            <a:pPr algn="ctr"/>
+          </a:p>
+        </p:txBody>
+      </p:sp>
+      <p:sp>
+        <p:nvSpPr>
+          <p:cNvPr id="7" name="Rectangle 6"/>
+          <p:cNvSpPr/>
+          <p:nvPr/>
+        </p:nvSpPr>
+        <p:spPr>
+          <a:xfrm>
+            <a:off x="914400" y="6172200"/>
+            <a:ext cx="210312" cy="32004"/>
+          </a:xfrm>
+          <a:prstGeom prst="rect">
+            <a:avLst/>
+          </a:prstGeom>
+          <a:solidFill>
+            <a:srgbClr val="D5DEDA"/>
+          </a:solidFill>
+          <a:ln>
+            <a:noFill/>
+          </a:ln>
+        </p:spPr>
+        <p:style>
+          <a:lnRef idx="1">
+            <a:schemeClr val="accent1"/>
+          </a:lnRef>
+          <a:fillRef idx="3">
+            <a:schemeClr val="accent1"/>
+          </a:fillRef>
+          <a:effectRef idx="2">
+            <a:schemeClr val="accent1"/>
+          </a:effectRef>
+          <a:fontRef idx="minor">
+            <a:schemeClr val="lt1"/>
+          </a:fontRef>
+        </p:style>
+        <p:txBody>
+          <a:bodyPr rtlCol="0" anchor="ctr"/>
+          <a:lstStyle/>
+          <a:p>
+            <a:pPr algn="ctr"/>
+          </a:p>
+        </p:txBody>
+      </p:sp>
+      <p:sp>
+        <p:nvSpPr>
+          <p:cNvPr id="8" name="Rectangle 7"/>
+          <p:cNvSpPr/>
+          <p:nvPr/>
+        </p:nvSpPr>
+        <p:spPr>
+          <a:xfrm>
+            <a:off x="1207008" y="6172200"/>
+            <a:ext cx="210312" cy="32004"/>
+          </a:xfrm>
+          <a:prstGeom prst="rect">
+            <a:avLst/>
+          </a:prstGeom>
+          <a:solidFill>
+            <a:srgbClr val="D5DEDA"/>
+          </a:solidFill>
+          <a:ln>
+            <a:noFill/>
+          </a:ln>
+        </p:spPr>
+        <p:style>
+          <a:lnRef idx="1">
+            <a:schemeClr val="accent1"/>
+          </a:lnRef>
+          <a:fillRef idx="3">
+            <a:schemeClr val="accent1"/>
+          </a:fillRef>
+          <a:effectRef idx="2">
+            <a:schemeClr val="accent1"/>
+          </a:effectRef>
+          <a:fontRef idx="minor">
+            <a:schemeClr val="lt1"/>
+          </a:fontRef>
+        </p:style>
+        <p:txBody>
+          <a:bodyPr rtlCol="0" anchor="ctr"/>
+          <a:lstStyle/>
+          <a:p>
+            <a:pPr algn="ctr"/>
+          </a:p>
+        </p:txBody>
+      </p:sp>
+      <p:sp>
+        <p:nvSpPr>
+          <p:cNvPr id="9" name="Rectangle 8"/>
+          <p:cNvSpPr/>
+          <p:nvPr/>
+        </p:nvSpPr>
+        <p:spPr>
+          <a:xfrm>
+            <a:off x="1499616" y="6172200"/>
+            <a:ext cx="210312" cy="32004"/>
+          </a:xfrm>
+          <a:prstGeom prst="rect">
+            <a:avLst/>
+          </a:prstGeom>
+          <a:solidFill>
+            <a:srgbClr val="D5DEDA"/>
+          </a:solidFill>
+          <a:ln>
+            <a:noFill/>
+          </a:ln>
+        </p:spPr>
+        <p:style>
+          <a:lnRef idx="1">
+            <a:schemeClr val="accent1"/>
+          </a:lnRef>
+          <a:fillRef idx="3">
+            <a:schemeClr val="accent1"/>
+          </a:fillRef>
+          <a:effectRef idx="2">
+            <a:schemeClr val="accent1"/>
+          </a:effectRef>
+          <a:fontRef idx="minor">
+            <a:schemeClr val="lt1"/>
+          </a:fontRef>
+        </p:style>
+        <p:txBody>
+          <a:bodyPr rtlCol="0" anchor="ctr"/>
+          <a:lstStyle/>
+          <a:p>
+            <a:pPr algn="ctr"/>
+          </a:p>
+        </p:txBody>
+      </p:sp>
+      <p:sp>
+        <p:nvSpPr>
+          <p:cNvPr id="10" name="Rectangle 9"/>
+          <p:cNvSpPr/>
+          <p:nvPr/>
+        </p:nvSpPr>
+        <p:spPr>
+          <a:xfrm>
+            <a:off x="1792224" y="6172200"/>
+            <a:ext cx="210312" cy="32004"/>
+          </a:xfrm>
+          <a:prstGeom prst="rect">
+            <a:avLst/>
+          </a:prstGeom>
+          <a:solidFill>
+            <a:srgbClr val="D5DEDA"/>
+          </a:solidFill>
+          <a:ln>
+            <a:noFill/>
+          </a:ln>
+        </p:spPr>
+        <p:style>
+          <a:lnRef idx="1">
+            <a:schemeClr val="accent1"/>
+          </a:lnRef>
+          <a:fillRef idx="3">
+            <a:schemeClr val="accent1"/>
+          </a:fillRef>
+          <a:effectRef idx="2">
+            <a:schemeClr val="accent1"/>
+          </a:effectRef>
+          <a:fontRef idx="minor">
+            <a:schemeClr val="lt1"/>
+          </a:fontRef>
+        </p:style>
+        <p:txBody>
+          <a:bodyPr rtlCol="0" anchor="ctr"/>
+          <a:lstStyle/>
+          <a:p>
+            <a:pPr algn="ctr"/>
+          </a:p>
+        </p:txBody>
+      </p:sp>
+      <p:sp>
+        <p:nvSpPr>
+          <p:cNvPr id="11" name="Rectangle 10"/>
+          <p:cNvSpPr/>
+          <p:nvPr/>
+        </p:nvSpPr>
+        <p:spPr>
+          <a:xfrm>
+            <a:off x="2084832" y="6172200"/>
+            <a:ext cx="210312" cy="32004"/>
+          </a:xfrm>
+          <a:prstGeom prst="rect">
+            <a:avLst/>
+          </a:prstGeom>
+          <a:solidFill>
+            <a:srgbClr val="D5DEDA"/>
+          </a:solidFill>
+          <a:ln>
+            <a:noFill/>
+          </a:ln>
+        </p:spPr>
+        <p:style>
+          <a:lnRef idx="1">
+            <a:schemeClr val="accent1"/>
+          </a:lnRef>
+          <a:fillRef idx="3">
+            <a:schemeClr val="accent1"/>
+          </a:fillRef>
+          <a:effectRef idx="2">
+            <a:schemeClr val="accent1"/>
+          </a:effectRef>
+          <a:fontRef idx="minor">
+            <a:schemeClr val="lt1"/>
+          </a:fontRef>
+        </p:style>
+        <p:txBody>
+          <a:bodyPr rtlCol="0" anchor="ctr"/>
+          <a:lstStyle/>
+          <a:p>
+            <a:pPr algn="ctr"/>
+          </a:p>
+        </p:txBody>
+      </p:sp>
+      <p:sp>
+        <p:nvSpPr>
+          <p:cNvPr id="12" name="Rectangle 11"/>
+          <p:cNvSpPr/>
+          <p:nvPr/>
+        </p:nvSpPr>
+        <p:spPr>
+          <a:xfrm>
+            <a:off x="2377440" y="6172200"/>
+            <a:ext cx="210312" cy="32004"/>
+          </a:xfrm>
+          <a:prstGeom prst="rect">
+            <a:avLst/>
+          </a:prstGeom>
+          <a:solidFill>
+            <a:srgbClr val="39796F"/>
+          </a:solidFill>
+          <a:ln>
+            <a:noFill/>
+          </a:ln>
+        </p:spPr>
+        <p:style>
+          <a:lnRef idx="1">
+            <a:schemeClr val="accent1"/>
+          </a:lnRef>
+          <a:fillRef idx="3">
+            <a:schemeClr val="accent1"/>
+          </a:fillRef>
+          <a:effectRef idx="2">
+            <a:schemeClr val="accent1"/>
+          </a:effectRef>
+          <a:fontRef idx="minor">
+            <a:schemeClr val="lt1"/>
+          </a:fontRef>
+        </p:style>
+        <p:txBody>
+          <a:bodyPr rtlCol="0" anchor="ctr"/>
+          <a:lstStyle/>
+          <a:p>
+            <a:pPr algn="ctr"/>
+          </a:p>
+        </p:txBody>
+      </p:sp>
+      <p:sp>
+        <p:nvSpPr>
+          <p:cNvPr id="13" name="TextBox 12"/>
+          <p:cNvSpPr txBox="1"/>
+          <p:nvPr/>
+        </p:nvSpPr>
+        <p:spPr>
+          <a:xfrm>
+            <a:off x="685800" y="941832"/>
+            <a:ext cx="10881360" cy="731520"/>
+          </a:xfrm>
+          <a:prstGeom prst="rect">
+            <a:avLst/>
+          </a:prstGeom>
+          <a:noFill/>
+        </p:spPr>
+        <p:txBody>
+          <a:bodyPr wrap="square" lIns="18288" rIns="18288" tIns="18288">
+            <a:spAutoFit/>
+          </a:bodyPr>
+          <a:lstStyle/>
           <a:p>
             <a:pPr>
-              <a:spcAft>
-                <a:spcPts val="900"/>
-              </a:spcAft>
-              <a:defRPr sz="1800" b="0">
+              <a:defRPr sz="3500" b="1">
                 <a:solidFill>
-                  <a:srgbClr val="24343B"/>
+                  <a:srgbClr val="223B40"/>
                 </a:solidFill>
                 <a:latin typeface="Aptos"/>
               </a:defRPr>
             </a:pPr>
             <a:r>
-              <a:t>Sixteen going on sixty-six: A longitudinal study of personality stability</a:t>
-            </a:r>
-          </a:p>
+              <a:t>You don’t need a final definition.</a:t>
+            </a:r>
+          </a:p>
+        </p:txBody>
+      </p:sp>
+      <p:sp>
+        <p:nvSpPr>
+          <p:cNvPr id="14" name="TextBox 13"/>
+          <p:cNvSpPr txBox="1"/>
+          <p:nvPr/>
+        </p:nvSpPr>
+        <p:spPr>
+          <a:xfrm>
+            <a:off x="822960" y="1965960"/>
+            <a:ext cx="10515600" cy="548640"/>
+          </a:xfrm>
+          <a:prstGeom prst="rect">
+            <a:avLst/>
+          </a:prstGeom>
+          <a:noFill/>
+        </p:spPr>
+        <p:txBody>
+          <a:bodyPr wrap="square" lIns="18288" rIns="18288" tIns="18288">
+            <a:spAutoFit/>
+          </a:bodyPr>
+          <a:lstStyle/>
           <a:p>
             <a:pPr>
-              <a:spcAft>
-                <a:spcPts val="900"/>
-              </a:spcAft>
-              <a:defRPr sz="1800" b="0">
+              <a:defRPr sz="2600" b="1">
                 <a:solidFill>
-                  <a:srgbClr val="24343B"/>
+                  <a:srgbClr val="39796F"/>
                 </a:solidFill>
                 <a:latin typeface="Aptos"/>
               </a:defRPr>
             </a:pPr>
             <a:r>
-              <a:t>and change across 50 years. Journal of Personality and Social Psychology,</a:t>
-            </a:r>
-          </a:p>
+              <a:t>It doesn’t have to be the whole story.</a:t>
+            </a:r>
+          </a:p>
+        </p:txBody>
+      </p:sp>
+      <p:sp>
+        <p:nvSpPr>
+          <p:cNvPr id="15" name="TextBox 14"/>
+          <p:cNvSpPr txBox="1"/>
+          <p:nvPr/>
+        </p:nvSpPr>
+        <p:spPr>
+          <a:xfrm>
+            <a:off x="822960" y="2624328"/>
+            <a:ext cx="10515600" cy="548640"/>
+          </a:xfrm>
+          <a:prstGeom prst="rect">
+            <a:avLst/>
+          </a:prstGeom>
+          <a:noFill/>
+        </p:spPr>
+        <p:txBody>
+          <a:bodyPr wrap="square" lIns="18288" rIns="18288" tIns="18288">
+            <a:spAutoFit/>
+          </a:bodyPr>
+          <a:lstStyle/>
           <a:p>
             <a:pPr>
-              <a:spcAft>
-                <a:spcPts val="900"/>
-              </a:spcAft>
-              <a:defRPr sz="1800" b="0">
+              <a:defRPr sz="2600" b="0">
                 <a:solidFill>
-                  <a:srgbClr val="24343B"/>
+                  <a:srgbClr val="223B40"/>
                 </a:solidFill>
                 <a:latin typeface="Aptos"/>
               </a:defRPr>
             </a:pPr>
             <a:r>
-              <a:t>117(3), 674–695. https://doi.org/10.1037/pspp0000210</a:t>
-            </a:r>
-          </a:p>
+              <a:t>Take time to consider what you want.</a:t>
+            </a:r>
+          </a:p>
+        </p:txBody>
+      </p:sp>
+      <p:sp>
+        <p:nvSpPr>
+          <p:cNvPr id="16" name="TextBox 15"/>
+          <p:cNvSpPr txBox="1"/>
+          <p:nvPr/>
+        </p:nvSpPr>
+        <p:spPr>
+          <a:xfrm>
+            <a:off x="822960" y="3282696"/>
+            <a:ext cx="10515600" cy="548640"/>
+          </a:xfrm>
+          <a:prstGeom prst="rect">
+            <a:avLst/>
+          </a:prstGeom>
+          <a:noFill/>
+        </p:spPr>
+        <p:txBody>
+          <a:bodyPr wrap="square" lIns="18288" rIns="18288" tIns="18288">
+            <a:spAutoFit/>
+          </a:bodyPr>
+          <a:lstStyle/>
           <a:p>
             <a:pPr>
-              <a:spcAft>
-                <a:spcPts val="900"/>
-              </a:spcAft>
-              <a:defRPr sz="1800" b="0">
+              <a:defRPr sz="2600" b="0">
                 <a:solidFill>
-                  <a:srgbClr val="24343B"/>
+                  <a:srgbClr val="223B40"/>
                 </a:solidFill>
                 <a:latin typeface="Aptos"/>
               </a:defRPr>
             </a:pPr>
             <a:r>
-              <a:t>Chart: selected rows from Table 7, p. 688; percentages are not MBTI results.</a:t>
-            </a:r>
-          </a:p>
-        </p:txBody>
-      </p:sp>
-      <p:sp>
-        <p:nvSpPr>
-          <p:cNvPr id="5" name="TextBox 4"/>
+              <a:t>Listen to others, too.</a:t>
+            </a:r>
+          </a:p>
+        </p:txBody>
+      </p:sp>
+      <p:sp>
+        <p:nvSpPr>
+          <p:cNvPr id="17" name="Rounded Rectangle 16"/>
+          <p:cNvSpPr/>
+          <p:nvPr/>
+        </p:nvSpPr>
+        <p:spPr>
+          <a:xfrm>
+            <a:off x="731520" y="4206240"/>
+            <a:ext cx="10652760" cy="1508760"/>
+          </a:xfrm>
+          <a:prstGeom prst="roundRect">
+            <a:avLst>
+              <a:gd name="adj" fmla="val 10000"/>
+            </a:avLst>
+          </a:prstGeom>
+          <a:solidFill>
+            <a:srgbClr val="39796F"/>
+          </a:solidFill>
+          <a:ln>
+            <a:noFill/>
+          </a:ln>
+        </p:spPr>
+        <p:style>
+          <a:lnRef idx="1">
+            <a:schemeClr val="accent1"/>
+          </a:lnRef>
+          <a:fillRef idx="3">
+            <a:schemeClr val="accent1"/>
+          </a:fillRef>
+          <a:effectRef idx="2">
+            <a:schemeClr val="accent1"/>
+          </a:effectRef>
+          <a:fontRef idx="minor">
+            <a:schemeClr val="lt1"/>
+          </a:fontRef>
+        </p:style>
+        <p:txBody>
+          <a:bodyPr rtlCol="0" anchor="ctr"/>
+          <a:lstStyle/>
+          <a:p>
+            <a:pPr algn="ctr"/>
+          </a:p>
+        </p:txBody>
+      </p:sp>
+      <p:sp>
+        <p:nvSpPr>
+          <p:cNvPr id="18" name="TextBox 17"/>
           <p:cNvSpPr txBox="1"/>
           <p:nvPr/>
         </p:nvSpPr>
         <p:spPr>
           <a:xfrm>
-            <a:off x="731520" y="4206240"/>
-            <a:ext cx="10698480" cy="365760"/>
+            <a:off x="1024128" y="4489704"/>
+            <a:ext cx="10058400" cy="960120"/>
           </a:xfrm>
           <a:prstGeom prst="rect">
             <a:avLst/>
@@ -6610,105 +9991,777 @@
           <a:noFill/>
         </p:spPr>
         <p:txBody>
-          <a:bodyPr wrap="square">
+          <a:bodyPr wrap="square" lIns="18288" rIns="18288" tIns="18288">
             <a:spAutoFit/>
           </a:bodyPr>
           <a:lstStyle/>
           <a:p>
             <a:pPr>
-              <a:spcAft>
-                <a:spcPts val="900"/>
-              </a:spcAft>
-              <a:defRPr sz="2100" b="1">
+              <a:defRPr sz="2800" b="1">
                 <a:solidFill>
-                  <a:srgbClr val="3C726A"/>
+                  <a:srgbClr val="FFFFFF"/>
                 </a:solidFill>
                 <a:latin typeface="Aptos"/>
               </a:defRPr>
             </a:pPr>
             <a:r>
-              <a:t>Starting-point readings</a:t>
-            </a:r>
-          </a:p>
-        </p:txBody>
-      </p:sp>
-      <p:sp>
-        <p:nvSpPr>
-          <p:cNvPr id="6" name="TextBox 5"/>
-          <p:cNvSpPr txBox="1"/>
-          <p:nvPr/>
-        </p:nvSpPr>
-        <p:spPr>
-          <a:xfrm>
-            <a:off x="731520" y="4663440"/>
-            <a:ext cx="10698480" cy="2011680"/>
-          </a:xfrm>
-          <a:prstGeom prst="rect">
-            <a:avLst/>
-          </a:prstGeom>
-          <a:noFill/>
-        </p:spPr>
-        <p:txBody>
-          <a:bodyPr wrap="square">
-            <a:spAutoFit/>
-          </a:bodyPr>
-          <a:lstStyle/>
+              <a:t>You don’t need a final definition of yourself</a:t>
+            </a:r>
+          </a:p>
           <a:p>
             <a:pPr>
-              <a:spcAft>
-                <a:spcPts val="900"/>
-              </a:spcAft>
-              <a:defRPr sz="1800" b="0">
+              <a:defRPr sz="2800" b="1">
                 <a:solidFill>
-                  <a:srgbClr val="24343B"/>
+                  <a:srgbClr val="FFFFFF"/>
                 </a:solidFill>
                 <a:latin typeface="Aptos"/>
               </a:defRPr>
             </a:pPr>
             <a:r>
-              <a:t>Sah, S. (2025, January 7). How to Say No and Mean It. Psychology Today.</a:t>
-            </a:r>
-          </a:p>
+              <a:t>to make choices that matter to you.</a:t>
+            </a:r>
+          </a:p>
+        </p:txBody>
+      </p:sp>
+    </p:spTree>
+  </p:cSld>
+  <p:clrMapOvr>
+    <a:masterClrMapping/>
+  </p:clrMapOvr>
+</p:sld>
+</file>
+
+<file path=ppt/slides/slide8.xml><?xml version="1.0" encoding="utf-8"?>
+<p:sld xmlns:a="http://schemas.openxmlformats.org/drawingml/2006/main" xmlns:p="http://schemas.openxmlformats.org/presentationml/2006/main" xmlns:r="http://schemas.openxmlformats.org/officeDocument/2006/relationships">
+  <p:cSld>
+    <p:bg>
+      <p:bgPr>
+        <a:solidFill>
+          <a:srgbClr val="F7F8F4"/>
+        </a:solidFill>
+        <a:effectLst/>
+      </p:bgPr>
+    </p:bg>
+    <p:spTree>
+      <p:nvGrpSpPr>
+        <p:cNvPr id="1" name=""/>
+        <p:cNvGrpSpPr/>
+        <p:nvPr/>
+      </p:nvGrpSpPr>
+      <p:grpSpPr/>
+      <p:sp>
+        <p:nvSpPr>
+          <p:cNvPr id="2" name="Rectangle 1"/>
+          <p:cNvSpPr/>
+          <p:nvPr/>
+        </p:nvSpPr>
+        <p:spPr>
+          <a:xfrm>
+            <a:off x="0" y="0"/>
+            <a:ext cx="146304" cy="6858000"/>
+          </a:xfrm>
+          <a:prstGeom prst="rect">
+            <a:avLst/>
+          </a:prstGeom>
+          <a:solidFill>
+            <a:srgbClr val="39796F"/>
+          </a:solidFill>
+          <a:ln>
+            <a:noFill/>
+          </a:ln>
+        </p:spPr>
+        <p:style>
+          <a:lnRef idx="1">
+            <a:schemeClr val="accent1"/>
+          </a:lnRef>
+          <a:fillRef idx="3">
+            <a:schemeClr val="accent1"/>
+          </a:fillRef>
+          <a:effectRef idx="2">
+            <a:schemeClr val="accent1"/>
+          </a:effectRef>
+          <a:fontRef idx="minor">
+            <a:schemeClr val="lt1"/>
+          </a:fontRef>
+        </p:style>
+        <p:txBody>
+          <a:bodyPr rtlCol="0" anchor="ctr"/>
+          <a:lstStyle/>
+          <a:p>
+            <a:pPr algn="ctr"/>
+          </a:p>
+        </p:txBody>
+      </p:sp>
+      <p:sp>
+        <p:nvSpPr>
+          <p:cNvPr id="3" name="TextBox 2"/>
+          <p:cNvSpPr txBox="1"/>
+          <p:nvPr/>
+        </p:nvSpPr>
+        <p:spPr>
+          <a:xfrm>
+            <a:off x="594360" y="292608"/>
+            <a:ext cx="10058400" cy="274320"/>
+          </a:xfrm>
+          <a:prstGeom prst="rect">
+            <a:avLst/>
+          </a:prstGeom>
+          <a:noFill/>
+        </p:spPr>
+        <p:txBody>
+          <a:bodyPr wrap="square" lIns="18288" rIns="18288" tIns="18288">
+            <a:spAutoFit/>
+          </a:bodyPr>
+          <a:lstStyle/>
           <a:p>
             <a:pPr>
-              <a:spcAft>
-                <a:spcPts val="900"/>
-              </a:spcAft>
-              <a:defRPr sz="1800" b="0">
+              <a:defRPr sz="1100" b="0">
                 <a:solidFill>
-                  <a:srgbClr val="24343B"/>
+                  <a:srgbClr val="637575"/>
                 </a:solidFill>
                 <a:latin typeface="Aptos"/>
               </a:defRPr>
             </a:pPr>
             <a:r>
-              <a:t>Kam, K. (2024, November 7). Authenticity can protect mental health.</a:t>
-            </a:r>
-          </a:p>
+              <a:t>FINDING YOUR AUTHENTIC SELF OR NOT</a:t>
+            </a:r>
+          </a:p>
+        </p:txBody>
+      </p:sp>
+      <p:sp>
+        <p:nvSpPr>
+          <p:cNvPr id="4" name="TextBox 3"/>
+          <p:cNvSpPr txBox="1"/>
+          <p:nvPr/>
+        </p:nvSpPr>
+        <p:spPr>
+          <a:xfrm>
+            <a:off x="594360" y="6437376"/>
+            <a:ext cx="9144000" cy="228600"/>
+          </a:xfrm>
+          <a:prstGeom prst="rect">
+            <a:avLst/>
+          </a:prstGeom>
+          <a:noFill/>
+        </p:spPr>
+        <p:txBody>
+          <a:bodyPr wrap="square" lIns="18288" rIns="18288" tIns="18288">
+            <a:spAutoFit/>
+          </a:bodyPr>
+          <a:lstStyle/>
           <a:p>
             <a:pPr>
-              <a:spcAft>
-                <a:spcPts val="900"/>
-              </a:spcAft>
-              <a:defRPr sz="1800" b="0">
+              <a:defRPr sz="1000" b="0">
                 <a:solidFill>
-                  <a:srgbClr val="24343B"/>
+                  <a:srgbClr val="637575"/>
                 </a:solidFill>
                 <a:latin typeface="Aptos"/>
               </a:defRPr>
             </a:pPr>
             <a:r>
+              <a:t>REFERENCE APPENDIX · NOT PART OF THE SPEECH</a:t>
+            </a:r>
+          </a:p>
+        </p:txBody>
+      </p:sp>
+      <p:sp>
+        <p:nvSpPr>
+          <p:cNvPr id="5" name="TextBox 4"/>
+          <p:cNvSpPr txBox="1"/>
+          <p:nvPr/>
+        </p:nvSpPr>
+        <p:spPr>
+          <a:xfrm>
+            <a:off x="10972800" y="6400800"/>
+            <a:ext cx="594360" cy="274320"/>
+          </a:xfrm>
+          <a:prstGeom prst="rect">
+            <a:avLst/>
+          </a:prstGeom>
+          <a:noFill/>
+        </p:spPr>
+        <p:txBody>
+          <a:bodyPr wrap="square" lIns="18288" rIns="18288" tIns="18288">
+            <a:spAutoFit/>
+          </a:bodyPr>
+          <a:lstStyle/>
+          <a:p>
+            <a:pPr>
+              <a:defRPr sz="1200" b="1">
+                <a:solidFill>
+                  <a:srgbClr val="39796F"/>
+                </a:solidFill>
+                <a:latin typeface="Aptos"/>
+              </a:defRPr>
+            </a:pPr>
+            <a:r>
+              <a:t>08</a:t>
+            </a:r>
+          </a:p>
+        </p:txBody>
+      </p:sp>
+      <p:sp>
+        <p:nvSpPr>
+          <p:cNvPr id="6" name="Rectangle 5"/>
+          <p:cNvSpPr/>
+          <p:nvPr/>
+        </p:nvSpPr>
+        <p:spPr>
+          <a:xfrm>
+            <a:off x="621792" y="6172200"/>
+            <a:ext cx="210312" cy="32004"/>
+          </a:xfrm>
+          <a:prstGeom prst="rect">
+            <a:avLst/>
+          </a:prstGeom>
+          <a:solidFill>
+            <a:srgbClr val="D5DEDA"/>
+          </a:solidFill>
+          <a:ln>
+            <a:noFill/>
+          </a:ln>
+        </p:spPr>
+        <p:style>
+          <a:lnRef idx="1">
+            <a:schemeClr val="accent1"/>
+          </a:lnRef>
+          <a:fillRef idx="3">
+            <a:schemeClr val="accent1"/>
+          </a:fillRef>
+          <a:effectRef idx="2">
+            <a:schemeClr val="accent1"/>
+          </a:effectRef>
+          <a:fontRef idx="minor">
+            <a:schemeClr val="lt1"/>
+          </a:fontRef>
+        </p:style>
+        <p:txBody>
+          <a:bodyPr rtlCol="0" anchor="ctr"/>
+          <a:lstStyle/>
+          <a:p>
+            <a:pPr algn="ctr"/>
+          </a:p>
+        </p:txBody>
+      </p:sp>
+      <p:sp>
+        <p:nvSpPr>
+          <p:cNvPr id="7" name="Rectangle 6"/>
+          <p:cNvSpPr/>
+          <p:nvPr/>
+        </p:nvSpPr>
+        <p:spPr>
+          <a:xfrm>
+            <a:off x="914400" y="6172200"/>
+            <a:ext cx="210312" cy="32004"/>
+          </a:xfrm>
+          <a:prstGeom prst="rect">
+            <a:avLst/>
+          </a:prstGeom>
+          <a:solidFill>
+            <a:srgbClr val="D5DEDA"/>
+          </a:solidFill>
+          <a:ln>
+            <a:noFill/>
+          </a:ln>
+        </p:spPr>
+        <p:style>
+          <a:lnRef idx="1">
+            <a:schemeClr val="accent1"/>
+          </a:lnRef>
+          <a:fillRef idx="3">
+            <a:schemeClr val="accent1"/>
+          </a:fillRef>
+          <a:effectRef idx="2">
+            <a:schemeClr val="accent1"/>
+          </a:effectRef>
+          <a:fontRef idx="minor">
+            <a:schemeClr val="lt1"/>
+          </a:fontRef>
+        </p:style>
+        <p:txBody>
+          <a:bodyPr rtlCol="0" anchor="ctr"/>
+          <a:lstStyle/>
+          <a:p>
+            <a:pPr algn="ctr"/>
+          </a:p>
+        </p:txBody>
+      </p:sp>
+      <p:sp>
+        <p:nvSpPr>
+          <p:cNvPr id="8" name="Rectangle 7"/>
+          <p:cNvSpPr/>
+          <p:nvPr/>
+        </p:nvSpPr>
+        <p:spPr>
+          <a:xfrm>
+            <a:off x="1207008" y="6172200"/>
+            <a:ext cx="210312" cy="32004"/>
+          </a:xfrm>
+          <a:prstGeom prst="rect">
+            <a:avLst/>
+          </a:prstGeom>
+          <a:solidFill>
+            <a:srgbClr val="D5DEDA"/>
+          </a:solidFill>
+          <a:ln>
+            <a:noFill/>
+          </a:ln>
+        </p:spPr>
+        <p:style>
+          <a:lnRef idx="1">
+            <a:schemeClr val="accent1"/>
+          </a:lnRef>
+          <a:fillRef idx="3">
+            <a:schemeClr val="accent1"/>
+          </a:fillRef>
+          <a:effectRef idx="2">
+            <a:schemeClr val="accent1"/>
+          </a:effectRef>
+          <a:fontRef idx="minor">
+            <a:schemeClr val="lt1"/>
+          </a:fontRef>
+        </p:style>
+        <p:txBody>
+          <a:bodyPr rtlCol="0" anchor="ctr"/>
+          <a:lstStyle/>
+          <a:p>
+            <a:pPr algn="ctr"/>
+          </a:p>
+        </p:txBody>
+      </p:sp>
+      <p:sp>
+        <p:nvSpPr>
+          <p:cNvPr id="9" name="Rectangle 8"/>
+          <p:cNvSpPr/>
+          <p:nvPr/>
+        </p:nvSpPr>
+        <p:spPr>
+          <a:xfrm>
+            <a:off x="1499616" y="6172200"/>
+            <a:ext cx="210312" cy="32004"/>
+          </a:xfrm>
+          <a:prstGeom prst="rect">
+            <a:avLst/>
+          </a:prstGeom>
+          <a:solidFill>
+            <a:srgbClr val="D5DEDA"/>
+          </a:solidFill>
+          <a:ln>
+            <a:noFill/>
+          </a:ln>
+        </p:spPr>
+        <p:style>
+          <a:lnRef idx="1">
+            <a:schemeClr val="accent1"/>
+          </a:lnRef>
+          <a:fillRef idx="3">
+            <a:schemeClr val="accent1"/>
+          </a:fillRef>
+          <a:effectRef idx="2">
+            <a:schemeClr val="accent1"/>
+          </a:effectRef>
+          <a:fontRef idx="minor">
+            <a:schemeClr val="lt1"/>
+          </a:fontRef>
+        </p:style>
+        <p:txBody>
+          <a:bodyPr rtlCol="0" anchor="ctr"/>
+          <a:lstStyle/>
+          <a:p>
+            <a:pPr algn="ctr"/>
+          </a:p>
+        </p:txBody>
+      </p:sp>
+      <p:sp>
+        <p:nvSpPr>
+          <p:cNvPr id="10" name="Rectangle 9"/>
+          <p:cNvSpPr/>
+          <p:nvPr/>
+        </p:nvSpPr>
+        <p:spPr>
+          <a:xfrm>
+            <a:off x="1792224" y="6172200"/>
+            <a:ext cx="210312" cy="32004"/>
+          </a:xfrm>
+          <a:prstGeom prst="rect">
+            <a:avLst/>
+          </a:prstGeom>
+          <a:solidFill>
+            <a:srgbClr val="D5DEDA"/>
+          </a:solidFill>
+          <a:ln>
+            <a:noFill/>
+          </a:ln>
+        </p:spPr>
+        <p:style>
+          <a:lnRef idx="1">
+            <a:schemeClr val="accent1"/>
+          </a:lnRef>
+          <a:fillRef idx="3">
+            <a:schemeClr val="accent1"/>
+          </a:fillRef>
+          <a:effectRef idx="2">
+            <a:schemeClr val="accent1"/>
+          </a:effectRef>
+          <a:fontRef idx="minor">
+            <a:schemeClr val="lt1"/>
+          </a:fontRef>
+        </p:style>
+        <p:txBody>
+          <a:bodyPr rtlCol="0" anchor="ctr"/>
+          <a:lstStyle/>
+          <a:p>
+            <a:pPr algn="ctr"/>
+          </a:p>
+        </p:txBody>
+      </p:sp>
+      <p:sp>
+        <p:nvSpPr>
+          <p:cNvPr id="11" name="Rectangle 10"/>
+          <p:cNvSpPr/>
+          <p:nvPr/>
+        </p:nvSpPr>
+        <p:spPr>
+          <a:xfrm>
+            <a:off x="2084832" y="6172200"/>
+            <a:ext cx="210312" cy="32004"/>
+          </a:xfrm>
+          <a:prstGeom prst="rect">
+            <a:avLst/>
+          </a:prstGeom>
+          <a:solidFill>
+            <a:srgbClr val="D5DEDA"/>
+          </a:solidFill>
+          <a:ln>
+            <a:noFill/>
+          </a:ln>
+        </p:spPr>
+        <p:style>
+          <a:lnRef idx="1">
+            <a:schemeClr val="accent1"/>
+          </a:lnRef>
+          <a:fillRef idx="3">
+            <a:schemeClr val="accent1"/>
+          </a:fillRef>
+          <a:effectRef idx="2">
+            <a:schemeClr val="accent1"/>
+          </a:effectRef>
+          <a:fontRef idx="minor">
+            <a:schemeClr val="lt1"/>
+          </a:fontRef>
+        </p:style>
+        <p:txBody>
+          <a:bodyPr rtlCol="0" anchor="ctr"/>
+          <a:lstStyle/>
+          <a:p>
+            <a:pPr algn="ctr"/>
+          </a:p>
+        </p:txBody>
+      </p:sp>
+      <p:sp>
+        <p:nvSpPr>
+          <p:cNvPr id="12" name="Rectangle 11"/>
+          <p:cNvSpPr/>
+          <p:nvPr/>
+        </p:nvSpPr>
+        <p:spPr>
+          <a:xfrm>
+            <a:off x="2377440" y="6172200"/>
+            <a:ext cx="210312" cy="32004"/>
+          </a:xfrm>
+          <a:prstGeom prst="rect">
+            <a:avLst/>
+          </a:prstGeom>
+          <a:solidFill>
+            <a:srgbClr val="D5DEDA"/>
+          </a:solidFill>
+          <a:ln>
+            <a:noFill/>
+          </a:ln>
+        </p:spPr>
+        <p:style>
+          <a:lnRef idx="1">
+            <a:schemeClr val="accent1"/>
+          </a:lnRef>
+          <a:fillRef idx="3">
+            <a:schemeClr val="accent1"/>
+          </a:fillRef>
+          <a:effectRef idx="2">
+            <a:schemeClr val="accent1"/>
+          </a:effectRef>
+          <a:fontRef idx="minor">
+            <a:schemeClr val="lt1"/>
+          </a:fontRef>
+        </p:style>
+        <p:txBody>
+          <a:bodyPr rtlCol="0" anchor="ctr"/>
+          <a:lstStyle/>
+          <a:p>
+            <a:pPr algn="ctr"/>
+          </a:p>
+        </p:txBody>
+      </p:sp>
+      <p:sp>
+        <p:nvSpPr>
+          <p:cNvPr id="13" name="TextBox 12"/>
+          <p:cNvSpPr txBox="1"/>
+          <p:nvPr/>
+        </p:nvSpPr>
+        <p:spPr>
+          <a:xfrm>
+            <a:off x="685800" y="914400"/>
+            <a:ext cx="10972800" cy="640080"/>
+          </a:xfrm>
+          <a:prstGeom prst="rect">
+            <a:avLst/>
+          </a:prstGeom>
+          <a:noFill/>
+        </p:spPr>
+        <p:txBody>
+          <a:bodyPr wrap="square" lIns="18288" rIns="18288" tIns="18288">
+            <a:spAutoFit/>
+          </a:bodyPr>
+          <a:lstStyle/>
+          <a:p>
+            <a:pPr>
+              <a:defRPr sz="3500" b="1">
+                <a:solidFill>
+                  <a:srgbClr val="223B40"/>
+                </a:solidFill>
+                <a:latin typeface="Aptos"/>
+              </a:defRPr>
+            </a:pPr>
+            <a:r>
+              <a:t>References</a:t>
+            </a:r>
+          </a:p>
+        </p:txBody>
+      </p:sp>
+      <p:sp>
+        <p:nvSpPr>
+          <p:cNvPr id="14" name="TextBox 13"/>
+          <p:cNvSpPr txBox="1"/>
+          <p:nvPr/>
+        </p:nvSpPr>
+        <p:spPr>
+          <a:xfrm>
+            <a:off x="777240" y="1828800"/>
+            <a:ext cx="10698480" cy="365760"/>
+          </a:xfrm>
+          <a:prstGeom prst="rect">
+            <a:avLst/>
+          </a:prstGeom>
+          <a:noFill/>
+        </p:spPr>
+        <p:txBody>
+          <a:bodyPr wrap="square" lIns="18288" rIns="18288" tIns="18288">
+            <a:spAutoFit/>
+          </a:bodyPr>
+          <a:lstStyle/>
+          <a:p>
+            <a:pPr>
+              <a:defRPr sz="2000" b="1">
+                <a:solidFill>
+                  <a:srgbClr val="39796F"/>
+                </a:solidFill>
+                <a:latin typeface="Aptos"/>
+              </a:defRPr>
+            </a:pPr>
+            <a:r>
+              <a:t>Research used for the chart</a:t>
+            </a:r>
+          </a:p>
+        </p:txBody>
+      </p:sp>
+      <p:sp>
+        <p:nvSpPr>
+          <p:cNvPr id="15" name="TextBox 14"/>
+          <p:cNvSpPr txBox="1"/>
+          <p:nvPr/>
+        </p:nvSpPr>
+        <p:spPr>
+          <a:xfrm>
+            <a:off x="777240" y="2267712"/>
+            <a:ext cx="10698480" cy="1828800"/>
+          </a:xfrm>
+          <a:prstGeom prst="rect">
+            <a:avLst/>
+          </a:prstGeom>
+          <a:noFill/>
+        </p:spPr>
+        <p:txBody>
+          <a:bodyPr wrap="square" lIns="18288" rIns="18288" tIns="18288">
+            <a:spAutoFit/>
+          </a:bodyPr>
+          <a:lstStyle/>
+          <a:p>
+            <a:pPr>
+              <a:defRPr sz="1700" b="0">
+                <a:solidFill>
+                  <a:srgbClr val="223B40"/>
+                </a:solidFill>
+                <a:latin typeface="Aptos"/>
+              </a:defRPr>
+            </a:pPr>
+            <a:r>
+              <a:t>Damian, R. I., Spengler, M., Sutu, A., &amp; Roberts, B. W. (2019).</a:t>
+            </a:r>
+          </a:p>
+          <a:p>
+            <a:pPr>
+              <a:defRPr sz="1700" b="0">
+                <a:solidFill>
+                  <a:srgbClr val="223B40"/>
+                </a:solidFill>
+                <a:latin typeface="Aptos"/>
+              </a:defRPr>
+            </a:pPr>
+            <a:r>
+              <a:t>Sixteen going on sixty-six: A longitudinal study of personality stability</a:t>
+            </a:r>
+          </a:p>
+          <a:p>
+            <a:pPr>
+              <a:defRPr sz="1700" b="0">
+                <a:solidFill>
+                  <a:srgbClr val="223B40"/>
+                </a:solidFill>
+                <a:latin typeface="Aptos"/>
+              </a:defRPr>
+            </a:pPr>
+            <a:r>
+              <a:t>and change across 50 years. Journal of Personality and Social Psychology,</a:t>
+            </a:r>
+          </a:p>
+          <a:p>
+            <a:pPr>
+              <a:defRPr sz="1700" b="0">
+                <a:solidFill>
+                  <a:srgbClr val="223B40"/>
+                </a:solidFill>
+                <a:latin typeface="Aptos"/>
+              </a:defRPr>
+            </a:pPr>
+            <a:r>
+              <a:t>117(3), 674–695. https://doi.org/10.1037/pspp0000210</a:t>
+            </a:r>
+          </a:p>
+          <a:p>
+            <a:pPr>
+              <a:defRPr sz="1700" b="0">
+                <a:solidFill>
+                  <a:srgbClr val="223B40"/>
+                </a:solidFill>
+                <a:latin typeface="Aptos"/>
+              </a:defRPr>
+            </a:pPr>
+            <a:r>
+              <a:t>Chart: selected rows from Table 7, p. 688; percentages are not MBTI results.</a:t>
+            </a:r>
+          </a:p>
+        </p:txBody>
+      </p:sp>
+      <p:sp>
+        <p:nvSpPr>
+          <p:cNvPr id="16" name="TextBox 15"/>
+          <p:cNvSpPr txBox="1"/>
+          <p:nvPr/>
+        </p:nvSpPr>
+        <p:spPr>
+          <a:xfrm>
+            <a:off x="777240" y="4114800"/>
+            <a:ext cx="10698480" cy="365760"/>
+          </a:xfrm>
+          <a:prstGeom prst="rect">
+            <a:avLst/>
+          </a:prstGeom>
+          <a:noFill/>
+        </p:spPr>
+        <p:txBody>
+          <a:bodyPr wrap="square" lIns="18288" rIns="18288" tIns="18288">
+            <a:spAutoFit/>
+          </a:bodyPr>
+          <a:lstStyle/>
+          <a:p>
+            <a:pPr>
+              <a:defRPr sz="2000" b="1">
+                <a:solidFill>
+                  <a:srgbClr val="39796F"/>
+                </a:solidFill>
+                <a:latin typeface="Aptos"/>
+              </a:defRPr>
+            </a:pPr>
+            <a:r>
+              <a:t>Starting-point readings</a:t>
+            </a:r>
+          </a:p>
+        </p:txBody>
+      </p:sp>
+      <p:sp>
+        <p:nvSpPr>
+          <p:cNvPr id="17" name="TextBox 16"/>
+          <p:cNvSpPr txBox="1"/>
+          <p:nvPr/>
+        </p:nvSpPr>
+        <p:spPr>
+          <a:xfrm>
+            <a:off x="777240" y="4553712"/>
+            <a:ext cx="10698480" cy="1828800"/>
+          </a:xfrm>
+          <a:prstGeom prst="rect">
+            <a:avLst/>
+          </a:prstGeom>
+          <a:noFill/>
+        </p:spPr>
+        <p:txBody>
+          <a:bodyPr wrap="square" lIns="18288" rIns="18288" tIns="18288">
+            <a:spAutoFit/>
+          </a:bodyPr>
+          <a:lstStyle/>
+          <a:p>
+            <a:pPr>
+              <a:defRPr sz="1700" b="0">
+                <a:solidFill>
+                  <a:srgbClr val="223B40"/>
+                </a:solidFill>
+                <a:latin typeface="Aptos"/>
+              </a:defRPr>
+            </a:pPr>
+            <a:r>
+              <a:t>Sah, S. (2025, January 7). How to Say No and Mean It. Psychology Today.</a:t>
+            </a:r>
+          </a:p>
+          <a:p>
+            <a:pPr>
+              <a:defRPr sz="1700" b="0">
+                <a:solidFill>
+                  <a:srgbClr val="223B40"/>
+                </a:solidFill>
+                <a:latin typeface="Aptos"/>
+              </a:defRPr>
+            </a:pPr>
+            <a:r>
+              <a:t>Kam, K. (2024, November 7). Authenticity can protect mental health.</a:t>
+            </a:r>
+          </a:p>
+          <a:p>
+            <a:pPr>
+              <a:defRPr sz="1700" b="0">
+                <a:solidFill>
+                  <a:srgbClr val="223B40"/>
+                </a:solidFill>
+                <a:latin typeface="Aptos"/>
+              </a:defRPr>
+            </a:pPr>
+            <a:r>
               <a:t>Here’s how to be authentic. The Washington Post.</a:t>
             </a:r>
           </a:p>
           <a:p>
             <a:pPr>
-              <a:spcAft>
-                <a:spcPts val="900"/>
-              </a:spcAft>
-              <a:defRPr sz="1800" b="0">
+              <a:defRPr sz="1700" b="0">
                 <a:solidFill>
-                  <a:srgbClr val="24343B"/>
+                  <a:srgbClr val="223B40"/>
                 </a:solidFill>
                 <a:latin typeface="Aptos"/>
               </a:defRPr>

--- a/authentic-self-presentation/Finding_Your_Authentic_Self.pptx
+++ b/authentic-self-presentation/Finding_Your_Authentic_Self.pptx
@@ -14,8 +14,11 @@
     <p:sldId id="259" r:id="rId5"/>
     <p:sldId id="260" r:id="rId6"/>
     <p:sldId id="264" r:id="rId15"/>
+    <p:sldId id="265" r:id="rId16"/>
     <p:sldId id="261" r:id="rId7"/>
     <p:sldId id="262" r:id="rId8"/>
+    <p:sldId id="266" r:id="rId17"/>
+    <p:sldId id="267" r:id="rId18"/>
     <p:sldId id="263" r:id="rId9"/>
   </p:sldIdLst>
   <p:sldSz cx="12192000" cy="6858000"/>
@@ -684,6 +687,162 @@
 </p:notes>
 </file>
 
+<file path=ppt/notesSlides/notesSlide10.xml><?xml version="1.0" encoding="utf-8"?>
+<p:notes xmlns:a="http://schemas.openxmlformats.org/drawingml/2006/main" xmlns:p="http://schemas.openxmlformats.org/presentationml/2006/main" xmlns:r="http://schemas.openxmlformats.org/officeDocument/2006/relationships">
+  <p:cSld>
+    <p:spTree>
+      <p:nvGrpSpPr>
+        <p:cNvPr id="1" name=""/>
+        <p:cNvGrpSpPr/>
+        <p:nvPr/>
+      </p:nvGrpSpPr>
+      <p:grpSpPr>
+        <a:xfrm>
+          <a:off x="0" y="0"/>
+          <a:ext cx="0" cy="0"/>
+          <a:chOff x="0" y="0"/>
+          <a:chExt cx="0" cy="0"/>
+        </a:xfrm>
+      </p:grpSpPr>
+      <p:sp>
+        <p:nvSpPr>
+          <p:cNvPr id="3" name="Notes Placeholder 2"/>
+          <p:cNvSpPr>
+            <a:spLocks noGrp="1"/>
+          </p:cNvSpPr>
+          <p:nvPr>
+            <p:ph type="body" sz="quarter" idx="3"/>
+          </p:nvPr>
+        </p:nvSpPr>
+        <p:spPr/>
+        <p:txBody>
+          <a:bodyPr/>
+          <a:lstStyle/>
+          <a:p>
+            <a:r>
+              <a:t>过渡页：总结之后，停一下，问“那我们可以怎么做？”然后翻页。</a:t>
+            </a:r>
+          </a:p>
+          <a:p/>
+          <a:p>
+            <a:r>
+              <a:t>So, what can we do?</a:t>
+            </a:r>
+          </a:p>
+        </p:txBody>
+      </p:sp>
+    </p:spTree>
+  </p:cSld>
+  <p:clrMapOvr>
+    <a:masterClrMapping/>
+  </p:clrMapOvr>
+</p:notes>
+</file>
+
+<file path=ppt/notesSlides/notesSlide11.xml><?xml version="1.0" encoding="utf-8"?>
+<p:notes xmlns:a="http://schemas.openxmlformats.org/drawingml/2006/main" xmlns:p="http://schemas.openxmlformats.org/presentationml/2006/main" xmlns:r="http://schemas.openxmlformats.org/officeDocument/2006/relationships">
+  <p:cSld>
+    <p:spTree>
+      <p:nvGrpSpPr>
+        <p:cNvPr id="1" name=""/>
+        <p:cNvGrpSpPr/>
+        <p:nvPr/>
+      </p:nvGrpSpPr>
+      <p:grpSpPr>
+        <a:xfrm>
+          <a:off x="0" y="0"/>
+          <a:ext cx="0" cy="0"/>
+          <a:chOff x="0" y="0"/>
+          <a:chExt cx="0" cy="0"/>
+        </a:xfrm>
+      </p:grpSpPr>
+      <p:sp>
+        <p:nvSpPr>
+          <p:cNvPr id="3" name="Notes Placeholder 2"/>
+          <p:cNvSpPr>
+            <a:spLocks noGrp="1"/>
+          </p:cNvSpPr>
+          <p:nvPr>
+            <p:ph type="body" sz="quarter" idx="3"/>
+          </p:nvPr>
+        </p:nvSpPr>
+        <p:spPr/>
+        <p:txBody>
+          <a:bodyPr/>
+          <a:lstStyle/>
+          <a:p>
+            <a:r>
+              <a:t>核心结论页：先用三句短句收束，再慢慢念大字结论。</a:t>
+            </a:r>
+          </a:p>
+          <a:p/>
+          <a:p>
+            <a:r>
+              <a:t>Live your life. When something matters, take time to consider what you want. Listen to others, and make your own choice. You don’t need a final definition of yourself to make choices that matter to you.</a:t>
+            </a:r>
+          </a:p>
+        </p:txBody>
+      </p:sp>
+    </p:spTree>
+  </p:cSld>
+  <p:clrMapOvr>
+    <a:masterClrMapping/>
+  </p:clrMapOvr>
+</p:notes>
+</file>
+
+<file path=ppt/notesSlides/notesSlide12.xml><?xml version="1.0" encoding="utf-8"?>
+<p:notes xmlns:a="http://schemas.openxmlformats.org/drawingml/2006/main" xmlns:p="http://schemas.openxmlformats.org/presentationml/2006/main" xmlns:r="http://schemas.openxmlformats.org/officeDocument/2006/relationships">
+  <p:cSld>
+    <p:spTree>
+      <p:nvGrpSpPr>
+        <p:cNvPr id="1" name=""/>
+        <p:cNvGrpSpPr/>
+        <p:nvPr/>
+      </p:nvGrpSpPr>
+      <p:grpSpPr>
+        <a:xfrm>
+          <a:off x="0" y="0"/>
+          <a:ext cx="0" cy="0"/>
+          <a:chOff x="0" y="0"/>
+          <a:chExt cx="0" cy="0"/>
+        </a:xfrm>
+      </p:grpSpPr>
+      <p:sp>
+        <p:nvSpPr>
+          <p:cNvPr id="3" name="Notes Placeholder 2"/>
+          <p:cNvSpPr>
+            <a:spLocks noGrp="1"/>
+          </p:cNvSpPr>
+          <p:nvPr>
+            <p:ph type="body" sz="quarter" idx="3"/>
+          </p:nvPr>
+        </p:nvSpPr>
+        <p:spPr/>
+        <p:txBody>
+          <a:bodyPr/>
+          <a:lstStyle/>
+          <a:p>
+            <a:r>
+              <a:t>结束页：说谢谢，停一下结束。</a:t>
+            </a:r>
+          </a:p>
+          <a:p/>
+          <a:p>
+            <a:r>
+              <a:t>Thank you.</a:t>
+            </a:r>
+          </a:p>
+        </p:txBody>
+      </p:sp>
+    </p:spTree>
+  </p:cSld>
+  <p:clrMapOvr>
+    <a:masterClrMapping/>
+  </p:clrMapOvr>
+</p:notes>
+</file>
+
 <file path=ppt/notesSlides/notesSlide2.xml><?xml version="1.0" encoding="utf-8"?>
 <p:notes xmlns:a="http://schemas.openxmlformats.org/drawingml/2006/main" xmlns:r="http://schemas.openxmlformats.org/officeDocument/2006/relationships" xmlns:p="http://schemas.openxmlformats.org/presentationml/2006/main">
   <p:cSld>
@@ -1047,7 +1206,7 @@
           <a:p/>
           <a:p>
             <a:r>
-              <a:t>So, what can we do? When something matters, ask yourself: “What do I really want?” Take your time. Think before you decide. You can also ask other people for help. Listen to different views. The choice is yours. Finding yourself doesn’t mean doing everything alone.</a:t>
+              <a:t>When something matters, ask yourself: “What do I really want?” Take your time. Think before you decide. You can also ask other people for help. Listen to different views. The choice is yours. Finding yourself doesn’t mean doing everything alone.</a:t>
             </a:r>
           </a:p>
         </p:txBody>
@@ -1117,13 +1276,13 @@
           <a:lstStyle/>
           <a:p>
             <a:r>
-              <a:t>结尾：MBTI → 只是你的一部分 → 好好生活 → 重要时刻思考 → 听意见、自己选 → 最后一句。</a:t>
+              <a:t>回扣页：再次问 MBTI → 标签只是你的一部分 → 不必一次性把自己想清楚。</a:t>
             </a:r>
           </a:p>
           <a:p/>
           <a:p>
             <a:r>
-              <a:t>So, what’s your MBTI? Your type is only part of your story. You don’t need to figure yourself out once and for all. Live your life. When something matters, take time to consider what you want. Listen to others, and make your own choice. You don’t need a final definition of yourself to make choices that matter to you. Thank you.</a:t>
+              <a:t>So, what’s your MBTI? Your type is only part of your story. You don’t need to figure yourself out once and for all.</a:t>
             </a:r>
           </a:p>
         </p:txBody>
@@ -4399,20 +4558,71 @@
       </p:sp>
       <p:sp>
         <p:nvSpPr>
-          <p:cNvPr id="6" name="Rectangle 5"/>
+          <p:cNvPr id="13" name="TextBox 12"/>
+          <p:cNvSpPr txBox="1"/>
+          <p:nvPr/>
+        </p:nvSpPr>
+        <p:spPr>
+          <a:xfrm>
+            <a:off x="685800" y="1005840"/>
+            <a:ext cx="7315200" cy="1554480"/>
+          </a:xfrm>
+          <a:prstGeom prst="rect">
+            <a:avLst/>
+          </a:prstGeom>
+          <a:noFill/>
+        </p:spPr>
+        <p:txBody>
+          <a:bodyPr wrap="square" lIns="18288" tIns="18288" rIns="18288">
+            <a:spAutoFit/>
+          </a:bodyPr>
+          <a:lstStyle/>
+          <a:p>
+            <a:pPr>
+              <a:defRPr sz="4300" b="1">
+                <a:solidFill>
+                  <a:srgbClr val="223B40"/>
+                </a:solidFill>
+                <a:latin typeface="Aptos"/>
+              </a:defRPr>
+            </a:pPr>
+            <a:r>
+              <a:t>Finding Your Authentic Self</a:t>
+            </a:r>
+          </a:p>
+          <a:p>
+            <a:pPr>
+              <a:defRPr sz="4300" b="1">
+                <a:solidFill>
+                  <a:srgbClr val="223B40"/>
+                </a:solidFill>
+                <a:latin typeface="Aptos"/>
+              </a:defRPr>
+            </a:pPr>
+            <a:r>
+              <a:t>or Not?</a:t>
+            </a:r>
+          </a:p>
+        </p:txBody>
+      </p:sp>
+      <p:sp>
+        <p:nvSpPr>
+          <p:cNvPr id="14" name="Rounded Rectangle 13"/>
           <p:cNvSpPr/>
           <p:nvPr/>
         </p:nvSpPr>
         <p:spPr>
           <a:xfrm>
-            <a:off x="621792" y="6172200"/>
-            <a:ext cx="210312" cy="32004"/>
-          </a:xfrm>
-          <a:prstGeom prst="rect">
-            <a:avLst/>
+            <a:off x="9144000" y="1143000"/>
+            <a:ext cx="2148840" cy="2148840"/>
+          </a:xfrm>
+          <a:prstGeom prst="roundRect">
+            <a:avLst>
+              <a:gd name="adj" fmla="val 10000"/>
+            </a:avLst>
           </a:prstGeom>
           <a:solidFill>
-            <a:srgbClr val="39796F"/>
+            <a:srgbClr val="E6EFEB"/>
           </a:solidFill>
           <a:ln>
             <a:noFill/>
@@ -4443,20 +4653,228 @@
       </p:sp>
       <p:sp>
         <p:nvSpPr>
-          <p:cNvPr id="7" name="Rectangle 6"/>
+          <p:cNvPr id="15" name="TextBox 14"/>
+          <p:cNvSpPr txBox="1"/>
+          <p:nvPr/>
+        </p:nvSpPr>
+        <p:spPr>
+          <a:xfrm>
+            <a:off x="9555480" y="1417320"/>
+            <a:ext cx="1463040" cy="822960"/>
+          </a:xfrm>
+          <a:prstGeom prst="rect">
+            <a:avLst/>
+          </a:prstGeom>
+          <a:noFill/>
+        </p:spPr>
+        <p:txBody>
+          <a:bodyPr wrap="square" lIns="18288" tIns="18288" rIns="18288">
+            <a:spAutoFit/>
+          </a:bodyPr>
+          <a:lstStyle/>
+          <a:p>
+            <a:pPr>
+              <a:defRPr sz="2600" b="1">
+                <a:solidFill>
+                  <a:srgbClr val="39796F"/>
+                </a:solidFill>
+                <a:latin typeface="Aptos"/>
+              </a:defRPr>
+            </a:pPr>
+            <a:r>
+              <a:t>MBTI</a:t>
+            </a:r>
+          </a:p>
+        </p:txBody>
+      </p:sp>
+      <p:sp>
+        <p:nvSpPr>
+          <p:cNvPr id="16" name="TextBox 15"/>
+          <p:cNvSpPr txBox="1"/>
+          <p:nvPr/>
+        </p:nvSpPr>
+        <p:spPr>
+          <a:xfrm>
+            <a:off x="9784080" y="2029968"/>
+            <a:ext cx="1188720" cy="914400"/>
+          </a:xfrm>
+          <a:prstGeom prst="rect">
+            <a:avLst/>
+          </a:prstGeom>
+          <a:noFill/>
+        </p:spPr>
+        <p:txBody>
+          <a:bodyPr wrap="square" lIns="18288" tIns="18288" rIns="18288">
+            <a:spAutoFit/>
+          </a:bodyPr>
+          <a:lstStyle/>
+          <a:p>
+            <a:pPr>
+              <a:defRPr sz="5800" b="1">
+                <a:solidFill>
+                  <a:srgbClr val="39796F"/>
+                </a:solidFill>
+                <a:latin typeface="Aptos"/>
+              </a:defRPr>
+            </a:pPr>
+            <a:r>
+              <a:t>?</a:t>
+            </a:r>
+          </a:p>
+        </p:txBody>
+      </p:sp>
+      <p:sp>
+        <p:nvSpPr>
+          <p:cNvPr id="17" name="TextBox 16"/>
+          <p:cNvSpPr txBox="1"/>
+          <p:nvPr/>
+        </p:nvSpPr>
+        <p:spPr>
+          <a:xfrm>
+            <a:off x="731520" y="3200400"/>
+            <a:ext cx="10515600" cy="594360"/>
+          </a:xfrm>
+          <a:prstGeom prst="rect">
+            <a:avLst/>
+          </a:prstGeom>
+          <a:noFill/>
+        </p:spPr>
+        <p:txBody>
+          <a:bodyPr wrap="square" lIns="18288" tIns="18288" rIns="18288">
+            <a:spAutoFit/>
+          </a:bodyPr>
+          <a:lstStyle/>
+          <a:p>
+            <a:pPr>
+              <a:defRPr sz="2700" b="1">
+                <a:solidFill>
+                  <a:srgbClr val="39796F"/>
+                </a:solidFill>
+                <a:latin typeface="Aptos"/>
+              </a:defRPr>
+            </a:pPr>
+            <a:r>
+              <a:rPr dirty="0"/>
+              <a:t>What’s your MBTI?</a:t>
+            </a:r>
+          </a:p>
+        </p:txBody>
+      </p:sp>
+      <p:sp>
+        <p:nvSpPr>
+          <p:cNvPr id="18" name="TextBox 17"/>
+          <p:cNvSpPr txBox="1"/>
+          <p:nvPr/>
+        </p:nvSpPr>
+        <p:spPr>
+          <a:xfrm>
+            <a:off x="731520" y="3913632"/>
+            <a:ext cx="10515600" cy="594360"/>
+          </a:xfrm>
+          <a:prstGeom prst="rect">
+            <a:avLst/>
+          </a:prstGeom>
+          <a:noFill/>
+        </p:spPr>
+        <p:txBody>
+          <a:bodyPr wrap="square" lIns="18288" tIns="18288" rIns="18288">
+            <a:spAutoFit/>
+          </a:bodyPr>
+          <a:lstStyle/>
+          <a:p>
+            <a:pPr>
+              <a:defRPr sz="2300" b="0">
+                <a:solidFill>
+                  <a:srgbClr val="223B40"/>
+                </a:solidFill>
+                <a:latin typeface="Aptos"/>
+              </a:defRPr>
+            </a:pPr>
+            <a:r>
+              <a:rPr dirty="0"/>
+              <a:t>Do those four letters really tell us who you are?</a:t>
+            </a:r>
+          </a:p>
+        </p:txBody>
+      </p:sp>
+      <p:sp>
+        <p:nvSpPr>
+          <p:cNvPr id="19" name="TextBox 18"/>
+          <p:cNvSpPr txBox="1"/>
+          <p:nvPr/>
+        </p:nvSpPr>
+        <p:spPr>
+          <a:xfrm>
+            <a:off x="731520" y="4626864"/>
+            <a:ext cx="10515600" cy="594360"/>
+          </a:xfrm>
+          <a:prstGeom prst="rect">
+            <a:avLst/>
+          </a:prstGeom>
+          <a:noFill/>
+        </p:spPr>
+        <p:txBody>
+          <a:bodyPr wrap="square" lIns="18288" tIns="18288" rIns="18288">
+            <a:spAutoFit/>
+          </a:bodyPr>
+          <a:lstStyle/>
+          <a:p>
+            <a:pPr>
+              <a:defRPr sz="2300" b="0">
+                <a:solidFill>
+                  <a:srgbClr val="223B40"/>
+                </a:solidFill>
+                <a:latin typeface="Aptos"/>
+              </a:defRPr>
+            </a:pPr>
+            <a:r>
+              <a:t>Do we need to try so hard to find our authentic self?</a:t>
+            </a:r>
+          </a:p>
+        </p:txBody>
+      </p:sp>
+    </p:spTree>
+  </p:cSld>
+  <p:clrMapOvr>
+    <a:masterClrMapping/>
+  </p:clrMapOvr>
+</p:sld>
+</file>
+
+<file path=ppt/slides/slide10.xml><?xml version="1.0" encoding="utf-8"?>
+<p:sld xmlns:a="http://schemas.openxmlformats.org/drawingml/2006/main" xmlns:p="http://schemas.openxmlformats.org/presentationml/2006/main" xmlns:r="http://schemas.openxmlformats.org/officeDocument/2006/relationships">
+  <p:cSld>
+    <p:bg>
+      <p:bgPr>
+        <a:solidFill>
+          <a:srgbClr val="F7F8F4"/>
+        </a:solidFill>
+        <a:effectLst/>
+      </p:bgPr>
+    </p:bg>
+    <p:spTree>
+      <p:nvGrpSpPr>
+        <p:cNvPr id="1" name=""/>
+        <p:cNvGrpSpPr/>
+        <p:nvPr/>
+      </p:nvGrpSpPr>
+      <p:grpSpPr/>
+      <p:sp>
+        <p:nvSpPr>
+          <p:cNvPr id="2" name="Rectangle 1"/>
           <p:cNvSpPr/>
           <p:nvPr/>
         </p:nvSpPr>
         <p:spPr>
           <a:xfrm>
-            <a:off x="914400" y="6172200"/>
-            <a:ext cx="210312" cy="32004"/>
+            <a:off x="0" y="0"/>
+            <a:ext cx="146304" cy="6858000"/>
           </a:xfrm>
           <a:prstGeom prst="rect">
             <a:avLst/>
           </a:prstGeom>
           <a:solidFill>
-            <a:srgbClr val="D5DEDA"/>
+            <a:srgbClr val="39796F"/>
           </a:solidFill>
           <a:ln>
             <a:noFill/>
@@ -4481,26 +4899,97 @@
           <a:lstStyle/>
           <a:p>
             <a:pPr algn="ctr"/>
-            <a:endParaRPr/>
-          </a:p>
-        </p:txBody>
-      </p:sp>
-      <p:sp>
-        <p:nvSpPr>
-          <p:cNvPr id="8" name="Rectangle 7"/>
+          </a:p>
+        </p:txBody>
+      </p:sp>
+      <p:sp>
+        <p:nvSpPr>
+          <p:cNvPr id="3" name="TextBox 2"/>
+          <p:cNvSpPr txBox="1"/>
+          <p:nvPr/>
+        </p:nvSpPr>
+        <p:spPr>
+          <a:xfrm>
+            <a:off x="640080" y="320040"/>
+            <a:ext cx="10058400" cy="320040"/>
+          </a:xfrm>
+          <a:prstGeom prst="rect">
+            <a:avLst/>
+          </a:prstGeom>
+          <a:noFill/>
+        </p:spPr>
+        <p:txBody>
+          <a:bodyPr wrap="square" lIns="18288" rIns="18288">
+            <a:spAutoFit/>
+          </a:bodyPr>
+          <a:lstStyle/>
+          <a:p>
+            <a:pPr>
+              <a:defRPr sz="1100" b="0">
+                <a:solidFill>
+                  <a:srgbClr val="637575"/>
+                </a:solidFill>
+                <a:latin typeface="Aptos"/>
+              </a:defRPr>
+            </a:pPr>
+            <a:r>
+              <a:t>FINDING YOUR AUTHENTIC SELF OR NOT</a:t>
+            </a:r>
+          </a:p>
+        </p:txBody>
+      </p:sp>
+      <p:sp>
+        <p:nvSpPr>
+          <p:cNvPr id="4" name="TextBox 3"/>
+          <p:cNvSpPr txBox="1"/>
+          <p:nvPr/>
+        </p:nvSpPr>
+        <p:spPr>
+          <a:xfrm>
+            <a:off x="777240" y="2057400"/>
+            <a:ext cx="10607040" cy="1600200"/>
+          </a:xfrm>
+          <a:prstGeom prst="rect">
+            <a:avLst/>
+          </a:prstGeom>
+          <a:noFill/>
+        </p:spPr>
+        <p:txBody>
+          <a:bodyPr wrap="square" lIns="18288" rIns="18288">
+            <a:spAutoFit/>
+          </a:bodyPr>
+          <a:lstStyle/>
+          <a:p>
+            <a:pPr>
+              <a:defRPr sz="4300" b="1">
+                <a:solidFill>
+                  <a:srgbClr val="223B40"/>
+                </a:solidFill>
+                <a:latin typeface="Aptos"/>
+              </a:defRPr>
+            </a:pPr>
+            <a:r>
+              <a:t>So, what can we do?</a:t>
+            </a:r>
+          </a:p>
+        </p:txBody>
+      </p:sp>
+      <p:sp>
+        <p:nvSpPr>
+          <p:cNvPr id="5" name="Rectangle 4"/>
           <p:cNvSpPr/>
           <p:nvPr/>
         </p:nvSpPr>
         <p:spPr>
           <a:xfrm>
-            <a:off x="1207008" y="6172200"/>
-            <a:ext cx="210312" cy="32004"/>
+            <a:off x="822960" y="3904487"/>
+            <a:ext cx="914400" cy="50292"/>
           </a:xfrm>
           <a:prstGeom prst="rect">
             <a:avLst/>
           </a:prstGeom>
           <a:solidFill>
-            <a:srgbClr val="D5DEDA"/>
+            <a:srgbClr val="D7AF65"/>
           </a:solidFill>
           <a:ln>
             <a:noFill/>
@@ -4525,26 +5014,159 @@
           <a:lstStyle/>
           <a:p>
             <a:pPr algn="ctr"/>
-            <a:endParaRPr/>
-          </a:p>
-        </p:txBody>
-      </p:sp>
-      <p:sp>
-        <p:nvSpPr>
-          <p:cNvPr id="9" name="Rectangle 8"/>
+          </a:p>
+        </p:txBody>
+      </p:sp>
+      <p:sp>
+        <p:nvSpPr>
+          <p:cNvPr id="6" name="TextBox 5"/>
+          <p:cNvSpPr txBox="1"/>
+          <p:nvPr/>
+        </p:nvSpPr>
+        <p:spPr>
+          <a:xfrm>
+            <a:off x="777240" y="4251960"/>
+            <a:ext cx="10515600" cy="1005840"/>
+          </a:xfrm>
+          <a:prstGeom prst="rect">
+            <a:avLst/>
+          </a:prstGeom>
+          <a:noFill/>
+        </p:spPr>
+        <p:txBody>
+          <a:bodyPr wrap="square" lIns="18288" rIns="18288">
+            <a:spAutoFit/>
+          </a:bodyPr>
+          <a:lstStyle/>
+          <a:p>
+            <a:pPr>
+              <a:defRPr sz="2500" b="0">
+                <a:solidFill>
+                  <a:srgbClr val="637575"/>
+                </a:solidFill>
+                <a:latin typeface="Aptos"/>
+              </a:defRPr>
+            </a:pPr>
+            <a:r>
+              <a:t>When something matters, take time to think.</a:t>
+            </a:r>
+          </a:p>
+        </p:txBody>
+      </p:sp>
+      <p:sp>
+        <p:nvSpPr>
+          <p:cNvPr id="7" name="TextBox 6"/>
+          <p:cNvSpPr txBox="1"/>
+          <p:nvPr/>
+        </p:nvSpPr>
+        <p:spPr>
+          <a:xfrm>
+            <a:off x="594360" y="6437376"/>
+            <a:ext cx="9144000" cy="274320"/>
+          </a:xfrm>
+          <a:prstGeom prst="rect">
+            <a:avLst/>
+          </a:prstGeom>
+          <a:noFill/>
+        </p:spPr>
+        <p:txBody>
+          <a:bodyPr wrap="square" lIns="18288" rIns="18288">
+            <a:spAutoFit/>
+          </a:bodyPr>
+          <a:lstStyle/>
+          <a:p>
+            <a:pPr>
+              <a:defRPr sz="1000" b="0">
+                <a:solidFill>
+                  <a:srgbClr val="637575"/>
+                </a:solidFill>
+                <a:latin typeface="Aptos"/>
+              </a:defRPr>
+            </a:pPr>
+            <a:r>
+              <a:t>FROM IDEAS TO ACTION</a:t>
+            </a:r>
+          </a:p>
+        </p:txBody>
+      </p:sp>
+      <p:sp>
+        <p:nvSpPr>
+          <p:cNvPr id="8" name="TextBox 7"/>
+          <p:cNvSpPr txBox="1"/>
+          <p:nvPr/>
+        </p:nvSpPr>
+        <p:spPr>
+          <a:xfrm>
+            <a:off x="10972800" y="6400800"/>
+            <a:ext cx="594360" cy="274320"/>
+          </a:xfrm>
+          <a:prstGeom prst="rect">
+            <a:avLst/>
+          </a:prstGeom>
+          <a:noFill/>
+        </p:spPr>
+        <p:txBody>
+          <a:bodyPr wrap="square" lIns="18288" rIns="18288">
+            <a:spAutoFit/>
+          </a:bodyPr>
+          <a:lstStyle/>
+          <a:p>
+            <a:pPr>
+              <a:defRPr sz="1200" b="1">
+                <a:solidFill>
+                  <a:srgbClr val="637575"/>
+                </a:solidFill>
+                <a:latin typeface="Aptos"/>
+              </a:defRPr>
+            </a:pPr>
+            <a:r>
+              <a:t>07</a:t>
+            </a:r>
+          </a:p>
+        </p:txBody>
+      </p:sp>
+    </p:spTree>
+  </p:cSld>
+  <p:clrMapOvr>
+    <a:masterClrMapping/>
+  </p:clrMapOvr>
+</p:sld>
+</file>
+
+<file path=ppt/slides/slide11.xml><?xml version="1.0" encoding="utf-8"?>
+<p:sld xmlns:a="http://schemas.openxmlformats.org/drawingml/2006/main" xmlns:p="http://schemas.openxmlformats.org/presentationml/2006/main" xmlns:r="http://schemas.openxmlformats.org/officeDocument/2006/relationships">
+  <p:cSld>
+    <p:bg>
+      <p:bgPr>
+        <a:solidFill>
+          <a:srgbClr val="39796F"/>
+        </a:solidFill>
+        <a:effectLst/>
+      </p:bgPr>
+    </p:bg>
+    <p:spTree>
+      <p:nvGrpSpPr>
+        <p:cNvPr id="1" name=""/>
+        <p:cNvGrpSpPr/>
+        <p:nvPr/>
+      </p:nvGrpSpPr>
+      <p:grpSpPr/>
+      <p:sp>
+        <p:nvSpPr>
+          <p:cNvPr id="2" name="Rectangle 1"/>
           <p:cNvSpPr/>
           <p:nvPr/>
         </p:nvSpPr>
         <p:spPr>
           <a:xfrm>
-            <a:off x="1499616" y="6172200"/>
-            <a:ext cx="210312" cy="32004"/>
+            <a:off x="0" y="0"/>
+            <a:ext cx="146304" cy="6858000"/>
           </a:xfrm>
           <a:prstGeom prst="rect">
             <a:avLst/>
           </a:prstGeom>
           <a:solidFill>
-            <a:srgbClr val="D5DEDA"/>
+            <a:srgbClr val="D7AF65"/>
           </a:solidFill>
           <a:ln>
             <a:noFill/>
@@ -4569,26 +5191,126 @@
           <a:lstStyle/>
           <a:p>
             <a:pPr algn="ctr"/>
-            <a:endParaRPr/>
-          </a:p>
-        </p:txBody>
-      </p:sp>
-      <p:sp>
-        <p:nvSpPr>
-          <p:cNvPr id="10" name="Rectangle 9"/>
+          </a:p>
+        </p:txBody>
+      </p:sp>
+      <p:sp>
+        <p:nvSpPr>
+          <p:cNvPr id="3" name="TextBox 2"/>
+          <p:cNvSpPr txBox="1"/>
+          <p:nvPr/>
+        </p:nvSpPr>
+        <p:spPr>
+          <a:xfrm>
+            <a:off x="640080" y="320040"/>
+            <a:ext cx="10058400" cy="320040"/>
+          </a:xfrm>
+          <a:prstGeom prst="rect">
+            <a:avLst/>
+          </a:prstGeom>
+          <a:noFill/>
+        </p:spPr>
+        <p:txBody>
+          <a:bodyPr wrap="square" lIns="18288" rIns="18288">
+            <a:spAutoFit/>
+          </a:bodyPr>
+          <a:lstStyle/>
+          <a:p>
+            <a:pPr>
+              <a:defRPr sz="1100" b="0">
+                <a:solidFill>
+                  <a:srgbClr val="D7E8DF"/>
+                </a:solidFill>
+                <a:latin typeface="Aptos"/>
+              </a:defRPr>
+            </a:pPr>
+            <a:r>
+              <a:t>FINDING YOUR AUTHENTIC SELF OR NOT</a:t>
+            </a:r>
+          </a:p>
+        </p:txBody>
+      </p:sp>
+      <p:sp>
+        <p:nvSpPr>
+          <p:cNvPr id="4" name="TextBox 3"/>
+          <p:cNvSpPr txBox="1"/>
+          <p:nvPr/>
+        </p:nvSpPr>
+        <p:spPr>
+          <a:xfrm>
+            <a:off x="777240" y="2057400"/>
+            <a:ext cx="10607040" cy="2057400"/>
+          </a:xfrm>
+          <a:prstGeom prst="rect">
+            <a:avLst/>
+          </a:prstGeom>
+          <a:noFill/>
+        </p:spPr>
+        <p:txBody>
+          <a:bodyPr wrap="square" lIns="18288" rIns="18288">
+            <a:spAutoFit/>
+          </a:bodyPr>
+          <a:lstStyle/>
+          <a:p>
+            <a:pPr>
+              <a:defRPr sz="4300" b="1">
+                <a:solidFill>
+                  <a:srgbClr val="FFFFFF"/>
+                </a:solidFill>
+                <a:latin typeface="Aptos"/>
+              </a:defRPr>
+            </a:pPr>
+            <a:r>
+              <a:rPr sz="3600"/>
+              <a:t>You don’t need a final definition</a:t>
+            </a:r>
+          </a:p>
+          <a:p>
+            <a:pPr>
+              <a:defRPr sz="4300" b="1">
+                <a:solidFill>
+                  <a:srgbClr val="FFFFFF"/>
+                </a:solidFill>
+                <a:latin typeface="Aptos"/>
+              </a:defRPr>
+            </a:pPr>
+            <a:r>
+              <a:rPr sz="3600"/>
+              <a:t>of yourself to make choices</a:t>
+            </a:r>
+          </a:p>
+          <a:p>
+            <a:pPr>
+              <a:defRPr sz="4300" b="1">
+                <a:solidFill>
+                  <a:srgbClr val="FFFFFF"/>
+                </a:solidFill>
+                <a:latin typeface="Aptos"/>
+              </a:defRPr>
+            </a:pPr>
+            <a:r>
+              <a:rPr sz="3600"/>
+              <a:t>that matter to you.</a:t>
+            </a:r>
+          </a:p>
+        </p:txBody>
+      </p:sp>
+      <p:sp>
+        <p:nvSpPr>
+          <p:cNvPr id="5" name="Rectangle 4"/>
           <p:cNvSpPr/>
           <p:nvPr/>
         </p:nvSpPr>
         <p:spPr>
           <a:xfrm>
-            <a:off x="1792224" y="6172200"/>
-            <a:ext cx="210312" cy="32004"/>
+            <a:off x="822960" y="3904487"/>
+            <a:ext cx="914400" cy="50292"/>
           </a:xfrm>
           <a:prstGeom prst="rect">
             <a:avLst/>
           </a:prstGeom>
           <a:solidFill>
-            <a:srgbClr val="D5DEDA"/>
+            <a:srgbClr val="D7AF65"/>
           </a:solidFill>
           <a:ln>
             <a:noFill/>
@@ -4613,26 +5335,159 @@
           <a:lstStyle/>
           <a:p>
             <a:pPr algn="ctr"/>
-            <a:endParaRPr/>
-          </a:p>
-        </p:txBody>
-      </p:sp>
-      <p:sp>
-        <p:nvSpPr>
-          <p:cNvPr id="11" name="Rectangle 10"/>
+          </a:p>
+        </p:txBody>
+      </p:sp>
+      <p:sp>
+        <p:nvSpPr>
+          <p:cNvPr id="6" name="TextBox 5"/>
+          <p:cNvSpPr txBox="1"/>
+          <p:nvPr/>
+        </p:nvSpPr>
+        <p:spPr>
+          <a:xfrm>
+            <a:off x="777240" y="4251960"/>
+            <a:ext cx="10515600" cy="1005840"/>
+          </a:xfrm>
+          <a:prstGeom prst="rect">
+            <a:avLst/>
+          </a:prstGeom>
+          <a:noFill/>
+        </p:spPr>
+        <p:txBody>
+          <a:bodyPr wrap="square" lIns="18288" rIns="18288">
+            <a:spAutoFit/>
+          </a:bodyPr>
+          <a:lstStyle/>
+          <a:p>
+            <a:pPr>
+              <a:defRPr sz="2500" b="0">
+                <a:solidFill>
+                  <a:srgbClr val="D7E8DF"/>
+                </a:solidFill>
+                <a:latin typeface="Aptos"/>
+              </a:defRPr>
+            </a:pPr>
+            <a:r>
+              <a:t>Live your life. Think when it matters. Listen to others.</a:t>
+            </a:r>
+          </a:p>
+        </p:txBody>
+      </p:sp>
+      <p:sp>
+        <p:nvSpPr>
+          <p:cNvPr id="7" name="TextBox 6"/>
+          <p:cNvSpPr txBox="1"/>
+          <p:nvPr/>
+        </p:nvSpPr>
+        <p:spPr>
+          <a:xfrm>
+            <a:off x="594360" y="6437376"/>
+            <a:ext cx="9144000" cy="274320"/>
+          </a:xfrm>
+          <a:prstGeom prst="rect">
+            <a:avLst/>
+          </a:prstGeom>
+          <a:noFill/>
+        </p:spPr>
+        <p:txBody>
+          <a:bodyPr wrap="square" lIns="18288" rIns="18288">
+            <a:spAutoFit/>
+          </a:bodyPr>
+          <a:lstStyle/>
+          <a:p>
+            <a:pPr>
+              <a:defRPr sz="1000" b="0">
+                <a:solidFill>
+                  <a:srgbClr val="D7E8DF"/>
+                </a:solidFill>
+                <a:latin typeface="Aptos"/>
+              </a:defRPr>
+            </a:pPr>
+            <a:r>
+              <a:t>THE TAKEAWAY</a:t>
+            </a:r>
+          </a:p>
+        </p:txBody>
+      </p:sp>
+      <p:sp>
+        <p:nvSpPr>
+          <p:cNvPr id="8" name="TextBox 7"/>
+          <p:cNvSpPr txBox="1"/>
+          <p:nvPr/>
+        </p:nvSpPr>
+        <p:spPr>
+          <a:xfrm>
+            <a:off x="10972800" y="6400800"/>
+            <a:ext cx="594360" cy="274320"/>
+          </a:xfrm>
+          <a:prstGeom prst="rect">
+            <a:avLst/>
+          </a:prstGeom>
+          <a:noFill/>
+        </p:spPr>
+        <p:txBody>
+          <a:bodyPr wrap="square" lIns="18288" rIns="18288">
+            <a:spAutoFit/>
+          </a:bodyPr>
+          <a:lstStyle/>
+          <a:p>
+            <a:pPr>
+              <a:defRPr sz="1200" b="1">
+                <a:solidFill>
+                  <a:srgbClr val="D7E8DF"/>
+                </a:solidFill>
+                <a:latin typeface="Aptos"/>
+              </a:defRPr>
+            </a:pPr>
+            <a:r>
+              <a:t>10</a:t>
+            </a:r>
+          </a:p>
+        </p:txBody>
+      </p:sp>
+    </p:spTree>
+  </p:cSld>
+  <p:clrMapOvr>
+    <a:masterClrMapping/>
+  </p:clrMapOvr>
+</p:sld>
+</file>
+
+<file path=ppt/slides/slide12.xml><?xml version="1.0" encoding="utf-8"?>
+<p:sld xmlns:a="http://schemas.openxmlformats.org/drawingml/2006/main" xmlns:p="http://schemas.openxmlformats.org/presentationml/2006/main" xmlns:r="http://schemas.openxmlformats.org/officeDocument/2006/relationships">
+  <p:cSld>
+    <p:bg>
+      <p:bgPr>
+        <a:solidFill>
+          <a:srgbClr val="39796F"/>
+        </a:solidFill>
+        <a:effectLst/>
+      </p:bgPr>
+    </p:bg>
+    <p:spTree>
+      <p:nvGrpSpPr>
+        <p:cNvPr id="1" name=""/>
+        <p:cNvGrpSpPr/>
+        <p:nvPr/>
+      </p:nvGrpSpPr>
+      <p:grpSpPr/>
+      <p:sp>
+        <p:nvSpPr>
+          <p:cNvPr id="2" name="Rectangle 1"/>
           <p:cNvSpPr/>
           <p:nvPr/>
         </p:nvSpPr>
         <p:spPr>
           <a:xfrm>
-            <a:off x="2084832" y="6172200"/>
-            <a:ext cx="210312" cy="32004"/>
+            <a:off x="0" y="0"/>
+            <a:ext cx="146304" cy="6858000"/>
           </a:xfrm>
           <a:prstGeom prst="rect">
             <a:avLst/>
           </a:prstGeom>
           <a:solidFill>
-            <a:srgbClr val="D5DEDA"/>
+            <a:srgbClr val="D7AF65"/>
           </a:solidFill>
           <a:ln>
             <a:noFill/>
@@ -4657,26 +5512,97 @@
           <a:lstStyle/>
           <a:p>
             <a:pPr algn="ctr"/>
-            <a:endParaRPr/>
-          </a:p>
-        </p:txBody>
-      </p:sp>
-      <p:sp>
-        <p:nvSpPr>
-          <p:cNvPr id="12" name="Rectangle 11"/>
+          </a:p>
+        </p:txBody>
+      </p:sp>
+      <p:sp>
+        <p:nvSpPr>
+          <p:cNvPr id="3" name="TextBox 2"/>
+          <p:cNvSpPr txBox="1"/>
+          <p:nvPr/>
+        </p:nvSpPr>
+        <p:spPr>
+          <a:xfrm>
+            <a:off x="640080" y="320040"/>
+            <a:ext cx="10058400" cy="320040"/>
+          </a:xfrm>
+          <a:prstGeom prst="rect">
+            <a:avLst/>
+          </a:prstGeom>
+          <a:noFill/>
+        </p:spPr>
+        <p:txBody>
+          <a:bodyPr wrap="square" lIns="18288" rIns="18288">
+            <a:spAutoFit/>
+          </a:bodyPr>
+          <a:lstStyle/>
+          <a:p>
+            <a:pPr>
+              <a:defRPr sz="1100" b="0">
+                <a:solidFill>
+                  <a:srgbClr val="D7E8DF"/>
+                </a:solidFill>
+                <a:latin typeface="Aptos"/>
+              </a:defRPr>
+            </a:pPr>
+            <a:r>
+              <a:t>FINDING YOUR AUTHENTIC SELF OR NOT</a:t>
+            </a:r>
+          </a:p>
+        </p:txBody>
+      </p:sp>
+      <p:sp>
+        <p:nvSpPr>
+          <p:cNvPr id="4" name="TextBox 3"/>
+          <p:cNvSpPr txBox="1"/>
+          <p:nvPr/>
+        </p:nvSpPr>
+        <p:spPr>
+          <a:xfrm>
+            <a:off x="777240" y="2057400"/>
+            <a:ext cx="10607040" cy="1600200"/>
+          </a:xfrm>
+          <a:prstGeom prst="rect">
+            <a:avLst/>
+          </a:prstGeom>
+          <a:noFill/>
+        </p:spPr>
+        <p:txBody>
+          <a:bodyPr wrap="square" lIns="18288" rIns="18288">
+            <a:spAutoFit/>
+          </a:bodyPr>
+          <a:lstStyle/>
+          <a:p>
+            <a:pPr>
+              <a:defRPr sz="4300" b="1">
+                <a:solidFill>
+                  <a:srgbClr val="FFFFFF"/>
+                </a:solidFill>
+                <a:latin typeface="Aptos"/>
+              </a:defRPr>
+            </a:pPr>
+            <a:r>
+              <a:t>Thank you.</a:t>
+            </a:r>
+          </a:p>
+        </p:txBody>
+      </p:sp>
+      <p:sp>
+        <p:nvSpPr>
+          <p:cNvPr id="5" name="Rectangle 4"/>
           <p:cNvSpPr/>
           <p:nvPr/>
         </p:nvSpPr>
         <p:spPr>
           <a:xfrm>
-            <a:off x="2377440" y="6172200"/>
-            <a:ext cx="210312" cy="32004"/>
+            <a:off x="822960" y="3904487"/>
+            <a:ext cx="914400" cy="50292"/>
           </a:xfrm>
           <a:prstGeom prst="rect">
             <a:avLst/>
           </a:prstGeom>
           <a:solidFill>
-            <a:srgbClr val="D5DEDA"/>
+            <a:srgbClr val="D7AF65"/>
           </a:solidFill>
           <a:ln>
             <a:noFill/>
@@ -4701,20 +5627,19 @@
           <a:lstStyle/>
           <a:p>
             <a:pPr algn="ctr"/>
-            <a:endParaRPr/>
-          </a:p>
-        </p:txBody>
-      </p:sp>
-      <p:sp>
-        <p:nvSpPr>
-          <p:cNvPr id="13" name="TextBox 12"/>
+          </a:p>
+        </p:txBody>
+      </p:sp>
+      <p:sp>
+        <p:nvSpPr>
+          <p:cNvPr id="6" name="TextBox 5"/>
           <p:cNvSpPr txBox="1"/>
           <p:nvPr/>
         </p:nvSpPr>
         <p:spPr>
           <a:xfrm>
-            <a:off x="685800" y="1005840"/>
-            <a:ext cx="7315200" cy="1554480"/>
+            <a:off x="777240" y="4251960"/>
+            <a:ext cx="10515600" cy="1005840"/>
           </a:xfrm>
           <a:prstGeom prst="rect">
             <a:avLst/>
@@ -4722,94 +5647,32 @@
           <a:noFill/>
         </p:spPr>
         <p:txBody>
-          <a:bodyPr wrap="square" lIns="18288" tIns="18288" rIns="18288">
+          <a:bodyPr wrap="square" lIns="18288" rIns="18288">
             <a:spAutoFit/>
           </a:bodyPr>
           <a:lstStyle/>
           <a:p>
             <a:pPr>
-              <a:defRPr sz="4300" b="1">
-                <a:solidFill>
-                  <a:srgbClr val="223B40"/>
-                </a:solidFill>
-                <a:latin typeface="Aptos"/>
-              </a:defRPr>
-            </a:pPr>
-            <a:r>
-              <a:t>Finding Your Authentic Self</a:t>
-            </a:r>
-          </a:p>
-          <a:p>
-            <a:pPr>
-              <a:defRPr sz="4300" b="1">
-                <a:solidFill>
-                  <a:srgbClr val="223B40"/>
-                </a:solidFill>
-                <a:latin typeface="Aptos"/>
-              </a:defRPr>
-            </a:pPr>
-            <a:r>
-              <a:t>or Not?</a:t>
-            </a:r>
-          </a:p>
-        </p:txBody>
-      </p:sp>
-      <p:sp>
-        <p:nvSpPr>
-          <p:cNvPr id="14" name="Rounded Rectangle 13"/>
-          <p:cNvSpPr/>
-          <p:nvPr/>
-        </p:nvSpPr>
-        <p:spPr>
-          <a:xfrm>
-            <a:off x="9144000" y="1143000"/>
-            <a:ext cx="2148840" cy="2148840"/>
-          </a:xfrm>
-          <a:prstGeom prst="roundRect">
-            <a:avLst>
-              <a:gd name="adj" fmla="val 10000"/>
-            </a:avLst>
-          </a:prstGeom>
-          <a:solidFill>
-            <a:srgbClr val="E6EFEB"/>
-          </a:solidFill>
-          <a:ln>
-            <a:noFill/>
-          </a:ln>
-        </p:spPr>
-        <p:style>
-          <a:lnRef idx="1">
-            <a:schemeClr val="accent1"/>
-          </a:lnRef>
-          <a:fillRef idx="3">
-            <a:schemeClr val="accent1"/>
-          </a:fillRef>
-          <a:effectRef idx="2">
-            <a:schemeClr val="accent1"/>
-          </a:effectRef>
-          <a:fontRef idx="minor">
-            <a:schemeClr val="lt1"/>
-          </a:fontRef>
-        </p:style>
-        <p:txBody>
-          <a:bodyPr rtlCol="0" anchor="ctr"/>
-          <a:lstStyle/>
-          <a:p>
-            <a:pPr algn="ctr"/>
-            <a:endParaRPr/>
-          </a:p>
-        </p:txBody>
-      </p:sp>
-      <p:sp>
-        <p:nvSpPr>
-          <p:cNvPr id="15" name="TextBox 14"/>
+              <a:defRPr sz="2500" b="0">
+                <a:solidFill>
+                  <a:srgbClr val="D7E8DF"/>
+                </a:solidFill>
+                <a:latin typeface="Aptos"/>
+              </a:defRPr>
+            </a:pPr>
+          </a:p>
+        </p:txBody>
+      </p:sp>
+      <p:sp>
+        <p:nvSpPr>
+          <p:cNvPr id="7" name="TextBox 6"/>
           <p:cNvSpPr txBox="1"/>
           <p:nvPr/>
         </p:nvSpPr>
         <p:spPr>
           <a:xfrm>
-            <a:off x="9555480" y="1417320"/>
-            <a:ext cx="1463040" cy="822960"/>
+            <a:off x="594360" y="6437376"/>
+            <a:ext cx="9144000" cy="274320"/>
           </a:xfrm>
           <a:prstGeom prst="rect">
             <a:avLst/>
@@ -4817,35 +5680,35 @@
           <a:noFill/>
         </p:spPr>
         <p:txBody>
-          <a:bodyPr wrap="square" lIns="18288" tIns="18288" rIns="18288">
+          <a:bodyPr wrap="square" lIns="18288" rIns="18288">
             <a:spAutoFit/>
           </a:bodyPr>
           <a:lstStyle/>
           <a:p>
             <a:pPr>
-              <a:defRPr sz="2600" b="1">
-                <a:solidFill>
-                  <a:srgbClr val="39796F"/>
-                </a:solidFill>
-                <a:latin typeface="Aptos"/>
-              </a:defRPr>
-            </a:pPr>
-            <a:r>
-              <a:t>MBTI</a:t>
-            </a:r>
-          </a:p>
-        </p:txBody>
-      </p:sp>
-      <p:sp>
-        <p:nvSpPr>
-          <p:cNvPr id="16" name="TextBox 15"/>
+              <a:defRPr sz="1000" b="0">
+                <a:solidFill>
+                  <a:srgbClr val="D7E8DF"/>
+                </a:solidFill>
+                <a:latin typeface="Aptos"/>
+              </a:defRPr>
+            </a:pPr>
+            <a:r>
+              <a:t>END</a:t>
+            </a:r>
+          </a:p>
+        </p:txBody>
+      </p:sp>
+      <p:sp>
+        <p:nvSpPr>
+          <p:cNvPr id="8" name="TextBox 7"/>
           <p:cNvSpPr txBox="1"/>
           <p:nvPr/>
         </p:nvSpPr>
         <p:spPr>
           <a:xfrm>
-            <a:off x="9784080" y="2029968"/>
-            <a:ext cx="1188720" cy="914400"/>
+            <a:off x="10972800" y="6400800"/>
+            <a:ext cx="594360" cy="274320"/>
           </a:xfrm>
           <a:prstGeom prst="rect">
             <a:avLst/>
@@ -4853,131 +5716,21 @@
           <a:noFill/>
         </p:spPr>
         <p:txBody>
-          <a:bodyPr wrap="square" lIns="18288" tIns="18288" rIns="18288">
+          <a:bodyPr wrap="square" lIns="18288" rIns="18288">
             <a:spAutoFit/>
           </a:bodyPr>
           <a:lstStyle/>
           <a:p>
             <a:pPr>
-              <a:defRPr sz="5800" b="1">
-                <a:solidFill>
-                  <a:srgbClr val="39796F"/>
-                </a:solidFill>
-                <a:latin typeface="Aptos"/>
-              </a:defRPr>
-            </a:pPr>
-            <a:r>
-              <a:t>?</a:t>
-            </a:r>
-          </a:p>
-        </p:txBody>
-      </p:sp>
-      <p:sp>
-        <p:nvSpPr>
-          <p:cNvPr id="17" name="TextBox 16"/>
-          <p:cNvSpPr txBox="1"/>
-          <p:nvPr/>
-        </p:nvSpPr>
-        <p:spPr>
-          <a:xfrm>
-            <a:off x="731520" y="3200400"/>
-            <a:ext cx="10515600" cy="594360"/>
-          </a:xfrm>
-          <a:prstGeom prst="rect">
-            <a:avLst/>
-          </a:prstGeom>
-          <a:noFill/>
-        </p:spPr>
-        <p:txBody>
-          <a:bodyPr wrap="square" lIns="18288" tIns="18288" rIns="18288">
-            <a:spAutoFit/>
-          </a:bodyPr>
-          <a:lstStyle/>
-          <a:p>
-            <a:pPr>
-              <a:defRPr sz="2700" b="1">
-                <a:solidFill>
-                  <a:srgbClr val="39796F"/>
-                </a:solidFill>
-                <a:latin typeface="Aptos"/>
-              </a:defRPr>
-            </a:pPr>
-            <a:r>
-              <a:rPr dirty="0"/>
-              <a:t>What’s your MBTI?</a:t>
-            </a:r>
-          </a:p>
-        </p:txBody>
-      </p:sp>
-      <p:sp>
-        <p:nvSpPr>
-          <p:cNvPr id="18" name="TextBox 17"/>
-          <p:cNvSpPr txBox="1"/>
-          <p:nvPr/>
-        </p:nvSpPr>
-        <p:spPr>
-          <a:xfrm>
-            <a:off x="731520" y="3913632"/>
-            <a:ext cx="10515600" cy="594360"/>
-          </a:xfrm>
-          <a:prstGeom prst="rect">
-            <a:avLst/>
-          </a:prstGeom>
-          <a:noFill/>
-        </p:spPr>
-        <p:txBody>
-          <a:bodyPr wrap="square" lIns="18288" tIns="18288" rIns="18288">
-            <a:spAutoFit/>
-          </a:bodyPr>
-          <a:lstStyle/>
-          <a:p>
-            <a:pPr>
-              <a:defRPr sz="2300" b="0">
-                <a:solidFill>
-                  <a:srgbClr val="223B40"/>
-                </a:solidFill>
-                <a:latin typeface="Aptos"/>
-              </a:defRPr>
-            </a:pPr>
-            <a:r>
-              <a:rPr dirty="0"/>
-              <a:t>Do those four letters really tell us who you are?</a:t>
-            </a:r>
-          </a:p>
-        </p:txBody>
-      </p:sp>
-      <p:sp>
-        <p:nvSpPr>
-          <p:cNvPr id="19" name="TextBox 18"/>
-          <p:cNvSpPr txBox="1"/>
-          <p:nvPr/>
-        </p:nvSpPr>
-        <p:spPr>
-          <a:xfrm>
-            <a:off x="731520" y="4626864"/>
-            <a:ext cx="10515600" cy="594360"/>
-          </a:xfrm>
-          <a:prstGeom prst="rect">
-            <a:avLst/>
-          </a:prstGeom>
-          <a:noFill/>
-        </p:spPr>
-        <p:txBody>
-          <a:bodyPr wrap="square" lIns="18288" tIns="18288" rIns="18288">
-            <a:spAutoFit/>
-          </a:bodyPr>
-          <a:lstStyle/>
-          <a:p>
-            <a:pPr>
-              <a:defRPr sz="2300" b="0">
-                <a:solidFill>
-                  <a:srgbClr val="223B40"/>
-                </a:solidFill>
-                <a:latin typeface="Aptos"/>
-              </a:defRPr>
-            </a:pPr>
-            <a:r>
-              <a:t>Do we need to try so hard to find our authentic self?</a:t>
+              <a:defRPr sz="1200" b="1">
+                <a:solidFill>
+                  <a:srgbClr val="D7E8DF"/>
+                </a:solidFill>
+                <a:latin typeface="Aptos"/>
+              </a:defRPr>
+            </a:pPr>
+            <a:r>
+              <a:t>11</a:t>
             </a:r>
           </a:p>
         </p:txBody>
@@ -5169,314 +5922,6 @@
       </p:sp>
       <p:sp>
         <p:nvSpPr>
-          <p:cNvPr id="6" name="Rectangle 5"/>
-          <p:cNvSpPr/>
-          <p:nvPr/>
-        </p:nvSpPr>
-        <p:spPr>
-          <a:xfrm>
-            <a:off x="621792" y="6172200"/>
-            <a:ext cx="210312" cy="32004"/>
-          </a:xfrm>
-          <a:prstGeom prst="rect">
-            <a:avLst/>
-          </a:prstGeom>
-          <a:solidFill>
-            <a:srgbClr val="D5DEDA"/>
-          </a:solidFill>
-          <a:ln>
-            <a:noFill/>
-          </a:ln>
-        </p:spPr>
-        <p:style>
-          <a:lnRef idx="1">
-            <a:schemeClr val="accent1"/>
-          </a:lnRef>
-          <a:fillRef idx="3">
-            <a:schemeClr val="accent1"/>
-          </a:fillRef>
-          <a:effectRef idx="2">
-            <a:schemeClr val="accent1"/>
-          </a:effectRef>
-          <a:fontRef idx="minor">
-            <a:schemeClr val="lt1"/>
-          </a:fontRef>
-        </p:style>
-        <p:txBody>
-          <a:bodyPr rtlCol="0" anchor="ctr"/>
-          <a:lstStyle/>
-          <a:p>
-            <a:pPr algn="ctr"/>
-            <a:endParaRPr/>
-          </a:p>
-        </p:txBody>
-      </p:sp>
-      <p:sp>
-        <p:nvSpPr>
-          <p:cNvPr id="7" name="Rectangle 6"/>
-          <p:cNvSpPr/>
-          <p:nvPr/>
-        </p:nvSpPr>
-        <p:spPr>
-          <a:xfrm>
-            <a:off x="914400" y="6172200"/>
-            <a:ext cx="210312" cy="32004"/>
-          </a:xfrm>
-          <a:prstGeom prst="rect">
-            <a:avLst/>
-          </a:prstGeom>
-          <a:solidFill>
-            <a:srgbClr val="D5DEDA"/>
-          </a:solidFill>
-          <a:ln>
-            <a:noFill/>
-          </a:ln>
-        </p:spPr>
-        <p:style>
-          <a:lnRef idx="1">
-            <a:schemeClr val="accent1"/>
-          </a:lnRef>
-          <a:fillRef idx="3">
-            <a:schemeClr val="accent1"/>
-          </a:fillRef>
-          <a:effectRef idx="2">
-            <a:schemeClr val="accent1"/>
-          </a:effectRef>
-          <a:fontRef idx="minor">
-            <a:schemeClr val="lt1"/>
-          </a:fontRef>
-        </p:style>
-        <p:txBody>
-          <a:bodyPr rtlCol="0" anchor="ctr"/>
-          <a:lstStyle/>
-          <a:p>
-            <a:pPr algn="ctr"/>
-            <a:endParaRPr/>
-          </a:p>
-        </p:txBody>
-      </p:sp>
-      <p:sp>
-        <p:nvSpPr>
-          <p:cNvPr id="8" name="Rectangle 7"/>
-          <p:cNvSpPr/>
-          <p:nvPr/>
-        </p:nvSpPr>
-        <p:spPr>
-          <a:xfrm>
-            <a:off x="1207008" y="6172200"/>
-            <a:ext cx="210312" cy="32004"/>
-          </a:xfrm>
-          <a:prstGeom prst="rect">
-            <a:avLst/>
-          </a:prstGeom>
-          <a:solidFill>
-            <a:srgbClr val="39796F"/>
-          </a:solidFill>
-          <a:ln>
-            <a:noFill/>
-          </a:ln>
-        </p:spPr>
-        <p:style>
-          <a:lnRef idx="1">
-            <a:schemeClr val="accent1"/>
-          </a:lnRef>
-          <a:fillRef idx="3">
-            <a:schemeClr val="accent1"/>
-          </a:fillRef>
-          <a:effectRef idx="2">
-            <a:schemeClr val="accent1"/>
-          </a:effectRef>
-          <a:fontRef idx="minor">
-            <a:schemeClr val="lt1"/>
-          </a:fontRef>
-        </p:style>
-        <p:txBody>
-          <a:bodyPr rtlCol="0" anchor="ctr"/>
-          <a:lstStyle/>
-          <a:p>
-            <a:pPr algn="ctr"/>
-            <a:endParaRPr/>
-          </a:p>
-        </p:txBody>
-      </p:sp>
-      <p:sp>
-        <p:nvSpPr>
-          <p:cNvPr id="9" name="Rectangle 8"/>
-          <p:cNvSpPr/>
-          <p:nvPr/>
-        </p:nvSpPr>
-        <p:spPr>
-          <a:xfrm>
-            <a:off x="1499616" y="6172200"/>
-            <a:ext cx="210312" cy="32004"/>
-          </a:xfrm>
-          <a:prstGeom prst="rect">
-            <a:avLst/>
-          </a:prstGeom>
-          <a:solidFill>
-            <a:srgbClr val="D5DEDA"/>
-          </a:solidFill>
-          <a:ln>
-            <a:noFill/>
-          </a:ln>
-        </p:spPr>
-        <p:style>
-          <a:lnRef idx="1">
-            <a:schemeClr val="accent1"/>
-          </a:lnRef>
-          <a:fillRef idx="3">
-            <a:schemeClr val="accent1"/>
-          </a:fillRef>
-          <a:effectRef idx="2">
-            <a:schemeClr val="accent1"/>
-          </a:effectRef>
-          <a:fontRef idx="minor">
-            <a:schemeClr val="lt1"/>
-          </a:fontRef>
-        </p:style>
-        <p:txBody>
-          <a:bodyPr rtlCol="0" anchor="ctr"/>
-          <a:lstStyle/>
-          <a:p>
-            <a:pPr algn="ctr"/>
-            <a:endParaRPr/>
-          </a:p>
-        </p:txBody>
-      </p:sp>
-      <p:sp>
-        <p:nvSpPr>
-          <p:cNvPr id="10" name="Rectangle 9"/>
-          <p:cNvSpPr/>
-          <p:nvPr/>
-        </p:nvSpPr>
-        <p:spPr>
-          <a:xfrm>
-            <a:off x="1792224" y="6172200"/>
-            <a:ext cx="210312" cy="32004"/>
-          </a:xfrm>
-          <a:prstGeom prst="rect">
-            <a:avLst/>
-          </a:prstGeom>
-          <a:solidFill>
-            <a:srgbClr val="D5DEDA"/>
-          </a:solidFill>
-          <a:ln>
-            <a:noFill/>
-          </a:ln>
-        </p:spPr>
-        <p:style>
-          <a:lnRef idx="1">
-            <a:schemeClr val="accent1"/>
-          </a:lnRef>
-          <a:fillRef idx="3">
-            <a:schemeClr val="accent1"/>
-          </a:fillRef>
-          <a:effectRef idx="2">
-            <a:schemeClr val="accent1"/>
-          </a:effectRef>
-          <a:fontRef idx="minor">
-            <a:schemeClr val="lt1"/>
-          </a:fontRef>
-        </p:style>
-        <p:txBody>
-          <a:bodyPr rtlCol="0" anchor="ctr"/>
-          <a:lstStyle/>
-          <a:p>
-            <a:pPr algn="ctr"/>
-            <a:endParaRPr/>
-          </a:p>
-        </p:txBody>
-      </p:sp>
-      <p:sp>
-        <p:nvSpPr>
-          <p:cNvPr id="11" name="Rectangle 10"/>
-          <p:cNvSpPr/>
-          <p:nvPr/>
-        </p:nvSpPr>
-        <p:spPr>
-          <a:xfrm>
-            <a:off x="2084832" y="6172200"/>
-            <a:ext cx="210312" cy="32004"/>
-          </a:xfrm>
-          <a:prstGeom prst="rect">
-            <a:avLst/>
-          </a:prstGeom>
-          <a:solidFill>
-            <a:srgbClr val="D5DEDA"/>
-          </a:solidFill>
-          <a:ln>
-            <a:noFill/>
-          </a:ln>
-        </p:spPr>
-        <p:style>
-          <a:lnRef idx="1">
-            <a:schemeClr val="accent1"/>
-          </a:lnRef>
-          <a:fillRef idx="3">
-            <a:schemeClr val="accent1"/>
-          </a:fillRef>
-          <a:effectRef idx="2">
-            <a:schemeClr val="accent1"/>
-          </a:effectRef>
-          <a:fontRef idx="minor">
-            <a:schemeClr val="lt1"/>
-          </a:fontRef>
-        </p:style>
-        <p:txBody>
-          <a:bodyPr rtlCol="0" anchor="ctr"/>
-          <a:lstStyle/>
-          <a:p>
-            <a:pPr algn="ctr"/>
-            <a:endParaRPr/>
-          </a:p>
-        </p:txBody>
-      </p:sp>
-      <p:sp>
-        <p:nvSpPr>
-          <p:cNvPr id="12" name="Rectangle 11"/>
-          <p:cNvSpPr/>
-          <p:nvPr/>
-        </p:nvSpPr>
-        <p:spPr>
-          <a:xfrm>
-            <a:off x="2377440" y="6172200"/>
-            <a:ext cx="210312" cy="32004"/>
-          </a:xfrm>
-          <a:prstGeom prst="rect">
-            <a:avLst/>
-          </a:prstGeom>
-          <a:solidFill>
-            <a:srgbClr val="D5DEDA"/>
-          </a:solidFill>
-          <a:ln>
-            <a:noFill/>
-          </a:ln>
-        </p:spPr>
-        <p:style>
-          <a:lnRef idx="1">
-            <a:schemeClr val="accent1"/>
-          </a:lnRef>
-          <a:fillRef idx="3">
-            <a:schemeClr val="accent1"/>
-          </a:fillRef>
-          <a:effectRef idx="2">
-            <a:schemeClr val="accent1"/>
-          </a:effectRef>
-          <a:fontRef idx="minor">
-            <a:schemeClr val="lt1"/>
-          </a:fontRef>
-        </p:style>
-        <p:txBody>
-          <a:bodyPr rtlCol="0" anchor="ctr"/>
-          <a:lstStyle/>
-          <a:p>
-            <a:pPr algn="ctr"/>
-            <a:endParaRPr/>
-          </a:p>
-        </p:txBody>
-      </p:sp>
-      <p:sp>
-        <p:nvSpPr>
           <p:cNvPr id="13" name="TextBox 12"/>
           <p:cNvSpPr txBox="1"/>
           <p:nvPr/>
@@ -6019,314 +6464,6 @@
       </p:sp>
       <p:sp>
         <p:nvSpPr>
-          <p:cNvPr id="6" name="Rectangle 5"/>
-          <p:cNvSpPr/>
-          <p:nvPr/>
-        </p:nvSpPr>
-        <p:spPr>
-          <a:xfrm>
-            <a:off x="621792" y="6172200"/>
-            <a:ext cx="210312" cy="32004"/>
-          </a:xfrm>
-          <a:prstGeom prst="rect">
-            <a:avLst/>
-          </a:prstGeom>
-          <a:solidFill>
-            <a:srgbClr val="D5DEDA"/>
-          </a:solidFill>
-          <a:ln>
-            <a:noFill/>
-          </a:ln>
-        </p:spPr>
-        <p:style>
-          <a:lnRef idx="1">
-            <a:schemeClr val="accent1"/>
-          </a:lnRef>
-          <a:fillRef idx="3">
-            <a:schemeClr val="accent1"/>
-          </a:fillRef>
-          <a:effectRef idx="2">
-            <a:schemeClr val="accent1"/>
-          </a:effectRef>
-          <a:fontRef idx="minor">
-            <a:schemeClr val="lt1"/>
-          </a:fontRef>
-        </p:style>
-        <p:txBody>
-          <a:bodyPr rtlCol="0" anchor="ctr"/>
-          <a:lstStyle/>
-          <a:p>
-            <a:pPr algn="ctr"/>
-            <a:endParaRPr/>
-          </a:p>
-        </p:txBody>
-      </p:sp>
-      <p:sp>
-        <p:nvSpPr>
-          <p:cNvPr id="7" name="Rectangle 6"/>
-          <p:cNvSpPr/>
-          <p:nvPr/>
-        </p:nvSpPr>
-        <p:spPr>
-          <a:xfrm>
-            <a:off x="914400" y="6172200"/>
-            <a:ext cx="210312" cy="32004"/>
-          </a:xfrm>
-          <a:prstGeom prst="rect">
-            <a:avLst/>
-          </a:prstGeom>
-          <a:solidFill>
-            <a:srgbClr val="39796F"/>
-          </a:solidFill>
-          <a:ln>
-            <a:noFill/>
-          </a:ln>
-        </p:spPr>
-        <p:style>
-          <a:lnRef idx="1">
-            <a:schemeClr val="accent1"/>
-          </a:lnRef>
-          <a:fillRef idx="3">
-            <a:schemeClr val="accent1"/>
-          </a:fillRef>
-          <a:effectRef idx="2">
-            <a:schemeClr val="accent1"/>
-          </a:effectRef>
-          <a:fontRef idx="minor">
-            <a:schemeClr val="lt1"/>
-          </a:fontRef>
-        </p:style>
-        <p:txBody>
-          <a:bodyPr rtlCol="0" anchor="ctr"/>
-          <a:lstStyle/>
-          <a:p>
-            <a:pPr algn="ctr"/>
-            <a:endParaRPr/>
-          </a:p>
-        </p:txBody>
-      </p:sp>
-      <p:sp>
-        <p:nvSpPr>
-          <p:cNvPr id="8" name="Rectangle 7"/>
-          <p:cNvSpPr/>
-          <p:nvPr/>
-        </p:nvSpPr>
-        <p:spPr>
-          <a:xfrm>
-            <a:off x="1207008" y="6172200"/>
-            <a:ext cx="210312" cy="32004"/>
-          </a:xfrm>
-          <a:prstGeom prst="rect">
-            <a:avLst/>
-          </a:prstGeom>
-          <a:solidFill>
-            <a:srgbClr val="D5DEDA"/>
-          </a:solidFill>
-          <a:ln>
-            <a:noFill/>
-          </a:ln>
-        </p:spPr>
-        <p:style>
-          <a:lnRef idx="1">
-            <a:schemeClr val="accent1"/>
-          </a:lnRef>
-          <a:fillRef idx="3">
-            <a:schemeClr val="accent1"/>
-          </a:fillRef>
-          <a:effectRef idx="2">
-            <a:schemeClr val="accent1"/>
-          </a:effectRef>
-          <a:fontRef idx="minor">
-            <a:schemeClr val="lt1"/>
-          </a:fontRef>
-        </p:style>
-        <p:txBody>
-          <a:bodyPr rtlCol="0" anchor="ctr"/>
-          <a:lstStyle/>
-          <a:p>
-            <a:pPr algn="ctr"/>
-            <a:endParaRPr/>
-          </a:p>
-        </p:txBody>
-      </p:sp>
-      <p:sp>
-        <p:nvSpPr>
-          <p:cNvPr id="9" name="Rectangle 8"/>
-          <p:cNvSpPr/>
-          <p:nvPr/>
-        </p:nvSpPr>
-        <p:spPr>
-          <a:xfrm>
-            <a:off x="1499616" y="6172200"/>
-            <a:ext cx="210312" cy="32004"/>
-          </a:xfrm>
-          <a:prstGeom prst="rect">
-            <a:avLst/>
-          </a:prstGeom>
-          <a:solidFill>
-            <a:srgbClr val="D5DEDA"/>
-          </a:solidFill>
-          <a:ln>
-            <a:noFill/>
-          </a:ln>
-        </p:spPr>
-        <p:style>
-          <a:lnRef idx="1">
-            <a:schemeClr val="accent1"/>
-          </a:lnRef>
-          <a:fillRef idx="3">
-            <a:schemeClr val="accent1"/>
-          </a:fillRef>
-          <a:effectRef idx="2">
-            <a:schemeClr val="accent1"/>
-          </a:effectRef>
-          <a:fontRef idx="minor">
-            <a:schemeClr val="lt1"/>
-          </a:fontRef>
-        </p:style>
-        <p:txBody>
-          <a:bodyPr rtlCol="0" anchor="ctr"/>
-          <a:lstStyle/>
-          <a:p>
-            <a:pPr algn="ctr"/>
-            <a:endParaRPr/>
-          </a:p>
-        </p:txBody>
-      </p:sp>
-      <p:sp>
-        <p:nvSpPr>
-          <p:cNvPr id="10" name="Rectangle 9"/>
-          <p:cNvSpPr/>
-          <p:nvPr/>
-        </p:nvSpPr>
-        <p:spPr>
-          <a:xfrm>
-            <a:off x="1792224" y="6172200"/>
-            <a:ext cx="210312" cy="32004"/>
-          </a:xfrm>
-          <a:prstGeom prst="rect">
-            <a:avLst/>
-          </a:prstGeom>
-          <a:solidFill>
-            <a:srgbClr val="D5DEDA"/>
-          </a:solidFill>
-          <a:ln>
-            <a:noFill/>
-          </a:ln>
-        </p:spPr>
-        <p:style>
-          <a:lnRef idx="1">
-            <a:schemeClr val="accent1"/>
-          </a:lnRef>
-          <a:fillRef idx="3">
-            <a:schemeClr val="accent1"/>
-          </a:fillRef>
-          <a:effectRef idx="2">
-            <a:schemeClr val="accent1"/>
-          </a:effectRef>
-          <a:fontRef idx="minor">
-            <a:schemeClr val="lt1"/>
-          </a:fontRef>
-        </p:style>
-        <p:txBody>
-          <a:bodyPr rtlCol="0" anchor="ctr"/>
-          <a:lstStyle/>
-          <a:p>
-            <a:pPr algn="ctr"/>
-            <a:endParaRPr/>
-          </a:p>
-        </p:txBody>
-      </p:sp>
-      <p:sp>
-        <p:nvSpPr>
-          <p:cNvPr id="11" name="Rectangle 10"/>
-          <p:cNvSpPr/>
-          <p:nvPr/>
-        </p:nvSpPr>
-        <p:spPr>
-          <a:xfrm>
-            <a:off x="2084832" y="6172200"/>
-            <a:ext cx="210312" cy="32004"/>
-          </a:xfrm>
-          <a:prstGeom prst="rect">
-            <a:avLst/>
-          </a:prstGeom>
-          <a:solidFill>
-            <a:srgbClr val="D5DEDA"/>
-          </a:solidFill>
-          <a:ln>
-            <a:noFill/>
-          </a:ln>
-        </p:spPr>
-        <p:style>
-          <a:lnRef idx="1">
-            <a:schemeClr val="accent1"/>
-          </a:lnRef>
-          <a:fillRef idx="3">
-            <a:schemeClr val="accent1"/>
-          </a:fillRef>
-          <a:effectRef idx="2">
-            <a:schemeClr val="accent1"/>
-          </a:effectRef>
-          <a:fontRef idx="minor">
-            <a:schemeClr val="lt1"/>
-          </a:fontRef>
-        </p:style>
-        <p:txBody>
-          <a:bodyPr rtlCol="0" anchor="ctr"/>
-          <a:lstStyle/>
-          <a:p>
-            <a:pPr algn="ctr"/>
-            <a:endParaRPr/>
-          </a:p>
-        </p:txBody>
-      </p:sp>
-      <p:sp>
-        <p:nvSpPr>
-          <p:cNvPr id="12" name="Rectangle 11"/>
-          <p:cNvSpPr/>
-          <p:nvPr/>
-        </p:nvSpPr>
-        <p:spPr>
-          <a:xfrm>
-            <a:off x="2377440" y="6172200"/>
-            <a:ext cx="210312" cy="32004"/>
-          </a:xfrm>
-          <a:prstGeom prst="rect">
-            <a:avLst/>
-          </a:prstGeom>
-          <a:solidFill>
-            <a:srgbClr val="D5DEDA"/>
-          </a:solidFill>
-          <a:ln>
-            <a:noFill/>
-          </a:ln>
-        </p:spPr>
-        <p:style>
-          <a:lnRef idx="1">
-            <a:schemeClr val="accent1"/>
-          </a:lnRef>
-          <a:fillRef idx="3">
-            <a:schemeClr val="accent1"/>
-          </a:fillRef>
-          <a:effectRef idx="2">
-            <a:schemeClr val="accent1"/>
-          </a:effectRef>
-          <a:fontRef idx="minor">
-            <a:schemeClr val="lt1"/>
-          </a:fontRef>
-        </p:style>
-        <p:txBody>
-          <a:bodyPr rtlCol="0" anchor="ctr"/>
-          <a:lstStyle/>
-          <a:p>
-            <a:pPr algn="ctr"/>
-            <a:endParaRPr/>
-          </a:p>
-        </p:txBody>
-      </p:sp>
-      <p:sp>
-        <p:nvSpPr>
           <p:cNvPr id="13" name="TextBox 12"/>
           <p:cNvSpPr txBox="1"/>
           <p:nvPr/>
@@ -7029,314 +7166,6 @@
       </p:sp>
       <p:sp>
         <p:nvSpPr>
-          <p:cNvPr id="6" name="Rectangle 5"/>
-          <p:cNvSpPr/>
-          <p:nvPr/>
-        </p:nvSpPr>
-        <p:spPr>
-          <a:xfrm>
-            <a:off x="621792" y="6172200"/>
-            <a:ext cx="210312" cy="32004"/>
-          </a:xfrm>
-          <a:prstGeom prst="rect">
-            <a:avLst/>
-          </a:prstGeom>
-          <a:solidFill>
-            <a:srgbClr val="D5DEDA"/>
-          </a:solidFill>
-          <a:ln>
-            <a:noFill/>
-          </a:ln>
-        </p:spPr>
-        <p:style>
-          <a:lnRef idx="1">
-            <a:schemeClr val="accent1"/>
-          </a:lnRef>
-          <a:fillRef idx="3">
-            <a:schemeClr val="accent1"/>
-          </a:fillRef>
-          <a:effectRef idx="2">
-            <a:schemeClr val="accent1"/>
-          </a:effectRef>
-          <a:fontRef idx="minor">
-            <a:schemeClr val="lt1"/>
-          </a:fontRef>
-        </p:style>
-        <p:txBody>
-          <a:bodyPr rtlCol="0" anchor="ctr"/>
-          <a:lstStyle/>
-          <a:p>
-            <a:pPr algn="ctr"/>
-            <a:endParaRPr/>
-          </a:p>
-        </p:txBody>
-      </p:sp>
-      <p:sp>
-        <p:nvSpPr>
-          <p:cNvPr id="7" name="Rectangle 6"/>
-          <p:cNvSpPr/>
-          <p:nvPr/>
-        </p:nvSpPr>
-        <p:spPr>
-          <a:xfrm>
-            <a:off x="914400" y="6172200"/>
-            <a:ext cx="210312" cy="32004"/>
-          </a:xfrm>
-          <a:prstGeom prst="rect">
-            <a:avLst/>
-          </a:prstGeom>
-          <a:solidFill>
-            <a:srgbClr val="D5DEDA"/>
-          </a:solidFill>
-          <a:ln>
-            <a:noFill/>
-          </a:ln>
-        </p:spPr>
-        <p:style>
-          <a:lnRef idx="1">
-            <a:schemeClr val="accent1"/>
-          </a:lnRef>
-          <a:fillRef idx="3">
-            <a:schemeClr val="accent1"/>
-          </a:fillRef>
-          <a:effectRef idx="2">
-            <a:schemeClr val="accent1"/>
-          </a:effectRef>
-          <a:fontRef idx="minor">
-            <a:schemeClr val="lt1"/>
-          </a:fontRef>
-        </p:style>
-        <p:txBody>
-          <a:bodyPr rtlCol="0" anchor="ctr"/>
-          <a:lstStyle/>
-          <a:p>
-            <a:pPr algn="ctr"/>
-            <a:endParaRPr/>
-          </a:p>
-        </p:txBody>
-      </p:sp>
-      <p:sp>
-        <p:nvSpPr>
-          <p:cNvPr id="8" name="Rectangle 7"/>
-          <p:cNvSpPr/>
-          <p:nvPr/>
-        </p:nvSpPr>
-        <p:spPr>
-          <a:xfrm>
-            <a:off x="1207008" y="6172200"/>
-            <a:ext cx="210312" cy="32004"/>
-          </a:xfrm>
-          <a:prstGeom prst="rect">
-            <a:avLst/>
-          </a:prstGeom>
-          <a:solidFill>
-            <a:srgbClr val="D5DEDA"/>
-          </a:solidFill>
-          <a:ln>
-            <a:noFill/>
-          </a:ln>
-        </p:spPr>
-        <p:style>
-          <a:lnRef idx="1">
-            <a:schemeClr val="accent1"/>
-          </a:lnRef>
-          <a:fillRef idx="3">
-            <a:schemeClr val="accent1"/>
-          </a:fillRef>
-          <a:effectRef idx="2">
-            <a:schemeClr val="accent1"/>
-          </a:effectRef>
-          <a:fontRef idx="minor">
-            <a:schemeClr val="lt1"/>
-          </a:fontRef>
-        </p:style>
-        <p:txBody>
-          <a:bodyPr rtlCol="0" anchor="ctr"/>
-          <a:lstStyle/>
-          <a:p>
-            <a:pPr algn="ctr"/>
-            <a:endParaRPr/>
-          </a:p>
-        </p:txBody>
-      </p:sp>
-      <p:sp>
-        <p:nvSpPr>
-          <p:cNvPr id="9" name="Rectangle 8"/>
-          <p:cNvSpPr/>
-          <p:nvPr/>
-        </p:nvSpPr>
-        <p:spPr>
-          <a:xfrm>
-            <a:off x="1499616" y="6172200"/>
-            <a:ext cx="210312" cy="32004"/>
-          </a:xfrm>
-          <a:prstGeom prst="rect">
-            <a:avLst/>
-          </a:prstGeom>
-          <a:solidFill>
-            <a:srgbClr val="39796F"/>
-          </a:solidFill>
-          <a:ln>
-            <a:noFill/>
-          </a:ln>
-        </p:spPr>
-        <p:style>
-          <a:lnRef idx="1">
-            <a:schemeClr val="accent1"/>
-          </a:lnRef>
-          <a:fillRef idx="3">
-            <a:schemeClr val="accent1"/>
-          </a:fillRef>
-          <a:effectRef idx="2">
-            <a:schemeClr val="accent1"/>
-          </a:effectRef>
-          <a:fontRef idx="minor">
-            <a:schemeClr val="lt1"/>
-          </a:fontRef>
-        </p:style>
-        <p:txBody>
-          <a:bodyPr rtlCol="0" anchor="ctr"/>
-          <a:lstStyle/>
-          <a:p>
-            <a:pPr algn="ctr"/>
-            <a:endParaRPr/>
-          </a:p>
-        </p:txBody>
-      </p:sp>
-      <p:sp>
-        <p:nvSpPr>
-          <p:cNvPr id="10" name="Rectangle 9"/>
-          <p:cNvSpPr/>
-          <p:nvPr/>
-        </p:nvSpPr>
-        <p:spPr>
-          <a:xfrm>
-            <a:off x="1792224" y="6172200"/>
-            <a:ext cx="210312" cy="32004"/>
-          </a:xfrm>
-          <a:prstGeom prst="rect">
-            <a:avLst/>
-          </a:prstGeom>
-          <a:solidFill>
-            <a:srgbClr val="D5DEDA"/>
-          </a:solidFill>
-          <a:ln>
-            <a:noFill/>
-          </a:ln>
-        </p:spPr>
-        <p:style>
-          <a:lnRef idx="1">
-            <a:schemeClr val="accent1"/>
-          </a:lnRef>
-          <a:fillRef idx="3">
-            <a:schemeClr val="accent1"/>
-          </a:fillRef>
-          <a:effectRef idx="2">
-            <a:schemeClr val="accent1"/>
-          </a:effectRef>
-          <a:fontRef idx="minor">
-            <a:schemeClr val="lt1"/>
-          </a:fontRef>
-        </p:style>
-        <p:txBody>
-          <a:bodyPr rtlCol="0" anchor="ctr"/>
-          <a:lstStyle/>
-          <a:p>
-            <a:pPr algn="ctr"/>
-            <a:endParaRPr/>
-          </a:p>
-        </p:txBody>
-      </p:sp>
-      <p:sp>
-        <p:nvSpPr>
-          <p:cNvPr id="11" name="Rectangle 10"/>
-          <p:cNvSpPr/>
-          <p:nvPr/>
-        </p:nvSpPr>
-        <p:spPr>
-          <a:xfrm>
-            <a:off x="2084832" y="6172200"/>
-            <a:ext cx="210312" cy="32004"/>
-          </a:xfrm>
-          <a:prstGeom prst="rect">
-            <a:avLst/>
-          </a:prstGeom>
-          <a:solidFill>
-            <a:srgbClr val="D5DEDA"/>
-          </a:solidFill>
-          <a:ln>
-            <a:noFill/>
-          </a:ln>
-        </p:spPr>
-        <p:style>
-          <a:lnRef idx="1">
-            <a:schemeClr val="accent1"/>
-          </a:lnRef>
-          <a:fillRef idx="3">
-            <a:schemeClr val="accent1"/>
-          </a:fillRef>
-          <a:effectRef idx="2">
-            <a:schemeClr val="accent1"/>
-          </a:effectRef>
-          <a:fontRef idx="minor">
-            <a:schemeClr val="lt1"/>
-          </a:fontRef>
-        </p:style>
-        <p:txBody>
-          <a:bodyPr rtlCol="0" anchor="ctr"/>
-          <a:lstStyle/>
-          <a:p>
-            <a:pPr algn="ctr"/>
-            <a:endParaRPr/>
-          </a:p>
-        </p:txBody>
-      </p:sp>
-      <p:sp>
-        <p:nvSpPr>
-          <p:cNvPr id="12" name="Rectangle 11"/>
-          <p:cNvSpPr/>
-          <p:nvPr/>
-        </p:nvSpPr>
-        <p:spPr>
-          <a:xfrm>
-            <a:off x="2377440" y="6172200"/>
-            <a:ext cx="210312" cy="32004"/>
-          </a:xfrm>
-          <a:prstGeom prst="rect">
-            <a:avLst/>
-          </a:prstGeom>
-          <a:solidFill>
-            <a:srgbClr val="D5DEDA"/>
-          </a:solidFill>
-          <a:ln>
-            <a:noFill/>
-          </a:ln>
-        </p:spPr>
-        <p:style>
-          <a:lnRef idx="1">
-            <a:schemeClr val="accent1"/>
-          </a:lnRef>
-          <a:fillRef idx="3">
-            <a:schemeClr val="accent1"/>
-          </a:fillRef>
-          <a:effectRef idx="2">
-            <a:schemeClr val="accent1"/>
-          </a:effectRef>
-          <a:fontRef idx="minor">
-            <a:schemeClr val="lt1"/>
-          </a:fontRef>
-        </p:style>
-        <p:txBody>
-          <a:bodyPr rtlCol="0" anchor="ctr"/>
-          <a:lstStyle/>
-          <a:p>
-            <a:pPr algn="ctr"/>
-            <a:endParaRPr/>
-          </a:p>
-        </p:txBody>
-      </p:sp>
-      <p:sp>
-        <p:nvSpPr>
           <p:cNvPr id="13" name="TextBox 12"/>
           <p:cNvSpPr txBox="1"/>
           <p:nvPr/>
@@ -7830,20 +7659,114 @@
       </p:sp>
       <p:sp>
         <p:nvSpPr>
-          <p:cNvPr id="6" name="Rectangle 5"/>
+          <p:cNvPr id="13" name="TextBox 12"/>
+          <p:cNvSpPr txBox="1"/>
+          <p:nvPr/>
+        </p:nvSpPr>
+        <p:spPr>
+          <a:xfrm>
+            <a:off x="685800" y="941832"/>
+            <a:ext cx="10881360" cy="731520"/>
+          </a:xfrm>
+          <a:prstGeom prst="rect">
+            <a:avLst/>
+          </a:prstGeom>
+          <a:noFill/>
+        </p:spPr>
+        <p:txBody>
+          <a:bodyPr wrap="square" lIns="18288" tIns="18288" rIns="18288">
+            <a:spAutoFit/>
+          </a:bodyPr>
+          <a:lstStyle/>
+          <a:p>
+            <a:pPr>
+              <a:defRPr sz="3500" b="1">
+                <a:solidFill>
+                  <a:srgbClr val="223B40"/>
+                </a:solidFill>
+                <a:latin typeface="Aptos"/>
+              </a:defRPr>
+            </a:pPr>
+            <a:r>
+              <a:rPr dirty="0"/>
+              <a:t>We also change over time.</a:t>
+            </a:r>
+          </a:p>
+        </p:txBody>
+      </p:sp>
+      <p:sp>
+        <p:nvSpPr>
+          <p:cNvPr id="14" name="TextBox 13"/>
+          <p:cNvSpPr txBox="1"/>
+          <p:nvPr/>
+        </p:nvSpPr>
+        <p:spPr>
+          <a:xfrm>
+            <a:off x="731520" y="1755648"/>
+            <a:ext cx="10607040" cy="457200"/>
+          </a:xfrm>
+          <a:prstGeom prst="rect">
+            <a:avLst/>
+          </a:prstGeom>
+          <a:noFill/>
+        </p:spPr>
+        <p:txBody>
+          <a:bodyPr wrap="square" lIns="18288" tIns="18288" rIns="18288">
+            <a:spAutoFit/>
+          </a:bodyPr>
+          <a:lstStyle/>
+          <a:p>
+            <a:pPr>
+              <a:defRPr sz="2200" b="0">
+                <a:solidFill>
+                  <a:srgbClr val="637575"/>
+                </a:solidFill>
+                <a:latin typeface="Aptos"/>
+              </a:defRPr>
+            </a:pPr>
+            <a:r>
+              <a:rPr dirty="0"/>
+              <a:t>1,795 people · fifty years later</a:t>
+            </a:r>
+          </a:p>
+        </p:txBody>
+      </p:sp>
+      <p:graphicFrame>
+        <p:nvGraphicFramePr>
+          <p:cNvPr id="15" name="Chart 14"/>
+          <p:cNvGraphicFramePr>
+            <a:graphicFrameLocks noGrp="1"/>
+          </p:cNvGraphicFramePr>
+          <p:nvPr/>
+        </p:nvGraphicFramePr>
+        <p:xfrm>
+          <a:off x="731520" y="2331720"/>
+          <a:ext cx="7818120" cy="2971800"/>
+        </p:xfrm>
+        <a:graphic>
+          <a:graphicData uri="http://schemas.openxmlformats.org/drawingml/2006/chart">
+            <c:chart xmlns:c="http://schemas.openxmlformats.org/drawingml/2006/chart" xmlns:r="http://schemas.openxmlformats.org/officeDocument/2006/relationships" r:id="rId3"/>
+          </a:graphicData>
+        </a:graphic>
+      </p:graphicFrame>
+      <p:sp>
+        <p:nvSpPr>
+          <p:cNvPr id="16" name="Rounded Rectangle 15"/>
           <p:cNvSpPr/>
           <p:nvPr/>
         </p:nvSpPr>
         <p:spPr>
           <a:xfrm>
-            <a:off x="621792" y="6172200"/>
-            <a:ext cx="210312" cy="32004"/>
-          </a:xfrm>
-          <a:prstGeom prst="rect">
-            <a:avLst/>
+            <a:off x="8869680" y="2423160"/>
+            <a:ext cx="2514600" cy="2697480"/>
+          </a:xfrm>
+          <a:prstGeom prst="roundRect">
+            <a:avLst>
+              <a:gd name="adj" fmla="val 10000"/>
+            </a:avLst>
           </a:prstGeom>
           <a:solidFill>
-            <a:srgbClr val="D5DEDA"/>
+            <a:srgbClr val="E6EFEB"/>
           </a:solidFill>
           <a:ln>
             <a:noFill/>
@@ -7874,408 +7797,6 @@
       </p:sp>
       <p:sp>
         <p:nvSpPr>
-          <p:cNvPr id="7" name="Rectangle 6"/>
-          <p:cNvSpPr/>
-          <p:nvPr/>
-        </p:nvSpPr>
-        <p:spPr>
-          <a:xfrm>
-            <a:off x="914400" y="6172200"/>
-            <a:ext cx="210312" cy="32004"/>
-          </a:xfrm>
-          <a:prstGeom prst="rect">
-            <a:avLst/>
-          </a:prstGeom>
-          <a:solidFill>
-            <a:srgbClr val="D5DEDA"/>
-          </a:solidFill>
-          <a:ln>
-            <a:noFill/>
-          </a:ln>
-        </p:spPr>
-        <p:style>
-          <a:lnRef idx="1">
-            <a:schemeClr val="accent1"/>
-          </a:lnRef>
-          <a:fillRef idx="3">
-            <a:schemeClr val="accent1"/>
-          </a:fillRef>
-          <a:effectRef idx="2">
-            <a:schemeClr val="accent1"/>
-          </a:effectRef>
-          <a:fontRef idx="minor">
-            <a:schemeClr val="lt1"/>
-          </a:fontRef>
-        </p:style>
-        <p:txBody>
-          <a:bodyPr rtlCol="0" anchor="ctr"/>
-          <a:lstStyle/>
-          <a:p>
-            <a:pPr algn="ctr"/>
-            <a:endParaRPr/>
-          </a:p>
-        </p:txBody>
-      </p:sp>
-      <p:sp>
-        <p:nvSpPr>
-          <p:cNvPr id="8" name="Rectangle 7"/>
-          <p:cNvSpPr/>
-          <p:nvPr/>
-        </p:nvSpPr>
-        <p:spPr>
-          <a:xfrm>
-            <a:off x="1207008" y="6172200"/>
-            <a:ext cx="210312" cy="32004"/>
-          </a:xfrm>
-          <a:prstGeom prst="rect">
-            <a:avLst/>
-          </a:prstGeom>
-          <a:solidFill>
-            <a:srgbClr val="D5DEDA"/>
-          </a:solidFill>
-          <a:ln>
-            <a:noFill/>
-          </a:ln>
-        </p:spPr>
-        <p:style>
-          <a:lnRef idx="1">
-            <a:schemeClr val="accent1"/>
-          </a:lnRef>
-          <a:fillRef idx="3">
-            <a:schemeClr val="accent1"/>
-          </a:fillRef>
-          <a:effectRef idx="2">
-            <a:schemeClr val="accent1"/>
-          </a:effectRef>
-          <a:fontRef idx="minor">
-            <a:schemeClr val="lt1"/>
-          </a:fontRef>
-        </p:style>
-        <p:txBody>
-          <a:bodyPr rtlCol="0" anchor="ctr"/>
-          <a:lstStyle/>
-          <a:p>
-            <a:pPr algn="ctr"/>
-            <a:endParaRPr/>
-          </a:p>
-        </p:txBody>
-      </p:sp>
-      <p:sp>
-        <p:nvSpPr>
-          <p:cNvPr id="9" name="Rectangle 8"/>
-          <p:cNvSpPr/>
-          <p:nvPr/>
-        </p:nvSpPr>
-        <p:spPr>
-          <a:xfrm>
-            <a:off x="1499616" y="6172200"/>
-            <a:ext cx="210312" cy="32004"/>
-          </a:xfrm>
-          <a:prstGeom prst="rect">
-            <a:avLst/>
-          </a:prstGeom>
-          <a:solidFill>
-            <a:srgbClr val="D5DEDA"/>
-          </a:solidFill>
-          <a:ln>
-            <a:noFill/>
-          </a:ln>
-        </p:spPr>
-        <p:style>
-          <a:lnRef idx="1">
-            <a:schemeClr val="accent1"/>
-          </a:lnRef>
-          <a:fillRef idx="3">
-            <a:schemeClr val="accent1"/>
-          </a:fillRef>
-          <a:effectRef idx="2">
-            <a:schemeClr val="accent1"/>
-          </a:effectRef>
-          <a:fontRef idx="minor">
-            <a:schemeClr val="lt1"/>
-          </a:fontRef>
-        </p:style>
-        <p:txBody>
-          <a:bodyPr rtlCol="0" anchor="ctr"/>
-          <a:lstStyle/>
-          <a:p>
-            <a:pPr algn="ctr"/>
-            <a:endParaRPr/>
-          </a:p>
-        </p:txBody>
-      </p:sp>
-      <p:sp>
-        <p:nvSpPr>
-          <p:cNvPr id="10" name="Rectangle 9"/>
-          <p:cNvSpPr/>
-          <p:nvPr/>
-        </p:nvSpPr>
-        <p:spPr>
-          <a:xfrm>
-            <a:off x="1792224" y="6172200"/>
-            <a:ext cx="210312" cy="32004"/>
-          </a:xfrm>
-          <a:prstGeom prst="rect">
-            <a:avLst/>
-          </a:prstGeom>
-          <a:solidFill>
-            <a:srgbClr val="39796F"/>
-          </a:solidFill>
-          <a:ln>
-            <a:noFill/>
-          </a:ln>
-        </p:spPr>
-        <p:style>
-          <a:lnRef idx="1">
-            <a:schemeClr val="accent1"/>
-          </a:lnRef>
-          <a:fillRef idx="3">
-            <a:schemeClr val="accent1"/>
-          </a:fillRef>
-          <a:effectRef idx="2">
-            <a:schemeClr val="accent1"/>
-          </a:effectRef>
-          <a:fontRef idx="minor">
-            <a:schemeClr val="lt1"/>
-          </a:fontRef>
-        </p:style>
-        <p:txBody>
-          <a:bodyPr rtlCol="0" anchor="ctr"/>
-          <a:lstStyle/>
-          <a:p>
-            <a:pPr algn="ctr"/>
-            <a:endParaRPr/>
-          </a:p>
-        </p:txBody>
-      </p:sp>
-      <p:sp>
-        <p:nvSpPr>
-          <p:cNvPr id="11" name="Rectangle 10"/>
-          <p:cNvSpPr/>
-          <p:nvPr/>
-        </p:nvSpPr>
-        <p:spPr>
-          <a:xfrm>
-            <a:off x="2084832" y="6172200"/>
-            <a:ext cx="210312" cy="32004"/>
-          </a:xfrm>
-          <a:prstGeom prst="rect">
-            <a:avLst/>
-          </a:prstGeom>
-          <a:solidFill>
-            <a:srgbClr val="D5DEDA"/>
-          </a:solidFill>
-          <a:ln>
-            <a:noFill/>
-          </a:ln>
-        </p:spPr>
-        <p:style>
-          <a:lnRef idx="1">
-            <a:schemeClr val="accent1"/>
-          </a:lnRef>
-          <a:fillRef idx="3">
-            <a:schemeClr val="accent1"/>
-          </a:fillRef>
-          <a:effectRef idx="2">
-            <a:schemeClr val="accent1"/>
-          </a:effectRef>
-          <a:fontRef idx="minor">
-            <a:schemeClr val="lt1"/>
-          </a:fontRef>
-        </p:style>
-        <p:txBody>
-          <a:bodyPr rtlCol="0" anchor="ctr"/>
-          <a:lstStyle/>
-          <a:p>
-            <a:pPr algn="ctr"/>
-            <a:endParaRPr/>
-          </a:p>
-        </p:txBody>
-      </p:sp>
-      <p:sp>
-        <p:nvSpPr>
-          <p:cNvPr id="12" name="Rectangle 11"/>
-          <p:cNvSpPr/>
-          <p:nvPr/>
-        </p:nvSpPr>
-        <p:spPr>
-          <a:xfrm>
-            <a:off x="2377440" y="6172200"/>
-            <a:ext cx="210312" cy="32004"/>
-          </a:xfrm>
-          <a:prstGeom prst="rect">
-            <a:avLst/>
-          </a:prstGeom>
-          <a:solidFill>
-            <a:srgbClr val="D5DEDA"/>
-          </a:solidFill>
-          <a:ln>
-            <a:noFill/>
-          </a:ln>
-        </p:spPr>
-        <p:style>
-          <a:lnRef idx="1">
-            <a:schemeClr val="accent1"/>
-          </a:lnRef>
-          <a:fillRef idx="3">
-            <a:schemeClr val="accent1"/>
-          </a:fillRef>
-          <a:effectRef idx="2">
-            <a:schemeClr val="accent1"/>
-          </a:effectRef>
-          <a:fontRef idx="minor">
-            <a:schemeClr val="lt1"/>
-          </a:fontRef>
-        </p:style>
-        <p:txBody>
-          <a:bodyPr rtlCol="0" anchor="ctr"/>
-          <a:lstStyle/>
-          <a:p>
-            <a:pPr algn="ctr"/>
-            <a:endParaRPr/>
-          </a:p>
-        </p:txBody>
-      </p:sp>
-      <p:sp>
-        <p:nvSpPr>
-          <p:cNvPr id="13" name="TextBox 12"/>
-          <p:cNvSpPr txBox="1"/>
-          <p:nvPr/>
-        </p:nvSpPr>
-        <p:spPr>
-          <a:xfrm>
-            <a:off x="685800" y="941832"/>
-            <a:ext cx="10881360" cy="731520"/>
-          </a:xfrm>
-          <a:prstGeom prst="rect">
-            <a:avLst/>
-          </a:prstGeom>
-          <a:noFill/>
-        </p:spPr>
-        <p:txBody>
-          <a:bodyPr wrap="square" lIns="18288" tIns="18288" rIns="18288">
-            <a:spAutoFit/>
-          </a:bodyPr>
-          <a:lstStyle/>
-          <a:p>
-            <a:pPr>
-              <a:defRPr sz="3500" b="1">
-                <a:solidFill>
-                  <a:srgbClr val="223B40"/>
-                </a:solidFill>
-                <a:latin typeface="Aptos"/>
-              </a:defRPr>
-            </a:pPr>
-            <a:r>
-              <a:rPr dirty="0"/>
-              <a:t>We also change over time.</a:t>
-            </a:r>
-          </a:p>
-        </p:txBody>
-      </p:sp>
-      <p:sp>
-        <p:nvSpPr>
-          <p:cNvPr id="14" name="TextBox 13"/>
-          <p:cNvSpPr txBox="1"/>
-          <p:nvPr/>
-        </p:nvSpPr>
-        <p:spPr>
-          <a:xfrm>
-            <a:off x="731520" y="1755648"/>
-            <a:ext cx="10607040" cy="457200"/>
-          </a:xfrm>
-          <a:prstGeom prst="rect">
-            <a:avLst/>
-          </a:prstGeom>
-          <a:noFill/>
-        </p:spPr>
-        <p:txBody>
-          <a:bodyPr wrap="square" lIns="18288" tIns="18288" rIns="18288">
-            <a:spAutoFit/>
-          </a:bodyPr>
-          <a:lstStyle/>
-          <a:p>
-            <a:pPr>
-              <a:defRPr sz="2200" b="0">
-                <a:solidFill>
-                  <a:srgbClr val="637575"/>
-                </a:solidFill>
-                <a:latin typeface="Aptos"/>
-              </a:defRPr>
-            </a:pPr>
-            <a:r>
-              <a:rPr dirty="0"/>
-              <a:t>1,795 people · fifty years later</a:t>
-            </a:r>
-          </a:p>
-        </p:txBody>
-      </p:sp>
-      <p:graphicFrame>
-        <p:nvGraphicFramePr>
-          <p:cNvPr id="15" name="Chart 14"/>
-          <p:cNvGraphicFramePr>
-            <a:graphicFrameLocks noGrp="1"/>
-          </p:cNvGraphicFramePr>
-          <p:nvPr/>
-        </p:nvGraphicFramePr>
-        <p:xfrm>
-          <a:off x="731520" y="2331720"/>
-          <a:ext cx="7818120" cy="2971800"/>
-        </p:xfrm>
-        <a:graphic>
-          <a:graphicData uri="http://schemas.openxmlformats.org/drawingml/2006/chart">
-            <c:chart xmlns:c="http://schemas.openxmlformats.org/drawingml/2006/chart" xmlns:r="http://schemas.openxmlformats.org/officeDocument/2006/relationships" r:id="rId3"/>
-          </a:graphicData>
-        </a:graphic>
-      </p:graphicFrame>
-      <p:sp>
-        <p:nvSpPr>
-          <p:cNvPr id="16" name="Rounded Rectangle 15"/>
-          <p:cNvSpPr/>
-          <p:nvPr/>
-        </p:nvSpPr>
-        <p:spPr>
-          <a:xfrm>
-            <a:off x="8869680" y="2423160"/>
-            <a:ext cx="2514600" cy="2697480"/>
-          </a:xfrm>
-          <a:prstGeom prst="roundRect">
-            <a:avLst>
-              <a:gd name="adj" fmla="val 10000"/>
-            </a:avLst>
-          </a:prstGeom>
-          <a:solidFill>
-            <a:srgbClr val="E6EFEB"/>
-          </a:solidFill>
-          <a:ln>
-            <a:noFill/>
-          </a:ln>
-        </p:spPr>
-        <p:style>
-          <a:lnRef idx="1">
-            <a:schemeClr val="accent1"/>
-          </a:lnRef>
-          <a:fillRef idx="3">
-            <a:schemeClr val="accent1"/>
-          </a:fillRef>
-          <a:effectRef idx="2">
-            <a:schemeClr val="accent1"/>
-          </a:effectRef>
-          <a:fontRef idx="minor">
-            <a:schemeClr val="lt1"/>
-          </a:fontRef>
-        </p:style>
-        <p:txBody>
-          <a:bodyPr rtlCol="0" anchor="ctr"/>
-          <a:lstStyle/>
-          <a:p>
-            <a:pPr algn="ctr"/>
-            <a:endParaRPr/>
-          </a:p>
-        </p:txBody>
-      </p:sp>
-      <p:sp>
-        <p:nvSpPr>
           <p:cNvPr id="17" name="TextBox 16"/>
           <p:cNvSpPr txBox="1"/>
           <p:nvPr/>
@@ -8446,7 +7967,7 @@
 </file>
 
 <file path=ppt/slides/slide6.xml><?xml version="1.0" encoding="utf-8"?>
-<p:sld xmlns:a="http://schemas.openxmlformats.org/drawingml/2006/main" xmlns:r="http://schemas.openxmlformats.org/officeDocument/2006/relationships" xmlns:p="http://schemas.openxmlformats.org/presentationml/2006/main">
+<p:sld xmlns:a="http://schemas.openxmlformats.org/drawingml/2006/main" xmlns:p="http://schemas.openxmlformats.org/presentationml/2006/main" xmlns:r="http://schemas.openxmlformats.org/officeDocument/2006/relationships">
   <p:cSld>
     <p:bg>
       <p:bgPr>
@@ -8462,17 +7983,10 @@
         <p:cNvGrpSpPr/>
         <p:nvPr/>
       </p:nvGrpSpPr>
-      <p:grpSpPr>
-        <a:xfrm>
-          <a:off x="0" y="0"/>
-          <a:ext cx="0" cy="0"/>
-          <a:chOff x="0" y="0"/>
-          <a:chExt cx="0" cy="0"/>
-        </a:xfrm>
-      </p:grpSpPr>
-      <p:sp>
-        <p:nvSpPr>
-          <p:cNvPr id="2" name="Rectangle 1"/>
+      <p:grpSpPr/>
+      <p:sp>
+        <p:nvSpPr>
+          <p:cNvPr id="2" name="Rounded Rectangle 1"/>
           <p:cNvSpPr/>
           <p:nvPr/>
         </p:nvSpPr>
@@ -8481,8 +7995,10 @@
             <a:off x="0" y="0"/>
             <a:ext cx="146304" cy="6858000"/>
           </a:xfrm>
-          <a:prstGeom prst="rect">
-            <a:avLst/>
+          <a:prstGeom prst="roundRect">
+            <a:avLst>
+              <a:gd name="adj" fmla="val 10000"/>
+            </a:avLst>
           </a:prstGeom>
           <a:solidFill>
             <a:srgbClr val="39796F"/>
@@ -8510,7 +8026,6 @@
           <a:lstStyle/>
           <a:p>
             <a:pPr algn="ctr"/>
-            <a:endParaRPr/>
           </a:p>
         </p:txBody>
       </p:sp>
@@ -8523,7 +8038,7 @@
         <p:spPr>
           <a:xfrm>
             <a:off x="594360" y="292608"/>
-            <a:ext cx="10058400" cy="274320"/>
+            <a:ext cx="10058400" cy="320040"/>
           </a:xfrm>
           <a:prstGeom prst="rect">
             <a:avLst/>
@@ -8531,7 +8046,7 @@
           <a:noFill/>
         </p:spPr>
         <p:txBody>
-          <a:bodyPr wrap="square" lIns="18288" tIns="18288" rIns="18288">
+          <a:bodyPr wrap="square" lIns="18288" rIns="18288">
             <a:spAutoFit/>
           </a:bodyPr>
           <a:lstStyle/>
@@ -8559,7 +8074,7 @@
         <p:spPr>
           <a:xfrm>
             <a:off x="594360" y="6437376"/>
-            <a:ext cx="9144000" cy="228600"/>
+            <a:ext cx="9144000" cy="274320"/>
           </a:xfrm>
           <a:prstGeom prst="rect">
             <a:avLst/>
@@ -8567,7 +8082,7 @@
           <a:noFill/>
         </p:spPr>
         <p:txBody>
-          <a:bodyPr wrap="square" lIns="18288" tIns="18288" rIns="18288">
+          <a:bodyPr wrap="square" lIns="18288" rIns="18288">
             <a:spAutoFit/>
           </a:bodyPr>
           <a:lstStyle/>
@@ -8581,7 +8096,7 @@
               </a:defRPr>
             </a:pPr>
             <a:r>
-              <a:t>IN PRACTICE</a:t>
+              <a:t>A QUICK SUMMARY</a:t>
             </a:r>
           </a:p>
         </p:txBody>
@@ -8603,7 +8118,7 @@
           <a:noFill/>
         </p:spPr>
         <p:txBody>
-          <a:bodyPr wrap="square" lIns="18288" tIns="18288" rIns="18288">
+          <a:bodyPr wrap="square" lIns="18288" rIns="18288">
             <a:spAutoFit/>
           </a:bodyPr>
           <a:lstStyle/>
@@ -8617,27 +8132,65 @@
               </a:defRPr>
             </a:pPr>
             <a:r>
-              <a:t>07</a:t>
-            </a:r>
-          </a:p>
-        </p:txBody>
-      </p:sp>
-      <p:sp>
-        <p:nvSpPr>
-          <p:cNvPr id="6" name="Rectangle 5"/>
+              <a:t>06</a:t>
+            </a:r>
+          </a:p>
+        </p:txBody>
+      </p:sp>
+      <p:sp>
+        <p:nvSpPr>
+          <p:cNvPr id="6" name="TextBox 5"/>
+          <p:cNvSpPr txBox="1"/>
+          <p:nvPr/>
+        </p:nvSpPr>
+        <p:spPr>
+          <a:xfrm>
+            <a:off x="685800" y="941832"/>
+            <a:ext cx="10881360" cy="731520"/>
+          </a:xfrm>
+          <a:prstGeom prst="rect">
+            <a:avLst/>
+          </a:prstGeom>
+          <a:noFill/>
+        </p:spPr>
+        <p:txBody>
+          <a:bodyPr wrap="square" lIns="18288" rIns="18288">
+            <a:spAutoFit/>
+          </a:bodyPr>
+          <a:lstStyle/>
+          <a:p>
+            <a:pPr>
+              <a:defRPr sz="3500" b="1">
+                <a:solidFill>
+                  <a:srgbClr val="223B40"/>
+                </a:solidFill>
+                <a:latin typeface="Aptos"/>
+              </a:defRPr>
+            </a:pPr>
+            <a:r>
+              <a:t>So, why worry less?</a:t>
+            </a:r>
+          </a:p>
+        </p:txBody>
+      </p:sp>
+      <p:sp>
+        <p:nvSpPr>
+          <p:cNvPr id="7" name="Rounded Rectangle 6"/>
           <p:cNvSpPr/>
           <p:nvPr/>
         </p:nvSpPr>
         <p:spPr>
           <a:xfrm>
-            <a:off x="621792" y="6172200"/>
-            <a:ext cx="210312" cy="32004"/>
-          </a:xfrm>
-          <a:prstGeom prst="rect">
-            <a:avLst/>
+            <a:off x="731520" y="2148840"/>
+            <a:ext cx="5166360" cy="2148840"/>
+          </a:xfrm>
+          <a:prstGeom prst="roundRect">
+            <a:avLst>
+              <a:gd name="adj" fmla="val 10000"/>
+            </a:avLst>
           </a:prstGeom>
           <a:solidFill>
-            <a:srgbClr val="D5DEDA"/>
+            <a:srgbClr val="E6EFEB"/>
           </a:solidFill>
           <a:ln>
             <a:noFill/>
@@ -8662,26 +8215,99 @@
           <a:lstStyle/>
           <a:p>
             <a:pPr algn="ctr"/>
-            <a:endParaRPr/>
-          </a:p>
-        </p:txBody>
-      </p:sp>
-      <p:sp>
-        <p:nvSpPr>
-          <p:cNvPr id="7" name="Rectangle 6"/>
+          </a:p>
+        </p:txBody>
+      </p:sp>
+      <p:sp>
+        <p:nvSpPr>
+          <p:cNvPr id="8" name="TextBox 7"/>
+          <p:cNvSpPr txBox="1"/>
+          <p:nvPr/>
+        </p:nvSpPr>
+        <p:spPr>
+          <a:xfrm>
+            <a:off x="1005840" y="2423160"/>
+            <a:ext cx="4572000" cy="365760"/>
+          </a:xfrm>
+          <a:prstGeom prst="rect">
+            <a:avLst/>
+          </a:prstGeom>
+          <a:noFill/>
+        </p:spPr>
+        <p:txBody>
+          <a:bodyPr wrap="square" lIns="18288" rIns="18288">
+            <a:spAutoFit/>
+          </a:bodyPr>
+          <a:lstStyle/>
+          <a:p>
+            <a:pPr>
+              <a:defRPr sz="1500" b="1">
+                <a:solidFill>
+                  <a:srgbClr val="39796F"/>
+                </a:solidFill>
+                <a:latin typeface="Aptos"/>
+              </a:defRPr>
+            </a:pPr>
+            <a:r>
+              <a:t>WE ARE COMPLEX.</a:t>
+            </a:r>
+          </a:p>
+        </p:txBody>
+      </p:sp>
+      <p:sp>
+        <p:nvSpPr>
+          <p:cNvPr id="9" name="TextBox 8"/>
+          <p:cNvSpPr txBox="1"/>
+          <p:nvPr/>
+        </p:nvSpPr>
+        <p:spPr>
+          <a:xfrm>
+            <a:off x="1005840" y="2971800"/>
+            <a:ext cx="4526280" cy="1097280"/>
+          </a:xfrm>
+          <a:prstGeom prst="rect">
+            <a:avLst/>
+          </a:prstGeom>
+          <a:noFill/>
+        </p:spPr>
+        <p:txBody>
+          <a:bodyPr wrap="square" lIns="18288" rIns="18288">
+            <a:spAutoFit/>
+          </a:bodyPr>
+          <a:lstStyle/>
+          <a:p>
+            <a:pPr>
+              <a:defRPr sz="2600" b="1">
+                <a:solidFill>
+                  <a:srgbClr val="223B40"/>
+                </a:solidFill>
+                <a:latin typeface="Aptos"/>
+              </a:defRPr>
+            </a:pPr>
+            <a:r>
+              <a:t>One label cannot tell the whole story.</a:t>
+            </a:r>
+          </a:p>
+        </p:txBody>
+      </p:sp>
+      <p:sp>
+        <p:nvSpPr>
+          <p:cNvPr id="10" name="Rounded Rectangle 9"/>
           <p:cNvSpPr/>
           <p:nvPr/>
         </p:nvSpPr>
         <p:spPr>
           <a:xfrm>
-            <a:off x="914400" y="6172200"/>
-            <a:ext cx="210312" cy="32004"/>
-          </a:xfrm>
-          <a:prstGeom prst="rect">
-            <a:avLst/>
+            <a:off x="6217920" y="2148840"/>
+            <a:ext cx="5166360" cy="2148840"/>
+          </a:xfrm>
+          <a:prstGeom prst="roundRect">
+            <a:avLst>
+              <a:gd name="adj" fmla="val 10000"/>
+            </a:avLst>
           </a:prstGeom>
           <a:solidFill>
-            <a:srgbClr val="D5DEDA"/>
+            <a:srgbClr val="E6EEF2"/>
           </a:solidFill>
           <a:ln>
             <a:noFill/>
@@ -8706,26 +8332,99 @@
           <a:lstStyle/>
           <a:p>
             <a:pPr algn="ctr"/>
-            <a:endParaRPr/>
-          </a:p>
-        </p:txBody>
-      </p:sp>
-      <p:sp>
-        <p:nvSpPr>
-          <p:cNvPr id="8" name="Rectangle 7"/>
+          </a:p>
+        </p:txBody>
+      </p:sp>
+      <p:sp>
+        <p:nvSpPr>
+          <p:cNvPr id="11" name="TextBox 10"/>
+          <p:cNvSpPr txBox="1"/>
+          <p:nvPr/>
+        </p:nvSpPr>
+        <p:spPr>
+          <a:xfrm>
+            <a:off x="6492240" y="2423160"/>
+            <a:ext cx="4572000" cy="365760"/>
+          </a:xfrm>
+          <a:prstGeom prst="rect">
+            <a:avLst/>
+          </a:prstGeom>
+          <a:noFill/>
+        </p:spPr>
+        <p:txBody>
+          <a:bodyPr wrap="square" lIns="18288" rIns="18288">
+            <a:spAutoFit/>
+          </a:bodyPr>
+          <a:lstStyle/>
+          <a:p>
+            <a:pPr>
+              <a:defRPr sz="1500" b="1">
+                <a:solidFill>
+                  <a:srgbClr val="39796F"/>
+                </a:solidFill>
+                <a:latin typeface="Aptos"/>
+              </a:defRPr>
+            </a:pPr>
+            <a:r>
+              <a:t>WE CAN CHANGE.</a:t>
+            </a:r>
+          </a:p>
+        </p:txBody>
+      </p:sp>
+      <p:sp>
+        <p:nvSpPr>
+          <p:cNvPr id="12" name="TextBox 11"/>
+          <p:cNvSpPr txBox="1"/>
+          <p:nvPr/>
+        </p:nvSpPr>
+        <p:spPr>
+          <a:xfrm>
+            <a:off x="6492240" y="2971800"/>
+            <a:ext cx="4526280" cy="1097280"/>
+          </a:xfrm>
+          <a:prstGeom prst="rect">
+            <a:avLst/>
+          </a:prstGeom>
+          <a:noFill/>
+        </p:spPr>
+        <p:txBody>
+          <a:bodyPr wrap="square" lIns="18288" rIns="18288">
+            <a:spAutoFit/>
+          </a:bodyPr>
+          <a:lstStyle/>
+          <a:p>
+            <a:pPr>
+              <a:defRPr sz="2600" b="1">
+                <a:solidFill>
+                  <a:srgbClr val="223B40"/>
+                </a:solidFill>
+                <a:latin typeface="Aptos"/>
+              </a:defRPr>
+            </a:pPr>
+            <a:r>
+              <a:t>Who we are today may change over time.</a:t>
+            </a:r>
+          </a:p>
+        </p:txBody>
+      </p:sp>
+      <p:sp>
+        <p:nvSpPr>
+          <p:cNvPr id="13" name="Rounded Rectangle 12"/>
           <p:cNvSpPr/>
           <p:nvPr/>
         </p:nvSpPr>
         <p:spPr>
           <a:xfrm>
-            <a:off x="1207008" y="6172200"/>
-            <a:ext cx="210312" cy="32004"/>
-          </a:xfrm>
-          <a:prstGeom prst="rect">
-            <a:avLst/>
+            <a:off x="731520" y="4690872"/>
+            <a:ext cx="10652760" cy="868680"/>
+          </a:xfrm>
+          <a:prstGeom prst="roundRect">
+            <a:avLst>
+              <a:gd name="adj" fmla="val 10000"/>
+            </a:avLst>
           </a:prstGeom>
           <a:solidFill>
-            <a:srgbClr val="D5DEDA"/>
+            <a:srgbClr val="39796F"/>
           </a:solidFill>
           <a:ln>
             <a:noFill/>
@@ -8750,196 +8449,19 @@
           <a:lstStyle/>
           <a:p>
             <a:pPr algn="ctr"/>
-            <a:endParaRPr/>
-          </a:p>
-        </p:txBody>
-      </p:sp>
-      <p:sp>
-        <p:nvSpPr>
-          <p:cNvPr id="9" name="Rectangle 8"/>
-          <p:cNvSpPr/>
-          <p:nvPr/>
-        </p:nvSpPr>
-        <p:spPr>
-          <a:xfrm>
-            <a:off x="1499616" y="6172200"/>
-            <a:ext cx="210312" cy="32004"/>
-          </a:xfrm>
-          <a:prstGeom prst="rect">
-            <a:avLst/>
-          </a:prstGeom>
-          <a:solidFill>
-            <a:srgbClr val="D5DEDA"/>
-          </a:solidFill>
-          <a:ln>
-            <a:noFill/>
-          </a:ln>
-        </p:spPr>
-        <p:style>
-          <a:lnRef idx="1">
-            <a:schemeClr val="accent1"/>
-          </a:lnRef>
-          <a:fillRef idx="3">
-            <a:schemeClr val="accent1"/>
-          </a:fillRef>
-          <a:effectRef idx="2">
-            <a:schemeClr val="accent1"/>
-          </a:effectRef>
-          <a:fontRef idx="minor">
-            <a:schemeClr val="lt1"/>
-          </a:fontRef>
-        </p:style>
-        <p:txBody>
-          <a:bodyPr rtlCol="0" anchor="ctr"/>
-          <a:lstStyle/>
-          <a:p>
-            <a:pPr algn="ctr"/>
-            <a:endParaRPr/>
-          </a:p>
-        </p:txBody>
-      </p:sp>
-      <p:sp>
-        <p:nvSpPr>
-          <p:cNvPr id="10" name="Rectangle 9"/>
-          <p:cNvSpPr/>
-          <p:nvPr/>
-        </p:nvSpPr>
-        <p:spPr>
-          <a:xfrm>
-            <a:off x="1792224" y="6172200"/>
-            <a:ext cx="210312" cy="32004"/>
-          </a:xfrm>
-          <a:prstGeom prst="rect">
-            <a:avLst/>
-          </a:prstGeom>
-          <a:solidFill>
-            <a:srgbClr val="D5DEDA"/>
-          </a:solidFill>
-          <a:ln>
-            <a:noFill/>
-          </a:ln>
-        </p:spPr>
-        <p:style>
-          <a:lnRef idx="1">
-            <a:schemeClr val="accent1"/>
-          </a:lnRef>
-          <a:fillRef idx="3">
-            <a:schemeClr val="accent1"/>
-          </a:fillRef>
-          <a:effectRef idx="2">
-            <a:schemeClr val="accent1"/>
-          </a:effectRef>
-          <a:fontRef idx="minor">
-            <a:schemeClr val="lt1"/>
-          </a:fontRef>
-        </p:style>
-        <p:txBody>
-          <a:bodyPr rtlCol="0" anchor="ctr"/>
-          <a:lstStyle/>
-          <a:p>
-            <a:pPr algn="ctr"/>
-            <a:endParaRPr/>
-          </a:p>
-        </p:txBody>
-      </p:sp>
-      <p:sp>
-        <p:nvSpPr>
-          <p:cNvPr id="11" name="Rectangle 10"/>
-          <p:cNvSpPr/>
-          <p:nvPr/>
-        </p:nvSpPr>
-        <p:spPr>
-          <a:xfrm>
-            <a:off x="2084832" y="6172200"/>
-            <a:ext cx="210312" cy="32004"/>
-          </a:xfrm>
-          <a:prstGeom prst="rect">
-            <a:avLst/>
-          </a:prstGeom>
-          <a:solidFill>
-            <a:srgbClr val="39796F"/>
-          </a:solidFill>
-          <a:ln>
-            <a:noFill/>
-          </a:ln>
-        </p:spPr>
-        <p:style>
-          <a:lnRef idx="1">
-            <a:schemeClr val="accent1"/>
-          </a:lnRef>
-          <a:fillRef idx="3">
-            <a:schemeClr val="accent1"/>
-          </a:fillRef>
-          <a:effectRef idx="2">
-            <a:schemeClr val="accent1"/>
-          </a:effectRef>
-          <a:fontRef idx="minor">
-            <a:schemeClr val="lt1"/>
-          </a:fontRef>
-        </p:style>
-        <p:txBody>
-          <a:bodyPr rtlCol="0" anchor="ctr"/>
-          <a:lstStyle/>
-          <a:p>
-            <a:pPr algn="ctr"/>
-            <a:endParaRPr/>
-          </a:p>
-        </p:txBody>
-      </p:sp>
-      <p:sp>
-        <p:nvSpPr>
-          <p:cNvPr id="12" name="Rectangle 11"/>
-          <p:cNvSpPr/>
-          <p:nvPr/>
-        </p:nvSpPr>
-        <p:spPr>
-          <a:xfrm>
-            <a:off x="2377440" y="6172200"/>
-            <a:ext cx="210312" cy="32004"/>
-          </a:xfrm>
-          <a:prstGeom prst="rect">
-            <a:avLst/>
-          </a:prstGeom>
-          <a:solidFill>
-            <a:srgbClr val="D5DEDA"/>
-          </a:solidFill>
-          <a:ln>
-            <a:noFill/>
-          </a:ln>
-        </p:spPr>
-        <p:style>
-          <a:lnRef idx="1">
-            <a:schemeClr val="accent1"/>
-          </a:lnRef>
-          <a:fillRef idx="3">
-            <a:schemeClr val="accent1"/>
-          </a:fillRef>
-          <a:effectRef idx="2">
-            <a:schemeClr val="accent1"/>
-          </a:effectRef>
-          <a:fontRef idx="minor">
-            <a:schemeClr val="lt1"/>
-          </a:fontRef>
-        </p:style>
-        <p:txBody>
-          <a:bodyPr rtlCol="0" anchor="ctr"/>
-          <a:lstStyle/>
-          <a:p>
-            <a:pPr algn="ctr"/>
-            <a:endParaRPr/>
-          </a:p>
-        </p:txBody>
-      </p:sp>
-      <p:sp>
-        <p:nvSpPr>
-          <p:cNvPr id="13" name="TextBox 12"/>
+          </a:p>
+        </p:txBody>
+      </p:sp>
+      <p:sp>
+        <p:nvSpPr>
+          <p:cNvPr id="14" name="TextBox 13"/>
           <p:cNvSpPr txBox="1"/>
           <p:nvPr/>
         </p:nvSpPr>
         <p:spPr>
           <a:xfrm>
-            <a:off x="685800" y="941832"/>
-            <a:ext cx="10881360" cy="731520"/>
+            <a:off x="1005840" y="4864608"/>
+            <a:ext cx="10058400" cy="548640"/>
           </a:xfrm>
           <a:prstGeom prst="rect">
             <a:avLst/>
@@ -8947,382 +8469,21 @@
           <a:noFill/>
         </p:spPr>
         <p:txBody>
-          <a:bodyPr wrap="square" lIns="18288" tIns="18288" rIns="18288">
+          <a:bodyPr wrap="square" lIns="18288" rIns="18288">
             <a:spAutoFit/>
           </a:bodyPr>
           <a:lstStyle/>
           <a:p>
             <a:pPr>
-              <a:defRPr sz="3500" b="1">
-                <a:solidFill>
-                  <a:srgbClr val="223B40"/>
-                </a:solidFill>
-                <a:latin typeface="Aptos"/>
-              </a:defRPr>
-            </a:pPr>
-            <a:r>
-              <a:rPr dirty="0"/>
-              <a:t>When it matters, ask yourself.</a:t>
-            </a:r>
-          </a:p>
-        </p:txBody>
-      </p:sp>
-      <p:sp>
-        <p:nvSpPr>
-          <p:cNvPr id="14" name="Rounded Rectangle 13"/>
-          <p:cNvSpPr/>
-          <p:nvPr/>
-        </p:nvSpPr>
-        <p:spPr>
-          <a:xfrm>
-            <a:off x="731520" y="1938528"/>
-            <a:ext cx="10652760" cy="1069848"/>
-          </a:xfrm>
-          <a:prstGeom prst="roundRect">
-            <a:avLst>
-              <a:gd name="adj" fmla="val 10000"/>
-            </a:avLst>
-          </a:prstGeom>
-          <a:solidFill>
-            <a:srgbClr val="E6EFEB"/>
-          </a:solidFill>
-          <a:ln>
-            <a:noFill/>
-          </a:ln>
-        </p:spPr>
-        <p:style>
-          <a:lnRef idx="1">
-            <a:schemeClr val="accent1"/>
-          </a:lnRef>
-          <a:fillRef idx="3">
-            <a:schemeClr val="accent1"/>
-          </a:fillRef>
-          <a:effectRef idx="2">
-            <a:schemeClr val="accent1"/>
-          </a:effectRef>
-          <a:fontRef idx="minor">
-            <a:schemeClr val="lt1"/>
-          </a:fontRef>
-        </p:style>
-        <p:txBody>
-          <a:bodyPr rtlCol="0" anchor="ctr"/>
-          <a:lstStyle/>
-          <a:p>
-            <a:pPr algn="ctr"/>
-            <a:endParaRPr/>
-          </a:p>
-        </p:txBody>
-      </p:sp>
-      <p:sp>
-        <p:nvSpPr>
-          <p:cNvPr id="15" name="TextBox 14"/>
-          <p:cNvSpPr txBox="1"/>
-          <p:nvPr/>
-        </p:nvSpPr>
-        <p:spPr>
-          <a:xfrm>
-            <a:off x="960120" y="2084832"/>
-            <a:ext cx="2697480" cy="685800"/>
-          </a:xfrm>
-          <a:prstGeom prst="rect">
-            <a:avLst/>
-          </a:prstGeom>
-          <a:noFill/>
-        </p:spPr>
-        <p:txBody>
-          <a:bodyPr wrap="square" lIns="18288" tIns="18288" rIns="18288">
-            <a:spAutoFit/>
-          </a:bodyPr>
-          <a:lstStyle/>
-          <a:p>
-            <a:pPr>
-              <a:defRPr sz="1300" b="1">
-                <a:solidFill>
-                  <a:srgbClr val="39796F"/>
-                </a:solidFill>
-                <a:latin typeface="Aptos"/>
-              </a:defRPr>
-            </a:pPr>
-            <a:r>
-              <a:rPr dirty="0"/>
-              <a:t>ASK YOURSELF</a:t>
-            </a:r>
-          </a:p>
-        </p:txBody>
-      </p:sp>
-      <p:sp>
-        <p:nvSpPr>
-          <p:cNvPr id="16" name="TextBox 15"/>
-          <p:cNvSpPr txBox="1"/>
-          <p:nvPr/>
-        </p:nvSpPr>
-        <p:spPr>
-          <a:xfrm>
-            <a:off x="3703320" y="2130552"/>
-            <a:ext cx="7223760" cy="731520"/>
-          </a:xfrm>
-          <a:prstGeom prst="rect">
-            <a:avLst/>
-          </a:prstGeom>
-          <a:noFill/>
-        </p:spPr>
-        <p:txBody>
-          <a:bodyPr wrap="square" lIns="18288" tIns="18288" rIns="18288">
-            <a:spAutoFit/>
-          </a:bodyPr>
-          <a:lstStyle/>
-          <a:p>
-            <a:pPr>
-              <a:defRPr sz="2500" b="1">
-                <a:solidFill>
-                  <a:srgbClr val="223B40"/>
-                </a:solidFill>
-                <a:latin typeface="Aptos"/>
-              </a:defRPr>
-            </a:pPr>
-            <a:r>
-              <a:rPr dirty="0"/>
-              <a:t>What do I really want?</a:t>
-            </a:r>
-          </a:p>
-        </p:txBody>
-      </p:sp>
-      <p:sp>
-        <p:nvSpPr>
-          <p:cNvPr id="17" name="Rounded Rectangle 16"/>
-          <p:cNvSpPr/>
-          <p:nvPr/>
-        </p:nvSpPr>
-        <p:spPr>
-          <a:xfrm>
-            <a:off x="731520" y="3191256"/>
-            <a:ext cx="10652760" cy="1069848"/>
-          </a:xfrm>
-          <a:prstGeom prst="roundRect">
-            <a:avLst>
-              <a:gd name="adj" fmla="val 10000"/>
-            </a:avLst>
-          </a:prstGeom>
-          <a:solidFill>
-            <a:srgbClr val="E6EEF2"/>
-          </a:solidFill>
-          <a:ln>
-            <a:noFill/>
-          </a:ln>
-        </p:spPr>
-        <p:style>
-          <a:lnRef idx="1">
-            <a:schemeClr val="accent1"/>
-          </a:lnRef>
-          <a:fillRef idx="3">
-            <a:schemeClr val="accent1"/>
-          </a:fillRef>
-          <a:effectRef idx="2">
-            <a:schemeClr val="accent1"/>
-          </a:effectRef>
-          <a:fontRef idx="minor">
-            <a:schemeClr val="lt1"/>
-          </a:fontRef>
-        </p:style>
-        <p:txBody>
-          <a:bodyPr rtlCol="0" anchor="ctr"/>
-          <a:lstStyle/>
-          <a:p>
-            <a:pPr algn="ctr"/>
-            <a:endParaRPr/>
-          </a:p>
-        </p:txBody>
-      </p:sp>
-      <p:sp>
-        <p:nvSpPr>
-          <p:cNvPr id="18" name="TextBox 17"/>
-          <p:cNvSpPr txBox="1"/>
-          <p:nvPr/>
-        </p:nvSpPr>
-        <p:spPr>
-          <a:xfrm>
-            <a:off x="960120" y="3337560"/>
-            <a:ext cx="2697480" cy="685800"/>
-          </a:xfrm>
-          <a:prstGeom prst="rect">
-            <a:avLst/>
-          </a:prstGeom>
-          <a:noFill/>
-        </p:spPr>
-        <p:txBody>
-          <a:bodyPr wrap="square" lIns="18288" tIns="18288" rIns="18288">
-            <a:spAutoFit/>
-          </a:bodyPr>
-          <a:lstStyle/>
-          <a:p>
-            <a:pPr>
-              <a:defRPr sz="1300" b="1">
-                <a:solidFill>
-                  <a:srgbClr val="39796F"/>
-                </a:solidFill>
-                <a:latin typeface="Aptos"/>
-              </a:defRPr>
-            </a:pPr>
-            <a:r>
-              <a:rPr dirty="0"/>
-              <a:t>TAKE YOUR TIME</a:t>
-            </a:r>
-          </a:p>
-        </p:txBody>
-      </p:sp>
-      <p:sp>
-        <p:nvSpPr>
-          <p:cNvPr id="19" name="TextBox 18"/>
-          <p:cNvSpPr txBox="1"/>
-          <p:nvPr/>
-        </p:nvSpPr>
-        <p:spPr>
-          <a:xfrm>
-            <a:off x="3703320" y="3383280"/>
-            <a:ext cx="7223760" cy="731520"/>
-          </a:xfrm>
-          <a:prstGeom prst="rect">
-            <a:avLst/>
-          </a:prstGeom>
-          <a:noFill/>
-        </p:spPr>
-        <p:txBody>
-          <a:bodyPr wrap="square" lIns="18288" tIns="18288" rIns="18288">
-            <a:spAutoFit/>
-          </a:bodyPr>
-          <a:lstStyle/>
-          <a:p>
-            <a:pPr>
-              <a:defRPr sz="2500" b="1">
-                <a:solidFill>
-                  <a:srgbClr val="223B40"/>
-                </a:solidFill>
-                <a:latin typeface="Aptos"/>
-              </a:defRPr>
-            </a:pPr>
-            <a:r>
-              <a:rPr dirty="0"/>
-              <a:t>Think before you decide.</a:t>
-            </a:r>
-          </a:p>
-        </p:txBody>
-      </p:sp>
-      <p:sp>
-        <p:nvSpPr>
-          <p:cNvPr id="20" name="Rounded Rectangle 19"/>
-          <p:cNvSpPr/>
-          <p:nvPr/>
-        </p:nvSpPr>
-        <p:spPr>
-          <a:xfrm>
-            <a:off x="731520" y="4443984"/>
-            <a:ext cx="10652760" cy="1069848"/>
-          </a:xfrm>
-          <a:prstGeom prst="roundRect">
-            <a:avLst>
-              <a:gd name="adj" fmla="val 10000"/>
-            </a:avLst>
-          </a:prstGeom>
-          <a:solidFill>
-            <a:srgbClr val="E6EFEB"/>
-          </a:solidFill>
-          <a:ln>
-            <a:noFill/>
-          </a:ln>
-        </p:spPr>
-        <p:style>
-          <a:lnRef idx="1">
-            <a:schemeClr val="accent1"/>
-          </a:lnRef>
-          <a:fillRef idx="3">
-            <a:schemeClr val="accent1"/>
-          </a:fillRef>
-          <a:effectRef idx="2">
-            <a:schemeClr val="accent1"/>
-          </a:effectRef>
-          <a:fontRef idx="minor">
-            <a:schemeClr val="lt1"/>
-          </a:fontRef>
-        </p:style>
-        <p:txBody>
-          <a:bodyPr rtlCol="0" anchor="ctr"/>
-          <a:lstStyle/>
-          <a:p>
-            <a:pPr algn="ctr"/>
-            <a:endParaRPr/>
-          </a:p>
-        </p:txBody>
-      </p:sp>
-      <p:sp>
-        <p:nvSpPr>
-          <p:cNvPr id="21" name="TextBox 20"/>
-          <p:cNvSpPr txBox="1"/>
-          <p:nvPr/>
-        </p:nvSpPr>
-        <p:spPr>
-          <a:xfrm>
-            <a:off x="960120" y="4590288"/>
-            <a:ext cx="2697480" cy="685800"/>
-          </a:xfrm>
-          <a:prstGeom prst="rect">
-            <a:avLst/>
-          </a:prstGeom>
-          <a:noFill/>
-        </p:spPr>
-        <p:txBody>
-          <a:bodyPr wrap="square" lIns="18288" tIns="18288" rIns="18288">
-            <a:spAutoFit/>
-          </a:bodyPr>
-          <a:lstStyle/>
-          <a:p>
-            <a:pPr>
-              <a:defRPr sz="1300" b="1">
-                <a:solidFill>
-                  <a:srgbClr val="39796F"/>
-                </a:solidFill>
-                <a:latin typeface="Aptos"/>
-              </a:defRPr>
-            </a:pPr>
-            <a:r>
-              <a:rPr dirty="0"/>
-              <a:t>ASK OTHER PEOPLE</a:t>
-            </a:r>
-          </a:p>
-        </p:txBody>
-      </p:sp>
-      <p:sp>
-        <p:nvSpPr>
-          <p:cNvPr id="22" name="TextBox 21"/>
-          <p:cNvSpPr txBox="1"/>
-          <p:nvPr/>
-        </p:nvSpPr>
-        <p:spPr>
-          <a:xfrm>
-            <a:off x="3703320" y="4636008"/>
-            <a:ext cx="7223760" cy="731520"/>
-          </a:xfrm>
-          <a:prstGeom prst="rect">
-            <a:avLst/>
-          </a:prstGeom>
-          <a:noFill/>
-        </p:spPr>
-        <p:txBody>
-          <a:bodyPr wrap="square" lIns="18288" tIns="18288" rIns="18288">
-            <a:spAutoFit/>
-          </a:bodyPr>
-          <a:lstStyle/>
-          <a:p>
-            <a:pPr>
-              <a:defRPr sz="2500" b="1">
-                <a:solidFill>
-                  <a:srgbClr val="223B40"/>
-                </a:solidFill>
-                <a:latin typeface="Aptos"/>
-              </a:defRPr>
-            </a:pPr>
-            <a:r>
-              <a:rPr sz="2400"/>
-              <a:t>Listen to different views. The choice is yours.</a:t>
+              <a:defRPr sz="2700" b="1">
+                <a:solidFill>
+                  <a:srgbClr val="FFFFFF"/>
+                </a:solidFill>
+                <a:latin typeface="Aptos"/>
+              </a:defRPr>
+            </a:pPr>
+            <a:r>
+              <a:t>We don’t need a fixed answer to “Who am I?”</a:t>
             </a:r>
           </a:p>
         </p:txBody>
@@ -9471,7 +8632,7 @@
               </a:defRPr>
             </a:pPr>
             <a:r>
-              <a:t>TAKEAWAY</a:t>
+              <a:t>IN PRACTICE</a:t>
             </a:r>
           </a:p>
         </p:txBody>
@@ -9514,20 +8675,59 @@
       </p:sp>
       <p:sp>
         <p:nvSpPr>
-          <p:cNvPr id="6" name="Rectangle 5"/>
+          <p:cNvPr id="13" name="TextBox 12"/>
+          <p:cNvSpPr txBox="1"/>
+          <p:nvPr/>
+        </p:nvSpPr>
+        <p:spPr>
+          <a:xfrm>
+            <a:off x="685800" y="941832"/>
+            <a:ext cx="10881360" cy="731520"/>
+          </a:xfrm>
+          <a:prstGeom prst="rect">
+            <a:avLst/>
+          </a:prstGeom>
+          <a:noFill/>
+        </p:spPr>
+        <p:txBody>
+          <a:bodyPr wrap="square" lIns="18288" tIns="18288" rIns="18288">
+            <a:spAutoFit/>
+          </a:bodyPr>
+          <a:lstStyle/>
+          <a:p>
+            <a:pPr>
+              <a:defRPr sz="3500" b="1">
+                <a:solidFill>
+                  <a:srgbClr val="223B40"/>
+                </a:solidFill>
+                <a:latin typeface="Aptos"/>
+              </a:defRPr>
+            </a:pPr>
+            <a:r>
+              <a:rPr dirty="0"/>
+              <a:t>When it matters, ask yourself.</a:t>
+            </a:r>
+          </a:p>
+        </p:txBody>
+      </p:sp>
+      <p:sp>
+        <p:nvSpPr>
+          <p:cNvPr id="14" name="Rounded Rectangle 13"/>
           <p:cNvSpPr/>
           <p:nvPr/>
         </p:nvSpPr>
         <p:spPr>
           <a:xfrm>
-            <a:off x="621792" y="6172200"/>
-            <a:ext cx="210312" cy="32004"/>
-          </a:xfrm>
-          <a:prstGeom prst="rect">
-            <a:avLst/>
+            <a:off x="731520" y="1938528"/>
+            <a:ext cx="10652760" cy="1069848"/>
+          </a:xfrm>
+          <a:prstGeom prst="roundRect">
+            <a:avLst>
+              <a:gd name="adj" fmla="val 10000"/>
+            </a:avLst>
           </a:prstGeom>
           <a:solidFill>
-            <a:srgbClr val="D5DEDA"/>
+            <a:srgbClr val="E6EFEB"/>
           </a:solidFill>
           <a:ln>
             <a:noFill/>
@@ -9558,20 +8758,96 @@
       </p:sp>
       <p:sp>
         <p:nvSpPr>
-          <p:cNvPr id="7" name="Rectangle 6"/>
+          <p:cNvPr id="15" name="TextBox 14"/>
+          <p:cNvSpPr txBox="1"/>
+          <p:nvPr/>
+        </p:nvSpPr>
+        <p:spPr>
+          <a:xfrm>
+            <a:off x="960120" y="2084832"/>
+            <a:ext cx="2697480" cy="685800"/>
+          </a:xfrm>
+          <a:prstGeom prst="rect">
+            <a:avLst/>
+          </a:prstGeom>
+          <a:noFill/>
+        </p:spPr>
+        <p:txBody>
+          <a:bodyPr wrap="square" lIns="18288" tIns="18288" rIns="18288">
+            <a:spAutoFit/>
+          </a:bodyPr>
+          <a:lstStyle/>
+          <a:p>
+            <a:pPr>
+              <a:defRPr sz="1300" b="1">
+                <a:solidFill>
+                  <a:srgbClr val="39796F"/>
+                </a:solidFill>
+                <a:latin typeface="Aptos"/>
+              </a:defRPr>
+            </a:pPr>
+            <a:r>
+              <a:rPr dirty="0"/>
+              <a:t>ASK YOURSELF</a:t>
+            </a:r>
+          </a:p>
+        </p:txBody>
+      </p:sp>
+      <p:sp>
+        <p:nvSpPr>
+          <p:cNvPr id="16" name="TextBox 15"/>
+          <p:cNvSpPr txBox="1"/>
+          <p:nvPr/>
+        </p:nvSpPr>
+        <p:spPr>
+          <a:xfrm>
+            <a:off x="3703320" y="2130552"/>
+            <a:ext cx="7223760" cy="731520"/>
+          </a:xfrm>
+          <a:prstGeom prst="rect">
+            <a:avLst/>
+          </a:prstGeom>
+          <a:noFill/>
+        </p:spPr>
+        <p:txBody>
+          <a:bodyPr wrap="square" lIns="18288" tIns="18288" rIns="18288">
+            <a:spAutoFit/>
+          </a:bodyPr>
+          <a:lstStyle/>
+          <a:p>
+            <a:pPr>
+              <a:defRPr sz="2500" b="1">
+                <a:solidFill>
+                  <a:srgbClr val="223B40"/>
+                </a:solidFill>
+                <a:latin typeface="Aptos"/>
+              </a:defRPr>
+            </a:pPr>
+            <a:r>
+              <a:rPr dirty="0"/>
+              <a:t>What do I really want?</a:t>
+            </a:r>
+          </a:p>
+        </p:txBody>
+      </p:sp>
+      <p:sp>
+        <p:nvSpPr>
+          <p:cNvPr id="17" name="Rounded Rectangle 16"/>
           <p:cNvSpPr/>
           <p:nvPr/>
         </p:nvSpPr>
         <p:spPr>
           <a:xfrm>
-            <a:off x="914400" y="6172200"/>
-            <a:ext cx="210312" cy="32004"/>
-          </a:xfrm>
-          <a:prstGeom prst="rect">
-            <a:avLst/>
+            <a:off x="731520" y="3191256"/>
+            <a:ext cx="10652760" cy="1069848"/>
+          </a:xfrm>
+          <a:prstGeom prst="roundRect">
+            <a:avLst>
+              <a:gd name="adj" fmla="val 10000"/>
+            </a:avLst>
           </a:prstGeom>
           <a:solidFill>
-            <a:srgbClr val="D5DEDA"/>
+            <a:srgbClr val="E6EEF2"/>
           </a:solidFill>
           <a:ln>
             <a:noFill/>
@@ -9602,20 +8878,96 @@
       </p:sp>
       <p:sp>
         <p:nvSpPr>
-          <p:cNvPr id="8" name="Rectangle 7"/>
+          <p:cNvPr id="18" name="TextBox 17"/>
+          <p:cNvSpPr txBox="1"/>
+          <p:nvPr/>
+        </p:nvSpPr>
+        <p:spPr>
+          <a:xfrm>
+            <a:off x="960120" y="3337560"/>
+            <a:ext cx="2697480" cy="685800"/>
+          </a:xfrm>
+          <a:prstGeom prst="rect">
+            <a:avLst/>
+          </a:prstGeom>
+          <a:noFill/>
+        </p:spPr>
+        <p:txBody>
+          <a:bodyPr wrap="square" lIns="18288" tIns="18288" rIns="18288">
+            <a:spAutoFit/>
+          </a:bodyPr>
+          <a:lstStyle/>
+          <a:p>
+            <a:pPr>
+              <a:defRPr sz="1300" b="1">
+                <a:solidFill>
+                  <a:srgbClr val="39796F"/>
+                </a:solidFill>
+                <a:latin typeface="Aptos"/>
+              </a:defRPr>
+            </a:pPr>
+            <a:r>
+              <a:rPr dirty="0"/>
+              <a:t>TAKE YOUR TIME</a:t>
+            </a:r>
+          </a:p>
+        </p:txBody>
+      </p:sp>
+      <p:sp>
+        <p:nvSpPr>
+          <p:cNvPr id="19" name="TextBox 18"/>
+          <p:cNvSpPr txBox="1"/>
+          <p:nvPr/>
+        </p:nvSpPr>
+        <p:spPr>
+          <a:xfrm>
+            <a:off x="3703320" y="3383280"/>
+            <a:ext cx="7223760" cy="731520"/>
+          </a:xfrm>
+          <a:prstGeom prst="rect">
+            <a:avLst/>
+          </a:prstGeom>
+          <a:noFill/>
+        </p:spPr>
+        <p:txBody>
+          <a:bodyPr wrap="square" lIns="18288" tIns="18288" rIns="18288">
+            <a:spAutoFit/>
+          </a:bodyPr>
+          <a:lstStyle/>
+          <a:p>
+            <a:pPr>
+              <a:defRPr sz="2500" b="1">
+                <a:solidFill>
+                  <a:srgbClr val="223B40"/>
+                </a:solidFill>
+                <a:latin typeface="Aptos"/>
+              </a:defRPr>
+            </a:pPr>
+            <a:r>
+              <a:rPr dirty="0"/>
+              <a:t>Think before you decide.</a:t>
+            </a:r>
+          </a:p>
+        </p:txBody>
+      </p:sp>
+      <p:sp>
+        <p:nvSpPr>
+          <p:cNvPr id="20" name="Rounded Rectangle 19"/>
           <p:cNvSpPr/>
           <p:nvPr/>
         </p:nvSpPr>
         <p:spPr>
           <a:xfrm>
-            <a:off x="1207008" y="6172200"/>
-            <a:ext cx="210312" cy="32004"/>
-          </a:xfrm>
-          <a:prstGeom prst="rect">
-            <a:avLst/>
+            <a:off x="731520" y="4443984"/>
+            <a:ext cx="10652760" cy="1069848"/>
+          </a:xfrm>
+          <a:prstGeom prst="roundRect">
+            <a:avLst>
+              <a:gd name="adj" fmla="val 10000"/>
+            </a:avLst>
           </a:prstGeom>
           <a:solidFill>
-            <a:srgbClr val="D5DEDA"/>
+            <a:srgbClr val="E6EFEB"/>
           </a:solidFill>
           <a:ln>
             <a:noFill/>
@@ -9646,20 +8998,127 @@
       </p:sp>
       <p:sp>
         <p:nvSpPr>
-          <p:cNvPr id="9" name="Rectangle 8"/>
+          <p:cNvPr id="21" name="TextBox 20"/>
+          <p:cNvSpPr txBox="1"/>
+          <p:nvPr/>
+        </p:nvSpPr>
+        <p:spPr>
+          <a:xfrm>
+            <a:off x="960120" y="4590288"/>
+            <a:ext cx="2697480" cy="685800"/>
+          </a:xfrm>
+          <a:prstGeom prst="rect">
+            <a:avLst/>
+          </a:prstGeom>
+          <a:noFill/>
+        </p:spPr>
+        <p:txBody>
+          <a:bodyPr wrap="square" lIns="18288" tIns="18288" rIns="18288">
+            <a:spAutoFit/>
+          </a:bodyPr>
+          <a:lstStyle/>
+          <a:p>
+            <a:pPr>
+              <a:defRPr sz="1300" b="1">
+                <a:solidFill>
+                  <a:srgbClr val="39796F"/>
+                </a:solidFill>
+                <a:latin typeface="Aptos"/>
+              </a:defRPr>
+            </a:pPr>
+            <a:r>
+              <a:rPr dirty="0"/>
+              <a:t>ASK OTHER PEOPLE</a:t>
+            </a:r>
+          </a:p>
+        </p:txBody>
+      </p:sp>
+      <p:sp>
+        <p:nvSpPr>
+          <p:cNvPr id="22" name="TextBox 21"/>
+          <p:cNvSpPr txBox="1"/>
+          <p:nvPr/>
+        </p:nvSpPr>
+        <p:spPr>
+          <a:xfrm>
+            <a:off x="3703320" y="4636008"/>
+            <a:ext cx="7223760" cy="731520"/>
+          </a:xfrm>
+          <a:prstGeom prst="rect">
+            <a:avLst/>
+          </a:prstGeom>
+          <a:noFill/>
+        </p:spPr>
+        <p:txBody>
+          <a:bodyPr wrap="square" lIns="18288" tIns="18288" rIns="18288">
+            <a:spAutoFit/>
+          </a:bodyPr>
+          <a:lstStyle/>
+          <a:p>
+            <a:pPr>
+              <a:defRPr sz="2500" b="1">
+                <a:solidFill>
+                  <a:srgbClr val="223B40"/>
+                </a:solidFill>
+                <a:latin typeface="Aptos"/>
+              </a:defRPr>
+            </a:pPr>
+            <a:r>
+              <a:rPr sz="2400"/>
+              <a:t>Listen to different views. The choice is yours.</a:t>
+            </a:r>
+          </a:p>
+        </p:txBody>
+      </p:sp>
+    </p:spTree>
+  </p:cSld>
+  <p:clrMapOvr>
+    <a:masterClrMapping/>
+  </p:clrMapOvr>
+</p:sld>
+</file>
+
+<file path=ppt/slides/slide8.xml><?xml version="1.0" encoding="utf-8"?>
+<p:sld xmlns:a="http://schemas.openxmlformats.org/drawingml/2006/main" xmlns:r="http://schemas.openxmlformats.org/officeDocument/2006/relationships" xmlns:p="http://schemas.openxmlformats.org/presentationml/2006/main">
+  <p:cSld>
+    <p:bg>
+      <p:bgPr>
+        <a:solidFill>
+          <a:srgbClr val="E6EFEB"/>
+        </a:solidFill>
+        <a:effectLst/>
+      </p:bgPr>
+    </p:bg>
+    <p:spTree>
+      <p:nvGrpSpPr>
+        <p:cNvPr id="1" name=""/>
+        <p:cNvGrpSpPr/>
+        <p:nvPr/>
+      </p:nvGrpSpPr>
+      <p:grpSpPr>
+        <a:xfrm>
+          <a:off x="0" y="0"/>
+          <a:ext cx="0" cy="0"/>
+          <a:chOff x="0" y="0"/>
+          <a:chExt cx="0" cy="0"/>
+        </a:xfrm>
+      </p:grpSpPr>
+      <p:sp>
+        <p:nvSpPr>
+          <p:cNvPr id="2" name="Rectangle 1"/>
           <p:cNvSpPr/>
           <p:nvPr/>
         </p:nvSpPr>
         <p:spPr>
           <a:xfrm>
-            <a:off x="1499616" y="6172200"/>
-            <a:ext cx="210312" cy="32004"/>
+            <a:off x="0" y="0"/>
+            <a:ext cx="146304" cy="6858000"/>
           </a:xfrm>
           <a:prstGeom prst="rect">
             <a:avLst/>
           </a:prstGeom>
           <a:solidFill>
-            <a:srgbClr val="D5DEDA"/>
+            <a:srgbClr val="39796F"/>
           </a:solidFill>
           <a:ln>
             <a:noFill/>
@@ -9684,26 +9143,97 @@
           <a:lstStyle/>
           <a:p>
             <a:pPr algn="ctr"/>
-            <a:endParaRPr/>
-          </a:p>
-        </p:txBody>
-      </p:sp>
-      <p:sp>
-        <p:nvSpPr>
-          <p:cNvPr id="10" name="Rectangle 9"/>
+          </a:p>
+        </p:txBody>
+      </p:sp>
+      <p:sp>
+        <p:nvSpPr>
+          <p:cNvPr id="3" name="TextBox 2"/>
+          <p:cNvSpPr txBox="1"/>
+          <p:nvPr/>
+        </p:nvSpPr>
+        <p:spPr>
+          <a:xfrm>
+            <a:off x="640080" y="320040"/>
+            <a:ext cx="10058400" cy="320040"/>
+          </a:xfrm>
+          <a:prstGeom prst="rect">
+            <a:avLst/>
+          </a:prstGeom>
+          <a:noFill/>
+        </p:spPr>
+        <p:txBody>
+          <a:bodyPr wrap="square" lIns="18288" rIns="18288">
+            <a:spAutoFit/>
+          </a:bodyPr>
+          <a:lstStyle/>
+          <a:p>
+            <a:pPr>
+              <a:defRPr sz="1100" b="0">
+                <a:solidFill>
+                  <a:srgbClr val="637575"/>
+                </a:solidFill>
+                <a:latin typeface="Aptos"/>
+              </a:defRPr>
+            </a:pPr>
+            <a:r>
+              <a:t>FINDING YOUR AUTHENTIC SELF OR NOT</a:t>
+            </a:r>
+          </a:p>
+        </p:txBody>
+      </p:sp>
+      <p:sp>
+        <p:nvSpPr>
+          <p:cNvPr id="4" name="TextBox 3"/>
+          <p:cNvSpPr txBox="1"/>
+          <p:nvPr/>
+        </p:nvSpPr>
+        <p:spPr>
+          <a:xfrm>
+            <a:off x="777240" y="2011680"/>
+            <a:ext cx="10607040" cy="914400"/>
+          </a:xfrm>
+          <a:prstGeom prst="rect">
+            <a:avLst/>
+          </a:prstGeom>
+          <a:noFill/>
+        </p:spPr>
+        <p:txBody>
+          <a:bodyPr wrap="square" lIns="18288" rIns="18288">
+            <a:spAutoFit/>
+          </a:bodyPr>
+          <a:lstStyle/>
+          <a:p>
+            <a:pPr>
+              <a:defRPr sz="4400" b="1">
+                <a:solidFill>
+                  <a:srgbClr val="223B40"/>
+                </a:solidFill>
+                <a:latin typeface="Aptos"/>
+              </a:defRPr>
+            </a:pPr>
+            <a:r>
+              <a:t>So, what’s your MBTI?</a:t>
+            </a:r>
+          </a:p>
+        </p:txBody>
+      </p:sp>
+      <p:sp>
+        <p:nvSpPr>
+          <p:cNvPr id="5" name="Rectangle 4"/>
           <p:cNvSpPr/>
           <p:nvPr/>
         </p:nvSpPr>
         <p:spPr>
           <a:xfrm>
-            <a:off x="1792224" y="6172200"/>
-            <a:ext cx="210312" cy="32004"/>
+            <a:off x="822960" y="3310128"/>
+            <a:ext cx="914400" cy="50292"/>
           </a:xfrm>
           <a:prstGeom prst="rect">
             <a:avLst/>
           </a:prstGeom>
           <a:solidFill>
-            <a:srgbClr val="D5DEDA"/>
+            <a:srgbClr val="D7AF65"/>
           </a:solidFill>
           <a:ln>
             <a:noFill/>
@@ -9728,108 +9258,19 @@
           <a:lstStyle/>
           <a:p>
             <a:pPr algn="ctr"/>
-            <a:endParaRPr/>
-          </a:p>
-        </p:txBody>
-      </p:sp>
-      <p:sp>
-        <p:nvSpPr>
-          <p:cNvPr id="11" name="Rectangle 10"/>
-          <p:cNvSpPr/>
-          <p:nvPr/>
-        </p:nvSpPr>
-        <p:spPr>
-          <a:xfrm>
-            <a:off x="2084832" y="6172200"/>
-            <a:ext cx="210312" cy="32004"/>
-          </a:xfrm>
-          <a:prstGeom prst="rect">
-            <a:avLst/>
-          </a:prstGeom>
-          <a:solidFill>
-            <a:srgbClr val="D5DEDA"/>
-          </a:solidFill>
-          <a:ln>
-            <a:noFill/>
-          </a:ln>
-        </p:spPr>
-        <p:style>
-          <a:lnRef idx="1">
-            <a:schemeClr val="accent1"/>
-          </a:lnRef>
-          <a:fillRef idx="3">
-            <a:schemeClr val="accent1"/>
-          </a:fillRef>
-          <a:effectRef idx="2">
-            <a:schemeClr val="accent1"/>
-          </a:effectRef>
-          <a:fontRef idx="minor">
-            <a:schemeClr val="lt1"/>
-          </a:fontRef>
-        </p:style>
-        <p:txBody>
-          <a:bodyPr rtlCol="0" anchor="ctr"/>
-          <a:lstStyle/>
-          <a:p>
-            <a:pPr algn="ctr"/>
-            <a:endParaRPr/>
-          </a:p>
-        </p:txBody>
-      </p:sp>
-      <p:sp>
-        <p:nvSpPr>
-          <p:cNvPr id="12" name="Rectangle 11"/>
-          <p:cNvSpPr/>
-          <p:nvPr/>
-        </p:nvSpPr>
-        <p:spPr>
-          <a:xfrm>
-            <a:off x="2377440" y="6172200"/>
-            <a:ext cx="210312" cy="32004"/>
-          </a:xfrm>
-          <a:prstGeom prst="rect">
-            <a:avLst/>
-          </a:prstGeom>
-          <a:solidFill>
-            <a:srgbClr val="39796F"/>
-          </a:solidFill>
-          <a:ln>
-            <a:noFill/>
-          </a:ln>
-        </p:spPr>
-        <p:style>
-          <a:lnRef idx="1">
-            <a:schemeClr val="accent1"/>
-          </a:lnRef>
-          <a:fillRef idx="3">
-            <a:schemeClr val="accent1"/>
-          </a:fillRef>
-          <a:effectRef idx="2">
-            <a:schemeClr val="accent1"/>
-          </a:effectRef>
-          <a:fontRef idx="minor">
-            <a:schemeClr val="lt1"/>
-          </a:fontRef>
-        </p:style>
-        <p:txBody>
-          <a:bodyPr rtlCol="0" anchor="ctr"/>
-          <a:lstStyle/>
-          <a:p>
-            <a:pPr algn="ctr"/>
-            <a:endParaRPr/>
-          </a:p>
-        </p:txBody>
-      </p:sp>
-      <p:sp>
-        <p:nvSpPr>
-          <p:cNvPr id="13" name="TextBox 12"/>
+          </a:p>
+        </p:txBody>
+      </p:sp>
+      <p:sp>
+        <p:nvSpPr>
+          <p:cNvPr id="6" name="TextBox 5"/>
           <p:cNvSpPr txBox="1"/>
           <p:nvPr/>
         </p:nvSpPr>
         <p:spPr>
           <a:xfrm>
-            <a:off x="685800" y="941832"/>
-            <a:ext cx="10881360" cy="731520"/>
+            <a:off x="777240" y="3703320"/>
+            <a:ext cx="10515600" cy="1280160"/>
           </a:xfrm>
           <a:prstGeom prst="rect">
             <a:avLst/>
@@ -9837,35 +9278,48 @@
           <a:noFill/>
         </p:spPr>
         <p:txBody>
-          <a:bodyPr wrap="square" lIns="18288" tIns="18288" rIns="18288">
+          <a:bodyPr wrap="square" lIns="18288" rIns="18288">
             <a:spAutoFit/>
           </a:bodyPr>
           <a:lstStyle/>
           <a:p>
             <a:pPr>
-              <a:defRPr sz="3500" b="1">
-                <a:solidFill>
-                  <a:srgbClr val="223B40"/>
-                </a:solidFill>
-                <a:latin typeface="Aptos"/>
-              </a:defRPr>
-            </a:pPr>
-            <a:r>
-              <a:t>So, what’s your MBTI?</a:t>
-            </a:r>
-          </a:p>
-        </p:txBody>
-      </p:sp>
-      <p:sp>
-        <p:nvSpPr>
-          <p:cNvPr id="14" name="TextBox 13"/>
+              <a:defRPr sz="2700" b="0">
+                <a:solidFill>
+                  <a:srgbClr val="39796F"/>
+                </a:solidFill>
+                <a:latin typeface="Aptos"/>
+              </a:defRPr>
+            </a:pPr>
+            <a:r>
+              <a:t>Your type is only part of your story.</a:t>
+            </a:r>
+          </a:p>
+          <a:p>
+            <a:pPr>
+              <a:defRPr sz="2700" b="0">
+                <a:solidFill>
+                  <a:srgbClr val="39796F"/>
+                </a:solidFill>
+                <a:latin typeface="Aptos"/>
+              </a:defRPr>
+            </a:pPr>
+            <a:r>
+              <a:t>You don’t need to figure yourself out once and for all.</a:t>
+            </a:r>
+          </a:p>
+        </p:txBody>
+      </p:sp>
+      <p:sp>
+        <p:nvSpPr>
+          <p:cNvPr id="7" name="TextBox 6"/>
           <p:cNvSpPr txBox="1"/>
           <p:nvPr/>
         </p:nvSpPr>
         <p:spPr>
           <a:xfrm>
-            <a:off x="822960" y="1965960"/>
-            <a:ext cx="10515600" cy="548640"/>
+            <a:off x="594360" y="6437376"/>
+            <a:ext cx="9144000" cy="274320"/>
           </a:xfrm>
           <a:prstGeom prst="rect">
             <a:avLst/>
@@ -9873,35 +9327,35 @@
           <a:noFill/>
         </p:spPr>
         <p:txBody>
-          <a:bodyPr wrap="square" lIns="18288" tIns="18288" rIns="18288">
+          <a:bodyPr wrap="square" lIns="18288" rIns="18288">
             <a:spAutoFit/>
           </a:bodyPr>
           <a:lstStyle/>
           <a:p>
             <a:pPr>
-              <a:defRPr sz="2600" b="1">
-                <a:solidFill>
-                  <a:srgbClr val="39796F"/>
-                </a:solidFill>
-                <a:latin typeface="Aptos"/>
-              </a:defRPr>
-            </a:pPr>
-            <a:r>
-              <a:t>Your type is only part of your story.</a:t>
-            </a:r>
-          </a:p>
-        </p:txBody>
-      </p:sp>
-      <p:sp>
-        <p:nvSpPr>
-          <p:cNvPr id="15" name="TextBox 14"/>
+              <a:defRPr sz="1000" b="0">
+                <a:solidFill>
+                  <a:srgbClr val="637575"/>
+                </a:solidFill>
+                <a:latin typeface="Aptos"/>
+              </a:defRPr>
+            </a:pPr>
+            <a:r>
+              <a:t>BACK TO THE OPENING QUESTION</a:t>
+            </a:r>
+          </a:p>
+        </p:txBody>
+      </p:sp>
+      <p:sp>
+        <p:nvSpPr>
+          <p:cNvPr id="8" name="TextBox 7"/>
           <p:cNvSpPr txBox="1"/>
           <p:nvPr/>
         </p:nvSpPr>
         <p:spPr>
           <a:xfrm>
-            <a:off x="822960" y="2624328"/>
-            <a:ext cx="10515600" cy="548640"/>
+            <a:off x="10972800" y="6400800"/>
+            <a:ext cx="594360" cy="274320"/>
           </a:xfrm>
           <a:prstGeom prst="rect">
             <a:avLst/>
@@ -9909,152 +9363,21 @@
           <a:noFill/>
         </p:spPr>
         <p:txBody>
-          <a:bodyPr wrap="square" lIns="18288" tIns="18288" rIns="18288">
+          <a:bodyPr wrap="square" lIns="18288" rIns="18288">
             <a:spAutoFit/>
           </a:bodyPr>
           <a:lstStyle/>
           <a:p>
             <a:pPr>
-              <a:defRPr sz="2600" b="0">
-                <a:solidFill>
-                  <a:srgbClr val="223B40"/>
-                </a:solidFill>
-                <a:latin typeface="Aptos"/>
-              </a:defRPr>
-            </a:pPr>
-            <a:r>
-              <a:t>Live your life. Think when it matters.</a:t>
-            </a:r>
-          </a:p>
-        </p:txBody>
-      </p:sp>
-      <p:sp>
-        <p:nvSpPr>
-          <p:cNvPr id="16" name="TextBox 15"/>
-          <p:cNvSpPr txBox="1"/>
-          <p:nvPr/>
-        </p:nvSpPr>
-        <p:spPr>
-          <a:xfrm>
-            <a:off x="822960" y="3282696"/>
-            <a:ext cx="10515600" cy="548640"/>
-          </a:xfrm>
-          <a:prstGeom prst="rect">
-            <a:avLst/>
-          </a:prstGeom>
-          <a:noFill/>
-        </p:spPr>
-        <p:txBody>
-          <a:bodyPr wrap="square" lIns="18288" tIns="18288" rIns="18288">
-            <a:spAutoFit/>
-          </a:bodyPr>
-          <a:lstStyle/>
-          <a:p>
-            <a:pPr>
-              <a:defRPr sz="2600" b="0">
-                <a:solidFill>
-                  <a:srgbClr val="223B40"/>
-                </a:solidFill>
-                <a:latin typeface="Aptos"/>
-              </a:defRPr>
-            </a:pPr>
-            <a:r>
-              <a:t>Listen to others. Make your own choice.</a:t>
-            </a:r>
-          </a:p>
-        </p:txBody>
-      </p:sp>
-      <p:sp>
-        <p:nvSpPr>
-          <p:cNvPr id="17" name="Rounded Rectangle 16"/>
-          <p:cNvSpPr/>
-          <p:nvPr/>
-        </p:nvSpPr>
-        <p:spPr>
-          <a:xfrm>
-            <a:off x="731520" y="4206240"/>
-            <a:ext cx="10652760" cy="1508760"/>
-          </a:xfrm>
-          <a:prstGeom prst="roundRect">
-            <a:avLst>
-              <a:gd name="adj" fmla="val 10000"/>
-            </a:avLst>
-          </a:prstGeom>
-          <a:solidFill>
-            <a:srgbClr val="39796F"/>
-          </a:solidFill>
-          <a:ln>
-            <a:noFill/>
-          </a:ln>
-        </p:spPr>
-        <p:style>
-          <a:lnRef idx="1">
-            <a:schemeClr val="accent1"/>
-          </a:lnRef>
-          <a:fillRef idx="3">
-            <a:schemeClr val="accent1"/>
-          </a:fillRef>
-          <a:effectRef idx="2">
-            <a:schemeClr val="accent1"/>
-          </a:effectRef>
-          <a:fontRef idx="minor">
-            <a:schemeClr val="lt1"/>
-          </a:fontRef>
-        </p:style>
-        <p:txBody>
-          <a:bodyPr rtlCol="0" anchor="ctr"/>
-          <a:lstStyle/>
-          <a:p>
-            <a:pPr algn="ctr"/>
-            <a:endParaRPr/>
-          </a:p>
-        </p:txBody>
-      </p:sp>
-      <p:sp>
-        <p:nvSpPr>
-          <p:cNvPr id="18" name="TextBox 17"/>
-          <p:cNvSpPr txBox="1"/>
-          <p:nvPr/>
-        </p:nvSpPr>
-        <p:spPr>
-          <a:xfrm>
-            <a:off x="1024128" y="4489704"/>
-            <a:ext cx="10058400" cy="960120"/>
-          </a:xfrm>
-          <a:prstGeom prst="rect">
-            <a:avLst/>
-          </a:prstGeom>
-          <a:noFill/>
-        </p:spPr>
-        <p:txBody>
-          <a:bodyPr wrap="square" lIns="18288" tIns="18288" rIns="18288">
-            <a:spAutoFit/>
-          </a:bodyPr>
-          <a:lstStyle/>
-          <a:p>
-            <a:pPr>
-              <a:defRPr sz="2800" b="1">
-                <a:solidFill>
-                  <a:srgbClr val="FFFFFF"/>
-                </a:solidFill>
-                <a:latin typeface="Aptos"/>
-              </a:defRPr>
-            </a:pPr>
-            <a:r>
-              <a:t>You don’t need a final definition of yourself</a:t>
-            </a:r>
-          </a:p>
-          <a:p>
-            <a:pPr>
-              <a:defRPr sz="2800" b="1">
-                <a:solidFill>
-                  <a:srgbClr val="FFFFFF"/>
-                </a:solidFill>
-                <a:latin typeface="Aptos"/>
-              </a:defRPr>
-            </a:pPr>
-            <a:r>
-              <a:t>to make choices that matter to you.</a:t>
+              <a:defRPr sz="1200" b="1">
+                <a:solidFill>
+                  <a:srgbClr val="39796F"/>
+                </a:solidFill>
+                <a:latin typeface="Aptos"/>
+              </a:defRPr>
+            </a:pPr>
+            <a:r>
+              <a:t>09</a:t>
             </a:r>
           </a:p>
         </p:txBody>
@@ -10067,7 +9390,7 @@
 </p:sld>
 </file>
 
-<file path=ppt/slides/slide8.xml><?xml version="1.0" encoding="utf-8"?>
+<file path=ppt/slides/slide9.xml><?xml version="1.0" encoding="utf-8"?>
 <p:sld xmlns:a="http://schemas.openxmlformats.org/drawingml/2006/main" xmlns:r="http://schemas.openxmlformats.org/officeDocument/2006/relationships" xmlns:p="http://schemas.openxmlformats.org/presentationml/2006/main">
   <p:cSld>
     <p:bg>
@@ -10239,316 +9562,8 @@
               </a:defRPr>
             </a:pPr>
             <a:r>
-              <a:t>09</a:t>
-            </a:r>
-          </a:p>
-        </p:txBody>
-      </p:sp>
-      <p:sp>
-        <p:nvSpPr>
-          <p:cNvPr id="6" name="Rectangle 5"/>
-          <p:cNvSpPr/>
-          <p:nvPr/>
-        </p:nvSpPr>
-        <p:spPr>
-          <a:xfrm>
-            <a:off x="621792" y="6172200"/>
-            <a:ext cx="210312" cy="32004"/>
-          </a:xfrm>
-          <a:prstGeom prst="rect">
-            <a:avLst/>
-          </a:prstGeom>
-          <a:solidFill>
-            <a:srgbClr val="D5DEDA"/>
-          </a:solidFill>
-          <a:ln>
-            <a:noFill/>
-          </a:ln>
-        </p:spPr>
-        <p:style>
-          <a:lnRef idx="1">
-            <a:schemeClr val="accent1"/>
-          </a:lnRef>
-          <a:fillRef idx="3">
-            <a:schemeClr val="accent1"/>
-          </a:fillRef>
-          <a:effectRef idx="2">
-            <a:schemeClr val="accent1"/>
-          </a:effectRef>
-          <a:fontRef idx="minor">
-            <a:schemeClr val="lt1"/>
-          </a:fontRef>
-        </p:style>
-        <p:txBody>
-          <a:bodyPr rtlCol="0" anchor="ctr"/>
-          <a:lstStyle/>
-          <a:p>
-            <a:pPr algn="ctr"/>
-            <a:endParaRPr/>
-          </a:p>
-        </p:txBody>
-      </p:sp>
-      <p:sp>
-        <p:nvSpPr>
-          <p:cNvPr id="7" name="Rectangle 6"/>
-          <p:cNvSpPr/>
-          <p:nvPr/>
-        </p:nvSpPr>
-        <p:spPr>
-          <a:xfrm>
-            <a:off x="914400" y="6172200"/>
-            <a:ext cx="210312" cy="32004"/>
-          </a:xfrm>
-          <a:prstGeom prst="rect">
-            <a:avLst/>
-          </a:prstGeom>
-          <a:solidFill>
-            <a:srgbClr val="D5DEDA"/>
-          </a:solidFill>
-          <a:ln>
-            <a:noFill/>
-          </a:ln>
-        </p:spPr>
-        <p:style>
-          <a:lnRef idx="1">
-            <a:schemeClr val="accent1"/>
-          </a:lnRef>
-          <a:fillRef idx="3">
-            <a:schemeClr val="accent1"/>
-          </a:fillRef>
-          <a:effectRef idx="2">
-            <a:schemeClr val="accent1"/>
-          </a:effectRef>
-          <a:fontRef idx="minor">
-            <a:schemeClr val="lt1"/>
-          </a:fontRef>
-        </p:style>
-        <p:txBody>
-          <a:bodyPr rtlCol="0" anchor="ctr"/>
-          <a:lstStyle/>
-          <a:p>
-            <a:pPr algn="ctr"/>
-            <a:endParaRPr/>
-          </a:p>
-        </p:txBody>
-      </p:sp>
-      <p:sp>
-        <p:nvSpPr>
-          <p:cNvPr id="8" name="Rectangle 7"/>
-          <p:cNvSpPr/>
-          <p:nvPr/>
-        </p:nvSpPr>
-        <p:spPr>
-          <a:xfrm>
-            <a:off x="1207008" y="6172200"/>
-            <a:ext cx="210312" cy="32004"/>
-          </a:xfrm>
-          <a:prstGeom prst="rect">
-            <a:avLst/>
-          </a:prstGeom>
-          <a:solidFill>
-            <a:srgbClr val="D5DEDA"/>
-          </a:solidFill>
-          <a:ln>
-            <a:noFill/>
-          </a:ln>
-        </p:spPr>
-        <p:style>
-          <a:lnRef idx="1">
-            <a:schemeClr val="accent1"/>
-          </a:lnRef>
-          <a:fillRef idx="3">
-            <a:schemeClr val="accent1"/>
-          </a:fillRef>
-          <a:effectRef idx="2">
-            <a:schemeClr val="accent1"/>
-          </a:effectRef>
-          <a:fontRef idx="minor">
-            <a:schemeClr val="lt1"/>
-          </a:fontRef>
-        </p:style>
-        <p:txBody>
-          <a:bodyPr rtlCol="0" anchor="ctr"/>
-          <a:lstStyle/>
-          <a:p>
-            <a:pPr algn="ctr"/>
-            <a:endParaRPr/>
-          </a:p>
-        </p:txBody>
-      </p:sp>
-      <p:sp>
-        <p:nvSpPr>
-          <p:cNvPr id="9" name="Rectangle 8"/>
-          <p:cNvSpPr/>
-          <p:nvPr/>
-        </p:nvSpPr>
-        <p:spPr>
-          <a:xfrm>
-            <a:off x="1499616" y="6172200"/>
-            <a:ext cx="210312" cy="32004"/>
-          </a:xfrm>
-          <a:prstGeom prst="rect">
-            <a:avLst/>
-          </a:prstGeom>
-          <a:solidFill>
-            <a:srgbClr val="D5DEDA"/>
-          </a:solidFill>
-          <a:ln>
-            <a:noFill/>
-          </a:ln>
-        </p:spPr>
-        <p:style>
-          <a:lnRef idx="1">
-            <a:schemeClr val="accent1"/>
-          </a:lnRef>
-          <a:fillRef idx="3">
-            <a:schemeClr val="accent1"/>
-          </a:fillRef>
-          <a:effectRef idx="2">
-            <a:schemeClr val="accent1"/>
-          </a:effectRef>
-          <a:fontRef idx="minor">
-            <a:schemeClr val="lt1"/>
-          </a:fontRef>
-        </p:style>
-        <p:txBody>
-          <a:bodyPr rtlCol="0" anchor="ctr"/>
-          <a:lstStyle/>
-          <a:p>
-            <a:pPr algn="ctr"/>
-            <a:endParaRPr/>
-          </a:p>
-        </p:txBody>
-      </p:sp>
-      <p:sp>
-        <p:nvSpPr>
-          <p:cNvPr id="10" name="Rectangle 9"/>
-          <p:cNvSpPr/>
-          <p:nvPr/>
-        </p:nvSpPr>
-        <p:spPr>
-          <a:xfrm>
-            <a:off x="1792224" y="6172200"/>
-            <a:ext cx="210312" cy="32004"/>
-          </a:xfrm>
-          <a:prstGeom prst="rect">
-            <a:avLst/>
-          </a:prstGeom>
-          <a:solidFill>
-            <a:srgbClr val="D5DEDA"/>
-          </a:solidFill>
-          <a:ln>
-            <a:noFill/>
-          </a:ln>
-        </p:spPr>
-        <p:style>
-          <a:lnRef idx="1">
-            <a:schemeClr val="accent1"/>
-          </a:lnRef>
-          <a:fillRef idx="3">
-            <a:schemeClr val="accent1"/>
-          </a:fillRef>
-          <a:effectRef idx="2">
-            <a:schemeClr val="accent1"/>
-          </a:effectRef>
-          <a:fontRef idx="minor">
-            <a:schemeClr val="lt1"/>
-          </a:fontRef>
-        </p:style>
-        <p:txBody>
-          <a:bodyPr rtlCol="0" anchor="ctr"/>
-          <a:lstStyle/>
-          <a:p>
-            <a:pPr algn="ctr"/>
-            <a:endParaRPr/>
-          </a:p>
-        </p:txBody>
-      </p:sp>
-      <p:sp>
-        <p:nvSpPr>
-          <p:cNvPr id="11" name="Rectangle 10"/>
-          <p:cNvSpPr/>
-          <p:nvPr/>
-        </p:nvSpPr>
-        <p:spPr>
-          <a:xfrm>
-            <a:off x="2084832" y="6172200"/>
-            <a:ext cx="210312" cy="32004"/>
-          </a:xfrm>
-          <a:prstGeom prst="rect">
-            <a:avLst/>
-          </a:prstGeom>
-          <a:solidFill>
-            <a:srgbClr val="D5DEDA"/>
-          </a:solidFill>
-          <a:ln>
-            <a:noFill/>
-          </a:ln>
-        </p:spPr>
-        <p:style>
-          <a:lnRef idx="1">
-            <a:schemeClr val="accent1"/>
-          </a:lnRef>
-          <a:fillRef idx="3">
-            <a:schemeClr val="accent1"/>
-          </a:fillRef>
-          <a:effectRef idx="2">
-            <a:schemeClr val="accent1"/>
-          </a:effectRef>
-          <a:fontRef idx="minor">
-            <a:schemeClr val="lt1"/>
-          </a:fontRef>
-        </p:style>
-        <p:txBody>
-          <a:bodyPr rtlCol="0" anchor="ctr"/>
-          <a:lstStyle/>
-          <a:p>
-            <a:pPr algn="ctr"/>
-            <a:endParaRPr/>
-          </a:p>
-        </p:txBody>
-      </p:sp>
-      <p:sp>
-        <p:nvSpPr>
-          <p:cNvPr id="12" name="Rectangle 11"/>
-          <p:cNvSpPr/>
-          <p:nvPr/>
-        </p:nvSpPr>
-        <p:spPr>
-          <a:xfrm>
-            <a:off x="2377440" y="6172200"/>
-            <a:ext cx="210312" cy="32004"/>
-          </a:xfrm>
-          <a:prstGeom prst="rect">
-            <a:avLst/>
-          </a:prstGeom>
-          <a:solidFill>
-            <a:srgbClr val="D5DEDA"/>
-          </a:solidFill>
-          <a:ln>
-            <a:noFill/>
-          </a:ln>
-        </p:spPr>
-        <p:style>
-          <a:lnRef idx="1">
-            <a:schemeClr val="accent1"/>
-          </a:lnRef>
-          <a:fillRef idx="3">
-            <a:schemeClr val="accent1"/>
-          </a:fillRef>
-          <a:effectRef idx="2">
-            <a:schemeClr val="accent1"/>
-          </a:effectRef>
-          <a:fontRef idx="minor">
-            <a:schemeClr val="lt1"/>
-          </a:fontRef>
-        </p:style>
-        <p:txBody>
-          <a:bodyPr rtlCol="0" anchor="ctr"/>
-          <a:lstStyle/>
-          <a:p>
-            <a:pPr algn="ctr"/>
-            <a:endParaRPr/>
+              <a:t>12</a:t>
+            </a:r>
           </a:p>
         </p:txBody>
       </p:sp>
@@ -10819,536 +9834,6 @@
             </a:pPr>
             <a:r>
               <a:t>Both readings were provided as course documents.</a:t>
-            </a:r>
-          </a:p>
-        </p:txBody>
-      </p:sp>
-    </p:spTree>
-  </p:cSld>
-  <p:clrMapOvr>
-    <a:masterClrMapping/>
-  </p:clrMapOvr>
-</p:sld>
-</file>
-
-<file path=ppt/slides/slide9.xml><?xml version="1.0" encoding="utf-8"?>
-<p:sld xmlns:a="http://schemas.openxmlformats.org/drawingml/2006/main" xmlns:p="http://schemas.openxmlformats.org/presentationml/2006/main" xmlns:r="http://schemas.openxmlformats.org/officeDocument/2006/relationships">
-  <p:cSld>
-    <p:bg>
-      <p:bgPr>
-        <a:solidFill>
-          <a:srgbClr val="F7F8F4"/>
-        </a:solidFill>
-        <a:effectLst/>
-      </p:bgPr>
-    </p:bg>
-    <p:spTree>
-      <p:nvGrpSpPr>
-        <p:cNvPr id="1" name=""/>
-        <p:cNvGrpSpPr/>
-        <p:nvPr/>
-      </p:nvGrpSpPr>
-      <p:grpSpPr/>
-      <p:sp>
-        <p:nvSpPr>
-          <p:cNvPr id="2" name="Rounded Rectangle 1"/>
-          <p:cNvSpPr/>
-          <p:nvPr/>
-        </p:nvSpPr>
-        <p:spPr>
-          <a:xfrm>
-            <a:off x="0" y="0"/>
-            <a:ext cx="146304" cy="6858000"/>
-          </a:xfrm>
-          <a:prstGeom prst="roundRect">
-            <a:avLst>
-              <a:gd name="adj" fmla="val 10000"/>
-            </a:avLst>
-          </a:prstGeom>
-          <a:solidFill>
-            <a:srgbClr val="39796F"/>
-          </a:solidFill>
-          <a:ln>
-            <a:noFill/>
-          </a:ln>
-        </p:spPr>
-        <p:style>
-          <a:lnRef idx="1">
-            <a:schemeClr val="accent1"/>
-          </a:lnRef>
-          <a:fillRef idx="3">
-            <a:schemeClr val="accent1"/>
-          </a:fillRef>
-          <a:effectRef idx="2">
-            <a:schemeClr val="accent1"/>
-          </a:effectRef>
-          <a:fontRef idx="minor">
-            <a:schemeClr val="lt1"/>
-          </a:fontRef>
-        </p:style>
-        <p:txBody>
-          <a:bodyPr rtlCol="0" anchor="ctr"/>
-          <a:lstStyle/>
-          <a:p>
-            <a:pPr algn="ctr"/>
-          </a:p>
-        </p:txBody>
-      </p:sp>
-      <p:sp>
-        <p:nvSpPr>
-          <p:cNvPr id="3" name="TextBox 2"/>
-          <p:cNvSpPr txBox="1"/>
-          <p:nvPr/>
-        </p:nvSpPr>
-        <p:spPr>
-          <a:xfrm>
-            <a:off x="594360" y="292608"/>
-            <a:ext cx="10058400" cy="320040"/>
-          </a:xfrm>
-          <a:prstGeom prst="rect">
-            <a:avLst/>
-          </a:prstGeom>
-          <a:noFill/>
-        </p:spPr>
-        <p:txBody>
-          <a:bodyPr wrap="square" lIns="18288" rIns="18288">
-            <a:spAutoFit/>
-          </a:bodyPr>
-          <a:lstStyle/>
-          <a:p>
-            <a:pPr>
-              <a:defRPr sz="1100" b="0">
-                <a:solidFill>
-                  <a:srgbClr val="637575"/>
-                </a:solidFill>
-                <a:latin typeface="Aptos"/>
-              </a:defRPr>
-            </a:pPr>
-            <a:r>
-              <a:t>FINDING YOUR AUTHENTIC SELF OR NOT</a:t>
-            </a:r>
-          </a:p>
-        </p:txBody>
-      </p:sp>
-      <p:sp>
-        <p:nvSpPr>
-          <p:cNvPr id="4" name="TextBox 3"/>
-          <p:cNvSpPr txBox="1"/>
-          <p:nvPr/>
-        </p:nvSpPr>
-        <p:spPr>
-          <a:xfrm>
-            <a:off x="594360" y="6437376"/>
-            <a:ext cx="9144000" cy="274320"/>
-          </a:xfrm>
-          <a:prstGeom prst="rect">
-            <a:avLst/>
-          </a:prstGeom>
-          <a:noFill/>
-        </p:spPr>
-        <p:txBody>
-          <a:bodyPr wrap="square" lIns="18288" rIns="18288">
-            <a:spAutoFit/>
-          </a:bodyPr>
-          <a:lstStyle/>
-          <a:p>
-            <a:pPr>
-              <a:defRPr sz="1000" b="0">
-                <a:solidFill>
-                  <a:srgbClr val="637575"/>
-                </a:solidFill>
-                <a:latin typeface="Aptos"/>
-              </a:defRPr>
-            </a:pPr>
-            <a:r>
-              <a:t>A QUICK SUMMARY</a:t>
-            </a:r>
-          </a:p>
-        </p:txBody>
-      </p:sp>
-      <p:sp>
-        <p:nvSpPr>
-          <p:cNvPr id="5" name="TextBox 4"/>
-          <p:cNvSpPr txBox="1"/>
-          <p:nvPr/>
-        </p:nvSpPr>
-        <p:spPr>
-          <a:xfrm>
-            <a:off x="10972800" y="6400800"/>
-            <a:ext cx="594360" cy="274320"/>
-          </a:xfrm>
-          <a:prstGeom prst="rect">
-            <a:avLst/>
-          </a:prstGeom>
-          <a:noFill/>
-        </p:spPr>
-        <p:txBody>
-          <a:bodyPr wrap="square" lIns="18288" rIns="18288">
-            <a:spAutoFit/>
-          </a:bodyPr>
-          <a:lstStyle/>
-          <a:p>
-            <a:pPr>
-              <a:defRPr sz="1200" b="1">
-                <a:solidFill>
-                  <a:srgbClr val="39796F"/>
-                </a:solidFill>
-                <a:latin typeface="Aptos"/>
-              </a:defRPr>
-            </a:pPr>
-            <a:r>
-              <a:t>06</a:t>
-            </a:r>
-          </a:p>
-        </p:txBody>
-      </p:sp>
-      <p:sp>
-        <p:nvSpPr>
-          <p:cNvPr id="6" name="TextBox 5"/>
-          <p:cNvSpPr txBox="1"/>
-          <p:nvPr/>
-        </p:nvSpPr>
-        <p:spPr>
-          <a:xfrm>
-            <a:off x="685800" y="941832"/>
-            <a:ext cx="10881360" cy="731520"/>
-          </a:xfrm>
-          <a:prstGeom prst="rect">
-            <a:avLst/>
-          </a:prstGeom>
-          <a:noFill/>
-        </p:spPr>
-        <p:txBody>
-          <a:bodyPr wrap="square" lIns="18288" rIns="18288">
-            <a:spAutoFit/>
-          </a:bodyPr>
-          <a:lstStyle/>
-          <a:p>
-            <a:pPr>
-              <a:defRPr sz="3500" b="1">
-                <a:solidFill>
-                  <a:srgbClr val="223B40"/>
-                </a:solidFill>
-                <a:latin typeface="Aptos"/>
-              </a:defRPr>
-            </a:pPr>
-            <a:r>
-              <a:t>So, why worry less?</a:t>
-            </a:r>
-          </a:p>
-        </p:txBody>
-      </p:sp>
-      <p:sp>
-        <p:nvSpPr>
-          <p:cNvPr id="7" name="Rounded Rectangle 6"/>
-          <p:cNvSpPr/>
-          <p:nvPr/>
-        </p:nvSpPr>
-        <p:spPr>
-          <a:xfrm>
-            <a:off x="731520" y="2148840"/>
-            <a:ext cx="5166360" cy="2148840"/>
-          </a:xfrm>
-          <a:prstGeom prst="roundRect">
-            <a:avLst>
-              <a:gd name="adj" fmla="val 10000"/>
-            </a:avLst>
-          </a:prstGeom>
-          <a:solidFill>
-            <a:srgbClr val="E6EFEB"/>
-          </a:solidFill>
-          <a:ln>
-            <a:noFill/>
-          </a:ln>
-        </p:spPr>
-        <p:style>
-          <a:lnRef idx="1">
-            <a:schemeClr val="accent1"/>
-          </a:lnRef>
-          <a:fillRef idx="3">
-            <a:schemeClr val="accent1"/>
-          </a:fillRef>
-          <a:effectRef idx="2">
-            <a:schemeClr val="accent1"/>
-          </a:effectRef>
-          <a:fontRef idx="minor">
-            <a:schemeClr val="lt1"/>
-          </a:fontRef>
-        </p:style>
-        <p:txBody>
-          <a:bodyPr rtlCol="0" anchor="ctr"/>
-          <a:lstStyle/>
-          <a:p>
-            <a:pPr algn="ctr"/>
-          </a:p>
-        </p:txBody>
-      </p:sp>
-      <p:sp>
-        <p:nvSpPr>
-          <p:cNvPr id="8" name="TextBox 7"/>
-          <p:cNvSpPr txBox="1"/>
-          <p:nvPr/>
-        </p:nvSpPr>
-        <p:spPr>
-          <a:xfrm>
-            <a:off x="1005840" y="2423160"/>
-            <a:ext cx="4572000" cy="365760"/>
-          </a:xfrm>
-          <a:prstGeom prst="rect">
-            <a:avLst/>
-          </a:prstGeom>
-          <a:noFill/>
-        </p:spPr>
-        <p:txBody>
-          <a:bodyPr wrap="square" lIns="18288" rIns="18288">
-            <a:spAutoFit/>
-          </a:bodyPr>
-          <a:lstStyle/>
-          <a:p>
-            <a:pPr>
-              <a:defRPr sz="1500" b="1">
-                <a:solidFill>
-                  <a:srgbClr val="39796F"/>
-                </a:solidFill>
-                <a:latin typeface="Aptos"/>
-              </a:defRPr>
-            </a:pPr>
-            <a:r>
-              <a:t>WE ARE COMPLEX.</a:t>
-            </a:r>
-          </a:p>
-        </p:txBody>
-      </p:sp>
-      <p:sp>
-        <p:nvSpPr>
-          <p:cNvPr id="9" name="TextBox 8"/>
-          <p:cNvSpPr txBox="1"/>
-          <p:nvPr/>
-        </p:nvSpPr>
-        <p:spPr>
-          <a:xfrm>
-            <a:off x="1005840" y="2971800"/>
-            <a:ext cx="4526280" cy="1097280"/>
-          </a:xfrm>
-          <a:prstGeom prst="rect">
-            <a:avLst/>
-          </a:prstGeom>
-          <a:noFill/>
-        </p:spPr>
-        <p:txBody>
-          <a:bodyPr wrap="square" lIns="18288" rIns="18288">
-            <a:spAutoFit/>
-          </a:bodyPr>
-          <a:lstStyle/>
-          <a:p>
-            <a:pPr>
-              <a:defRPr sz="2600" b="1">
-                <a:solidFill>
-                  <a:srgbClr val="223B40"/>
-                </a:solidFill>
-                <a:latin typeface="Aptos"/>
-              </a:defRPr>
-            </a:pPr>
-            <a:r>
-              <a:t>One label cannot tell the whole story.</a:t>
-            </a:r>
-          </a:p>
-        </p:txBody>
-      </p:sp>
-      <p:sp>
-        <p:nvSpPr>
-          <p:cNvPr id="10" name="Rounded Rectangle 9"/>
-          <p:cNvSpPr/>
-          <p:nvPr/>
-        </p:nvSpPr>
-        <p:spPr>
-          <a:xfrm>
-            <a:off x="6217920" y="2148840"/>
-            <a:ext cx="5166360" cy="2148840"/>
-          </a:xfrm>
-          <a:prstGeom prst="roundRect">
-            <a:avLst>
-              <a:gd name="adj" fmla="val 10000"/>
-            </a:avLst>
-          </a:prstGeom>
-          <a:solidFill>
-            <a:srgbClr val="E6EEF2"/>
-          </a:solidFill>
-          <a:ln>
-            <a:noFill/>
-          </a:ln>
-        </p:spPr>
-        <p:style>
-          <a:lnRef idx="1">
-            <a:schemeClr val="accent1"/>
-          </a:lnRef>
-          <a:fillRef idx="3">
-            <a:schemeClr val="accent1"/>
-          </a:fillRef>
-          <a:effectRef idx="2">
-            <a:schemeClr val="accent1"/>
-          </a:effectRef>
-          <a:fontRef idx="minor">
-            <a:schemeClr val="lt1"/>
-          </a:fontRef>
-        </p:style>
-        <p:txBody>
-          <a:bodyPr rtlCol="0" anchor="ctr"/>
-          <a:lstStyle/>
-          <a:p>
-            <a:pPr algn="ctr"/>
-          </a:p>
-        </p:txBody>
-      </p:sp>
-      <p:sp>
-        <p:nvSpPr>
-          <p:cNvPr id="11" name="TextBox 10"/>
-          <p:cNvSpPr txBox="1"/>
-          <p:nvPr/>
-        </p:nvSpPr>
-        <p:spPr>
-          <a:xfrm>
-            <a:off x="6492240" y="2423160"/>
-            <a:ext cx="4572000" cy="365760"/>
-          </a:xfrm>
-          <a:prstGeom prst="rect">
-            <a:avLst/>
-          </a:prstGeom>
-          <a:noFill/>
-        </p:spPr>
-        <p:txBody>
-          <a:bodyPr wrap="square" lIns="18288" rIns="18288">
-            <a:spAutoFit/>
-          </a:bodyPr>
-          <a:lstStyle/>
-          <a:p>
-            <a:pPr>
-              <a:defRPr sz="1500" b="1">
-                <a:solidFill>
-                  <a:srgbClr val="39796F"/>
-                </a:solidFill>
-                <a:latin typeface="Aptos"/>
-              </a:defRPr>
-            </a:pPr>
-            <a:r>
-              <a:t>WE CAN CHANGE.</a:t>
-            </a:r>
-          </a:p>
-        </p:txBody>
-      </p:sp>
-      <p:sp>
-        <p:nvSpPr>
-          <p:cNvPr id="12" name="TextBox 11"/>
-          <p:cNvSpPr txBox="1"/>
-          <p:nvPr/>
-        </p:nvSpPr>
-        <p:spPr>
-          <a:xfrm>
-            <a:off x="6492240" y="2971800"/>
-            <a:ext cx="4526280" cy="1097280"/>
-          </a:xfrm>
-          <a:prstGeom prst="rect">
-            <a:avLst/>
-          </a:prstGeom>
-          <a:noFill/>
-        </p:spPr>
-        <p:txBody>
-          <a:bodyPr wrap="square" lIns="18288" rIns="18288">
-            <a:spAutoFit/>
-          </a:bodyPr>
-          <a:lstStyle/>
-          <a:p>
-            <a:pPr>
-              <a:defRPr sz="2600" b="1">
-                <a:solidFill>
-                  <a:srgbClr val="223B40"/>
-                </a:solidFill>
-                <a:latin typeface="Aptos"/>
-              </a:defRPr>
-            </a:pPr>
-            <a:r>
-              <a:t>Who we are today may change over time.</a:t>
-            </a:r>
-          </a:p>
-        </p:txBody>
-      </p:sp>
-      <p:sp>
-        <p:nvSpPr>
-          <p:cNvPr id="13" name="Rounded Rectangle 12"/>
-          <p:cNvSpPr/>
-          <p:nvPr/>
-        </p:nvSpPr>
-        <p:spPr>
-          <a:xfrm>
-            <a:off x="731520" y="4690872"/>
-            <a:ext cx="10652760" cy="868680"/>
-          </a:xfrm>
-          <a:prstGeom prst="roundRect">
-            <a:avLst>
-              <a:gd name="adj" fmla="val 10000"/>
-            </a:avLst>
-          </a:prstGeom>
-          <a:solidFill>
-            <a:srgbClr val="39796F"/>
-          </a:solidFill>
-          <a:ln>
-            <a:noFill/>
-          </a:ln>
-        </p:spPr>
-        <p:style>
-          <a:lnRef idx="1">
-            <a:schemeClr val="accent1"/>
-          </a:lnRef>
-          <a:fillRef idx="3">
-            <a:schemeClr val="accent1"/>
-          </a:fillRef>
-          <a:effectRef idx="2">
-            <a:schemeClr val="accent1"/>
-          </a:effectRef>
-          <a:fontRef idx="minor">
-            <a:schemeClr val="lt1"/>
-          </a:fontRef>
-        </p:style>
-        <p:txBody>
-          <a:bodyPr rtlCol="0" anchor="ctr"/>
-          <a:lstStyle/>
-          <a:p>
-            <a:pPr algn="ctr"/>
-          </a:p>
-        </p:txBody>
-      </p:sp>
-      <p:sp>
-        <p:nvSpPr>
-          <p:cNvPr id="14" name="TextBox 13"/>
-          <p:cNvSpPr txBox="1"/>
-          <p:nvPr/>
-        </p:nvSpPr>
-        <p:spPr>
-          <a:xfrm>
-            <a:off x="1005840" y="4864608"/>
-            <a:ext cx="10058400" cy="548640"/>
-          </a:xfrm>
-          <a:prstGeom prst="rect">
-            <a:avLst/>
-          </a:prstGeom>
-          <a:noFill/>
-        </p:spPr>
-        <p:txBody>
-          <a:bodyPr wrap="square" lIns="18288" rIns="18288">
-            <a:spAutoFit/>
-          </a:bodyPr>
-          <a:lstStyle/>
-          <a:p>
-            <a:pPr>
-              <a:defRPr sz="2700" b="1">
-                <a:solidFill>
-                  <a:srgbClr val="FFFFFF"/>
-                </a:solidFill>
-                <a:latin typeface="Aptos"/>
-              </a:defRPr>
-            </a:pPr>
-            <a:r>
-              <a:t>We don’t need a fixed answer to “Who am I?”</a:t>
             </a:r>
           </a:p>
         </p:txBody>
